--- a/paper/effectslice_aaai/images/SkillAudit_Main_Figure_v3_3.pptx
+++ b/paper/effectslice_aaai/images/SkillAudit_Main_Figure_v3_3.pptx
@@ -2,14 +2,15 @@
 <file path=ppt/presentation.xml><?xml version="1.0" encoding="utf-8"?>
 <p:presentation xmlns:p="http://schemas.openxmlformats.org/presentationml/2006/main">
   <p:sldMasterIdLst>
-    <p:sldMasterId xmlns:r="http://schemas.openxmlformats.org/officeDocument/2006/relationships" id="2147483648" r:id="R43d7de9b359e42f8"/>
+    <p:sldMasterId xmlns:r="http://schemas.openxmlformats.org/officeDocument/2006/relationships" id="2147483648" r:id="R858b3a69b5cf4451"/>
   </p:sldMasterIdLst>
   <p:notesMasterIdLst>
-    <p:notesMasterId xmlns:r="http://schemas.openxmlformats.org/officeDocument/2006/relationships" r:id="R3078dc858e7a4e1f"/>
+    <p:notesMasterId xmlns:r="http://schemas.openxmlformats.org/officeDocument/2006/relationships" r:id="Rd2e11fc41f714df4"/>
   </p:notesMasterIdLst>
   <p:sldIdLst>
-    <p:sldId xmlns:r="http://schemas.openxmlformats.org/officeDocument/2006/relationships" id="256" r:id="Rfdaf009cf4484470"/>
-    <p:sldId xmlns:r="http://schemas.openxmlformats.org/officeDocument/2006/relationships" id="257" r:id="R0f747a57ecfc465d"/>
+    <p:sldId xmlns:r="http://schemas.openxmlformats.org/officeDocument/2006/relationships" id="256" r:id="Rea8670d6bafa4443"/>
+    <p:sldId xmlns:r="http://schemas.openxmlformats.org/officeDocument/2006/relationships" id="257" r:id="R5b6cf7abd092451e"/>
+    <p:sldId xmlns:r="http://schemas.openxmlformats.org/officeDocument/2006/relationships" id="258" r:id="R126275f6cacf4dec"/>
   </p:sldIdLst>
   <p:sldSz cx="12192000" cy="6858000"/>
   <p:notesSz cx="6858000" cy="9144000"/>
@@ -535,6 +536,72 @@
 </p:notes>
 </file>
 
+<file path=ppt/notesSlides/notesSlide3.xml><?xml version="1.0" encoding="utf-8"?>
+<p:notes xmlns:p="http://schemas.openxmlformats.org/presentationml/2006/main">
+  <p:cSld>
+    <p:spTree>
+      <p:nvGrpSpPr>
+        <p:cNvPr id="1" name=""/>
+        <p:cNvGrpSpPr/>
+        <p:nvPr/>
+      </p:nvGrpSpPr>
+      <p:grpSpPr>
+        <a:xfrm xmlns:a="http://schemas.openxmlformats.org/drawingml/2006/main"/>
+      </p:grpSpPr>
+      <p:sp>
+        <p:nvSpPr>
+          <p:cNvPr id="2" name="Slide Image Placeholder 1"/>
+          <p:cNvSpPr>
+            <a:spLocks xmlns:a="http://schemas.openxmlformats.org/drawingml/2006/main" noGrp="1"/>
+          </p:cNvSpPr>
+          <p:nvPr>
+            <p:ph type="sldImg" idx="0"/>
+          </p:nvPr>
+        </p:nvSpPr>
+        <p:spPr/>
+      </p:sp>
+      <p:sp>
+        <p:nvSpPr>
+          <p:cNvPr id="3" name="Notes Placeholder 2"/>
+          <p:cNvSpPr>
+            <a:spLocks xmlns:a="http://schemas.openxmlformats.org/drawingml/2006/main" noGrp="1"/>
+          </p:cNvSpPr>
+          <p:nvPr>
+            <p:ph type="body" idx="1"/>
+          </p:nvPr>
+        </p:nvSpPr>
+        <p:spPr/>
+        <p:txBody>
+          <a:bodyPr xmlns:a="http://schemas.openxmlformats.org/drawingml/2006/main"/>
+          <a:lstStyle xmlns:a="http://schemas.openxmlformats.org/drawingml/2006/main"/>
+          <a:p xmlns:a="http://schemas.openxmlformats.org/drawingml/2006/main"/>
+        </p:txBody>
+      </p:sp>
+      <p:sp>
+        <p:nvSpPr>
+          <p:cNvPr id="4" name="Slide Number Placeholder 3"/>
+          <p:cNvSpPr>
+            <a:spLocks xmlns:a="http://schemas.openxmlformats.org/drawingml/2006/main" noGrp="1"/>
+          </p:cNvSpPr>
+          <p:nvPr>
+            <p:ph type="sldNum" idx="5"/>
+          </p:nvPr>
+        </p:nvSpPr>
+        <p:spPr/>
+        <p:txBody>
+          <a:bodyPr xmlns:a="http://schemas.openxmlformats.org/drawingml/2006/main"/>
+          <a:lstStyle xmlns:a="http://schemas.openxmlformats.org/drawingml/2006/main"/>
+          <a:p xmlns:a="http://schemas.openxmlformats.org/drawingml/2006/main"/>
+        </p:txBody>
+      </p:sp>
+    </p:spTree>
+  </p:cSld>
+  <p:clrMapOvr>
+    <a:masterClrMapping xmlns:a="http://schemas.openxmlformats.org/drawingml/2006/main"/>
+  </p:clrMapOvr>
+</p:notes>
+</file>
+
 <file path=ppt/slideLayouts/slideLayout1.xml><?xml version="1.0" encoding="utf-8"?>
 <p:sldLayout xmlns:p="http://schemas.openxmlformats.org/presentationml/2006/main" type="title">
   <p:cSld name="Title Slide">
@@ -573,7 +640,7 @@
   </p:cSld>
   <p:clrMap bg1="lt1" tx1="dk1" bg2="lt2" tx2="dk2" accent1="accent1" accent2="accent2" accent3="accent3" accent4="accent4" accent5="accent5" accent6="accent6" hlink="hlink" folHlink="folHlink"/>
   <p:sldLayoutIdLst>
-    <p:sldLayoutId xmlns:r="http://schemas.openxmlformats.org/officeDocument/2006/relationships" id="2147483649" r:id="R2bc9ea1ad04f4c4f"/>
+    <p:sldLayoutId xmlns:r="http://schemas.openxmlformats.org/officeDocument/2006/relationships" id="2147483649" r:id="R9dece9765d184bb5"/>
   </p:sldLayoutIdLst>
   <p:txStyles>
     <p:titleStyle>
@@ -1121,7 +1188,7 @@
       </p:grpSpPr>
       <p:cxnSp>
         <p:nvCxnSpPr>
-          <p:cNvPr id="323" name="upstream-protocol-divider"/>
+          <p:cNvPr id="485" name="upstream-protocol-divider"/>
           <p:cNvCxnSpPr/>
           <p:nvPr/>
         </p:nvCxnSpPr>
@@ -1143,7 +1210,7 @@
       </p:cxnSp>
       <p:cxnSp>
         <p:nvCxnSpPr>
-          <p:cNvPr id="324" name="protocol-output-divider"/>
+          <p:cNvPr id="486" name="protocol-output-divider"/>
           <p:cNvCxnSpPr/>
           <p:nvPr/>
         </p:nvCxnSpPr>
@@ -1165,7 +1232,7 @@
       </p:cxnSp>
       <p:cxnSp>
         <p:nvCxnSpPr>
-          <p:cNvPr id="325" name="paper-to-full-line"/>
+          <p:cNvPr id="487" name="paper-to-full-line"/>
           <p:cNvCxnSpPr/>
           <p:nvPr/>
         </p:nvCxnSpPr>
@@ -1190,7 +1257,7 @@
           <p:cNvPr id="4" name="paper-to-full-head">
             <a:extLst xmlns:a="http://schemas.openxmlformats.org/drawingml/2006/main">
               <a:ext uri="{FF2B5EF4-FFF2-40B4-BE49-F238E27FC236}">
-                <a16:creationId xmlns:a16="http://schemas.microsoft.com/office/drawing/2014/main" id="{B3334836-8EEC-4E4D-B1C4-E7E6092187F7}"/>
+                <a16:creationId xmlns:a16="http://schemas.microsoft.com/office/drawing/2014/main" id="{4D925E26-40F3-48AB-907C-EA220D5B1FA7}"/>
               </a:ext>
             </a:extLst>
           </p:cNvPr>
@@ -1220,7 +1287,7 @@
       </p:sp>
       <p:cxnSp>
         <p:nvCxnSpPr>
-          <p:cNvPr id="327" name="full-to-reducer-line"/>
+          <p:cNvPr id="489" name="full-to-reducer-line"/>
           <p:cNvCxnSpPr/>
           <p:nvPr/>
         </p:nvCxnSpPr>
@@ -1245,7 +1312,7 @@
           <p:cNvPr id="6" name="full-to-reducer-head">
             <a:extLst xmlns:a="http://schemas.openxmlformats.org/drawingml/2006/main">
               <a:ext uri="{FF2B5EF4-FFF2-40B4-BE49-F238E27FC236}">
-                <a16:creationId xmlns:a16="http://schemas.microsoft.com/office/drawing/2014/main" id="{EAB8DEA7-C8D4-4744-9595-F041A9AAEBB1}"/>
+                <a16:creationId xmlns:a16="http://schemas.microsoft.com/office/drawing/2014/main" id="{E398B4E9-7E5C-4AF0-A668-25687B2CA2C9}"/>
               </a:ext>
             </a:extLst>
           </p:cNvPr>
@@ -1275,7 +1342,7 @@
       </p:sp>
       <p:cxnSp>
         <p:nvCxnSpPr>
-          <p:cNvPr id="329" name="reducer-to-candidate-line"/>
+          <p:cNvPr id="491" name="reducer-to-candidate-line"/>
           <p:cNvCxnSpPr/>
           <p:nvPr/>
         </p:nvCxnSpPr>
@@ -1300,7 +1367,7 @@
           <p:cNvPr id="8" name="reducer-to-candidate-head">
             <a:extLst xmlns:a="http://schemas.openxmlformats.org/drawingml/2006/main">
               <a:ext uri="{FF2B5EF4-FFF2-40B4-BE49-F238E27FC236}">
-                <a16:creationId xmlns:a16="http://schemas.microsoft.com/office/drawing/2014/main" id="{3BAC0982-F1F5-45DB-99F9-6024A62275A8}"/>
+                <a16:creationId xmlns:a16="http://schemas.microsoft.com/office/drawing/2014/main" id="{8D4AEB81-FBD0-48F4-91D1-775134BE594D}"/>
               </a:ext>
             </a:extLst>
           </p:cNvPr>
@@ -1330,7 +1397,7 @@
       </p:sp>
       <p:cxnSp>
         <p:nvCxnSpPr>
-          <p:cNvPr id="331" name="candidate-to-map-line"/>
+          <p:cNvPr id="493" name="candidate-to-map-line"/>
           <p:cNvCxnSpPr/>
           <p:nvPr/>
         </p:nvCxnSpPr>
@@ -1355,7 +1422,7 @@
           <p:cNvPr id="10" name="candidate-to-map-head">
             <a:extLst xmlns:a="http://schemas.openxmlformats.org/drawingml/2006/main">
               <a:ext uri="{FF2B5EF4-FFF2-40B4-BE49-F238E27FC236}">
-                <a16:creationId xmlns:a16="http://schemas.microsoft.com/office/drawing/2014/main" id="{01267827-86FF-435A-AF4F-6776A2979743}"/>
+                <a16:creationId xmlns:a16="http://schemas.microsoft.com/office/drawing/2014/main" id="{F31386E7-6155-47DC-A714-B2EEDC2C3E82}"/>
               </a:ext>
             </a:extLst>
           </p:cNvPr>
@@ -1385,7 +1452,7 @@
       </p:sp>
       <p:cxnSp>
         <p:nvCxnSpPr>
-          <p:cNvPr id="333" name="map-to-freeze-line"/>
+          <p:cNvPr id="495" name="map-to-freeze-line"/>
           <p:cNvCxnSpPr/>
           <p:nvPr/>
         </p:nvCxnSpPr>
@@ -1410,7 +1477,7 @@
           <p:cNvPr id="12" name="map-to-freeze-head">
             <a:extLst xmlns:a="http://schemas.openxmlformats.org/drawingml/2006/main">
               <a:ext uri="{FF2B5EF4-FFF2-40B4-BE49-F238E27FC236}">
-                <a16:creationId xmlns:a16="http://schemas.microsoft.com/office/drawing/2014/main" id="{9318298C-D280-4141-AF8D-3BAD860E33C0}"/>
+                <a16:creationId xmlns:a16="http://schemas.microsoft.com/office/drawing/2014/main" id="{99C2C050-2FC6-44CB-9A8B-8D5E7EBA1601}"/>
               </a:ext>
             </a:extLst>
           </p:cNvPr>
@@ -1440,7 +1507,7 @@
       </p:sp>
       <p:cxnSp>
         <p:nvCxnSpPr>
-          <p:cNvPr id="335" name="freeze-to-run-line"/>
+          <p:cNvPr id="497" name="freeze-to-run-line"/>
           <p:cNvCxnSpPr/>
           <p:nvPr/>
         </p:nvCxnSpPr>
@@ -1465,7 +1532,7 @@
           <p:cNvPr id="14" name="freeze-to-run-head">
             <a:extLst xmlns:a="http://schemas.openxmlformats.org/drawingml/2006/main">
               <a:ext uri="{FF2B5EF4-FFF2-40B4-BE49-F238E27FC236}">
-                <a16:creationId xmlns:a16="http://schemas.microsoft.com/office/drawing/2014/main" id="{AEE1A753-762E-4546-B654-DA7C22BAC464}"/>
+                <a16:creationId xmlns:a16="http://schemas.microsoft.com/office/drawing/2014/main" id="{01C01F91-332D-42FA-9F7E-8CCC30D1CF38}"/>
               </a:ext>
             </a:extLst>
           </p:cNvPr>
@@ -1495,7 +1562,7 @@
       </p:sp>
       <p:cxnSp>
         <p:nvCxnSpPr>
-          <p:cNvPr id="337" name="run-to-verify-line"/>
+          <p:cNvPr id="499" name="run-to-verify-line"/>
           <p:cNvCxnSpPr/>
           <p:nvPr/>
         </p:nvCxnSpPr>
@@ -1520,7 +1587,7 @@
           <p:cNvPr id="16" name="run-to-verify-head">
             <a:extLst xmlns:a="http://schemas.openxmlformats.org/drawingml/2006/main">
               <a:ext uri="{FF2B5EF4-FFF2-40B4-BE49-F238E27FC236}">
-                <a16:creationId xmlns:a16="http://schemas.microsoft.com/office/drawing/2014/main" id="{F7517E58-52CC-4FA5-83D4-D35E58A6D280}"/>
+                <a16:creationId xmlns:a16="http://schemas.microsoft.com/office/drawing/2014/main" id="{F6130BD6-0A21-4C6D-9411-1E4850583B16}"/>
               </a:ext>
             </a:extLst>
           </p:cNvPr>
@@ -1550,7 +1617,7 @@
       </p:sp>
       <p:cxnSp>
         <p:nvCxnSpPr>
-          <p:cNvPr id="339" name="verify-to-decision-a"/>
+          <p:cNvPr id="501" name="verify-to-decision-a"/>
           <p:cNvCxnSpPr/>
           <p:nvPr/>
         </p:nvCxnSpPr>
@@ -1572,7 +1639,7 @@
       </p:cxnSp>
       <p:cxnSp>
         <p:nvCxnSpPr>
-          <p:cNvPr id="340" name="verify-to-decision-b"/>
+          <p:cNvPr id="502" name="verify-to-decision-b"/>
           <p:cNvCxnSpPr/>
           <p:nvPr/>
         </p:nvCxnSpPr>
@@ -1594,7 +1661,7 @@
       </p:cxnSp>
       <p:cxnSp>
         <p:nvCxnSpPr>
-          <p:cNvPr id="341" name="verify-to-decision-c-line"/>
+          <p:cNvPr id="503" name="verify-to-decision-c-line"/>
           <p:cNvCxnSpPr/>
           <p:nvPr/>
         </p:nvCxnSpPr>
@@ -1619,7 +1686,7 @@
           <p:cNvPr id="20" name="verify-to-decision-c-head">
             <a:extLst xmlns:a="http://schemas.openxmlformats.org/drawingml/2006/main">
               <a:ext uri="{FF2B5EF4-FFF2-40B4-BE49-F238E27FC236}">
-                <a16:creationId xmlns:a16="http://schemas.microsoft.com/office/drawing/2014/main" id="{7F0BF53A-3277-4ED7-9572-63531F59C23E}"/>
+                <a16:creationId xmlns:a16="http://schemas.microsoft.com/office/drawing/2014/main" id="{DDBBDD12-7EB3-4618-A86B-A2807DF116EF}"/>
               </a:ext>
             </a:extLst>
           </p:cNvPr>
@@ -1649,7 +1716,7 @@
       </p:sp>
       <p:cxnSp>
         <p:nvCxnSpPr>
-          <p:cNvPr id="343" name="verify-to-evidence-a"/>
+          <p:cNvPr id="505" name="verify-to-evidence-a"/>
           <p:cNvCxnSpPr/>
           <p:nvPr/>
         </p:nvCxnSpPr>
@@ -1671,7 +1738,7 @@
       </p:cxnSp>
       <p:cxnSp>
         <p:nvCxnSpPr>
-          <p:cNvPr id="344" name="verify-to-evidence-b"/>
+          <p:cNvPr id="506" name="verify-to-evidence-b"/>
           <p:cNvCxnSpPr/>
           <p:nvPr/>
         </p:nvCxnSpPr>
@@ -1693,7 +1760,7 @@
       </p:cxnSp>
       <p:cxnSp>
         <p:nvCxnSpPr>
-          <p:cNvPr id="345" name="verify-to-evidence-c-line"/>
+          <p:cNvPr id="507" name="verify-to-evidence-c-line"/>
           <p:cNvCxnSpPr/>
           <p:nvPr/>
         </p:nvCxnSpPr>
@@ -1718,7 +1785,7 @@
           <p:cNvPr id="24" name="verify-to-evidence-c-head">
             <a:extLst xmlns:a="http://schemas.openxmlformats.org/drawingml/2006/main">
               <a:ext uri="{FF2B5EF4-FFF2-40B4-BE49-F238E27FC236}">
-                <a16:creationId xmlns:a16="http://schemas.microsoft.com/office/drawing/2014/main" id="{E994453A-D203-441C-8A59-D78D2FA94CC3}"/>
+                <a16:creationId xmlns:a16="http://schemas.microsoft.com/office/drawing/2014/main" id="{10F2AC67-4205-411A-8A55-6CFD1C67F238}"/>
               </a:ext>
             </a:extLst>
           </p:cNvPr>
@@ -1748,7 +1815,7 @@
       </p:sp>
       <p:cxnSp>
         <p:nvCxnSpPr>
-          <p:cNvPr id="347" name="package-to-freeze-a"/>
+          <p:cNvPr id="509" name="package-to-freeze-a"/>
           <p:cNvCxnSpPr/>
           <p:nvPr/>
         </p:nvCxnSpPr>
@@ -1770,7 +1837,7 @@
       </p:cxnSp>
       <p:cxnSp>
         <p:nvCxnSpPr>
-          <p:cNvPr id="348" name="package-to-freeze-b-line"/>
+          <p:cNvPr id="510" name="package-to-freeze-b-line"/>
           <p:cNvCxnSpPr/>
           <p:nvPr/>
         </p:nvCxnSpPr>
@@ -1795,7 +1862,7 @@
           <p:cNvPr id="27" name="package-to-freeze-b-head">
             <a:extLst xmlns:a="http://schemas.openxmlformats.org/drawingml/2006/main">
               <a:ext uri="{FF2B5EF4-FFF2-40B4-BE49-F238E27FC236}">
-                <a16:creationId xmlns:a16="http://schemas.microsoft.com/office/drawing/2014/main" id="{2C9C725E-00E9-4BD0-AC71-99F134C6DCE6}"/>
+                <a16:creationId xmlns:a16="http://schemas.microsoft.com/office/drawing/2014/main" id="{2AB9AFCE-C503-4675-A029-65B4FF7EB02B}"/>
               </a:ext>
             </a:extLst>
           </p:cNvPr>
@@ -1828,7 +1895,7 @@
           <p:cNvPr id="28" name="title">
             <a:extLst xmlns:a="http://schemas.openxmlformats.org/drawingml/2006/main">
               <a:ext uri="{FF2B5EF4-FFF2-40B4-BE49-F238E27FC236}">
-                <a16:creationId xmlns:a16="http://schemas.microsoft.com/office/drawing/2014/main" id="{403B4042-262E-4277-8BF5-16035F915046}"/>
+                <a16:creationId xmlns:a16="http://schemas.microsoft.com/office/drawing/2014/main" id="{E69479E8-38D6-4933-A6E9-BA318A29FFE5}"/>
               </a:ext>
             </a:extLst>
           </p:cNvPr>
@@ -1874,7 +1941,7 @@
           <p:cNvPr id="29" name="subtitle">
             <a:extLst xmlns:a="http://schemas.openxmlformats.org/drawingml/2006/main">
               <a:ext uri="{FF2B5EF4-FFF2-40B4-BE49-F238E27FC236}">
-                <a16:creationId xmlns:a16="http://schemas.microsoft.com/office/drawing/2014/main" id="{F25F202C-A275-4648-90E5-3F665CC49051}"/>
+                <a16:creationId xmlns:a16="http://schemas.microsoft.com/office/drawing/2014/main" id="{C8D2A2F4-67A3-4084-AE56-7783616FF224}"/>
               </a:ext>
             </a:extLst>
           </p:cNvPr>
@@ -1917,7 +1984,7 @@
       </p:sp>
       <p:cxnSp>
         <p:nvCxnSpPr>
-          <p:cNvPr id="352" name="upstream-rule"/>
+          <p:cNvPr id="514" name="upstream-rule"/>
           <p:cNvCxnSpPr/>
           <p:nvPr/>
         </p:nvCxnSpPr>
@@ -1939,7 +2006,7 @@
       </p:cxnSp>
       <p:cxnSp>
         <p:nvCxnSpPr>
-          <p:cNvPr id="353" name="protocol-rule"/>
+          <p:cNvPr id="515" name="protocol-rule"/>
           <p:cNvCxnSpPr/>
           <p:nvPr/>
         </p:nvCxnSpPr>
@@ -1961,7 +2028,7 @@
       </p:cxnSp>
       <p:cxnSp>
         <p:nvCxnSpPr>
-          <p:cNvPr id="354" name="outputs-rule"/>
+          <p:cNvPr id="516" name="outputs-rule"/>
           <p:cNvCxnSpPr/>
           <p:nvPr/>
         </p:nvCxnSpPr>
@@ -1986,7 +2053,7 @@
           <p:cNvPr id="33" name="upstream-zone-title">
             <a:extLst xmlns:a="http://schemas.openxmlformats.org/drawingml/2006/main">
               <a:ext uri="{FF2B5EF4-FFF2-40B4-BE49-F238E27FC236}">
-                <a16:creationId xmlns:a16="http://schemas.microsoft.com/office/drawing/2014/main" id="{D62D390C-E8CE-4A42-B54C-626A142FC1F1}"/>
+                <a16:creationId xmlns:a16="http://schemas.microsoft.com/office/drawing/2014/main" id="{7750C558-0FEE-4D1C-913B-50CE6A1A3C27}"/>
               </a:ext>
             </a:extLst>
           </p:cNvPr>
@@ -2032,7 +2099,7 @@
           <p:cNvPr id="34" name="protocol-zone-title">
             <a:extLst xmlns:a="http://schemas.openxmlformats.org/drawingml/2006/main">
               <a:ext uri="{FF2B5EF4-FFF2-40B4-BE49-F238E27FC236}">
-                <a16:creationId xmlns:a16="http://schemas.microsoft.com/office/drawing/2014/main" id="{954AB892-BBFB-42D9-8F4E-816834C11A6E}"/>
+                <a16:creationId xmlns:a16="http://schemas.microsoft.com/office/drawing/2014/main" id="{BE6699CD-8BBD-46A2-AB1C-E18EA762829F}"/>
               </a:ext>
             </a:extLst>
           </p:cNvPr>
@@ -2078,7 +2145,7 @@
           <p:cNvPr id="35" name="outputs-zone-title">
             <a:extLst xmlns:a="http://schemas.openxmlformats.org/drawingml/2006/main">
               <a:ext uri="{FF2B5EF4-FFF2-40B4-BE49-F238E27FC236}">
-                <a16:creationId xmlns:a16="http://schemas.microsoft.com/office/drawing/2014/main" id="{4E223C45-F441-47B9-8FAE-A31AA4EECDDD}"/>
+                <a16:creationId xmlns:a16="http://schemas.microsoft.com/office/drawing/2014/main" id="{0DC6C48D-291C-444E-8BDA-325EF9F210FF}"/>
               </a:ext>
             </a:extLst>
           </p:cNvPr>
@@ -2124,7 +2191,7 @@
           <p:cNvPr id="36" name="source-kicker">
             <a:extLst xmlns:a="http://schemas.openxmlformats.org/drawingml/2006/main">
               <a:ext uri="{FF2B5EF4-FFF2-40B4-BE49-F238E27FC236}">
-                <a16:creationId xmlns:a16="http://schemas.microsoft.com/office/drawing/2014/main" id="{D2009141-4191-477C-85E0-185D776BCD54}"/>
+                <a16:creationId xmlns:a16="http://schemas.microsoft.com/office/drawing/2014/main" id="{BC66F9C4-FE0B-4F2C-AD28-E268857360CB}"/>
               </a:ext>
             </a:extLst>
           </p:cNvPr>
@@ -2170,7 +2237,7 @@
           <p:cNvPr id="37" name="paper-shadow">
             <a:extLst xmlns:a="http://schemas.openxmlformats.org/drawingml/2006/main">
               <a:ext uri="{FF2B5EF4-FFF2-40B4-BE49-F238E27FC236}">
-                <a16:creationId xmlns:a16="http://schemas.microsoft.com/office/drawing/2014/main" id="{9B0D919B-4BB6-4DBA-AE05-7FB6B2F6A96E}"/>
+                <a16:creationId xmlns:a16="http://schemas.microsoft.com/office/drawing/2014/main" id="{BA17E2D7-B255-40C0-850B-9FC42BEFCDA3}"/>
               </a:ext>
             </a:extLst>
           </p:cNvPr>
@@ -2203,7 +2270,7 @@
           <p:cNvPr id="38" name="paper-page">
             <a:extLst xmlns:a="http://schemas.openxmlformats.org/drawingml/2006/main">
               <a:ext uri="{FF2B5EF4-FFF2-40B4-BE49-F238E27FC236}">
-                <a16:creationId xmlns:a16="http://schemas.microsoft.com/office/drawing/2014/main" id="{3E59A7FC-A943-446E-9615-832F027738F1}"/>
+                <a16:creationId xmlns:a16="http://schemas.microsoft.com/office/drawing/2014/main" id="{BE7A3AC2-182F-404C-894F-19E129F6FA6B}"/>
               </a:ext>
             </a:extLst>
           </p:cNvPr>
@@ -2236,7 +2303,7 @@
           <p:cNvPr id="39" name="paper-bar-0">
             <a:extLst xmlns:a="http://schemas.openxmlformats.org/drawingml/2006/main">
               <a:ext uri="{FF2B5EF4-FFF2-40B4-BE49-F238E27FC236}">
-                <a16:creationId xmlns:a16="http://schemas.microsoft.com/office/drawing/2014/main" id="{34387482-37F9-4CC7-9264-558E531E6A90}"/>
+                <a16:creationId xmlns:a16="http://schemas.microsoft.com/office/drawing/2014/main" id="{B989D04F-280A-4904-93AA-8DE0D6CFC347}"/>
               </a:ext>
             </a:extLst>
           </p:cNvPr>
@@ -2267,7 +2334,7 @@
           <p:cNvPr id="40" name="paper-bar-1">
             <a:extLst xmlns:a="http://schemas.openxmlformats.org/drawingml/2006/main">
               <a:ext uri="{FF2B5EF4-FFF2-40B4-BE49-F238E27FC236}">
-                <a16:creationId xmlns:a16="http://schemas.microsoft.com/office/drawing/2014/main" id="{D58FBDF0-5C5A-457D-8FD4-50E30E158F5B}"/>
+                <a16:creationId xmlns:a16="http://schemas.microsoft.com/office/drawing/2014/main" id="{6BD298A2-35C1-44E7-AD6A-004CA1DB622D}"/>
               </a:ext>
             </a:extLst>
           </p:cNvPr>
@@ -2298,7 +2365,7 @@
           <p:cNvPr id="41" name="paper-bar-2">
             <a:extLst xmlns:a="http://schemas.openxmlformats.org/drawingml/2006/main">
               <a:ext uri="{FF2B5EF4-FFF2-40B4-BE49-F238E27FC236}">
-                <a16:creationId xmlns:a16="http://schemas.microsoft.com/office/drawing/2014/main" id="{FBF876AB-7542-4A87-8682-F55F6359F53B}"/>
+                <a16:creationId xmlns:a16="http://schemas.microsoft.com/office/drawing/2014/main" id="{7BAD0C13-3073-4D90-B966-FDD229DBD285}"/>
               </a:ext>
             </a:extLst>
           </p:cNvPr>
@@ -2329,7 +2396,7 @@
           <p:cNvPr id="42" name="paper-bar-3">
             <a:extLst xmlns:a="http://schemas.openxmlformats.org/drawingml/2006/main">
               <a:ext uri="{FF2B5EF4-FFF2-40B4-BE49-F238E27FC236}">
-                <a16:creationId xmlns:a16="http://schemas.microsoft.com/office/drawing/2014/main" id="{523F630C-9FD5-4304-A79C-31748172C026}"/>
+                <a16:creationId xmlns:a16="http://schemas.microsoft.com/office/drawing/2014/main" id="{017A557A-271D-48C2-908D-C58E21832258}"/>
               </a:ext>
             </a:extLst>
           </p:cNvPr>
@@ -2360,7 +2427,7 @@
           <p:cNvPr id="43" name="paper-label">
             <a:extLst xmlns:a="http://schemas.openxmlformats.org/drawingml/2006/main">
               <a:ext uri="{FF2B5EF4-FFF2-40B4-BE49-F238E27FC236}">
-                <a16:creationId xmlns:a16="http://schemas.microsoft.com/office/drawing/2014/main" id="{36E82C6F-0FC3-45EE-AFD5-702419BE2F3E}"/>
+                <a16:creationId xmlns:a16="http://schemas.microsoft.com/office/drawing/2014/main" id="{D370BD48-7EFB-4CD0-A2BA-68E0E25363D5}"/>
               </a:ext>
             </a:extLst>
           </p:cNvPr>
@@ -2407,7 +2474,7 @@
           <p:cNvPr id="44" name="paper-note">
             <a:extLst xmlns:a="http://schemas.openxmlformats.org/drawingml/2006/main">
               <a:ext uri="{FF2B5EF4-FFF2-40B4-BE49-F238E27FC236}">
-                <a16:creationId xmlns:a16="http://schemas.microsoft.com/office/drawing/2014/main" id="{33D09FF4-CDE7-4186-BF3C-E488AB9AF1A1}"/>
+                <a16:creationId xmlns:a16="http://schemas.microsoft.com/office/drawing/2014/main" id="{8727DE4B-5FA8-4AA5-B7CB-A98EDEDDCA04}"/>
               </a:ext>
             </a:extLst>
           </p:cNvPr>
@@ -2453,7 +2520,7 @@
           <p:cNvPr id="45" name="full-kicker">
             <a:extLst xmlns:a="http://schemas.openxmlformats.org/drawingml/2006/main">
               <a:ext uri="{FF2B5EF4-FFF2-40B4-BE49-F238E27FC236}">
-                <a16:creationId xmlns:a16="http://schemas.microsoft.com/office/drawing/2014/main" id="{F94A74FC-20B9-406A-9788-EB2448B680EE}"/>
+                <a16:creationId xmlns:a16="http://schemas.microsoft.com/office/drawing/2014/main" id="{09B4B785-3093-4B11-AD8C-26E98FFCE278}"/>
               </a:ext>
             </a:extLst>
           </p:cNvPr>
@@ -2499,7 +2566,7 @@
           <p:cNvPr id="46" name="full-shadow">
             <a:extLst xmlns:a="http://schemas.openxmlformats.org/drawingml/2006/main">
               <a:ext uri="{FF2B5EF4-FFF2-40B4-BE49-F238E27FC236}">
-                <a16:creationId xmlns:a16="http://schemas.microsoft.com/office/drawing/2014/main" id="{606106EE-D73B-4094-A3F0-867BD33A6B7E}"/>
+                <a16:creationId xmlns:a16="http://schemas.microsoft.com/office/drawing/2014/main" id="{E7E5717B-42BD-489E-9C7F-8A198AF1FE13}"/>
               </a:ext>
             </a:extLst>
           </p:cNvPr>
@@ -2532,7 +2599,7 @@
           <p:cNvPr id="47" name="full-page">
             <a:extLst xmlns:a="http://schemas.openxmlformats.org/drawingml/2006/main">
               <a:ext uri="{FF2B5EF4-FFF2-40B4-BE49-F238E27FC236}">
-                <a16:creationId xmlns:a16="http://schemas.microsoft.com/office/drawing/2014/main" id="{206F4EF1-8FAA-4C9C-B02E-2F9D67077DA4}"/>
+                <a16:creationId xmlns:a16="http://schemas.microsoft.com/office/drawing/2014/main" id="{D4F2BE19-D6D5-4A53-BA4E-F9BD4F68613F}"/>
               </a:ext>
             </a:extLst>
           </p:cNvPr>
@@ -2565,7 +2632,7 @@
           <p:cNvPr id="48" name="full-bar-0">
             <a:extLst xmlns:a="http://schemas.openxmlformats.org/drawingml/2006/main">
               <a:ext uri="{FF2B5EF4-FFF2-40B4-BE49-F238E27FC236}">
-                <a16:creationId xmlns:a16="http://schemas.microsoft.com/office/drawing/2014/main" id="{2A6C1F39-0A84-4FF2-AAC4-9B5D197DCBD5}"/>
+                <a16:creationId xmlns:a16="http://schemas.microsoft.com/office/drawing/2014/main" id="{D7FDB0EE-C3FC-45D0-B522-5F423B1040B1}"/>
               </a:ext>
             </a:extLst>
           </p:cNvPr>
@@ -2596,7 +2663,7 @@
           <p:cNvPr id="49" name="full-bar-1">
             <a:extLst xmlns:a="http://schemas.openxmlformats.org/drawingml/2006/main">
               <a:ext uri="{FF2B5EF4-FFF2-40B4-BE49-F238E27FC236}">
-                <a16:creationId xmlns:a16="http://schemas.microsoft.com/office/drawing/2014/main" id="{7E4073F1-F9FD-4814-92EE-718D5FB97280}"/>
+                <a16:creationId xmlns:a16="http://schemas.microsoft.com/office/drawing/2014/main" id="{D672A392-A01F-44A2-BA34-A9A15865E20A}"/>
               </a:ext>
             </a:extLst>
           </p:cNvPr>
@@ -2627,7 +2694,7 @@
           <p:cNvPr id="50" name="full-bar-2">
             <a:extLst xmlns:a="http://schemas.openxmlformats.org/drawingml/2006/main">
               <a:ext uri="{FF2B5EF4-FFF2-40B4-BE49-F238E27FC236}">
-                <a16:creationId xmlns:a16="http://schemas.microsoft.com/office/drawing/2014/main" id="{565B2AB5-31ED-47A7-9469-CE438BA7ED14}"/>
+                <a16:creationId xmlns:a16="http://schemas.microsoft.com/office/drawing/2014/main" id="{1715688A-C80D-441C-9388-FC0838241DE3}"/>
               </a:ext>
             </a:extLst>
           </p:cNvPr>
@@ -2658,7 +2725,7 @@
           <p:cNvPr id="51" name="full-bar-3">
             <a:extLst xmlns:a="http://schemas.openxmlformats.org/drawingml/2006/main">
               <a:ext uri="{FF2B5EF4-FFF2-40B4-BE49-F238E27FC236}">
-                <a16:creationId xmlns:a16="http://schemas.microsoft.com/office/drawing/2014/main" id="{687A30DF-0194-4D5D-9412-FE911E0429F2}"/>
+                <a16:creationId xmlns:a16="http://schemas.microsoft.com/office/drawing/2014/main" id="{3D2ED43D-E514-4486-87DD-A5D96A7804F7}"/>
               </a:ext>
             </a:extLst>
           </p:cNvPr>
@@ -2689,7 +2756,7 @@
           <p:cNvPr id="52" name="full-bar-4">
             <a:extLst xmlns:a="http://schemas.openxmlformats.org/drawingml/2006/main">
               <a:ext uri="{FF2B5EF4-FFF2-40B4-BE49-F238E27FC236}">
-                <a16:creationId xmlns:a16="http://schemas.microsoft.com/office/drawing/2014/main" id="{E60A233C-BA69-4440-B912-CE9A3D1E993E}"/>
+                <a16:creationId xmlns:a16="http://schemas.microsoft.com/office/drawing/2014/main" id="{FE2317D7-07E5-4C2B-8353-5736A72BBD48}"/>
               </a:ext>
             </a:extLst>
           </p:cNvPr>
@@ -2720,7 +2787,7 @@
           <p:cNvPr id="53" name="full-label">
             <a:extLst xmlns:a="http://schemas.openxmlformats.org/drawingml/2006/main">
               <a:ext uri="{FF2B5EF4-FFF2-40B4-BE49-F238E27FC236}">
-                <a16:creationId xmlns:a16="http://schemas.microsoft.com/office/drawing/2014/main" id="{457ABFE9-1BF5-4964-8D37-B0E377F910D3}"/>
+                <a16:creationId xmlns:a16="http://schemas.microsoft.com/office/drawing/2014/main" id="{5A015999-56FB-4022-B46D-8077A7354A5C}"/>
               </a:ext>
             </a:extLst>
           </p:cNvPr>
@@ -2763,7 +2830,7 @@
       </p:sp>
       <p:cxnSp>
         <p:nvCxnSpPr>
-          <p:cNvPr id="376" name="full-atoms-edge-a"/>
+          <p:cNvPr id="538" name="full-atoms-edge-a"/>
           <p:cNvCxnSpPr/>
           <p:nvPr/>
         </p:nvCxnSpPr>
@@ -2785,7 +2852,7 @@
       </p:cxnSp>
       <p:cxnSp>
         <p:nvCxnSpPr>
-          <p:cNvPr id="377" name="full-atoms-edge-b"/>
+          <p:cNvPr id="539" name="full-atoms-edge-b"/>
           <p:cNvCxnSpPr/>
           <p:nvPr/>
         </p:nvCxnSpPr>
@@ -2810,7 +2877,7 @@
           <p:cNvPr id="56" name="full-atoms-a">
             <a:extLst xmlns:a="http://schemas.openxmlformats.org/drawingml/2006/main">
               <a:ext uri="{FF2B5EF4-FFF2-40B4-BE49-F238E27FC236}">
-                <a16:creationId xmlns:a16="http://schemas.microsoft.com/office/drawing/2014/main" id="{38660B1F-F800-459C-8881-65B9C6074266}"/>
+                <a16:creationId xmlns:a16="http://schemas.microsoft.com/office/drawing/2014/main" id="{13BF1FE7-1E8C-4C87-A777-EE626EC837AE}"/>
               </a:ext>
             </a:extLst>
           </p:cNvPr>
@@ -2841,7 +2908,7 @@
           <p:cNvPr id="57" name="full-atoms-b">
             <a:extLst xmlns:a="http://schemas.openxmlformats.org/drawingml/2006/main">
               <a:ext uri="{FF2B5EF4-FFF2-40B4-BE49-F238E27FC236}">
-                <a16:creationId xmlns:a16="http://schemas.microsoft.com/office/drawing/2014/main" id="{A03C1451-F767-4022-93BA-779D1E44E9F9}"/>
+                <a16:creationId xmlns:a16="http://schemas.microsoft.com/office/drawing/2014/main" id="{59DC6C2A-C54A-42C4-8FB6-834FF9046FD7}"/>
               </a:ext>
             </a:extLst>
           </p:cNvPr>
@@ -2872,7 +2939,7 @@
           <p:cNvPr id="58" name="full-atoms-b-label">
             <a:extLst xmlns:a="http://schemas.openxmlformats.org/drawingml/2006/main">
               <a:ext uri="{FF2B5EF4-FFF2-40B4-BE49-F238E27FC236}">
-                <a16:creationId xmlns:a16="http://schemas.microsoft.com/office/drawing/2014/main" id="{42897458-6A31-440C-A788-497172C7BFEE}"/>
+                <a16:creationId xmlns:a16="http://schemas.microsoft.com/office/drawing/2014/main" id="{F74BBC2E-AFBC-4FED-9DFE-41058D4A0C10}"/>
               </a:ext>
             </a:extLst>
           </p:cNvPr>
@@ -2915,7 +2982,7 @@
           <p:cNvPr id="59" name="full-atoms-ellipsis">
             <a:extLst xmlns:a="http://schemas.openxmlformats.org/drawingml/2006/main">
               <a:ext uri="{FF2B5EF4-FFF2-40B4-BE49-F238E27FC236}">
-                <a16:creationId xmlns:a16="http://schemas.microsoft.com/office/drawing/2014/main" id="{8370E1C0-93E3-4CCF-B1A5-38180D8B753E}"/>
+                <a16:creationId xmlns:a16="http://schemas.microsoft.com/office/drawing/2014/main" id="{6AB87CE2-1FEB-4F37-A9FA-751F78DF1C07}"/>
               </a:ext>
             </a:extLst>
           </p:cNvPr>
@@ -2961,7 +3028,7 @@
           <p:cNvPr id="60" name="full-atoms-c">
             <a:extLst xmlns:a="http://schemas.openxmlformats.org/drawingml/2006/main">
               <a:ext uri="{FF2B5EF4-FFF2-40B4-BE49-F238E27FC236}">
-                <a16:creationId xmlns:a16="http://schemas.microsoft.com/office/drawing/2014/main" id="{AF5B3BD6-7C81-47E6-B453-4983FE49193D}"/>
+                <a16:creationId xmlns:a16="http://schemas.microsoft.com/office/drawing/2014/main" id="{C3F490DD-3493-4CAB-8050-F8FEB47CEBA8}"/>
               </a:ext>
             </a:extLst>
           </p:cNvPr>
@@ -2992,7 +3059,7 @@
           <p:cNvPr id="61" name="full-atoms-label">
             <a:extLst xmlns:a="http://schemas.openxmlformats.org/drawingml/2006/main">
               <a:ext uri="{FF2B5EF4-FFF2-40B4-BE49-F238E27FC236}">
-                <a16:creationId xmlns:a16="http://schemas.microsoft.com/office/drawing/2014/main" id="{476511C5-2107-48B1-910E-3B3B87BBA2A3}"/>
+                <a16:creationId xmlns:a16="http://schemas.microsoft.com/office/drawing/2014/main" id="{1873FF37-4CC0-49FB-9B80-F22E94A533BA}"/>
               </a:ext>
             </a:extLst>
           </p:cNvPr>
@@ -3038,7 +3105,7 @@
           <p:cNvPr id="62" name="reducer">
             <a:extLst xmlns:a="http://schemas.openxmlformats.org/drawingml/2006/main">
               <a:ext uri="{FF2B5EF4-FFF2-40B4-BE49-F238E27FC236}">
-                <a16:creationId xmlns:a16="http://schemas.microsoft.com/office/drawing/2014/main" id="{0D7B63DE-2410-4288-9E64-B3F5CA3F9C2E}"/>
+                <a16:creationId xmlns:a16="http://schemas.microsoft.com/office/drawing/2014/main" id="{A4BA0639-17AD-4654-8900-44F319FCFF11}"/>
               </a:ext>
             </a:extLst>
           </p:cNvPr>
@@ -3073,7 +3140,7 @@
           <p:cNvPr id="63" name="reducer-core">
             <a:extLst xmlns:a="http://schemas.openxmlformats.org/drawingml/2006/main">
               <a:ext uri="{FF2B5EF4-FFF2-40B4-BE49-F238E27FC236}">
-                <a16:creationId xmlns:a16="http://schemas.microsoft.com/office/drawing/2014/main" id="{18B69D5D-9697-4F30-B389-91CB5B788C88}"/>
+                <a16:creationId xmlns:a16="http://schemas.microsoft.com/office/drawing/2014/main" id="{84A00463-AFAA-4CB2-92E9-B8C4DB4A7DF6}"/>
               </a:ext>
             </a:extLst>
           </p:cNvPr>
@@ -3106,7 +3173,7 @@
           <p:cNvPr id="64" name="reducer-minus">
             <a:extLst xmlns:a="http://schemas.openxmlformats.org/drawingml/2006/main">
               <a:ext uri="{FF2B5EF4-FFF2-40B4-BE49-F238E27FC236}">
-                <a16:creationId xmlns:a16="http://schemas.microsoft.com/office/drawing/2014/main" id="{19158BBB-CF6F-46CD-9F52-8A5455AB7DB0}"/>
+                <a16:creationId xmlns:a16="http://schemas.microsoft.com/office/drawing/2014/main" id="{13CE9F0D-895B-4B9A-8EBF-C35EF2B24C3A}"/>
               </a:ext>
             </a:extLst>
           </p:cNvPr>
@@ -3152,7 +3219,7 @@
           <p:cNvPr id="65" name="reducer-label">
             <a:extLst xmlns:a="http://schemas.openxmlformats.org/drawingml/2006/main">
               <a:ext uri="{FF2B5EF4-FFF2-40B4-BE49-F238E27FC236}">
-                <a16:creationId xmlns:a16="http://schemas.microsoft.com/office/drawing/2014/main" id="{B4A8A469-69B1-444F-BB0F-BE7B3DECAEFA}"/>
+                <a16:creationId xmlns:a16="http://schemas.microsoft.com/office/drawing/2014/main" id="{40B13099-9C96-48D2-9D15-3CF8D1A2ED8B}"/>
               </a:ext>
             </a:extLst>
           </p:cNvPr>
@@ -3199,7 +3266,7 @@
           <p:cNvPr id="66" name="reducer-note">
             <a:extLst xmlns:a="http://schemas.openxmlformats.org/drawingml/2006/main">
               <a:ext uri="{FF2B5EF4-FFF2-40B4-BE49-F238E27FC236}">
-                <a16:creationId xmlns:a16="http://schemas.microsoft.com/office/drawing/2014/main" id="{B3C40AFD-FFB2-4C80-A5EE-BBB9A9C1B433}"/>
+                <a16:creationId xmlns:a16="http://schemas.microsoft.com/office/drawing/2014/main" id="{1A1B4F16-8F56-4BC6-8EDC-BF5E455CCAC6}"/>
               </a:ext>
             </a:extLst>
           </p:cNvPr>
@@ -3245,7 +3312,7 @@
           <p:cNvPr id="67" name="candidate-kicker">
             <a:extLst xmlns:a="http://schemas.openxmlformats.org/drawingml/2006/main">
               <a:ext uri="{FF2B5EF4-FFF2-40B4-BE49-F238E27FC236}">
-                <a16:creationId xmlns:a16="http://schemas.microsoft.com/office/drawing/2014/main" id="{1FEA6030-A923-44E3-AF46-C7FEA4A2F73B}"/>
+                <a16:creationId xmlns:a16="http://schemas.microsoft.com/office/drawing/2014/main" id="{9059A154-BF1C-400F-9FE0-8915C8F09D1B}"/>
               </a:ext>
             </a:extLst>
           </p:cNvPr>
@@ -3291,7 +3358,7 @@
           <p:cNvPr id="68" name="candidate-shadow">
             <a:extLst xmlns:a="http://schemas.openxmlformats.org/drawingml/2006/main">
               <a:ext uri="{FF2B5EF4-FFF2-40B4-BE49-F238E27FC236}">
-                <a16:creationId xmlns:a16="http://schemas.microsoft.com/office/drawing/2014/main" id="{00FB75A6-16F8-4FF1-9DD0-1D42C3EB7930}"/>
+                <a16:creationId xmlns:a16="http://schemas.microsoft.com/office/drawing/2014/main" id="{C10E3841-DE9F-4107-B072-37C7803B2DEC}"/>
               </a:ext>
             </a:extLst>
           </p:cNvPr>
@@ -3324,7 +3391,7 @@
           <p:cNvPr id="69" name="candidate-page">
             <a:extLst xmlns:a="http://schemas.openxmlformats.org/drawingml/2006/main">
               <a:ext uri="{FF2B5EF4-FFF2-40B4-BE49-F238E27FC236}">
-                <a16:creationId xmlns:a16="http://schemas.microsoft.com/office/drawing/2014/main" id="{BFAD3C29-6C79-46C1-B935-D2AED9BAFD84}"/>
+                <a16:creationId xmlns:a16="http://schemas.microsoft.com/office/drawing/2014/main" id="{614FB720-3DC1-49E7-B1D1-48033DA436C0}"/>
               </a:ext>
             </a:extLst>
           </p:cNvPr>
@@ -3357,7 +3424,7 @@
           <p:cNvPr id="70" name="candidate-bar-0">
             <a:extLst xmlns:a="http://schemas.openxmlformats.org/drawingml/2006/main">
               <a:ext uri="{FF2B5EF4-FFF2-40B4-BE49-F238E27FC236}">
-                <a16:creationId xmlns:a16="http://schemas.microsoft.com/office/drawing/2014/main" id="{7F702788-DCAB-4863-9BE5-18150F4BFEDE}"/>
+                <a16:creationId xmlns:a16="http://schemas.microsoft.com/office/drawing/2014/main" id="{7F23D648-0AAD-4717-8390-F2801CDEB197}"/>
               </a:ext>
             </a:extLst>
           </p:cNvPr>
@@ -3388,7 +3455,7 @@
           <p:cNvPr id="71" name="candidate-bar-1">
             <a:extLst xmlns:a="http://schemas.openxmlformats.org/drawingml/2006/main">
               <a:ext uri="{FF2B5EF4-FFF2-40B4-BE49-F238E27FC236}">
-                <a16:creationId xmlns:a16="http://schemas.microsoft.com/office/drawing/2014/main" id="{9AE577BB-7741-4E77-9C26-BA7581F84B0A}"/>
+                <a16:creationId xmlns:a16="http://schemas.microsoft.com/office/drawing/2014/main" id="{4773B805-DE45-42C5-B0A7-DCA86FF09CB0}"/>
               </a:ext>
             </a:extLst>
           </p:cNvPr>
@@ -3419,7 +3486,7 @@
           <p:cNvPr id="72" name="candidate-bar-2">
             <a:extLst xmlns:a="http://schemas.openxmlformats.org/drawingml/2006/main">
               <a:ext uri="{FF2B5EF4-FFF2-40B4-BE49-F238E27FC236}">
-                <a16:creationId xmlns:a16="http://schemas.microsoft.com/office/drawing/2014/main" id="{387420D8-0375-4E87-956A-8B0C5015724F}"/>
+                <a16:creationId xmlns:a16="http://schemas.microsoft.com/office/drawing/2014/main" id="{02229EC5-6A42-4027-AAE6-164B07552365}"/>
               </a:ext>
             </a:extLst>
           </p:cNvPr>
@@ -3450,7 +3517,7 @@
           <p:cNvPr id="73" name="candidate-label">
             <a:extLst xmlns:a="http://schemas.openxmlformats.org/drawingml/2006/main">
               <a:ext uri="{FF2B5EF4-FFF2-40B4-BE49-F238E27FC236}">
-                <a16:creationId xmlns:a16="http://schemas.microsoft.com/office/drawing/2014/main" id="{E73E2C7D-0F94-43EB-B83F-E756AC5D6FD8}"/>
+                <a16:creationId xmlns:a16="http://schemas.microsoft.com/office/drawing/2014/main" id="{82E91F01-B9CA-45B8-BE39-728BF26508B4}"/>
               </a:ext>
             </a:extLst>
           </p:cNvPr>
@@ -3493,7 +3560,7 @@
       </p:sp>
       <p:cxnSp>
         <p:nvCxnSpPr>
-          <p:cNvPr id="396" name="candidate-atoms-edge-a"/>
+          <p:cNvPr id="558" name="candidate-atoms-edge-a"/>
           <p:cNvCxnSpPr/>
           <p:nvPr/>
         </p:nvCxnSpPr>
@@ -3515,7 +3582,7 @@
       </p:cxnSp>
       <p:cxnSp>
         <p:nvCxnSpPr>
-          <p:cNvPr id="397" name="candidate-atoms-edge-b"/>
+          <p:cNvPr id="559" name="candidate-atoms-edge-b"/>
           <p:cNvCxnSpPr/>
           <p:nvPr/>
         </p:nvCxnSpPr>
@@ -3540,7 +3607,7 @@
           <p:cNvPr id="76" name="candidate-atoms-a">
             <a:extLst xmlns:a="http://schemas.openxmlformats.org/drawingml/2006/main">
               <a:ext uri="{FF2B5EF4-FFF2-40B4-BE49-F238E27FC236}">
-                <a16:creationId xmlns:a16="http://schemas.microsoft.com/office/drawing/2014/main" id="{90457CF2-E183-4C04-B338-A856A0313262}"/>
+                <a16:creationId xmlns:a16="http://schemas.microsoft.com/office/drawing/2014/main" id="{C7867DA9-153C-4778-BE4C-8A6E77962FE3}"/>
               </a:ext>
             </a:extLst>
           </p:cNvPr>
@@ -3571,7 +3638,7 @@
           <p:cNvPr id="77" name="candidate-atoms-b">
             <a:extLst xmlns:a="http://schemas.openxmlformats.org/drawingml/2006/main">
               <a:ext uri="{FF2B5EF4-FFF2-40B4-BE49-F238E27FC236}">
-                <a16:creationId xmlns:a16="http://schemas.microsoft.com/office/drawing/2014/main" id="{EC64E240-2036-43BD-8148-65882A8722CD}"/>
+                <a16:creationId xmlns:a16="http://schemas.microsoft.com/office/drawing/2014/main" id="{AEEE996B-3D52-490B-B73E-264377CF93B9}"/>
               </a:ext>
             </a:extLst>
           </p:cNvPr>
@@ -3604,7 +3671,7 @@
           <p:cNvPr id="78" name="candidate-atoms-b-label">
             <a:extLst xmlns:a="http://schemas.openxmlformats.org/drawingml/2006/main">
               <a:ext uri="{FF2B5EF4-FFF2-40B4-BE49-F238E27FC236}">
-                <a16:creationId xmlns:a16="http://schemas.microsoft.com/office/drawing/2014/main" id="{956EDBD2-3E03-4C3A-9EE0-B82DE9B22571}"/>
+                <a16:creationId xmlns:a16="http://schemas.microsoft.com/office/drawing/2014/main" id="{3A041EF0-7D1A-42F7-AFF9-6E3B4286B016}"/>
               </a:ext>
             </a:extLst>
           </p:cNvPr>
@@ -3650,7 +3717,7 @@
           <p:cNvPr id="79" name="candidate-atoms-ellipsis">
             <a:extLst xmlns:a="http://schemas.openxmlformats.org/drawingml/2006/main">
               <a:ext uri="{FF2B5EF4-FFF2-40B4-BE49-F238E27FC236}">
-                <a16:creationId xmlns:a16="http://schemas.microsoft.com/office/drawing/2014/main" id="{0C37C357-EE91-4BDB-9EE5-1ED7E1C9BE67}"/>
+                <a16:creationId xmlns:a16="http://schemas.microsoft.com/office/drawing/2014/main" id="{741E9F2D-A687-46D3-99EF-43E652ADA482}"/>
               </a:ext>
             </a:extLst>
           </p:cNvPr>
@@ -3696,7 +3763,7 @@
           <p:cNvPr id="80" name="candidate-atoms-c">
             <a:extLst xmlns:a="http://schemas.openxmlformats.org/drawingml/2006/main">
               <a:ext uri="{FF2B5EF4-FFF2-40B4-BE49-F238E27FC236}">
-                <a16:creationId xmlns:a16="http://schemas.microsoft.com/office/drawing/2014/main" id="{CCE43A18-9394-4477-918F-08652922B2A2}"/>
+                <a16:creationId xmlns:a16="http://schemas.microsoft.com/office/drawing/2014/main" id="{EF27D679-5A50-416A-A262-EA333FA6B83A}"/>
               </a:ext>
             </a:extLst>
           </p:cNvPr>
@@ -3727,7 +3794,7 @@
           <p:cNvPr id="81" name="candidate-note">
             <a:extLst xmlns:a="http://schemas.openxmlformats.org/drawingml/2006/main">
               <a:ext uri="{FF2B5EF4-FFF2-40B4-BE49-F238E27FC236}">
-                <a16:creationId xmlns:a16="http://schemas.microsoft.com/office/drawing/2014/main" id="{8A4ADD2B-03B8-45FD-B27A-2195A8BCF01A}"/>
+                <a16:creationId xmlns:a16="http://schemas.microsoft.com/office/drawing/2014/main" id="{4B6F011E-7427-4EB4-91D3-432F2D5F10EA}"/>
               </a:ext>
             </a:extLst>
           </p:cNvPr>
@@ -3773,7 +3840,7 @@
           <p:cNvPr id="82" name="upstream-boundary-note">
             <a:extLst xmlns:a="http://schemas.openxmlformats.org/drawingml/2006/main">
               <a:ext uri="{FF2B5EF4-FFF2-40B4-BE49-F238E27FC236}">
-                <a16:creationId xmlns:a16="http://schemas.microsoft.com/office/drawing/2014/main" id="{E0EB846F-7167-4E14-AD34-C524B5285C8F}"/>
+                <a16:creationId xmlns:a16="http://schemas.microsoft.com/office/drawing/2014/main" id="{9DBE179E-3837-43E5-96C4-EB6F6C40F7ED}"/>
               </a:ext>
             </a:extLst>
           </p:cNvPr>
@@ -3819,7 +3886,7 @@
           <p:cNvPr id="83" name="evaluation-package">
             <a:extLst xmlns:a="http://schemas.openxmlformats.org/drawingml/2006/main">
               <a:ext uri="{FF2B5EF4-FFF2-40B4-BE49-F238E27FC236}">
-                <a16:creationId xmlns:a16="http://schemas.microsoft.com/office/drawing/2014/main" id="{DFB94AF8-BB44-433E-9B08-89F009D86882}"/>
+                <a16:creationId xmlns:a16="http://schemas.microsoft.com/office/drawing/2014/main" id="{E4B58597-6194-4CF7-981F-7A1CB9AFDEF3}"/>
               </a:ext>
             </a:extLst>
           </p:cNvPr>
@@ -3854,7 +3921,7 @@
           <p:cNvPr id="84" name="evaluation-tab">
             <a:extLst xmlns:a="http://schemas.openxmlformats.org/drawingml/2006/main">
               <a:ext uri="{FF2B5EF4-FFF2-40B4-BE49-F238E27FC236}">
-                <a16:creationId xmlns:a16="http://schemas.microsoft.com/office/drawing/2014/main" id="{83F00FB9-35A7-43DD-8493-2CFF82C46DB2}"/>
+                <a16:creationId xmlns:a16="http://schemas.microsoft.com/office/drawing/2014/main" id="{C2E62307-551F-4C33-B596-A027FB647048}"/>
               </a:ext>
             </a:extLst>
           </p:cNvPr>
@@ -3885,7 +3952,7 @@
           <p:cNvPr id="85" name="evaluation-title">
             <a:extLst xmlns:a="http://schemas.openxmlformats.org/drawingml/2006/main">
               <a:ext uri="{FF2B5EF4-FFF2-40B4-BE49-F238E27FC236}">
-                <a16:creationId xmlns:a16="http://schemas.microsoft.com/office/drawing/2014/main" id="{40C8C7D2-348C-4114-BCBB-F1A2FAA9FFD9}"/>
+                <a16:creationId xmlns:a16="http://schemas.microsoft.com/office/drawing/2014/main" id="{8F4FD363-7810-4229-9E09-416278E92D85}"/>
               </a:ext>
             </a:extLst>
           </p:cNvPr>
@@ -3931,7 +3998,7 @@
           <p:cNvPr id="86" name="evaluation-fields">
             <a:extLst xmlns:a="http://schemas.openxmlformats.org/drawingml/2006/main">
               <a:ext uri="{FF2B5EF4-FFF2-40B4-BE49-F238E27FC236}">
-                <a16:creationId xmlns:a16="http://schemas.microsoft.com/office/drawing/2014/main" id="{03993134-13BB-4EB3-A690-FEFE9A90D785}"/>
+                <a16:creationId xmlns:a16="http://schemas.microsoft.com/office/drawing/2014/main" id="{04A41F58-EDF1-4ED9-98FB-FB8EAFB53F15}"/>
               </a:ext>
             </a:extLst>
           </p:cNvPr>
@@ -3979,7 +4046,7 @@
           <p:cNvPr id="87" name="protocol-shell">
             <a:extLst xmlns:a="http://schemas.openxmlformats.org/drawingml/2006/main">
               <a:ext uri="{FF2B5EF4-FFF2-40B4-BE49-F238E27FC236}">
-                <a16:creationId xmlns:a16="http://schemas.microsoft.com/office/drawing/2014/main" id="{97DA212B-772D-40F3-81CE-BFBCF1CE6097}"/>
+                <a16:creationId xmlns:a16="http://schemas.microsoft.com/office/drawing/2014/main" id="{21B869B0-6D17-427E-B09E-F0B5A7D2356A}"/>
               </a:ext>
             </a:extLst>
           </p:cNvPr>
@@ -4014,7 +4081,7 @@
           <p:cNvPr id="88" name="protocol-boundary-label">
             <a:extLst xmlns:a="http://schemas.openxmlformats.org/drawingml/2006/main">
               <a:ext uri="{FF2B5EF4-FFF2-40B4-BE49-F238E27FC236}">
-                <a16:creationId xmlns:a16="http://schemas.microsoft.com/office/drawing/2014/main" id="{358F6996-5F3F-4546-BA97-28E4F9769276}"/>
+                <a16:creationId xmlns:a16="http://schemas.microsoft.com/office/drawing/2014/main" id="{F1C5B9E1-3B74-48FC-AC68-48B830E2A359}"/>
               </a:ext>
             </a:extLst>
           </p:cNvPr>
@@ -4060,7 +4127,7 @@
           <p:cNvPr id="89" name="stage-map">
             <a:extLst xmlns:a="http://schemas.openxmlformats.org/drawingml/2006/main">
               <a:ext uri="{FF2B5EF4-FFF2-40B4-BE49-F238E27FC236}">
-                <a16:creationId xmlns:a16="http://schemas.microsoft.com/office/drawing/2014/main" id="{C6DD5201-7FB7-4248-955E-CD84B069A5ED}"/>
+                <a16:creationId xmlns:a16="http://schemas.microsoft.com/office/drawing/2014/main" id="{607F7246-F8F8-4399-AE08-79CCAD953350}"/>
               </a:ext>
             </a:extLst>
           </p:cNvPr>
@@ -4095,7 +4162,7 @@
           <p:cNvPr id="90" name="stage-freeze">
             <a:extLst xmlns:a="http://schemas.openxmlformats.org/drawingml/2006/main">
               <a:ext uri="{FF2B5EF4-FFF2-40B4-BE49-F238E27FC236}">
-                <a16:creationId xmlns:a16="http://schemas.microsoft.com/office/drawing/2014/main" id="{94B8F202-7D88-4AFA-9FD2-38A3E26428F1}"/>
+                <a16:creationId xmlns:a16="http://schemas.microsoft.com/office/drawing/2014/main" id="{83B5EBC5-3696-4944-8659-FFDC913903D6}"/>
               </a:ext>
             </a:extLst>
           </p:cNvPr>
@@ -4130,7 +4197,7 @@
           <p:cNvPr id="91" name="stage-run">
             <a:extLst xmlns:a="http://schemas.openxmlformats.org/drawingml/2006/main">
               <a:ext uri="{FF2B5EF4-FFF2-40B4-BE49-F238E27FC236}">
-                <a16:creationId xmlns:a16="http://schemas.microsoft.com/office/drawing/2014/main" id="{E25929C6-0F2D-46CF-91CF-306356C45B02}"/>
+                <a16:creationId xmlns:a16="http://schemas.microsoft.com/office/drawing/2014/main" id="{6C181504-724B-46D2-A9FF-CC458BC4A27A}"/>
               </a:ext>
             </a:extLst>
           </p:cNvPr>
@@ -4165,7 +4232,7 @@
           <p:cNvPr id="92" name="stage-verify">
             <a:extLst xmlns:a="http://schemas.openxmlformats.org/drawingml/2006/main">
               <a:ext uri="{FF2B5EF4-FFF2-40B4-BE49-F238E27FC236}">
-                <a16:creationId xmlns:a16="http://schemas.microsoft.com/office/drawing/2014/main" id="{C4B4306F-90DA-46AC-9091-DC7056B42B01}"/>
+                <a16:creationId xmlns:a16="http://schemas.microsoft.com/office/drawing/2014/main" id="{79DE7573-AEFD-40E8-8A8C-D977E7B95D44}"/>
               </a:ext>
             </a:extLst>
           </p:cNvPr>
@@ -4200,7 +4267,7 @@
           <p:cNvPr id="93" name="stage-1-index">
             <a:extLst xmlns:a="http://schemas.openxmlformats.org/drawingml/2006/main">
               <a:ext uri="{FF2B5EF4-FFF2-40B4-BE49-F238E27FC236}">
-                <a16:creationId xmlns:a16="http://schemas.microsoft.com/office/drawing/2014/main" id="{1A88E97E-36B4-4523-AB37-E163E68C02E5}"/>
+                <a16:creationId xmlns:a16="http://schemas.microsoft.com/office/drawing/2014/main" id="{5567056A-7939-4A5F-8014-E6DCC8FA4E37}"/>
               </a:ext>
             </a:extLst>
           </p:cNvPr>
@@ -4231,7 +4298,7 @@
           <p:cNvPr id="94" name="stage-1-index-text">
             <a:extLst xmlns:a="http://schemas.openxmlformats.org/drawingml/2006/main">
               <a:ext uri="{FF2B5EF4-FFF2-40B4-BE49-F238E27FC236}">
-                <a16:creationId xmlns:a16="http://schemas.microsoft.com/office/drawing/2014/main" id="{4C34CBC6-11CF-47C9-9CBE-5CBC41BFFE4F}"/>
+                <a16:creationId xmlns:a16="http://schemas.microsoft.com/office/drawing/2014/main" id="{95E17319-7814-40B1-B30F-E7A18B405334}"/>
               </a:ext>
             </a:extLst>
           </p:cNvPr>
@@ -4277,7 +4344,7 @@
           <p:cNvPr id="95" name="stage-2-index">
             <a:extLst xmlns:a="http://schemas.openxmlformats.org/drawingml/2006/main">
               <a:ext uri="{FF2B5EF4-FFF2-40B4-BE49-F238E27FC236}">
-                <a16:creationId xmlns:a16="http://schemas.microsoft.com/office/drawing/2014/main" id="{D44A430B-FA7A-4F3E-94FB-B61194CDE46B}"/>
+                <a16:creationId xmlns:a16="http://schemas.microsoft.com/office/drawing/2014/main" id="{F969B34C-F65B-4290-A99D-69077DC0D5A0}"/>
               </a:ext>
             </a:extLst>
           </p:cNvPr>
@@ -4308,7 +4375,7 @@
           <p:cNvPr id="96" name="stage-2-index-text">
             <a:extLst xmlns:a="http://schemas.openxmlformats.org/drawingml/2006/main">
               <a:ext uri="{FF2B5EF4-FFF2-40B4-BE49-F238E27FC236}">
-                <a16:creationId xmlns:a16="http://schemas.microsoft.com/office/drawing/2014/main" id="{B8A2ABA2-9D7F-4CF7-B868-8F89F89EE895}"/>
+                <a16:creationId xmlns:a16="http://schemas.microsoft.com/office/drawing/2014/main" id="{29E4B40A-7A48-41D0-8C03-D409E5967BAF}"/>
               </a:ext>
             </a:extLst>
           </p:cNvPr>
@@ -4354,7 +4421,7 @@
           <p:cNvPr id="97" name="stage-3-index">
             <a:extLst xmlns:a="http://schemas.openxmlformats.org/drawingml/2006/main">
               <a:ext uri="{FF2B5EF4-FFF2-40B4-BE49-F238E27FC236}">
-                <a16:creationId xmlns:a16="http://schemas.microsoft.com/office/drawing/2014/main" id="{4A957A7C-682B-44B4-BAD1-4C2C90912D72}"/>
+                <a16:creationId xmlns:a16="http://schemas.microsoft.com/office/drawing/2014/main" id="{87D03525-93F2-48CD-8B1C-D22421CA96C0}"/>
               </a:ext>
             </a:extLst>
           </p:cNvPr>
@@ -4385,7 +4452,7 @@
           <p:cNvPr id="98" name="stage-3-index-text">
             <a:extLst xmlns:a="http://schemas.openxmlformats.org/drawingml/2006/main">
               <a:ext uri="{FF2B5EF4-FFF2-40B4-BE49-F238E27FC236}">
-                <a16:creationId xmlns:a16="http://schemas.microsoft.com/office/drawing/2014/main" id="{55FC5C11-FA85-4F26-A0DE-693F418DDF91}"/>
+                <a16:creationId xmlns:a16="http://schemas.microsoft.com/office/drawing/2014/main" id="{1003B742-E072-4429-B8AA-6C00059234DA}"/>
               </a:ext>
             </a:extLst>
           </p:cNvPr>
@@ -4431,7 +4498,7 @@
           <p:cNvPr id="99" name="stage-4-index">
             <a:extLst xmlns:a="http://schemas.openxmlformats.org/drawingml/2006/main">
               <a:ext uri="{FF2B5EF4-FFF2-40B4-BE49-F238E27FC236}">
-                <a16:creationId xmlns:a16="http://schemas.microsoft.com/office/drawing/2014/main" id="{88F47E14-99E5-414B-91AA-91A7E48AE095}"/>
+                <a16:creationId xmlns:a16="http://schemas.microsoft.com/office/drawing/2014/main" id="{BFA4B5E3-2830-443A-B0A3-FFAA8C988B9E}"/>
               </a:ext>
             </a:extLst>
           </p:cNvPr>
@@ -4462,7 +4529,7 @@
           <p:cNvPr id="100" name="stage-4-index-text">
             <a:extLst xmlns:a="http://schemas.openxmlformats.org/drawingml/2006/main">
               <a:ext uri="{FF2B5EF4-FFF2-40B4-BE49-F238E27FC236}">
-                <a16:creationId xmlns:a16="http://schemas.microsoft.com/office/drawing/2014/main" id="{9CBEBB73-A16A-45F3-AE49-24B00164257D}"/>
+                <a16:creationId xmlns:a16="http://schemas.microsoft.com/office/drawing/2014/main" id="{42CE6D84-AF86-4641-ABA7-876B9DE7481E}"/>
               </a:ext>
             </a:extLst>
           </p:cNvPr>
@@ -4508,7 +4575,7 @@
           <p:cNvPr id="101" name="stage-map-title">
             <a:extLst xmlns:a="http://schemas.openxmlformats.org/drawingml/2006/main">
               <a:ext uri="{FF2B5EF4-FFF2-40B4-BE49-F238E27FC236}">
-                <a16:creationId xmlns:a16="http://schemas.microsoft.com/office/drawing/2014/main" id="{53BAB415-24CC-409A-86F9-A951A9DD8CAE}"/>
+                <a16:creationId xmlns:a16="http://schemas.microsoft.com/office/drawing/2014/main" id="{9AD07021-B380-4B79-A50E-08F18A65C81A}"/>
               </a:ext>
             </a:extLst>
           </p:cNvPr>
@@ -4554,7 +4621,7 @@
           <p:cNvPr id="102" name="stage-map-detail">
             <a:extLst xmlns:a="http://schemas.openxmlformats.org/drawingml/2006/main">
               <a:ext uri="{FF2B5EF4-FFF2-40B4-BE49-F238E27FC236}">
-                <a16:creationId xmlns:a16="http://schemas.microsoft.com/office/drawing/2014/main" id="{686E10F6-94B4-48F5-B466-C94B5008294A}"/>
+                <a16:creationId xmlns:a16="http://schemas.microsoft.com/office/drawing/2014/main" id="{99D6F60F-23F2-48CD-AF90-7DF0B95ACD35}"/>
               </a:ext>
             </a:extLst>
           </p:cNvPr>
@@ -4602,7 +4669,7 @@
           <p:cNvPr id="103" name="closure-check">
             <a:extLst xmlns:a="http://schemas.openxmlformats.org/drawingml/2006/main">
               <a:ext uri="{FF2B5EF4-FFF2-40B4-BE49-F238E27FC236}">
-                <a16:creationId xmlns:a16="http://schemas.microsoft.com/office/drawing/2014/main" id="{F3A0607F-F077-494C-A5E0-EEC3D2E334DC}"/>
+                <a16:creationId xmlns:a16="http://schemas.microsoft.com/office/drawing/2014/main" id="{69BA937D-A873-4029-99F5-FCE951558DF2}"/>
               </a:ext>
             </a:extLst>
           </p:cNvPr>
@@ -4637,7 +4704,7 @@
           <p:cNvPr id="104" name="closure-check-title">
             <a:extLst xmlns:a="http://schemas.openxmlformats.org/drawingml/2006/main">
               <a:ext uri="{FF2B5EF4-FFF2-40B4-BE49-F238E27FC236}">
-                <a16:creationId xmlns:a16="http://schemas.microsoft.com/office/drawing/2014/main" id="{60971105-6E78-4168-85A3-5F798B7E1A09}"/>
+                <a16:creationId xmlns:a16="http://schemas.microsoft.com/office/drawing/2014/main" id="{9C0D759E-C6B5-4CE1-B4B3-BE2C5C739497}"/>
               </a:ext>
             </a:extLst>
           </p:cNvPr>
@@ -4683,7 +4750,7 @@
           <p:cNvPr id="105" name="closure-check-note">
             <a:extLst xmlns:a="http://schemas.openxmlformats.org/drawingml/2006/main">
               <a:ext uri="{FF2B5EF4-FFF2-40B4-BE49-F238E27FC236}">
-                <a16:creationId xmlns:a16="http://schemas.microsoft.com/office/drawing/2014/main" id="{83300982-21FE-4F67-8B36-F32439C42886}"/>
+                <a16:creationId xmlns:a16="http://schemas.microsoft.com/office/drawing/2014/main" id="{EE2DF3F4-3881-40BF-8BE8-AD19E98B3595}"/>
               </a:ext>
             </a:extLst>
           </p:cNvPr>
@@ -4730,7 +4797,7 @@
           <p:cNvPr id="106" name="stage-freeze-title">
             <a:extLst xmlns:a="http://schemas.openxmlformats.org/drawingml/2006/main">
               <a:ext uri="{FF2B5EF4-FFF2-40B4-BE49-F238E27FC236}">
-                <a16:creationId xmlns:a16="http://schemas.microsoft.com/office/drawing/2014/main" id="{FE9DD88C-CBDC-4BF8-9F3D-A2ED1561C9EA}"/>
+                <a16:creationId xmlns:a16="http://schemas.microsoft.com/office/drawing/2014/main" id="{CB8E3D35-CD69-4447-94C5-B7494907EBFF}"/>
               </a:ext>
             </a:extLst>
           </p:cNvPr>
@@ -4776,7 +4843,7 @@
           <p:cNvPr id="107" name="stage-freeze-detail">
             <a:extLst xmlns:a="http://schemas.openxmlformats.org/drawingml/2006/main">
               <a:ext uri="{FF2B5EF4-FFF2-40B4-BE49-F238E27FC236}">
-                <a16:creationId xmlns:a16="http://schemas.microsoft.com/office/drawing/2014/main" id="{89CEADE1-8172-4758-9408-E3DF032E2669}"/>
+                <a16:creationId xmlns:a16="http://schemas.microsoft.com/office/drawing/2014/main" id="{21C933E5-1412-4378-B339-BC3B6EEE4717}"/>
               </a:ext>
             </a:extLst>
           </p:cNvPr>
@@ -4825,7 +4892,7 @@
           <p:cNvPr id="108" name="stage-freeze-note">
             <a:extLst xmlns:a="http://schemas.openxmlformats.org/drawingml/2006/main">
               <a:ext uri="{FF2B5EF4-FFF2-40B4-BE49-F238E27FC236}">
-                <a16:creationId xmlns:a16="http://schemas.microsoft.com/office/drawing/2014/main" id="{C0C776AE-A4A9-43A3-B5DE-91816B002064}"/>
+                <a16:creationId xmlns:a16="http://schemas.microsoft.com/office/drawing/2014/main" id="{3DF3F60D-529D-4512-BFA9-0BB33C9F916F}"/>
               </a:ext>
             </a:extLst>
           </p:cNvPr>
@@ -4872,7 +4939,7 @@
           <p:cNvPr id="109" name="stage-run-title">
             <a:extLst xmlns:a="http://schemas.openxmlformats.org/drawingml/2006/main">
               <a:ext uri="{FF2B5EF4-FFF2-40B4-BE49-F238E27FC236}">
-                <a16:creationId xmlns:a16="http://schemas.microsoft.com/office/drawing/2014/main" id="{045D986D-D3FB-44EA-9DD4-42A732067F6F}"/>
+                <a16:creationId xmlns:a16="http://schemas.microsoft.com/office/drawing/2014/main" id="{433AC95A-C48B-4A9E-8A10-06D3E56AFBE2}"/>
               </a:ext>
             </a:extLst>
           </p:cNvPr>
@@ -4918,7 +4985,7 @@
           <p:cNvPr id="110" name="stage-run-subtitle">
             <a:extLst xmlns:a="http://schemas.openxmlformats.org/drawingml/2006/main">
               <a:ext uri="{FF2B5EF4-FFF2-40B4-BE49-F238E27FC236}">
-                <a16:creationId xmlns:a16="http://schemas.microsoft.com/office/drawing/2014/main" id="{FB764B81-D4B4-4F1F-A465-83B30BC35FC8}"/>
+                <a16:creationId xmlns:a16="http://schemas.microsoft.com/office/drawing/2014/main" id="{9D1E2E69-5778-4547-B8E5-04A49B15CDCE}"/>
               </a:ext>
             </a:extLst>
           </p:cNvPr>
@@ -4964,7 +5031,7 @@
           <p:cNvPr id="111" name="lane-0">
             <a:extLst xmlns:a="http://schemas.openxmlformats.org/drawingml/2006/main">
               <a:ext uri="{FF2B5EF4-FFF2-40B4-BE49-F238E27FC236}">
-                <a16:creationId xmlns:a16="http://schemas.microsoft.com/office/drawing/2014/main" id="{646C302E-0342-46C0-ADBA-AE8ED9881DD2}"/>
+                <a16:creationId xmlns:a16="http://schemas.microsoft.com/office/drawing/2014/main" id="{566485DF-AF6F-476B-A766-F2BF125A0BC1}"/>
               </a:ext>
             </a:extLst>
           </p:cNvPr>
@@ -4999,7 +5066,7 @@
           <p:cNvPr id="112" name="lane-0-code-bg">
             <a:extLst xmlns:a="http://schemas.openxmlformats.org/drawingml/2006/main">
               <a:ext uri="{FF2B5EF4-FFF2-40B4-BE49-F238E27FC236}">
-                <a16:creationId xmlns:a16="http://schemas.microsoft.com/office/drawing/2014/main" id="{46DB10CB-0D40-4E66-9E2B-2BF62C5E12C4}"/>
+                <a16:creationId xmlns:a16="http://schemas.microsoft.com/office/drawing/2014/main" id="{7AD3BD80-25F0-4393-9B43-E727EB22F28E}"/>
               </a:ext>
             </a:extLst>
           </p:cNvPr>
@@ -5032,7 +5099,7 @@
           <p:cNvPr id="113" name="lane-0-code">
             <a:extLst xmlns:a="http://schemas.openxmlformats.org/drawingml/2006/main">
               <a:ext uri="{FF2B5EF4-FFF2-40B4-BE49-F238E27FC236}">
-                <a16:creationId xmlns:a16="http://schemas.microsoft.com/office/drawing/2014/main" id="{C7C057EB-7A96-4BB8-9E32-DB529812341D}"/>
+                <a16:creationId xmlns:a16="http://schemas.microsoft.com/office/drawing/2014/main" id="{3965E5A3-09CA-4CBC-A53E-752A619AAD42}"/>
               </a:ext>
             </a:extLst>
           </p:cNvPr>
@@ -5078,7 +5145,7 @@
           <p:cNvPr id="114" name="lane-0-label">
             <a:extLst xmlns:a="http://schemas.openxmlformats.org/drawingml/2006/main">
               <a:ext uri="{FF2B5EF4-FFF2-40B4-BE49-F238E27FC236}">
-                <a16:creationId xmlns:a16="http://schemas.microsoft.com/office/drawing/2014/main" id="{393CE19E-22EA-4E9B-B2D0-F6D61285A664}"/>
+                <a16:creationId xmlns:a16="http://schemas.microsoft.com/office/drawing/2014/main" id="{60A559E2-E22C-4670-A809-2045F32A3BB6}"/>
               </a:ext>
             </a:extLst>
           </p:cNvPr>
@@ -5124,7 +5191,7 @@
           <p:cNvPr id="115" name="lane-1">
             <a:extLst xmlns:a="http://schemas.openxmlformats.org/drawingml/2006/main">
               <a:ext uri="{FF2B5EF4-FFF2-40B4-BE49-F238E27FC236}">
-                <a16:creationId xmlns:a16="http://schemas.microsoft.com/office/drawing/2014/main" id="{D9063CA1-E9BE-4BDF-9E2C-CDEC98CCA185}"/>
+                <a16:creationId xmlns:a16="http://schemas.microsoft.com/office/drawing/2014/main" id="{110007E9-18DF-40C5-99FA-4322525F9278}"/>
               </a:ext>
             </a:extLst>
           </p:cNvPr>
@@ -5159,7 +5226,7 @@
           <p:cNvPr id="116" name="lane-1-code-bg">
             <a:extLst xmlns:a="http://schemas.openxmlformats.org/drawingml/2006/main">
               <a:ext uri="{FF2B5EF4-FFF2-40B4-BE49-F238E27FC236}">
-                <a16:creationId xmlns:a16="http://schemas.microsoft.com/office/drawing/2014/main" id="{52BCB328-400E-4BA1-9009-4B285AF4570E}"/>
+                <a16:creationId xmlns:a16="http://schemas.microsoft.com/office/drawing/2014/main" id="{B46EDFE2-7609-4143-9AFE-1A31548ED11C}"/>
               </a:ext>
             </a:extLst>
           </p:cNvPr>
@@ -5192,7 +5259,7 @@
           <p:cNvPr id="117" name="lane-1-code">
             <a:extLst xmlns:a="http://schemas.openxmlformats.org/drawingml/2006/main">
               <a:ext uri="{FF2B5EF4-FFF2-40B4-BE49-F238E27FC236}">
-                <a16:creationId xmlns:a16="http://schemas.microsoft.com/office/drawing/2014/main" id="{B6CA3124-8178-4B7A-A174-518796B601F8}"/>
+                <a16:creationId xmlns:a16="http://schemas.microsoft.com/office/drawing/2014/main" id="{5F861D30-83D6-42C7-9907-80E95B214B25}"/>
               </a:ext>
             </a:extLst>
           </p:cNvPr>
@@ -5238,7 +5305,7 @@
           <p:cNvPr id="118" name="lane-1-label">
             <a:extLst xmlns:a="http://schemas.openxmlformats.org/drawingml/2006/main">
               <a:ext uri="{FF2B5EF4-FFF2-40B4-BE49-F238E27FC236}">
-                <a16:creationId xmlns:a16="http://schemas.microsoft.com/office/drawing/2014/main" id="{9BE8B7FD-A4C4-430A-BD57-B3317F071EDF}"/>
+                <a16:creationId xmlns:a16="http://schemas.microsoft.com/office/drawing/2014/main" id="{C7851DBC-F90F-4749-975E-A5C35956FF3C}"/>
               </a:ext>
             </a:extLst>
           </p:cNvPr>
@@ -5284,7 +5351,7 @@
           <p:cNvPr id="119" name="lane-2">
             <a:extLst xmlns:a="http://schemas.openxmlformats.org/drawingml/2006/main">
               <a:ext uri="{FF2B5EF4-FFF2-40B4-BE49-F238E27FC236}">
-                <a16:creationId xmlns:a16="http://schemas.microsoft.com/office/drawing/2014/main" id="{95467741-8256-4520-A92E-A68E18E90C7D}"/>
+                <a16:creationId xmlns:a16="http://schemas.microsoft.com/office/drawing/2014/main" id="{94D9F394-5B34-4E4D-8ECC-3A91F10F6397}"/>
               </a:ext>
             </a:extLst>
           </p:cNvPr>
@@ -5319,7 +5386,7 @@
           <p:cNvPr id="120" name="lane-2-code-bg">
             <a:extLst xmlns:a="http://schemas.openxmlformats.org/drawingml/2006/main">
               <a:ext uri="{FF2B5EF4-FFF2-40B4-BE49-F238E27FC236}">
-                <a16:creationId xmlns:a16="http://schemas.microsoft.com/office/drawing/2014/main" id="{EA9FE86D-1DF9-4A6F-A566-B4B3CCDBC894}"/>
+                <a16:creationId xmlns:a16="http://schemas.microsoft.com/office/drawing/2014/main" id="{B4F4EFC1-EF39-4CED-BC51-B365E74EEFAB}"/>
               </a:ext>
             </a:extLst>
           </p:cNvPr>
@@ -5352,7 +5419,7 @@
           <p:cNvPr id="121" name="lane-2-code">
             <a:extLst xmlns:a="http://schemas.openxmlformats.org/drawingml/2006/main">
               <a:ext uri="{FF2B5EF4-FFF2-40B4-BE49-F238E27FC236}">
-                <a16:creationId xmlns:a16="http://schemas.microsoft.com/office/drawing/2014/main" id="{1EDA7A22-0F40-402E-86AB-599C9F44F2AE}"/>
+                <a16:creationId xmlns:a16="http://schemas.microsoft.com/office/drawing/2014/main" id="{CC46D01B-6E19-4417-865E-A25ED001B7D7}"/>
               </a:ext>
             </a:extLst>
           </p:cNvPr>
@@ -5398,7 +5465,7 @@
           <p:cNvPr id="122" name="lane-2-label">
             <a:extLst xmlns:a="http://schemas.openxmlformats.org/drawingml/2006/main">
               <a:ext uri="{FF2B5EF4-FFF2-40B4-BE49-F238E27FC236}">
-                <a16:creationId xmlns:a16="http://schemas.microsoft.com/office/drawing/2014/main" id="{5DA1C945-1265-4EC9-9118-060A692C4248}"/>
+                <a16:creationId xmlns:a16="http://schemas.microsoft.com/office/drawing/2014/main" id="{57C86589-7620-4569-89BD-5F9AC7F2ECFD}"/>
               </a:ext>
             </a:extLst>
           </p:cNvPr>
@@ -5444,7 +5511,7 @@
           <p:cNvPr id="123" name="stage-run-note">
             <a:extLst xmlns:a="http://schemas.openxmlformats.org/drawingml/2006/main">
               <a:ext uri="{FF2B5EF4-FFF2-40B4-BE49-F238E27FC236}">
-                <a16:creationId xmlns:a16="http://schemas.microsoft.com/office/drawing/2014/main" id="{7FCFFA5B-52ED-444D-9713-6E9A3477AF3A}"/>
+                <a16:creationId xmlns:a16="http://schemas.microsoft.com/office/drawing/2014/main" id="{450C28DD-6CD0-4C98-A396-BFDA9B4FA75B}"/>
               </a:ext>
             </a:extLst>
           </p:cNvPr>
@@ -5490,7 +5557,7 @@
           <p:cNvPr id="124" name="stage-verify-title">
             <a:extLst xmlns:a="http://schemas.openxmlformats.org/drawingml/2006/main">
               <a:ext uri="{FF2B5EF4-FFF2-40B4-BE49-F238E27FC236}">
-                <a16:creationId xmlns:a16="http://schemas.microsoft.com/office/drawing/2014/main" id="{1909996F-42A6-4E14-B00F-A7783E64630C}"/>
+                <a16:creationId xmlns:a16="http://schemas.microsoft.com/office/drawing/2014/main" id="{8D63A5FC-E59E-4A41-B926-9EAA4DAC6D23}"/>
               </a:ext>
             </a:extLst>
           </p:cNvPr>
@@ -5536,7 +5603,7 @@
           <p:cNvPr id="125" name="integrity-check-bg">
             <a:extLst xmlns:a="http://schemas.openxmlformats.org/drawingml/2006/main">
               <a:ext uri="{FF2B5EF4-FFF2-40B4-BE49-F238E27FC236}">
-                <a16:creationId xmlns:a16="http://schemas.microsoft.com/office/drawing/2014/main" id="{AD487F5C-651D-4AE1-A869-6F5FCCA2D178}"/>
+                <a16:creationId xmlns:a16="http://schemas.microsoft.com/office/drawing/2014/main" id="{B32F77F8-28C9-42B1-A010-7EFAE2A4A5CA}"/>
               </a:ext>
             </a:extLst>
           </p:cNvPr>
@@ -5569,7 +5636,7 @@
           <p:cNvPr id="126" name="integrity-check-number">
             <a:extLst xmlns:a="http://schemas.openxmlformats.org/drawingml/2006/main">
               <a:ext uri="{FF2B5EF4-FFF2-40B4-BE49-F238E27FC236}">
-                <a16:creationId xmlns:a16="http://schemas.microsoft.com/office/drawing/2014/main" id="{1355F1F9-8295-4B48-BDFA-480165318C19}"/>
+                <a16:creationId xmlns:a16="http://schemas.microsoft.com/office/drawing/2014/main" id="{991181F8-CE17-477C-A888-5415FD14A78C}"/>
               </a:ext>
             </a:extLst>
           </p:cNvPr>
@@ -5615,7 +5682,7 @@
           <p:cNvPr id="127" name="integrity-check-label">
             <a:extLst xmlns:a="http://schemas.openxmlformats.org/drawingml/2006/main">
               <a:ext uri="{FF2B5EF4-FFF2-40B4-BE49-F238E27FC236}">
-                <a16:creationId xmlns:a16="http://schemas.microsoft.com/office/drawing/2014/main" id="{AB6B33AC-F7F2-45F7-8DCA-43DFD217546E}"/>
+                <a16:creationId xmlns:a16="http://schemas.microsoft.com/office/drawing/2014/main" id="{98B377EC-D7CB-4C32-8F93-2072C7FF6DB9}"/>
               </a:ext>
             </a:extLst>
           </p:cNvPr>
@@ -5662,7 +5729,7 @@
           <p:cNvPr id="128" name="sla-check-bg">
             <a:extLst xmlns:a="http://schemas.openxmlformats.org/drawingml/2006/main">
               <a:ext uri="{FF2B5EF4-FFF2-40B4-BE49-F238E27FC236}">
-                <a16:creationId xmlns:a16="http://schemas.microsoft.com/office/drawing/2014/main" id="{FF24DB47-0011-4BED-9A62-C9F023C700AC}"/>
+                <a16:creationId xmlns:a16="http://schemas.microsoft.com/office/drawing/2014/main" id="{9A4924E1-42CB-4472-9DB9-EF6305B69362}"/>
               </a:ext>
             </a:extLst>
           </p:cNvPr>
@@ -5695,7 +5762,7 @@
           <p:cNvPr id="129" name="sla-check-number">
             <a:extLst xmlns:a="http://schemas.openxmlformats.org/drawingml/2006/main">
               <a:ext uri="{FF2B5EF4-FFF2-40B4-BE49-F238E27FC236}">
-                <a16:creationId xmlns:a16="http://schemas.microsoft.com/office/drawing/2014/main" id="{24D8BB01-BE8F-4137-B5F7-047E9513C8BE}"/>
+                <a16:creationId xmlns:a16="http://schemas.microsoft.com/office/drawing/2014/main" id="{16D71561-7CB2-429A-8DCA-AEDBE89521D5}"/>
               </a:ext>
             </a:extLst>
           </p:cNvPr>
@@ -5741,7 +5808,7 @@
           <p:cNvPr id="130" name="sla-check-label">
             <a:extLst xmlns:a="http://schemas.openxmlformats.org/drawingml/2006/main">
               <a:ext uri="{FF2B5EF4-FFF2-40B4-BE49-F238E27FC236}">
-                <a16:creationId xmlns:a16="http://schemas.microsoft.com/office/drawing/2014/main" id="{5BC78D09-CB22-4C10-98B4-B08F3617BBC7}"/>
+                <a16:creationId xmlns:a16="http://schemas.microsoft.com/office/drawing/2014/main" id="{DD45409C-AF96-4669-8A04-40A76DC1FA47}"/>
               </a:ext>
             </a:extLst>
           </p:cNvPr>
@@ -5788,7 +5855,7 @@
           <p:cNvPr id="131" name="stage-verify-note">
             <a:extLst xmlns:a="http://schemas.openxmlformats.org/drawingml/2006/main">
               <a:ext uri="{FF2B5EF4-FFF2-40B4-BE49-F238E27FC236}">
-                <a16:creationId xmlns:a16="http://schemas.microsoft.com/office/drawing/2014/main" id="{23EEFE2B-7633-4DEF-B5A8-6BAC4F610EB6}"/>
+                <a16:creationId xmlns:a16="http://schemas.microsoft.com/office/drawing/2014/main" id="{3D996CCD-D472-4A7A-98C3-65A342778F21}"/>
               </a:ext>
             </a:extLst>
           </p:cNvPr>
@@ -5835,7 +5902,7 @@
           <p:cNvPr id="132" name="audit-trace-strip">
             <a:extLst xmlns:a="http://schemas.openxmlformats.org/drawingml/2006/main">
               <a:ext uri="{FF2B5EF4-FFF2-40B4-BE49-F238E27FC236}">
-                <a16:creationId xmlns:a16="http://schemas.microsoft.com/office/drawing/2014/main" id="{86F78938-390D-4EF1-82EA-2AC92FCF693D}"/>
+                <a16:creationId xmlns:a16="http://schemas.microsoft.com/office/drawing/2014/main" id="{1F27BAA0-B773-4F3C-AB29-87990F721E44}"/>
               </a:ext>
             </a:extLst>
           </p:cNvPr>
@@ -5870,7 +5937,7 @@
           <p:cNvPr id="133" name="audit-trace-title">
             <a:extLst xmlns:a="http://schemas.openxmlformats.org/drawingml/2006/main">
               <a:ext uri="{FF2B5EF4-FFF2-40B4-BE49-F238E27FC236}">
-                <a16:creationId xmlns:a16="http://schemas.microsoft.com/office/drawing/2014/main" id="{873E59FA-6784-414E-B3AA-1F08A528A05B}"/>
+                <a16:creationId xmlns:a16="http://schemas.microsoft.com/office/drawing/2014/main" id="{79EE8666-ABB2-40DC-9609-517D71804ABC}"/>
               </a:ext>
             </a:extLst>
           </p:cNvPr>
@@ -5916,7 +5983,7 @@
           <p:cNvPr id="134" name="audit-trace-fields">
             <a:extLst xmlns:a="http://schemas.openxmlformats.org/drawingml/2006/main">
               <a:ext uri="{FF2B5EF4-FFF2-40B4-BE49-F238E27FC236}">
-                <a16:creationId xmlns:a16="http://schemas.microsoft.com/office/drawing/2014/main" id="{6DE285EC-D07C-43B7-8322-7AA2D86A08D1}"/>
+                <a16:creationId xmlns:a16="http://schemas.microsoft.com/office/drawing/2014/main" id="{8D9FB429-DE6E-4768-9A0A-046C7ECDB3AB}"/>
               </a:ext>
             </a:extLst>
           </p:cNvPr>
@@ -5962,7 +6029,7 @@
           <p:cNvPr id="135" name="decision-kicker">
             <a:extLst xmlns:a="http://schemas.openxmlformats.org/drawingml/2006/main">
               <a:ext uri="{FF2B5EF4-FFF2-40B4-BE49-F238E27FC236}">
-                <a16:creationId xmlns:a16="http://schemas.microsoft.com/office/drawing/2014/main" id="{D07141AE-3F00-4B03-AB1D-EFB19D9087EF}"/>
+                <a16:creationId xmlns:a16="http://schemas.microsoft.com/office/drawing/2014/main" id="{C0F6ECAC-FE6C-43EA-B6F4-B8888C02A66A}"/>
               </a:ext>
             </a:extLst>
           </p:cNvPr>
@@ -6008,7 +6075,7 @@
           <p:cNvPr id="136" name="accept">
             <a:extLst xmlns:a="http://schemas.openxmlformats.org/drawingml/2006/main">
               <a:ext uri="{FF2B5EF4-FFF2-40B4-BE49-F238E27FC236}">
-                <a16:creationId xmlns:a16="http://schemas.microsoft.com/office/drawing/2014/main" id="{118428A7-7CFB-48EA-A60D-1F893FA2151D}"/>
+                <a16:creationId xmlns:a16="http://schemas.microsoft.com/office/drawing/2014/main" id="{3E0A58B2-420E-4E83-A679-3D39C7923FAC}"/>
               </a:ext>
             </a:extLst>
           </p:cNvPr>
@@ -6043,7 +6110,7 @@
           <p:cNvPr id="137" name="accept-rail">
             <a:extLst xmlns:a="http://schemas.openxmlformats.org/drawingml/2006/main">
               <a:ext uri="{FF2B5EF4-FFF2-40B4-BE49-F238E27FC236}">
-                <a16:creationId xmlns:a16="http://schemas.microsoft.com/office/drawing/2014/main" id="{6B06A037-E250-4181-AA8E-FE6E369B9BB0}"/>
+                <a16:creationId xmlns:a16="http://schemas.microsoft.com/office/drawing/2014/main" id="{1BC755D6-E52A-417D-B38A-EACA12329E10}"/>
               </a:ext>
             </a:extLst>
           </p:cNvPr>
@@ -6074,7 +6141,7 @@
           <p:cNvPr id="138" name="accept-title">
             <a:extLst xmlns:a="http://schemas.openxmlformats.org/drawingml/2006/main">
               <a:ext uri="{FF2B5EF4-FFF2-40B4-BE49-F238E27FC236}">
-                <a16:creationId xmlns:a16="http://schemas.microsoft.com/office/drawing/2014/main" id="{6F712450-EDBA-4B3E-92BC-398D2D3D9979}"/>
+                <a16:creationId xmlns:a16="http://schemas.microsoft.com/office/drawing/2014/main" id="{40A11A50-B47C-452A-9B92-A70A745D454C}"/>
               </a:ext>
             </a:extLst>
           </p:cNvPr>
@@ -6120,7 +6187,7 @@
           <p:cNvPr id="139" name="accept-note">
             <a:extLst xmlns:a="http://schemas.openxmlformats.org/drawingml/2006/main">
               <a:ext uri="{FF2B5EF4-FFF2-40B4-BE49-F238E27FC236}">
-                <a16:creationId xmlns:a16="http://schemas.microsoft.com/office/drawing/2014/main" id="{9FFD11B0-23A7-4FEF-8AD0-48659053797D}"/>
+                <a16:creationId xmlns:a16="http://schemas.microsoft.com/office/drawing/2014/main" id="{A0856B77-71EF-482B-9D32-F5ED0ACD3901}"/>
               </a:ext>
             </a:extLst>
           </p:cNvPr>
@@ -6166,7 +6233,7 @@
           <p:cNvPr id="140" name="reject">
             <a:extLst xmlns:a="http://schemas.openxmlformats.org/drawingml/2006/main">
               <a:ext uri="{FF2B5EF4-FFF2-40B4-BE49-F238E27FC236}">
-                <a16:creationId xmlns:a16="http://schemas.microsoft.com/office/drawing/2014/main" id="{78BA9888-576E-48A3-82EF-AF765CED7254}"/>
+                <a16:creationId xmlns:a16="http://schemas.microsoft.com/office/drawing/2014/main" id="{56A4A1E4-D281-480D-BB49-DABCE576038A}"/>
               </a:ext>
             </a:extLst>
           </p:cNvPr>
@@ -6201,7 +6268,7 @@
           <p:cNvPr id="141" name="reject-rail">
             <a:extLst xmlns:a="http://schemas.openxmlformats.org/drawingml/2006/main">
               <a:ext uri="{FF2B5EF4-FFF2-40B4-BE49-F238E27FC236}">
-                <a16:creationId xmlns:a16="http://schemas.microsoft.com/office/drawing/2014/main" id="{4B78B270-9EE6-44DF-92FC-2736420669DC}"/>
+                <a16:creationId xmlns:a16="http://schemas.microsoft.com/office/drawing/2014/main" id="{E52044D5-9CCE-4801-8502-6DB26D63F068}"/>
               </a:ext>
             </a:extLst>
           </p:cNvPr>
@@ -6232,7 +6299,7 @@
           <p:cNvPr id="142" name="reject-title">
             <a:extLst xmlns:a="http://schemas.openxmlformats.org/drawingml/2006/main">
               <a:ext uri="{FF2B5EF4-FFF2-40B4-BE49-F238E27FC236}">
-                <a16:creationId xmlns:a16="http://schemas.microsoft.com/office/drawing/2014/main" id="{BF790BD2-10C5-4BE2-A55C-3B3AB06A0DB8}"/>
+                <a16:creationId xmlns:a16="http://schemas.microsoft.com/office/drawing/2014/main" id="{2E90E2C7-9EEF-4F61-AC1C-8A5BD0D4ACAE}"/>
               </a:ext>
             </a:extLst>
           </p:cNvPr>
@@ -6278,7 +6345,7 @@
           <p:cNvPr id="143" name="reject-note">
             <a:extLst xmlns:a="http://schemas.openxmlformats.org/drawingml/2006/main">
               <a:ext uri="{FF2B5EF4-FFF2-40B4-BE49-F238E27FC236}">
-                <a16:creationId xmlns:a16="http://schemas.microsoft.com/office/drawing/2014/main" id="{96D6E353-81DF-407A-B175-BA635DD81CAF}"/>
+                <a16:creationId xmlns:a16="http://schemas.microsoft.com/office/drawing/2014/main" id="{569330F6-7A39-4940-BAE9-231291E5214D}"/>
               </a:ext>
             </a:extLst>
           </p:cNvPr>
@@ -6324,7 +6391,7 @@
           <p:cNvPr id="144" name="invalid">
             <a:extLst xmlns:a="http://schemas.openxmlformats.org/drawingml/2006/main">
               <a:ext uri="{FF2B5EF4-FFF2-40B4-BE49-F238E27FC236}">
-                <a16:creationId xmlns:a16="http://schemas.microsoft.com/office/drawing/2014/main" id="{0639B75F-BA62-44DD-B05F-E78FC11D3D2E}"/>
+                <a16:creationId xmlns:a16="http://schemas.microsoft.com/office/drawing/2014/main" id="{B89E0232-385A-4044-B593-F5D03E51B173}"/>
               </a:ext>
             </a:extLst>
           </p:cNvPr>
@@ -6359,7 +6426,7 @@
           <p:cNvPr id="145" name="invalid-rail">
             <a:extLst xmlns:a="http://schemas.openxmlformats.org/drawingml/2006/main">
               <a:ext uri="{FF2B5EF4-FFF2-40B4-BE49-F238E27FC236}">
-                <a16:creationId xmlns:a16="http://schemas.microsoft.com/office/drawing/2014/main" id="{CB296671-E4F8-4FC2-8D03-6F914E405B7F}"/>
+                <a16:creationId xmlns:a16="http://schemas.microsoft.com/office/drawing/2014/main" id="{41CD3B26-F408-4D8B-9DF0-7CF5D0BB4211}"/>
               </a:ext>
             </a:extLst>
           </p:cNvPr>
@@ -6390,7 +6457,7 @@
           <p:cNvPr id="146" name="invalid-title">
             <a:extLst xmlns:a="http://schemas.openxmlformats.org/drawingml/2006/main">
               <a:ext uri="{FF2B5EF4-FFF2-40B4-BE49-F238E27FC236}">
-                <a16:creationId xmlns:a16="http://schemas.microsoft.com/office/drawing/2014/main" id="{E98F20BA-9EE7-4CE7-AD6B-ECF9BDD2B45A}"/>
+                <a16:creationId xmlns:a16="http://schemas.microsoft.com/office/drawing/2014/main" id="{BC1DE885-98B7-42DE-ADAE-05D24C2473B5}"/>
               </a:ext>
             </a:extLst>
           </p:cNvPr>
@@ -6436,7 +6503,7 @@
           <p:cNvPr id="147" name="invalid-note">
             <a:extLst xmlns:a="http://schemas.openxmlformats.org/drawingml/2006/main">
               <a:ext uri="{FF2B5EF4-FFF2-40B4-BE49-F238E27FC236}">
-                <a16:creationId xmlns:a16="http://schemas.microsoft.com/office/drawing/2014/main" id="{326E15D3-A3C5-40FC-8B9C-EE609703EC5F}"/>
+                <a16:creationId xmlns:a16="http://schemas.microsoft.com/office/drawing/2014/main" id="{8799DD63-066C-4D8F-885B-F2D337127F79}"/>
               </a:ext>
             </a:extLst>
           </p:cNvPr>
@@ -6482,7 +6549,7 @@
           <p:cNvPr id="148" name="evidence-kicker">
             <a:extLst xmlns:a="http://schemas.openxmlformats.org/drawingml/2006/main">
               <a:ext uri="{FF2B5EF4-FFF2-40B4-BE49-F238E27FC236}">
-                <a16:creationId xmlns:a16="http://schemas.microsoft.com/office/drawing/2014/main" id="{9632261B-4C0E-475B-9E92-5167CDD5280D}"/>
+                <a16:creationId xmlns:a16="http://schemas.microsoft.com/office/drawing/2014/main" id="{B4A61377-EDD9-45B1-9FD1-3508406453FE}"/>
               </a:ext>
             </a:extLst>
           </p:cNvPr>
@@ -6528,7 +6595,7 @@
           <p:cNvPr id="149" name="evidence-title">
             <a:extLst xmlns:a="http://schemas.openxmlformats.org/drawingml/2006/main">
               <a:ext uri="{FF2B5EF4-FFF2-40B4-BE49-F238E27FC236}">
-                <a16:creationId xmlns:a16="http://schemas.microsoft.com/office/drawing/2014/main" id="{8C2ED1D3-EF5F-4F53-A6D6-C7364E8BA3D0}"/>
+                <a16:creationId xmlns:a16="http://schemas.microsoft.com/office/drawing/2014/main" id="{6BEFEC06-F0CB-40B4-9E0C-94C39B526784}"/>
               </a:ext>
             </a:extLst>
           </p:cNvPr>
@@ -6574,7 +6641,7 @@
           <p:cNvPr id="150" name="evidence-fields">
             <a:extLst xmlns:a="http://schemas.openxmlformats.org/drawingml/2006/main">
               <a:ext uri="{FF2B5EF4-FFF2-40B4-BE49-F238E27FC236}">
-                <a16:creationId xmlns:a16="http://schemas.microsoft.com/office/drawing/2014/main" id="{8D34E72D-FF04-4702-B5FB-A16259D8DCA4}"/>
+                <a16:creationId xmlns:a16="http://schemas.microsoft.com/office/drawing/2014/main" id="{B78650AE-2AAB-4E83-ABCF-96016865423E}"/>
               </a:ext>
             </a:extLst>
           </p:cNvPr>
@@ -6617,14 +6684,14 @@
       </p:sp>
       <p:pic>
         <p:nvPicPr>
-          <p:cNvPr id="473" name="图片 310"/>
+          <p:cNvPr id="635" name="图片 310"/>
           <p:cNvPicPr>
             <a:picLocks xmlns:a="http://schemas.openxmlformats.org/drawingml/2006/main" noChangeAspect="1"/>
           </p:cNvPicPr>
           <p:nvPr/>
         </p:nvPicPr>
         <p:blipFill>
-          <a:blip xmlns:r="http://schemas.openxmlformats.org/officeDocument/2006/relationships" xmlns:a="http://schemas.openxmlformats.org/drawingml/2006/main" r:embed="R0f98f1e57a554555"/>
+          <a:blip xmlns:r="http://schemas.openxmlformats.org/officeDocument/2006/relationships" xmlns:a="http://schemas.openxmlformats.org/drawingml/2006/main" r:embed="R142a92acc0c74e17"/>
           <a:stretch xmlns:a="http://schemas.openxmlformats.org/drawingml/2006/main">
             <a:fillRect l="0" t="0" r="0" b="0"/>
           </a:stretch>
@@ -6641,14 +6708,14 @@
       </p:pic>
       <p:pic>
         <p:nvPicPr>
-          <p:cNvPr id="474" name="图片 311"/>
+          <p:cNvPr id="636" name="图片 311"/>
           <p:cNvPicPr>
             <a:picLocks xmlns:a="http://schemas.openxmlformats.org/drawingml/2006/main" noChangeAspect="1"/>
           </p:cNvPicPr>
           <p:nvPr/>
         </p:nvPicPr>
         <p:blipFill>
-          <a:blip xmlns:r="http://schemas.openxmlformats.org/officeDocument/2006/relationships" xmlns:a="http://schemas.openxmlformats.org/drawingml/2006/main" r:embed="Rf7e8febe793c4bba"/>
+          <a:blip xmlns:r="http://schemas.openxmlformats.org/officeDocument/2006/relationships" xmlns:a="http://schemas.openxmlformats.org/drawingml/2006/main" r:embed="Rbc452cf550c64143"/>
           <a:stretch xmlns:a="http://schemas.openxmlformats.org/drawingml/2006/main">
             <a:fillRect l="0" t="0" r="0" b="0"/>
           </a:stretch>
@@ -6665,14 +6732,14 @@
       </p:pic>
       <p:pic>
         <p:nvPicPr>
-          <p:cNvPr id="475" name="图片 312"/>
+          <p:cNvPr id="637" name="图片 312"/>
           <p:cNvPicPr>
             <a:picLocks xmlns:a="http://schemas.openxmlformats.org/drawingml/2006/main" noChangeAspect="1"/>
           </p:cNvPicPr>
           <p:nvPr/>
         </p:nvPicPr>
         <p:blipFill>
-          <a:blip xmlns:r="http://schemas.openxmlformats.org/officeDocument/2006/relationships" xmlns:a="http://schemas.openxmlformats.org/drawingml/2006/main" r:embed="Re3844bf8ff9340d1"/>
+          <a:blip xmlns:r="http://schemas.openxmlformats.org/officeDocument/2006/relationships" xmlns:a="http://schemas.openxmlformats.org/drawingml/2006/main" r:embed="R1ba775ab4b5a407b"/>
           <a:stretch xmlns:a="http://schemas.openxmlformats.org/drawingml/2006/main">
             <a:fillRect l="0" t="0" r="0" b="0"/>
           </a:stretch>
@@ -6692,7 +6759,7 @@
           <p:cNvPr id="154" name="candidate-to-protocol-visible-head">
             <a:extLst xmlns:a="http://schemas.openxmlformats.org/drawingml/2006/main">
               <a:ext uri="{FF2B5EF4-FFF2-40B4-BE49-F238E27FC236}">
-                <a16:creationId xmlns:a16="http://schemas.microsoft.com/office/drawing/2014/main" id="{CEDE2354-CDC0-422A-909D-FA95B20F2D37}"/>
+                <a16:creationId xmlns:a16="http://schemas.microsoft.com/office/drawing/2014/main" id="{01EECF77-CFD6-4789-8A44-DBCC7676D9B5}"/>
               </a:ext>
             </a:extLst>
           </p:cNvPr>
@@ -6725,7 +6792,7 @@
           <p:cNvPr id="155" name="visible-stage-arrow-map-freeze">
             <a:extLst xmlns:a="http://schemas.openxmlformats.org/drawingml/2006/main">
               <a:ext uri="{FF2B5EF4-FFF2-40B4-BE49-F238E27FC236}">
-                <a16:creationId xmlns:a16="http://schemas.microsoft.com/office/drawing/2014/main" id="{FE95FDE0-A8EC-4377-B9CB-A9CB96D65A97}"/>
+                <a16:creationId xmlns:a16="http://schemas.microsoft.com/office/drawing/2014/main" id="{DCC6A443-4143-4A3B-B7DA-2DB7658FC14C}"/>
               </a:ext>
             </a:extLst>
           </p:cNvPr>
@@ -6758,7 +6825,7 @@
           <p:cNvPr id="156" name="visible-stage-arrow-freeze-run">
             <a:extLst xmlns:a="http://schemas.openxmlformats.org/drawingml/2006/main">
               <a:ext uri="{FF2B5EF4-FFF2-40B4-BE49-F238E27FC236}">
-                <a16:creationId xmlns:a16="http://schemas.microsoft.com/office/drawing/2014/main" id="{2200AC1F-4672-4F62-B3D6-780A114E1044}"/>
+                <a16:creationId xmlns:a16="http://schemas.microsoft.com/office/drawing/2014/main" id="{36855582-91C8-41B6-AA43-F3A1BE1416C3}"/>
               </a:ext>
             </a:extLst>
           </p:cNvPr>
@@ -6791,7 +6858,7 @@
           <p:cNvPr id="157" name="visible-stage-arrow-run-verify">
             <a:extLst xmlns:a="http://schemas.openxmlformats.org/drawingml/2006/main">
               <a:ext uri="{FF2B5EF4-FFF2-40B4-BE49-F238E27FC236}">
-                <a16:creationId xmlns:a16="http://schemas.microsoft.com/office/drawing/2014/main" id="{CD16BAFB-7540-4B33-865D-7592DA2605AA}"/>
+                <a16:creationId xmlns:a16="http://schemas.microsoft.com/office/drawing/2014/main" id="{DDF41066-392B-4173-BDC3-D6675B976FBF}"/>
               </a:ext>
             </a:extLst>
           </p:cNvPr>
@@ -6821,7 +6888,7 @@
       </p:sp>
       <p:cxnSp>
         <p:nvCxnSpPr>
-          <p:cNvPr id="480" name="visible-package-freeze-route"/>
+          <p:cNvPr id="642" name="visible-package-freeze-route"/>
           <p:cNvCxnSpPr/>
           <p:nvPr/>
         </p:nvCxnSpPr>
@@ -6843,7 +6910,7 @@
       </p:cxnSp>
       <p:cxnSp>
         <p:nvCxnSpPr>
-          <p:cNvPr id="481" name="visible-package-freeze-rise"/>
+          <p:cNvPr id="643" name="visible-package-freeze-rise"/>
           <p:cNvCxnSpPr/>
           <p:nvPr/>
         </p:nvCxnSpPr>
@@ -6868,7 +6935,7 @@
           <p:cNvPr id="160" name="visible-package-freeze-head">
             <a:extLst xmlns:a="http://schemas.openxmlformats.org/drawingml/2006/main">
               <a:ext uri="{FF2B5EF4-FFF2-40B4-BE49-F238E27FC236}">
-                <a16:creationId xmlns:a16="http://schemas.microsoft.com/office/drawing/2014/main" id="{7E8D2B1E-9A09-4401-80D7-E4EA95725541}"/>
+                <a16:creationId xmlns:a16="http://schemas.microsoft.com/office/drawing/2014/main" id="{C8CA785F-FEB8-4E50-B19E-3345F4B34CB9}"/>
               </a:ext>
             </a:extLst>
           </p:cNvPr>
@@ -6899,7 +6966,7 @@
     </p:spTree>
     <p:extLst>
       <p:ext uri="{BB962C8B-B14F-4D97-AF65-F5344CB8AC3E}">
-        <p14:creationId xmlns:p14="http://schemas.microsoft.com/office/powerpoint/2010/main" val="1733715573"/>
+        <p14:creationId xmlns:p14="http://schemas.microsoft.com/office/powerpoint/2010/main" val="738557630"/>
       </p:ext>
     </p:extLst>
   </p:cSld>
@@ -6927,7 +6994,7 @@
       </p:grpSpPr>
       <p:cxnSp>
         <p:nvCxnSpPr>
-          <p:cNvPr id="326" name="upstream-protocol-divider"/>
+          <p:cNvPr id="486" name="upstream-protocol-divider"/>
           <p:cNvCxnSpPr/>
           <p:nvPr/>
         </p:nvCxnSpPr>
@@ -6949,7 +7016,7 @@
       </p:cxnSp>
       <p:cxnSp>
         <p:nvCxnSpPr>
-          <p:cNvPr id="327" name="protocol-output-divider"/>
+          <p:cNvPr id="487" name="protocol-output-divider"/>
           <p:cNvCxnSpPr/>
           <p:nvPr/>
         </p:nvCxnSpPr>
@@ -6971,7 +7038,7 @@
       </p:cxnSp>
       <p:cxnSp>
         <p:nvCxnSpPr>
-          <p:cNvPr id="328" name="paper-to-full-line"/>
+          <p:cNvPr id="488" name="paper-to-full-line"/>
           <p:cNvCxnSpPr/>
           <p:nvPr/>
         </p:nvCxnSpPr>
@@ -6996,7 +7063,7 @@
           <p:cNvPr id="4" name="paper-to-full-head">
             <a:extLst xmlns:a="http://schemas.openxmlformats.org/drawingml/2006/main">
               <a:ext uri="{FF2B5EF4-FFF2-40B4-BE49-F238E27FC236}">
-                <a16:creationId xmlns:a16="http://schemas.microsoft.com/office/drawing/2014/main" id="{F7EADBF0-61DA-4C4A-B31E-8BCB48F4ED7A}"/>
+                <a16:creationId xmlns:a16="http://schemas.microsoft.com/office/drawing/2014/main" id="{FCDBE1B3-9F02-4ED2-AE95-F4A80661D782}"/>
               </a:ext>
             </a:extLst>
           </p:cNvPr>
@@ -7026,7 +7093,7 @@
       </p:sp>
       <p:cxnSp>
         <p:nvCxnSpPr>
-          <p:cNvPr id="330" name="full-to-reducer-line"/>
+          <p:cNvPr id="490" name="full-to-reducer-line"/>
           <p:cNvCxnSpPr/>
           <p:nvPr/>
         </p:nvCxnSpPr>
@@ -7051,7 +7118,7 @@
           <p:cNvPr id="6" name="full-to-reducer-head">
             <a:extLst xmlns:a="http://schemas.openxmlformats.org/drawingml/2006/main">
               <a:ext uri="{FF2B5EF4-FFF2-40B4-BE49-F238E27FC236}">
-                <a16:creationId xmlns:a16="http://schemas.microsoft.com/office/drawing/2014/main" id="{F7C8BC2D-BD31-4344-97C7-159EE176304C}"/>
+                <a16:creationId xmlns:a16="http://schemas.microsoft.com/office/drawing/2014/main" id="{45A4DC20-104F-4C8D-A64B-5C9DDBA42B0A}"/>
               </a:ext>
             </a:extLst>
           </p:cNvPr>
@@ -7081,7 +7148,7 @@
       </p:sp>
       <p:cxnSp>
         <p:nvCxnSpPr>
-          <p:cNvPr id="332" name="reducer-to-candidate-line"/>
+          <p:cNvPr id="492" name="reducer-to-candidate-line"/>
           <p:cNvCxnSpPr/>
           <p:nvPr/>
         </p:nvCxnSpPr>
@@ -7106,7 +7173,7 @@
           <p:cNvPr id="8" name="reducer-to-candidate-head">
             <a:extLst xmlns:a="http://schemas.openxmlformats.org/drawingml/2006/main">
               <a:ext uri="{FF2B5EF4-FFF2-40B4-BE49-F238E27FC236}">
-                <a16:creationId xmlns:a16="http://schemas.microsoft.com/office/drawing/2014/main" id="{A5C7763F-0923-4868-A460-B74ACC1C684D}"/>
+                <a16:creationId xmlns:a16="http://schemas.microsoft.com/office/drawing/2014/main" id="{FA76E97E-5F93-43BE-86B1-787DC8A5FF78}"/>
               </a:ext>
             </a:extLst>
           </p:cNvPr>
@@ -7136,7 +7203,7 @@
       </p:sp>
       <p:cxnSp>
         <p:nvCxnSpPr>
-          <p:cNvPr id="334" name="candidate-to-map-line"/>
+          <p:cNvPr id="494" name="candidate-to-map-line"/>
           <p:cNvCxnSpPr/>
           <p:nvPr/>
         </p:nvCxnSpPr>
@@ -7161,7 +7228,7 @@
           <p:cNvPr id="10" name="candidate-to-map-head">
             <a:extLst xmlns:a="http://schemas.openxmlformats.org/drawingml/2006/main">
               <a:ext uri="{FF2B5EF4-FFF2-40B4-BE49-F238E27FC236}">
-                <a16:creationId xmlns:a16="http://schemas.microsoft.com/office/drawing/2014/main" id="{4E612E8A-109D-4EF4-B4D5-033C7476E27C}"/>
+                <a16:creationId xmlns:a16="http://schemas.microsoft.com/office/drawing/2014/main" id="{4DB6A1C9-4007-4B4B-BAB3-C2A5648FABE8}"/>
               </a:ext>
             </a:extLst>
           </p:cNvPr>
@@ -7191,7 +7258,7 @@
       </p:sp>
       <p:cxnSp>
         <p:nvCxnSpPr>
-          <p:cNvPr id="336" name="map-to-freeze-line"/>
+          <p:cNvPr id="496" name="map-to-freeze-line"/>
           <p:cNvCxnSpPr/>
           <p:nvPr/>
         </p:nvCxnSpPr>
@@ -7216,7 +7283,7 @@
           <p:cNvPr id="12" name="map-to-freeze-head">
             <a:extLst xmlns:a="http://schemas.openxmlformats.org/drawingml/2006/main">
               <a:ext uri="{FF2B5EF4-FFF2-40B4-BE49-F238E27FC236}">
-                <a16:creationId xmlns:a16="http://schemas.microsoft.com/office/drawing/2014/main" id="{26AC577D-88D1-439C-9078-139C03A86DDC}"/>
+                <a16:creationId xmlns:a16="http://schemas.microsoft.com/office/drawing/2014/main" id="{19369105-5A7C-416A-9966-13F5C6B685AD}"/>
               </a:ext>
             </a:extLst>
           </p:cNvPr>
@@ -7246,7 +7313,7 @@
       </p:sp>
       <p:cxnSp>
         <p:nvCxnSpPr>
-          <p:cNvPr id="338" name="freeze-to-run-line"/>
+          <p:cNvPr id="498" name="freeze-to-run-line"/>
           <p:cNvCxnSpPr/>
           <p:nvPr/>
         </p:nvCxnSpPr>
@@ -7271,7 +7338,7 @@
           <p:cNvPr id="14" name="freeze-to-run-head">
             <a:extLst xmlns:a="http://schemas.openxmlformats.org/drawingml/2006/main">
               <a:ext uri="{FF2B5EF4-FFF2-40B4-BE49-F238E27FC236}">
-                <a16:creationId xmlns:a16="http://schemas.microsoft.com/office/drawing/2014/main" id="{0A6CC920-72F9-4BC8-BE93-F448F63C00EF}"/>
+                <a16:creationId xmlns:a16="http://schemas.microsoft.com/office/drawing/2014/main" id="{8E21818A-CF64-4833-91C0-E86856E62266}"/>
               </a:ext>
             </a:extLst>
           </p:cNvPr>
@@ -7301,7 +7368,7 @@
       </p:sp>
       <p:cxnSp>
         <p:nvCxnSpPr>
-          <p:cNvPr id="340" name="run-to-verify-line"/>
+          <p:cNvPr id="500" name="run-to-verify-line"/>
           <p:cNvCxnSpPr/>
           <p:nvPr/>
         </p:nvCxnSpPr>
@@ -7326,7 +7393,7 @@
           <p:cNvPr id="16" name="run-to-verify-head">
             <a:extLst xmlns:a="http://schemas.openxmlformats.org/drawingml/2006/main">
               <a:ext uri="{FF2B5EF4-FFF2-40B4-BE49-F238E27FC236}">
-                <a16:creationId xmlns:a16="http://schemas.microsoft.com/office/drawing/2014/main" id="{62D730A7-658F-4E2C-9966-7BDDA50E3739}"/>
+                <a16:creationId xmlns:a16="http://schemas.microsoft.com/office/drawing/2014/main" id="{DA8B19C6-E143-4E42-A709-61F60A53012D}"/>
               </a:ext>
             </a:extLst>
           </p:cNvPr>
@@ -7356,7 +7423,7 @@
       </p:sp>
       <p:cxnSp>
         <p:nvCxnSpPr>
-          <p:cNvPr id="342" name="verify-to-decision-a"/>
+          <p:cNvPr id="502" name="verify-to-decision-a"/>
           <p:cNvCxnSpPr/>
           <p:nvPr/>
         </p:nvCxnSpPr>
@@ -7378,7 +7445,7 @@
       </p:cxnSp>
       <p:cxnSp>
         <p:nvCxnSpPr>
-          <p:cNvPr id="343" name="verify-to-decision-b"/>
+          <p:cNvPr id="503" name="verify-to-decision-b"/>
           <p:cNvCxnSpPr/>
           <p:nvPr/>
         </p:nvCxnSpPr>
@@ -7400,7 +7467,7 @@
       </p:cxnSp>
       <p:cxnSp>
         <p:nvCxnSpPr>
-          <p:cNvPr id="344" name="verify-to-decision-c-line"/>
+          <p:cNvPr id="504" name="verify-to-decision-c-line"/>
           <p:cNvCxnSpPr/>
           <p:nvPr/>
         </p:nvCxnSpPr>
@@ -7425,7 +7492,7 @@
           <p:cNvPr id="20" name="verify-to-decision-c-head">
             <a:extLst xmlns:a="http://schemas.openxmlformats.org/drawingml/2006/main">
               <a:ext uri="{FF2B5EF4-FFF2-40B4-BE49-F238E27FC236}">
-                <a16:creationId xmlns:a16="http://schemas.microsoft.com/office/drawing/2014/main" id="{B3349BC9-5FAE-4457-B0D2-245A91ED0215}"/>
+                <a16:creationId xmlns:a16="http://schemas.microsoft.com/office/drawing/2014/main" id="{6A72A759-3A0E-4C90-AA3C-08447A95FFC3}"/>
               </a:ext>
             </a:extLst>
           </p:cNvPr>
@@ -7455,7 +7522,7 @@
       </p:sp>
       <p:cxnSp>
         <p:nvCxnSpPr>
-          <p:cNvPr id="346" name="verify-to-evidence-a"/>
+          <p:cNvPr id="506" name="verify-to-evidence-a"/>
           <p:cNvCxnSpPr/>
           <p:nvPr/>
         </p:nvCxnSpPr>
@@ -7477,7 +7544,7 @@
       </p:cxnSp>
       <p:cxnSp>
         <p:nvCxnSpPr>
-          <p:cNvPr id="347" name="verify-to-evidence-b"/>
+          <p:cNvPr id="507" name="verify-to-evidence-b"/>
           <p:cNvCxnSpPr/>
           <p:nvPr/>
         </p:nvCxnSpPr>
@@ -7499,7 +7566,7 @@
       </p:cxnSp>
       <p:cxnSp>
         <p:nvCxnSpPr>
-          <p:cNvPr id="348" name="verify-to-evidence-c-line"/>
+          <p:cNvPr id="508" name="verify-to-evidence-c-line"/>
           <p:cNvCxnSpPr/>
           <p:nvPr/>
         </p:nvCxnSpPr>
@@ -7524,7 +7591,7 @@
           <p:cNvPr id="24" name="verify-to-evidence-c-head">
             <a:extLst xmlns:a="http://schemas.openxmlformats.org/drawingml/2006/main">
               <a:ext uri="{FF2B5EF4-FFF2-40B4-BE49-F238E27FC236}">
-                <a16:creationId xmlns:a16="http://schemas.microsoft.com/office/drawing/2014/main" id="{AE5380A9-C398-427A-8C2E-837773F2DF31}"/>
+                <a16:creationId xmlns:a16="http://schemas.microsoft.com/office/drawing/2014/main" id="{21DC4AAD-187E-4106-9074-E85170646EF8}"/>
               </a:ext>
             </a:extLst>
           </p:cNvPr>
@@ -7554,7 +7621,7 @@
       </p:sp>
       <p:cxnSp>
         <p:nvCxnSpPr>
-          <p:cNvPr id="350" name="package-to-freeze-a"/>
+          <p:cNvPr id="510" name="package-to-freeze-a"/>
           <p:cNvCxnSpPr/>
           <p:nvPr/>
         </p:nvCxnSpPr>
@@ -7576,7 +7643,7 @@
       </p:cxnSp>
       <p:cxnSp>
         <p:nvCxnSpPr>
-          <p:cNvPr id="351" name="package-to-freeze-b-line"/>
+          <p:cNvPr id="511" name="package-to-freeze-b-line"/>
           <p:cNvCxnSpPr/>
           <p:nvPr/>
         </p:nvCxnSpPr>
@@ -7601,7 +7668,7 @@
           <p:cNvPr id="27" name="package-to-freeze-b-head">
             <a:extLst xmlns:a="http://schemas.openxmlformats.org/drawingml/2006/main">
               <a:ext uri="{FF2B5EF4-FFF2-40B4-BE49-F238E27FC236}">
-                <a16:creationId xmlns:a16="http://schemas.microsoft.com/office/drawing/2014/main" id="{A52827B6-486B-4EE0-98F9-A736345F9AF1}"/>
+                <a16:creationId xmlns:a16="http://schemas.microsoft.com/office/drawing/2014/main" id="{A1CBABC2-8C30-4B77-BB2F-22DF628C5A2A}"/>
               </a:ext>
             </a:extLst>
           </p:cNvPr>
@@ -7631,7 +7698,7 @@
       </p:sp>
       <p:cxnSp>
         <p:nvCxnSpPr>
-          <p:cNvPr id="353" name="upstream-rule"/>
+          <p:cNvPr id="513" name="upstream-rule"/>
           <p:cNvCxnSpPr/>
           <p:nvPr/>
         </p:nvCxnSpPr>
@@ -7653,7 +7720,7 @@
       </p:cxnSp>
       <p:cxnSp>
         <p:nvCxnSpPr>
-          <p:cNvPr id="354" name="protocol-rule"/>
+          <p:cNvPr id="514" name="protocol-rule"/>
           <p:cNvCxnSpPr/>
           <p:nvPr/>
         </p:nvCxnSpPr>
@@ -7675,7 +7742,7 @@
       </p:cxnSp>
       <p:cxnSp>
         <p:nvCxnSpPr>
-          <p:cNvPr id="355" name="outputs-rule"/>
+          <p:cNvPr id="515" name="outputs-rule"/>
           <p:cNvCxnSpPr/>
           <p:nvPr/>
         </p:nvCxnSpPr>
@@ -7700,7 +7767,7 @@
           <p:cNvPr id="33" name="upstream-zone-title">
             <a:extLst xmlns:a="http://schemas.openxmlformats.org/drawingml/2006/main">
               <a:ext uri="{FF2B5EF4-FFF2-40B4-BE49-F238E27FC236}">
-                <a16:creationId xmlns:a16="http://schemas.microsoft.com/office/drawing/2014/main" id="{C11028B9-9816-43B1-94D4-5183D7D4CFA4}"/>
+                <a16:creationId xmlns:a16="http://schemas.microsoft.com/office/drawing/2014/main" id="{756F420E-B1F9-479F-B0BC-B185278992AE}"/>
               </a:ext>
             </a:extLst>
           </p:cNvPr>
@@ -7746,7 +7813,7 @@
           <p:cNvPr id="34" name="protocol-zone-title">
             <a:extLst xmlns:a="http://schemas.openxmlformats.org/drawingml/2006/main">
               <a:ext uri="{FF2B5EF4-FFF2-40B4-BE49-F238E27FC236}">
-                <a16:creationId xmlns:a16="http://schemas.microsoft.com/office/drawing/2014/main" id="{587FED33-8A8B-4D9B-B67D-2D50A0D6DE5B}"/>
+                <a16:creationId xmlns:a16="http://schemas.microsoft.com/office/drawing/2014/main" id="{B1DBB926-2471-432B-9018-462C474809B2}"/>
               </a:ext>
             </a:extLst>
           </p:cNvPr>
@@ -7792,7 +7859,7 @@
           <p:cNvPr id="35" name="outputs-zone-title">
             <a:extLst xmlns:a="http://schemas.openxmlformats.org/drawingml/2006/main">
               <a:ext uri="{FF2B5EF4-FFF2-40B4-BE49-F238E27FC236}">
-                <a16:creationId xmlns:a16="http://schemas.microsoft.com/office/drawing/2014/main" id="{7457A34E-577F-4008-87A0-51FBF0C1BE3C}"/>
+                <a16:creationId xmlns:a16="http://schemas.microsoft.com/office/drawing/2014/main" id="{25C8A8D4-3C2C-4549-AFB6-D6937B750E7D}"/>
               </a:ext>
             </a:extLst>
           </p:cNvPr>
@@ -7838,7 +7905,7 @@
           <p:cNvPr id="36" name="source-kicker">
             <a:extLst xmlns:a="http://schemas.openxmlformats.org/drawingml/2006/main">
               <a:ext uri="{FF2B5EF4-FFF2-40B4-BE49-F238E27FC236}">
-                <a16:creationId xmlns:a16="http://schemas.microsoft.com/office/drawing/2014/main" id="{79985BCE-9D13-450E-9F04-C2BFD10F24BE}"/>
+                <a16:creationId xmlns:a16="http://schemas.microsoft.com/office/drawing/2014/main" id="{E25D7668-F666-4D8E-AD5E-FEA972353056}"/>
               </a:ext>
             </a:extLst>
           </p:cNvPr>
@@ -7884,7 +7951,7 @@
           <p:cNvPr id="37" name="paper-shadow">
             <a:extLst xmlns:a="http://schemas.openxmlformats.org/drawingml/2006/main">
               <a:ext uri="{FF2B5EF4-FFF2-40B4-BE49-F238E27FC236}">
-                <a16:creationId xmlns:a16="http://schemas.microsoft.com/office/drawing/2014/main" id="{FC9C42F2-F046-4F06-9CA5-ACD8C2BA696B}"/>
+                <a16:creationId xmlns:a16="http://schemas.microsoft.com/office/drawing/2014/main" id="{63B96FBE-2570-4256-81FC-FA61D901C05B}"/>
               </a:ext>
             </a:extLst>
           </p:cNvPr>
@@ -7917,7 +7984,7 @@
           <p:cNvPr id="38" name="paper-page">
             <a:extLst xmlns:a="http://schemas.openxmlformats.org/drawingml/2006/main">
               <a:ext uri="{FF2B5EF4-FFF2-40B4-BE49-F238E27FC236}">
-                <a16:creationId xmlns:a16="http://schemas.microsoft.com/office/drawing/2014/main" id="{0831A7FE-203B-486F-BF80-C9E7CD018734}"/>
+                <a16:creationId xmlns:a16="http://schemas.microsoft.com/office/drawing/2014/main" id="{C4CC86A8-A0FB-4CC8-AB46-07ED00889EF6}"/>
               </a:ext>
             </a:extLst>
           </p:cNvPr>
@@ -7950,7 +8017,7 @@
           <p:cNvPr id="39" name="paper-bar-0">
             <a:extLst xmlns:a="http://schemas.openxmlformats.org/drawingml/2006/main">
               <a:ext uri="{FF2B5EF4-FFF2-40B4-BE49-F238E27FC236}">
-                <a16:creationId xmlns:a16="http://schemas.microsoft.com/office/drawing/2014/main" id="{2C5B5952-02A9-4E33-99A5-3732020A7310}"/>
+                <a16:creationId xmlns:a16="http://schemas.microsoft.com/office/drawing/2014/main" id="{C1F5EC90-7A04-47C8-8359-EABC4F74B706}"/>
               </a:ext>
             </a:extLst>
           </p:cNvPr>
@@ -7981,7 +8048,7 @@
           <p:cNvPr id="40" name="paper-bar-1">
             <a:extLst xmlns:a="http://schemas.openxmlformats.org/drawingml/2006/main">
               <a:ext uri="{FF2B5EF4-FFF2-40B4-BE49-F238E27FC236}">
-                <a16:creationId xmlns:a16="http://schemas.microsoft.com/office/drawing/2014/main" id="{16908531-2B46-4471-85FD-232E97CDC231}"/>
+                <a16:creationId xmlns:a16="http://schemas.microsoft.com/office/drawing/2014/main" id="{B33F6CF8-2AC8-4FCF-91EA-80A97DA46D87}"/>
               </a:ext>
             </a:extLst>
           </p:cNvPr>
@@ -8012,7 +8079,7 @@
           <p:cNvPr id="41" name="paper-bar-2">
             <a:extLst xmlns:a="http://schemas.openxmlformats.org/drawingml/2006/main">
               <a:ext uri="{FF2B5EF4-FFF2-40B4-BE49-F238E27FC236}">
-                <a16:creationId xmlns:a16="http://schemas.microsoft.com/office/drawing/2014/main" id="{032EB028-D856-40EB-8033-2EF2963B0D8B}"/>
+                <a16:creationId xmlns:a16="http://schemas.microsoft.com/office/drawing/2014/main" id="{004307AF-EEDB-4CF8-B3F8-B6B3CCE37D98}"/>
               </a:ext>
             </a:extLst>
           </p:cNvPr>
@@ -8043,7 +8110,7 @@
           <p:cNvPr id="42" name="paper-bar-3">
             <a:extLst xmlns:a="http://schemas.openxmlformats.org/drawingml/2006/main">
               <a:ext uri="{FF2B5EF4-FFF2-40B4-BE49-F238E27FC236}">
-                <a16:creationId xmlns:a16="http://schemas.microsoft.com/office/drawing/2014/main" id="{D3EC2DFE-FFC8-4B22-BC45-3C739D0EDFB4}"/>
+                <a16:creationId xmlns:a16="http://schemas.microsoft.com/office/drawing/2014/main" id="{4609CAE2-03DB-49AA-BD74-6C3123698E3D}"/>
               </a:ext>
             </a:extLst>
           </p:cNvPr>
@@ -8074,7 +8141,7 @@
           <p:cNvPr id="43" name="paper-label">
             <a:extLst xmlns:a="http://schemas.openxmlformats.org/drawingml/2006/main">
               <a:ext uri="{FF2B5EF4-FFF2-40B4-BE49-F238E27FC236}">
-                <a16:creationId xmlns:a16="http://schemas.microsoft.com/office/drawing/2014/main" id="{2D58B669-00CF-480D-8235-17782778BC68}"/>
+                <a16:creationId xmlns:a16="http://schemas.microsoft.com/office/drawing/2014/main" id="{A098768C-5AE7-4133-B917-5E5FA7D55CF3}"/>
               </a:ext>
             </a:extLst>
           </p:cNvPr>
@@ -8094,7 +8161,7 @@
         </p:spPr>
         <p:txBody>
           <a:bodyPr xmlns:a="http://schemas.openxmlformats.org/drawingml/2006/main" wrap="square" lIns="0" tIns="0" rIns="0" bIns="0" anchor="ctr">
-            <a:normAutofit fontScale="100000"/>
+            <a:normAutofit/>
           </a:bodyPr>
           <a:lstStyle xmlns:a="http://schemas.openxmlformats.org/drawingml/2006/main"/>
           <a:p xmlns:a="http://schemas.openxmlformats.org/drawingml/2006/main">
@@ -8120,7 +8187,7 @@
           <p:cNvPr id="44" name="paper-note">
             <a:extLst xmlns:a="http://schemas.openxmlformats.org/drawingml/2006/main">
               <a:ext uri="{FF2B5EF4-FFF2-40B4-BE49-F238E27FC236}">
-                <a16:creationId xmlns:a16="http://schemas.microsoft.com/office/drawing/2014/main" id="{2F0EC656-9D2F-46CD-985F-2E679CFA3437}"/>
+                <a16:creationId xmlns:a16="http://schemas.microsoft.com/office/drawing/2014/main" id="{77121B5C-8EC6-4755-8194-ECA72DC6E40E}"/>
               </a:ext>
             </a:extLst>
           </p:cNvPr>
@@ -8166,7 +8233,7 @@
           <p:cNvPr id="45" name="full-kicker">
             <a:extLst xmlns:a="http://schemas.openxmlformats.org/drawingml/2006/main">
               <a:ext uri="{FF2B5EF4-FFF2-40B4-BE49-F238E27FC236}">
-                <a16:creationId xmlns:a16="http://schemas.microsoft.com/office/drawing/2014/main" id="{DB79FB28-DF78-4540-889D-953418C4EF76}"/>
+                <a16:creationId xmlns:a16="http://schemas.microsoft.com/office/drawing/2014/main" id="{A6AB490F-D0C2-4ECF-A70F-FC6586BE8E63}"/>
               </a:ext>
             </a:extLst>
           </p:cNvPr>
@@ -8186,7 +8253,7 @@
         </p:spPr>
         <p:txBody>
           <a:bodyPr xmlns:a="http://schemas.openxmlformats.org/drawingml/2006/main" wrap="square" lIns="0" tIns="0" rIns="0" bIns="0" anchor="ctr">
-            <a:normAutofit fontScale="100000"/>
+            <a:normAutofit/>
           </a:bodyPr>
           <a:lstStyle xmlns:a="http://schemas.openxmlformats.org/drawingml/2006/main"/>
           <a:p xmlns:a="http://schemas.openxmlformats.org/drawingml/2006/main">
@@ -8212,7 +8279,7 @@
           <p:cNvPr id="46" name="full-shadow">
             <a:extLst xmlns:a="http://schemas.openxmlformats.org/drawingml/2006/main">
               <a:ext uri="{FF2B5EF4-FFF2-40B4-BE49-F238E27FC236}">
-                <a16:creationId xmlns:a16="http://schemas.microsoft.com/office/drawing/2014/main" id="{E141CFE8-57BF-41DE-AACE-B354FBBB98B5}"/>
+                <a16:creationId xmlns:a16="http://schemas.microsoft.com/office/drawing/2014/main" id="{1402D276-0504-4F6C-BBB9-AC5F78FB777A}"/>
               </a:ext>
             </a:extLst>
           </p:cNvPr>
@@ -8245,7 +8312,7 @@
           <p:cNvPr id="47" name="full-page">
             <a:extLst xmlns:a="http://schemas.openxmlformats.org/drawingml/2006/main">
               <a:ext uri="{FF2B5EF4-FFF2-40B4-BE49-F238E27FC236}">
-                <a16:creationId xmlns:a16="http://schemas.microsoft.com/office/drawing/2014/main" id="{02C4076E-4D39-4D0C-A140-C2F49CF69313}"/>
+                <a16:creationId xmlns:a16="http://schemas.microsoft.com/office/drawing/2014/main" id="{0F06D16E-0220-4868-ADB6-E9A0410B2892}"/>
               </a:ext>
             </a:extLst>
           </p:cNvPr>
@@ -8278,7 +8345,7 @@
           <p:cNvPr id="48" name="full-bar-0">
             <a:extLst xmlns:a="http://schemas.openxmlformats.org/drawingml/2006/main">
               <a:ext uri="{FF2B5EF4-FFF2-40B4-BE49-F238E27FC236}">
-                <a16:creationId xmlns:a16="http://schemas.microsoft.com/office/drawing/2014/main" id="{664F32F3-0D43-474D-B09C-630663F990AA}"/>
+                <a16:creationId xmlns:a16="http://schemas.microsoft.com/office/drawing/2014/main" id="{14A1872B-2348-46B3-8E29-A4F10E94B248}"/>
               </a:ext>
             </a:extLst>
           </p:cNvPr>
@@ -8309,7 +8376,7 @@
           <p:cNvPr id="49" name="full-bar-1">
             <a:extLst xmlns:a="http://schemas.openxmlformats.org/drawingml/2006/main">
               <a:ext uri="{FF2B5EF4-FFF2-40B4-BE49-F238E27FC236}">
-                <a16:creationId xmlns:a16="http://schemas.microsoft.com/office/drawing/2014/main" id="{C1C0C8C0-61CF-4974-91D7-CB3E22B323D0}"/>
+                <a16:creationId xmlns:a16="http://schemas.microsoft.com/office/drawing/2014/main" id="{44B1071F-1D83-475E-8A10-8730B65CCCDE}"/>
               </a:ext>
             </a:extLst>
           </p:cNvPr>
@@ -8340,7 +8407,7 @@
           <p:cNvPr id="50" name="full-bar-2">
             <a:extLst xmlns:a="http://schemas.openxmlformats.org/drawingml/2006/main">
               <a:ext uri="{FF2B5EF4-FFF2-40B4-BE49-F238E27FC236}">
-                <a16:creationId xmlns:a16="http://schemas.microsoft.com/office/drawing/2014/main" id="{A5A2A4CE-0A90-4CA7-9E89-570ED31CDE2D}"/>
+                <a16:creationId xmlns:a16="http://schemas.microsoft.com/office/drawing/2014/main" id="{01E838BB-502E-4FB2-9FB3-998DC347906A}"/>
               </a:ext>
             </a:extLst>
           </p:cNvPr>
@@ -8371,7 +8438,7 @@
           <p:cNvPr id="51" name="full-bar-3">
             <a:extLst xmlns:a="http://schemas.openxmlformats.org/drawingml/2006/main">
               <a:ext uri="{FF2B5EF4-FFF2-40B4-BE49-F238E27FC236}">
-                <a16:creationId xmlns:a16="http://schemas.microsoft.com/office/drawing/2014/main" id="{714F61B8-3A70-4BAF-A284-BBCEB135DC82}"/>
+                <a16:creationId xmlns:a16="http://schemas.microsoft.com/office/drawing/2014/main" id="{56043C61-962E-4689-ACD5-3FD83EF8D056}"/>
               </a:ext>
             </a:extLst>
           </p:cNvPr>
@@ -8402,7 +8469,7 @@
           <p:cNvPr id="52" name="full-bar-4">
             <a:extLst xmlns:a="http://schemas.openxmlformats.org/drawingml/2006/main">
               <a:ext uri="{FF2B5EF4-FFF2-40B4-BE49-F238E27FC236}">
-                <a16:creationId xmlns:a16="http://schemas.microsoft.com/office/drawing/2014/main" id="{BB17B187-6392-4296-85D4-4D632CD6F884}"/>
+                <a16:creationId xmlns:a16="http://schemas.microsoft.com/office/drawing/2014/main" id="{FBECD1A6-23ED-4F31-BD0F-EAA4BEAFEFCA}"/>
               </a:ext>
             </a:extLst>
           </p:cNvPr>
@@ -8433,7 +8500,7 @@
           <p:cNvPr id="53" name="full-label">
             <a:extLst xmlns:a="http://schemas.openxmlformats.org/drawingml/2006/main">
               <a:ext uri="{FF2B5EF4-FFF2-40B4-BE49-F238E27FC236}">
-                <a16:creationId xmlns:a16="http://schemas.microsoft.com/office/drawing/2014/main" id="{A6780A69-08EB-4CCA-97DF-60B897FC59D8}"/>
+                <a16:creationId xmlns:a16="http://schemas.microsoft.com/office/drawing/2014/main" id="{E7E5B879-C652-4832-8E42-410A785E675F}"/>
               </a:ext>
             </a:extLst>
           </p:cNvPr>
@@ -8453,7 +8520,7 @@
         </p:spPr>
         <p:txBody>
           <a:bodyPr xmlns:a="http://schemas.openxmlformats.org/drawingml/2006/main" wrap="square" lIns="0" tIns="0" rIns="0" bIns="0" anchor="ctr">
-            <a:normAutofit fontScale="100000"/>
+            <a:normAutofit/>
           </a:bodyPr>
           <a:lstStyle xmlns:a="http://schemas.openxmlformats.org/drawingml/2006/main"/>
           <a:p xmlns:a="http://schemas.openxmlformats.org/drawingml/2006/main">
@@ -8474,67 +8541,23 @@
           </a:p>
         </p:txBody>
       </p:sp>
-      <p:cxnSp>
-        <p:nvCxnSpPr>
-          <p:cNvPr id="377" name="full-atoms-edge-a"/>
-          <p:cNvCxnSpPr/>
-          <p:nvPr/>
-        </p:nvCxnSpPr>
-        <p:spPr>
-          <a:xfrm xmlns:a="http://schemas.openxmlformats.org/drawingml/2006/main">
-            <a:off x="1809750" y="2476500"/>
-            <a:ext cx="133350" cy="95"/>
-          </a:xfrm>
-          <a:prstGeom xmlns:a="http://schemas.openxmlformats.org/drawingml/2006/main" prst="straightConnector1">
-            <a:avLst/>
-          </a:prstGeom>
-          <a:ln xmlns:a="http://schemas.openxmlformats.org/drawingml/2006/main" w="19050">
-            <a:solidFill>
-              <a:srgbClr val="AEB9C5"/>
-            </a:solidFill>
-            <a:prstDash val="solid"/>
-          </a:ln>
-        </p:spPr>
-      </p:cxnSp>
-      <p:cxnSp>
-        <p:nvCxnSpPr>
-          <p:cNvPr id="378" name="full-atoms-edge-b"/>
-          <p:cNvCxnSpPr/>
-          <p:nvPr/>
-        </p:nvCxnSpPr>
-        <p:spPr>
-          <a:xfrm xmlns:a="http://schemas.openxmlformats.org/drawingml/2006/main">
-            <a:off x="2133600" y="2476500"/>
-            <a:ext cx="438150" cy="95"/>
-          </a:xfrm>
-          <a:prstGeom xmlns:a="http://schemas.openxmlformats.org/drawingml/2006/main" prst="straightConnector1">
-            <a:avLst/>
-          </a:prstGeom>
-          <a:ln xmlns:a="http://schemas.openxmlformats.org/drawingml/2006/main" w="19050">
-            <a:solidFill>
-              <a:srgbClr val="AEB9C5"/>
-            </a:solidFill>
-            <a:prstDash val="solid"/>
-          </a:ln>
-        </p:spPr>
-      </p:cxnSp>
       <p:sp>
         <p:nvSpPr>
           <p:cNvPr id="56" name="full-atoms-a">
             <a:extLst xmlns:a="http://schemas.openxmlformats.org/drawingml/2006/main">
               <a:ext uri="{FF2B5EF4-FFF2-40B4-BE49-F238E27FC236}">
-                <a16:creationId xmlns:a16="http://schemas.microsoft.com/office/drawing/2014/main" id="{85C01F92-F531-4944-A454-18F3D8BE9BFD}"/>
-              </a:ext>
-            </a:extLst>
-          </p:cNvPr>
-          <p:cNvSpPr>
-            <a:spLocks xmlns:a="http://schemas.openxmlformats.org/drawingml/2006/main" noGrp="1"/>
-          </p:cNvSpPr>
-          <p:nvPr/>
-        </p:nvSpPr>
-        <p:spPr>
-          <a:xfrm xmlns:a="http://schemas.openxmlformats.org/drawingml/2006/main">
-            <a:off x="1619250" y="2381250"/>
+                <a16:creationId xmlns:a16="http://schemas.microsoft.com/office/drawing/2014/main" id="{A0B435C9-459B-43B1-BB91-6AFB1A596FB8}"/>
+              </a:ext>
+            </a:extLst>
+          </p:cNvPr>
+          <p:cNvSpPr>
+            <a:spLocks xmlns:a="http://schemas.openxmlformats.org/drawingml/2006/main" noGrp="1"/>
+          </p:cNvSpPr>
+          <p:nvPr/>
+        </p:nvSpPr>
+        <p:spPr>
+          <a:xfrm xmlns:a="http://schemas.openxmlformats.org/drawingml/2006/main">
+            <a:off x="2135505" y="1485900"/>
             <a:ext cx="190500" cy="190500"/>
           </a:xfrm>
           <a:prstGeom xmlns:a="http://schemas.openxmlformats.org/drawingml/2006/main" prst="ellipse">
@@ -8554,18 +8577,18 @@
           <p:cNvPr id="57" name="full-atoms-b">
             <a:extLst xmlns:a="http://schemas.openxmlformats.org/drawingml/2006/main">
               <a:ext uri="{FF2B5EF4-FFF2-40B4-BE49-F238E27FC236}">
-                <a16:creationId xmlns:a16="http://schemas.microsoft.com/office/drawing/2014/main" id="{01616A9B-1C84-48B5-8E98-D420DCACEB21}"/>
-              </a:ext>
-            </a:extLst>
-          </p:cNvPr>
-          <p:cNvSpPr>
-            <a:spLocks xmlns:a="http://schemas.openxmlformats.org/drawingml/2006/main" noGrp="1"/>
-          </p:cNvSpPr>
-          <p:nvPr/>
-        </p:nvSpPr>
-        <p:spPr>
-          <a:xfrm xmlns:a="http://schemas.openxmlformats.org/drawingml/2006/main">
-            <a:off x="1943100" y="2381250"/>
+                <a16:creationId xmlns:a16="http://schemas.microsoft.com/office/drawing/2014/main" id="{BCD08951-1C0F-44EE-8D6F-94C56FCD2262}"/>
+              </a:ext>
+            </a:extLst>
+          </p:cNvPr>
+          <p:cNvSpPr>
+            <a:spLocks xmlns:a="http://schemas.openxmlformats.org/drawingml/2006/main" noGrp="1"/>
+          </p:cNvSpPr>
+          <p:nvPr/>
+        </p:nvSpPr>
+        <p:spPr>
+          <a:xfrm xmlns:a="http://schemas.openxmlformats.org/drawingml/2006/main">
+            <a:off x="1729105" y="1809750"/>
             <a:ext cx="190500" cy="190500"/>
           </a:xfrm>
           <a:prstGeom xmlns:a="http://schemas.openxmlformats.org/drawingml/2006/main" prst="ellipse">
@@ -8582,22 +8605,53 @@
       </p:sp>
       <p:sp>
         <p:nvSpPr>
-          <p:cNvPr id="58" name="full-atoms-b-label">
-            <a:extLst xmlns:a="http://schemas.openxmlformats.org/drawingml/2006/main">
-              <a:ext uri="{FF2B5EF4-FFF2-40B4-BE49-F238E27FC236}">
-                <a16:creationId xmlns:a16="http://schemas.microsoft.com/office/drawing/2014/main" id="{20D8DB8A-FC7A-4851-9B80-A1E8DB5EB2B1}"/>
-              </a:ext>
-            </a:extLst>
-          </p:cNvPr>
-          <p:cNvSpPr>
-            <a:spLocks xmlns:a="http://schemas.openxmlformats.org/drawingml/2006/main" noGrp="1"/>
-          </p:cNvSpPr>
-          <p:nvPr/>
-        </p:nvSpPr>
-        <p:spPr>
-          <a:xfrm xmlns:a="http://schemas.openxmlformats.org/drawingml/2006/main">
-            <a:off x="1943100" y="2381250"/>
+          <p:cNvPr id="60" name="full-atoms-c">
+            <a:extLst xmlns:a="http://schemas.openxmlformats.org/drawingml/2006/main">
+              <a:ext uri="{FF2B5EF4-FFF2-40B4-BE49-F238E27FC236}">
+                <a16:creationId xmlns:a16="http://schemas.microsoft.com/office/drawing/2014/main" id="{9FF6439A-C472-428B-BF05-F34248DD6AE8}"/>
+              </a:ext>
+            </a:extLst>
+          </p:cNvPr>
+          <p:cNvSpPr>
+            <a:spLocks xmlns:a="http://schemas.openxmlformats.org/drawingml/2006/main" noGrp="1"/>
+          </p:cNvSpPr>
+          <p:nvPr/>
+        </p:nvSpPr>
+        <p:spPr>
+          <a:xfrm xmlns:a="http://schemas.openxmlformats.org/drawingml/2006/main">
+            <a:off x="2394585" y="1981200"/>
             <a:ext cx="190500" cy="190500"/>
+          </a:xfrm>
+          <a:prstGeom xmlns:a="http://schemas.openxmlformats.org/drawingml/2006/main" prst="ellipse">
+            <a:avLst/>
+          </a:prstGeom>
+          <a:solidFill xmlns:a="http://schemas.openxmlformats.org/drawingml/2006/main">
+            <a:srgbClr val="3578E5"/>
+          </a:solidFill>
+          <a:ln xmlns:a="http://schemas.openxmlformats.org/drawingml/2006/main" w="0">
+            <a:noFill/>
+            <a:prstDash val="solid"/>
+          </a:ln>
+        </p:spPr>
+      </p:sp>
+      <p:sp>
+        <p:nvSpPr>
+          <p:cNvPr id="61" name="full-atoms-label">
+            <a:extLst xmlns:a="http://schemas.openxmlformats.org/drawingml/2006/main">
+              <a:ext uri="{FF2B5EF4-FFF2-40B4-BE49-F238E27FC236}">
+                <a16:creationId xmlns:a16="http://schemas.microsoft.com/office/drawing/2014/main" id="{5FAD5D82-12FC-48D3-A69C-7A192A356666}"/>
+              </a:ext>
+            </a:extLst>
+          </p:cNvPr>
+          <p:cNvSpPr>
+            <a:spLocks xmlns:a="http://schemas.openxmlformats.org/drawingml/2006/main" noGrp="1"/>
+          </p:cNvSpPr>
+          <p:nvPr/>
+        </p:nvSpPr>
+        <p:spPr>
+          <a:xfrm xmlns:a="http://schemas.openxmlformats.org/drawingml/2006/main">
+            <a:off x="1559560" y="2790825"/>
+            <a:ext cx="1025525" cy="209550"/>
           </a:xfrm>
           <a:prstGeom xmlns:a="http://schemas.openxmlformats.org/drawingml/2006/main" prst="rect">
             <a:avLst/>
@@ -8606,126 +8660,6 @@
         <p:txBody>
           <a:bodyPr xmlns:a="http://schemas.openxmlformats.org/drawingml/2006/main" wrap="square" lIns="0" tIns="0" rIns="0" bIns="0" anchor="ctr">
             <a:normAutofit/>
-          </a:bodyPr>
-          <a:lstStyle xmlns:a="http://schemas.openxmlformats.org/drawingml/2006/main"/>
-          <a:p xmlns:a="http://schemas.openxmlformats.org/drawingml/2006/main">
-            <a:pPr algn="ctr">
-              <a:buNone/>
-              <a:defRPr sz="750" b="1">
-                <a:solidFill>
-                  <a:srgbClr val="D85B62"/>
-                </a:solidFill>
-                <a:latin typeface="Arial"/>
-                <a:ea typeface="Arial"/>
-                <a:cs typeface="Arial"/>
-              </a:defRPr>
-            </a:pPr>
-          </a:p>
-        </p:txBody>
-      </p:sp>
-      <p:sp>
-        <p:nvSpPr>
-          <p:cNvPr id="59" name="full-atoms-ellipsis">
-            <a:extLst xmlns:a="http://schemas.openxmlformats.org/drawingml/2006/main">
-              <a:ext uri="{FF2B5EF4-FFF2-40B4-BE49-F238E27FC236}">
-                <a16:creationId xmlns:a16="http://schemas.microsoft.com/office/drawing/2014/main" id="{E7CDFD64-2E3E-4EF1-B894-955F9B15D310}"/>
-              </a:ext>
-            </a:extLst>
-          </p:cNvPr>
-          <p:cNvSpPr>
-            <a:spLocks xmlns:a="http://schemas.openxmlformats.org/drawingml/2006/main" noGrp="1"/>
-          </p:cNvSpPr>
-          <p:nvPr/>
-        </p:nvSpPr>
-        <p:spPr>
-          <a:xfrm xmlns:a="http://schemas.openxmlformats.org/drawingml/2006/main">
-            <a:off x="2152650" y="2362200"/>
-            <a:ext cx="209550" cy="190500"/>
-          </a:xfrm>
-          <a:prstGeom xmlns:a="http://schemas.openxmlformats.org/drawingml/2006/main" prst="rect">
-            <a:avLst/>
-          </a:prstGeom>
-        </p:spPr>
-        <p:txBody>
-          <a:bodyPr xmlns:a="http://schemas.openxmlformats.org/drawingml/2006/main" wrap="square" lIns="0" tIns="0" rIns="0" bIns="0" anchor="ctr">
-            <a:normAutofit fontScale="100000"/>
-          </a:bodyPr>
-          <a:lstStyle xmlns:a="http://schemas.openxmlformats.org/drawingml/2006/main"/>
-          <a:p xmlns:a="http://schemas.openxmlformats.org/drawingml/2006/main">
-            <a:pPr algn="ctr">
-              <a:buNone/>
-              <a:defRPr sz="900" b="1">
-                <a:solidFill>
-                  <a:srgbClr val="637080"/>
-                </a:solidFill>
-                <a:latin typeface="Arial"/>
-                <a:ea typeface="Arial"/>
-                <a:cs typeface="Arial"/>
-              </a:defRPr>
-            </a:pPr>
-            <a:r>
-              <a:t>...</a:t>
-            </a:r>
-          </a:p>
-        </p:txBody>
-      </p:sp>
-      <p:sp>
-        <p:nvSpPr>
-          <p:cNvPr id="60" name="full-atoms-c">
-            <a:extLst xmlns:a="http://schemas.openxmlformats.org/drawingml/2006/main">
-              <a:ext uri="{FF2B5EF4-FFF2-40B4-BE49-F238E27FC236}">
-                <a16:creationId xmlns:a16="http://schemas.microsoft.com/office/drawing/2014/main" id="{5350D28E-65D2-4E8C-8369-99E3A0E36475}"/>
-              </a:ext>
-            </a:extLst>
-          </p:cNvPr>
-          <p:cNvSpPr>
-            <a:spLocks xmlns:a="http://schemas.openxmlformats.org/drawingml/2006/main" noGrp="1"/>
-          </p:cNvSpPr>
-          <p:nvPr/>
-        </p:nvSpPr>
-        <p:spPr>
-          <a:xfrm xmlns:a="http://schemas.openxmlformats.org/drawingml/2006/main">
-            <a:off x="2571750" y="2381250"/>
-            <a:ext cx="190500" cy="190500"/>
-          </a:xfrm>
-          <a:prstGeom xmlns:a="http://schemas.openxmlformats.org/drawingml/2006/main" prst="ellipse">
-            <a:avLst/>
-          </a:prstGeom>
-          <a:solidFill xmlns:a="http://schemas.openxmlformats.org/drawingml/2006/main">
-            <a:srgbClr val="3578E5"/>
-          </a:solidFill>
-          <a:ln xmlns:a="http://schemas.openxmlformats.org/drawingml/2006/main" w="0">
-            <a:noFill/>
-            <a:prstDash val="solid"/>
-          </a:ln>
-        </p:spPr>
-      </p:sp>
-      <p:sp>
-        <p:nvSpPr>
-          <p:cNvPr id="61" name="full-atoms-label">
-            <a:extLst xmlns:a="http://schemas.openxmlformats.org/drawingml/2006/main">
-              <a:ext uri="{FF2B5EF4-FFF2-40B4-BE49-F238E27FC236}">
-                <a16:creationId xmlns:a16="http://schemas.microsoft.com/office/drawing/2014/main" id="{91280CAD-91E3-49A5-AC67-BAB50033AAA4}"/>
-              </a:ext>
-            </a:extLst>
-          </p:cNvPr>
-          <p:cNvSpPr>
-            <a:spLocks xmlns:a="http://schemas.openxmlformats.org/drawingml/2006/main" noGrp="1"/>
-          </p:cNvSpPr>
-          <p:nvPr/>
-        </p:nvSpPr>
-        <p:spPr>
-          <a:xfrm xmlns:a="http://schemas.openxmlformats.org/drawingml/2006/main">
-            <a:off x="1381125" y="2647950"/>
-            <a:ext cx="1619250" cy="209550"/>
-          </a:xfrm>
-          <a:prstGeom xmlns:a="http://schemas.openxmlformats.org/drawingml/2006/main" prst="rect">
-            <a:avLst/>
-          </a:prstGeom>
-        </p:spPr>
-        <p:txBody>
-          <a:bodyPr xmlns:a="http://schemas.openxmlformats.org/drawingml/2006/main" wrap="square" lIns="0" tIns="0" rIns="0" bIns="0" anchor="ctr">
-            <a:normAutofit fontScale="100000"/>
           </a:bodyPr>
           <a:lstStyle xmlns:a="http://schemas.openxmlformats.org/drawingml/2006/main"/>
           <a:p xmlns:a="http://schemas.openxmlformats.org/drawingml/2006/main">
@@ -8751,7 +8685,7 @@
           <p:cNvPr id="62" name="reducer">
             <a:extLst xmlns:a="http://schemas.openxmlformats.org/drawingml/2006/main">
               <a:ext uri="{FF2B5EF4-FFF2-40B4-BE49-F238E27FC236}">
-                <a16:creationId xmlns:a16="http://schemas.microsoft.com/office/drawing/2014/main" id="{9EAA1269-3229-427A-AADD-8E884CBC948F}"/>
+                <a16:creationId xmlns:a16="http://schemas.microsoft.com/office/drawing/2014/main" id="{A2C58821-51B5-4388-B5DE-C22632CB97F9}"/>
               </a:ext>
             </a:extLst>
           </p:cNvPr>
@@ -8786,7 +8720,7 @@
           <p:cNvPr id="63" name="reducer-core">
             <a:extLst xmlns:a="http://schemas.openxmlformats.org/drawingml/2006/main">
               <a:ext uri="{FF2B5EF4-FFF2-40B4-BE49-F238E27FC236}">
-                <a16:creationId xmlns:a16="http://schemas.microsoft.com/office/drawing/2014/main" id="{C0761612-4949-48EE-BFC2-40B5060B9B0F}"/>
+                <a16:creationId xmlns:a16="http://schemas.microsoft.com/office/drawing/2014/main" id="{2875BDC2-909B-4CEE-BC3B-4E75D3BA4CD8}"/>
               </a:ext>
             </a:extLst>
           </p:cNvPr>
@@ -8819,7 +8753,7 @@
           <p:cNvPr id="64" name="reducer-minus">
             <a:extLst xmlns:a="http://schemas.openxmlformats.org/drawingml/2006/main">
               <a:ext uri="{FF2B5EF4-FFF2-40B4-BE49-F238E27FC236}">
-                <a16:creationId xmlns:a16="http://schemas.microsoft.com/office/drawing/2014/main" id="{0E9BB21A-AE1A-47DD-9013-84F7DF2B9953}"/>
+                <a16:creationId xmlns:a16="http://schemas.microsoft.com/office/drawing/2014/main" id="{7BD6503A-AC88-417B-A872-CBA5F322FA8E}"/>
               </a:ext>
             </a:extLst>
           </p:cNvPr>
@@ -8839,7 +8773,7 @@
         </p:spPr>
         <p:txBody>
           <a:bodyPr xmlns:a="http://schemas.openxmlformats.org/drawingml/2006/main" wrap="square" lIns="0" tIns="0" rIns="0" bIns="0" anchor="ctr">
-            <a:normAutofit fontScale="100000"/>
+            <a:normAutofit/>
           </a:bodyPr>
           <a:lstStyle xmlns:a="http://schemas.openxmlformats.org/drawingml/2006/main"/>
           <a:p xmlns:a="http://schemas.openxmlformats.org/drawingml/2006/main">
@@ -8865,7 +8799,7 @@
           <p:cNvPr id="65" name="reducer-label">
             <a:extLst xmlns:a="http://schemas.openxmlformats.org/drawingml/2006/main">
               <a:ext uri="{FF2B5EF4-FFF2-40B4-BE49-F238E27FC236}">
-                <a16:creationId xmlns:a16="http://schemas.microsoft.com/office/drawing/2014/main" id="{2DCB4BFD-9E1B-4084-AD3C-BBC1722FA653}"/>
+                <a16:creationId xmlns:a16="http://schemas.microsoft.com/office/drawing/2014/main" id="{05248F89-4377-44CC-BC2E-7F975FE33B3B}"/>
               </a:ext>
             </a:extLst>
           </p:cNvPr>
@@ -8885,7 +8819,7 @@
         </p:spPr>
         <p:txBody>
           <a:bodyPr xmlns:a="http://schemas.openxmlformats.org/drawingml/2006/main" wrap="square" lIns="0" tIns="0" rIns="0" bIns="0" anchor="ctr">
-            <a:normAutofit fontScale="100000"/>
+            <a:normAutofit/>
           </a:bodyPr>
           <a:lstStyle xmlns:a="http://schemas.openxmlformats.org/drawingml/2006/main"/>
           <a:p xmlns:a="http://schemas.openxmlformats.org/drawingml/2006/main">
@@ -8911,7 +8845,7 @@
           <p:cNvPr id="66" name="reducer-note">
             <a:extLst xmlns:a="http://schemas.openxmlformats.org/drawingml/2006/main">
               <a:ext uri="{FF2B5EF4-FFF2-40B4-BE49-F238E27FC236}">
-                <a16:creationId xmlns:a16="http://schemas.microsoft.com/office/drawing/2014/main" id="{2BB0AD21-92FE-4402-A185-2ED1C8ED5DB5}"/>
+                <a16:creationId xmlns:a16="http://schemas.microsoft.com/office/drawing/2014/main" id="{8F18A98E-2603-4F01-9CBD-1E912AD3EA15}"/>
               </a:ext>
             </a:extLst>
           </p:cNvPr>
@@ -8931,7 +8865,7 @@
         </p:spPr>
         <p:txBody>
           <a:bodyPr xmlns:a="http://schemas.openxmlformats.org/drawingml/2006/main" wrap="square" lIns="0" tIns="0" rIns="0" bIns="0" anchor="ctr">
-            <a:normAutofit fontScale="100000"/>
+            <a:normAutofit/>
           </a:bodyPr>
           <a:lstStyle xmlns:a="http://schemas.openxmlformats.org/drawingml/2006/main"/>
           <a:p xmlns:a="http://schemas.openxmlformats.org/drawingml/2006/main">
@@ -8973,7 +8907,7 @@
           <p:cNvPr id="67" name="candidate-kicker">
             <a:extLst xmlns:a="http://schemas.openxmlformats.org/drawingml/2006/main">
               <a:ext uri="{FF2B5EF4-FFF2-40B4-BE49-F238E27FC236}">
-                <a16:creationId xmlns:a16="http://schemas.microsoft.com/office/drawing/2014/main" id="{37B5A7BF-3BA6-4C28-8CDF-2C4C9B0CFB09}"/>
+                <a16:creationId xmlns:a16="http://schemas.microsoft.com/office/drawing/2014/main" id="{8137D3CC-7F7A-4FE6-A30E-5071C143D404}"/>
               </a:ext>
             </a:extLst>
           </p:cNvPr>
@@ -8993,7 +8927,7 @@
         </p:spPr>
         <p:txBody>
           <a:bodyPr xmlns:a="http://schemas.openxmlformats.org/drawingml/2006/main" wrap="square" lIns="0" tIns="0" rIns="0" bIns="0" anchor="ctr">
-            <a:normAutofit fontScale="100000"/>
+            <a:normAutofit/>
           </a:bodyPr>
           <a:lstStyle xmlns:a="http://schemas.openxmlformats.org/drawingml/2006/main"/>
           <a:p xmlns:a="http://schemas.openxmlformats.org/drawingml/2006/main">
@@ -9019,7 +8953,7 @@
           <p:cNvPr id="68" name="candidate-shadow">
             <a:extLst xmlns:a="http://schemas.openxmlformats.org/drawingml/2006/main">
               <a:ext uri="{FF2B5EF4-FFF2-40B4-BE49-F238E27FC236}">
-                <a16:creationId xmlns:a16="http://schemas.microsoft.com/office/drawing/2014/main" id="{21D59555-ECD9-4437-846D-DBF6837F0D50}"/>
+                <a16:creationId xmlns:a16="http://schemas.microsoft.com/office/drawing/2014/main" id="{047326A7-A6AF-4C01-B4D5-FEBDA7C68682}"/>
               </a:ext>
             </a:extLst>
           </p:cNvPr>
@@ -9052,7 +8986,7 @@
           <p:cNvPr id="69" name="candidate-page">
             <a:extLst xmlns:a="http://schemas.openxmlformats.org/drawingml/2006/main">
               <a:ext uri="{FF2B5EF4-FFF2-40B4-BE49-F238E27FC236}">
-                <a16:creationId xmlns:a16="http://schemas.microsoft.com/office/drawing/2014/main" id="{C12C4473-AA36-4878-9CB1-BCF044DC6606}"/>
+                <a16:creationId xmlns:a16="http://schemas.microsoft.com/office/drawing/2014/main" id="{7CE03937-76E7-4CEE-A371-37D4B339CC4B}"/>
               </a:ext>
             </a:extLst>
           </p:cNvPr>
@@ -9085,7 +9019,7 @@
           <p:cNvPr id="70" name="candidate-bar-0">
             <a:extLst xmlns:a="http://schemas.openxmlformats.org/drawingml/2006/main">
               <a:ext uri="{FF2B5EF4-FFF2-40B4-BE49-F238E27FC236}">
-                <a16:creationId xmlns:a16="http://schemas.microsoft.com/office/drawing/2014/main" id="{702DF694-33EA-40E3-B917-8C11CB61DA72}"/>
+                <a16:creationId xmlns:a16="http://schemas.microsoft.com/office/drawing/2014/main" id="{8DF8A982-A3C4-46C5-BAE7-91D1E023E946}"/>
               </a:ext>
             </a:extLst>
           </p:cNvPr>
@@ -9116,7 +9050,7 @@
           <p:cNvPr id="71" name="candidate-bar-1">
             <a:extLst xmlns:a="http://schemas.openxmlformats.org/drawingml/2006/main">
               <a:ext uri="{FF2B5EF4-FFF2-40B4-BE49-F238E27FC236}">
-                <a16:creationId xmlns:a16="http://schemas.microsoft.com/office/drawing/2014/main" id="{4EB4DCF4-08D1-4E03-8B41-8DDBCF053AF6}"/>
+                <a16:creationId xmlns:a16="http://schemas.microsoft.com/office/drawing/2014/main" id="{B50E37EE-7899-4EB0-87B3-E002F6973ADF}"/>
               </a:ext>
             </a:extLst>
           </p:cNvPr>
@@ -9147,7 +9081,7 @@
           <p:cNvPr id="72" name="candidate-bar-2">
             <a:extLst xmlns:a="http://schemas.openxmlformats.org/drawingml/2006/main">
               <a:ext uri="{FF2B5EF4-FFF2-40B4-BE49-F238E27FC236}">
-                <a16:creationId xmlns:a16="http://schemas.microsoft.com/office/drawing/2014/main" id="{6901EF75-5EA5-492E-A9C5-7209B0E7F4DC}"/>
+                <a16:creationId xmlns:a16="http://schemas.microsoft.com/office/drawing/2014/main" id="{54F5B944-FA05-4160-97A8-EDD553909617}"/>
               </a:ext>
             </a:extLst>
           </p:cNvPr>
@@ -9178,7 +9112,7 @@
           <p:cNvPr id="73" name="candidate-label">
             <a:extLst xmlns:a="http://schemas.openxmlformats.org/drawingml/2006/main">
               <a:ext uri="{FF2B5EF4-FFF2-40B4-BE49-F238E27FC236}">
-                <a16:creationId xmlns:a16="http://schemas.microsoft.com/office/drawing/2014/main" id="{133712F1-3357-4558-A916-7BA15F76A653}"/>
+                <a16:creationId xmlns:a16="http://schemas.microsoft.com/office/drawing/2014/main" id="{FA8D8015-EC66-4558-BEDC-89642ED1DDEE}"/>
               </a:ext>
             </a:extLst>
           </p:cNvPr>
@@ -9198,7 +9132,7 @@
         </p:spPr>
         <p:txBody>
           <a:bodyPr xmlns:a="http://schemas.openxmlformats.org/drawingml/2006/main" wrap="square" lIns="0" tIns="0" rIns="0" bIns="0" anchor="ctr">
-            <a:normAutofit fontScale="100000"/>
+            <a:normAutofit/>
           </a:bodyPr>
           <a:lstStyle xmlns:a="http://schemas.openxmlformats.org/drawingml/2006/main"/>
           <a:p xmlns:a="http://schemas.openxmlformats.org/drawingml/2006/main">
@@ -9221,7 +9155,7 @@
       </p:sp>
       <p:cxnSp>
         <p:nvCxnSpPr>
-          <p:cNvPr id="397" name="candidate-atoms-edge-a"/>
+          <p:cNvPr id="553" name="candidate-atoms-edge-a"/>
           <p:cNvCxnSpPr/>
           <p:nvPr/>
         </p:nvCxnSpPr>
@@ -9243,7 +9177,7 @@
       </p:cxnSp>
       <p:cxnSp>
         <p:nvCxnSpPr>
-          <p:cNvPr id="398" name="candidate-atoms-edge-b"/>
+          <p:cNvPr id="554" name="candidate-atoms-edge-b"/>
           <p:cNvCxnSpPr/>
           <p:nvPr/>
         </p:nvCxnSpPr>
@@ -9268,7 +9202,7 @@
           <p:cNvPr id="76" name="candidate-atoms-a">
             <a:extLst xmlns:a="http://schemas.openxmlformats.org/drawingml/2006/main">
               <a:ext uri="{FF2B5EF4-FFF2-40B4-BE49-F238E27FC236}">
-                <a16:creationId xmlns:a16="http://schemas.microsoft.com/office/drawing/2014/main" id="{ED27C365-CA90-4EEB-86F2-7EA75D7FAFBB}"/>
+                <a16:creationId xmlns:a16="http://schemas.microsoft.com/office/drawing/2014/main" id="{43AB67CC-57D4-488D-9ABC-8DA8098A97FB}"/>
               </a:ext>
             </a:extLst>
           </p:cNvPr>
@@ -9299,7 +9233,7 @@
           <p:cNvPr id="77" name="candidate-atoms-b">
             <a:extLst xmlns:a="http://schemas.openxmlformats.org/drawingml/2006/main">
               <a:ext uri="{FF2B5EF4-FFF2-40B4-BE49-F238E27FC236}">
-                <a16:creationId xmlns:a16="http://schemas.microsoft.com/office/drawing/2014/main" id="{864C9C4F-A447-4EBD-98FE-2534ADF9B830}"/>
+                <a16:creationId xmlns:a16="http://schemas.microsoft.com/office/drawing/2014/main" id="{4A7D5744-5C7A-4EA1-9EB5-B408DFD5F586}"/>
               </a:ext>
             </a:extLst>
           </p:cNvPr>
@@ -9332,7 +9266,7 @@
           <p:cNvPr id="78" name="candidate-atoms-b-label">
             <a:extLst xmlns:a="http://schemas.openxmlformats.org/drawingml/2006/main">
               <a:ext uri="{FF2B5EF4-FFF2-40B4-BE49-F238E27FC236}">
-                <a16:creationId xmlns:a16="http://schemas.microsoft.com/office/drawing/2014/main" id="{5281C539-45C2-49C5-AA87-83AC4CD24E6B}"/>
+                <a16:creationId xmlns:a16="http://schemas.microsoft.com/office/drawing/2014/main" id="{6BE33A29-9A50-4B50-9627-25FBB6FF92C3}"/>
               </a:ext>
             </a:extLst>
           </p:cNvPr>
@@ -9352,7 +9286,7 @@
         </p:spPr>
         <p:txBody>
           <a:bodyPr xmlns:a="http://schemas.openxmlformats.org/drawingml/2006/main" wrap="square" lIns="0" tIns="0" rIns="0" bIns="0" anchor="ctr">
-            <a:normAutofit fontScale="100000"/>
+            <a:normAutofit/>
           </a:bodyPr>
           <a:lstStyle xmlns:a="http://schemas.openxmlformats.org/drawingml/2006/main"/>
           <a:p xmlns:a="http://schemas.openxmlformats.org/drawingml/2006/main">
@@ -9378,7 +9312,7 @@
           <p:cNvPr id="79" name="candidate-atoms-ellipsis">
             <a:extLst xmlns:a="http://schemas.openxmlformats.org/drawingml/2006/main">
               <a:ext uri="{FF2B5EF4-FFF2-40B4-BE49-F238E27FC236}">
-                <a16:creationId xmlns:a16="http://schemas.microsoft.com/office/drawing/2014/main" id="{8C0A6554-2924-4C67-AA73-E6D76A64EC83}"/>
+                <a16:creationId xmlns:a16="http://schemas.microsoft.com/office/drawing/2014/main" id="{8D645A74-D2B5-4D6C-93E0-AE60AD697EEA}"/>
               </a:ext>
             </a:extLst>
           </p:cNvPr>
@@ -9398,7 +9332,7 @@
         </p:spPr>
         <p:txBody>
           <a:bodyPr xmlns:a="http://schemas.openxmlformats.org/drawingml/2006/main" wrap="square" lIns="0" tIns="0" rIns="0" bIns="0" anchor="ctr">
-            <a:normAutofit fontScale="100000"/>
+            <a:normAutofit/>
           </a:bodyPr>
           <a:lstStyle xmlns:a="http://schemas.openxmlformats.org/drawingml/2006/main"/>
           <a:p xmlns:a="http://schemas.openxmlformats.org/drawingml/2006/main">
@@ -9424,7 +9358,7 @@
           <p:cNvPr id="80" name="candidate-atoms-c">
             <a:extLst xmlns:a="http://schemas.openxmlformats.org/drawingml/2006/main">
               <a:ext uri="{FF2B5EF4-FFF2-40B4-BE49-F238E27FC236}">
-                <a16:creationId xmlns:a16="http://schemas.microsoft.com/office/drawing/2014/main" id="{79D1FBD1-A7E3-4500-836E-DD48A0B44D6E}"/>
+                <a16:creationId xmlns:a16="http://schemas.microsoft.com/office/drawing/2014/main" id="{E26B232E-280E-4334-B768-AD5DF9CE907B}"/>
               </a:ext>
             </a:extLst>
           </p:cNvPr>
@@ -9455,7 +9389,7 @@
           <p:cNvPr id="81" name="candidate-note">
             <a:extLst xmlns:a="http://schemas.openxmlformats.org/drawingml/2006/main">
               <a:ext uri="{FF2B5EF4-FFF2-40B4-BE49-F238E27FC236}">
-                <a16:creationId xmlns:a16="http://schemas.microsoft.com/office/drawing/2014/main" id="{45C72FBC-63C8-4B0D-B422-2CAAFFB5B76B}"/>
+                <a16:creationId xmlns:a16="http://schemas.microsoft.com/office/drawing/2014/main" id="{9FA231C7-3208-4680-9C6F-C70DF370028B}"/>
               </a:ext>
             </a:extLst>
           </p:cNvPr>
@@ -9475,7 +9409,7 @@
         </p:spPr>
         <p:txBody>
           <a:bodyPr xmlns:a="http://schemas.openxmlformats.org/drawingml/2006/main" wrap="square" lIns="0" tIns="0" rIns="0" bIns="0" anchor="ctr">
-            <a:normAutofit fontScale="100000"/>
+            <a:normAutofit/>
           </a:bodyPr>
           <a:lstStyle xmlns:a="http://schemas.openxmlformats.org/drawingml/2006/main"/>
           <a:p xmlns:a="http://schemas.openxmlformats.org/drawingml/2006/main">
@@ -9498,72 +9432,10 @@
       </p:sp>
       <p:sp>
         <p:nvSpPr>
-          <p:cNvPr id="82" name="upstream-boundary-note">
-            <a:extLst xmlns:a="http://schemas.openxmlformats.org/drawingml/2006/main">
-              <a:ext uri="{FF2B5EF4-FFF2-40B4-BE49-F238E27FC236}">
-                <a16:creationId xmlns:a16="http://schemas.microsoft.com/office/drawing/2014/main" id="{10D18860-C7AC-4DC4-BF93-8ADE80AD000A}"/>
-              </a:ext>
-            </a:extLst>
-          </p:cNvPr>
-          <p:cNvSpPr>
-            <a:spLocks xmlns:a="http://schemas.openxmlformats.org/drawingml/2006/main" noGrp="1"/>
-          </p:cNvSpPr>
-          <p:nvPr/>
-        </p:nvSpPr>
-        <p:spPr>
-          <a:xfrm xmlns:a="http://schemas.openxmlformats.org/drawingml/2006/main">
-            <a:off x="1381125" y="3000375"/>
-            <a:ext cx="1476375" cy="361950"/>
-          </a:xfrm>
-          <a:prstGeom xmlns:a="http://schemas.openxmlformats.org/drawingml/2006/main" prst="rect">
-            <a:avLst/>
-          </a:prstGeom>
-        </p:spPr>
-        <p:txBody>
-          <a:bodyPr xmlns:a="http://schemas.openxmlformats.org/drawingml/2006/main" wrap="square" lIns="0" tIns="0" rIns="0" bIns="0" anchor="ctr">
-            <a:normAutofit fontScale="100000"/>
-          </a:bodyPr>
-          <a:lstStyle xmlns:a="http://schemas.openxmlformats.org/drawingml/2006/main"/>
-          <a:p xmlns:a="http://schemas.openxmlformats.org/drawingml/2006/main">
-            <a:pPr algn="r">
-              <a:buNone/>
-              <a:defRPr sz="975" b="0">
-                <a:solidFill>
-                  <a:srgbClr val="637080"/>
-                </a:solidFill>
-                <a:latin typeface="Arial"/>
-                <a:ea typeface="Arial"/>
-                <a:cs typeface="Arial"/>
-              </a:defRPr>
-            </a:pPr>
-            <a:r>
-              <a:t>upstream simplifier</a:t>
-            </a:r>
-          </a:p>
-          <a:p xmlns:a="http://schemas.openxmlformats.org/drawingml/2006/main">
-            <a:pPr algn="r">
-              <a:buNone/>
-              <a:defRPr sz="975" b="0">
-                <a:solidFill>
-                  <a:srgbClr val="637080"/>
-                </a:solidFill>
-                <a:latin typeface="Arial"/>
-                <a:ea typeface="Arial"/>
-                <a:cs typeface="Arial"/>
-              </a:defRPr>
-            </a:pPr>
-            <a:r>
-              <a:t>(outside SkillAudit)</a:t>
-            </a:r>
-          </a:p>
-        </p:txBody>
-      </p:sp>
-      <p:sp>
-        <p:nvSpPr>
           <p:cNvPr id="83" name="evaluation-package">
             <a:extLst xmlns:a="http://schemas.openxmlformats.org/drawingml/2006/main">
               <a:ext uri="{FF2B5EF4-FFF2-40B4-BE49-F238E27FC236}">
-                <a16:creationId xmlns:a16="http://schemas.microsoft.com/office/drawing/2014/main" id="{02EE495F-45A1-4666-BAB5-3856FC7B8741}"/>
+                <a16:creationId xmlns:a16="http://schemas.microsoft.com/office/drawing/2014/main" id="{1B714F24-D302-4C30-AB40-11E292BEACE7}"/>
               </a:ext>
             </a:extLst>
           </p:cNvPr>
@@ -9598,7 +9470,7 @@
           <p:cNvPr id="84" name="evaluation-tab">
             <a:extLst xmlns:a="http://schemas.openxmlformats.org/drawingml/2006/main">
               <a:ext uri="{FF2B5EF4-FFF2-40B4-BE49-F238E27FC236}">
-                <a16:creationId xmlns:a16="http://schemas.microsoft.com/office/drawing/2014/main" id="{4D4A6D67-5AAC-4A2F-84D8-C61FDDB341A8}"/>
+                <a16:creationId xmlns:a16="http://schemas.microsoft.com/office/drawing/2014/main" id="{EE5F07EB-A26F-4F9C-9456-B498AA6D134B}"/>
               </a:ext>
             </a:extLst>
           </p:cNvPr>
@@ -9629,7 +9501,7 @@
           <p:cNvPr id="85" name="evaluation-title">
             <a:extLst xmlns:a="http://schemas.openxmlformats.org/drawingml/2006/main">
               <a:ext uri="{FF2B5EF4-FFF2-40B4-BE49-F238E27FC236}">
-                <a16:creationId xmlns:a16="http://schemas.microsoft.com/office/drawing/2014/main" id="{39DD4A1D-7002-4990-8100-7C4ECD935D5A}"/>
+                <a16:creationId xmlns:a16="http://schemas.microsoft.com/office/drawing/2014/main" id="{92F7CCC9-3FDD-482B-B1F5-CC27B36E86F4}"/>
               </a:ext>
             </a:extLst>
           </p:cNvPr>
@@ -9675,7 +9547,7 @@
           <p:cNvPr id="86" name="evaluation-fields">
             <a:extLst xmlns:a="http://schemas.openxmlformats.org/drawingml/2006/main">
               <a:ext uri="{FF2B5EF4-FFF2-40B4-BE49-F238E27FC236}">
-                <a16:creationId xmlns:a16="http://schemas.microsoft.com/office/drawing/2014/main" id="{BC75FB23-BD59-40A2-82F1-43E43AFF2C0C}"/>
+                <a16:creationId xmlns:a16="http://schemas.microsoft.com/office/drawing/2014/main" id="{4082E849-6CF8-4827-886B-4CA36635AE1B}"/>
               </a:ext>
             </a:extLst>
           </p:cNvPr>
@@ -9695,7 +9567,7 @@
         </p:spPr>
         <p:txBody>
           <a:bodyPr xmlns:a="http://schemas.openxmlformats.org/drawingml/2006/main" wrap="square" lIns="0" tIns="0" rIns="0" bIns="0" anchor="ctr">
-            <a:normAutofit fontScale="100000"/>
+            <a:normAutofit/>
           </a:bodyPr>
           <a:lstStyle xmlns:a="http://schemas.openxmlformats.org/drawingml/2006/main"/>
           <a:p xmlns:a="http://schemas.openxmlformats.org/drawingml/2006/main">
@@ -9737,7 +9609,7 @@
           <p:cNvPr id="87" name="protocol-shell">
             <a:extLst xmlns:a="http://schemas.openxmlformats.org/drawingml/2006/main">
               <a:ext uri="{FF2B5EF4-FFF2-40B4-BE49-F238E27FC236}">
-                <a16:creationId xmlns:a16="http://schemas.microsoft.com/office/drawing/2014/main" id="{8D9567EF-2AF5-464D-9D90-3BC24B184443}"/>
+                <a16:creationId xmlns:a16="http://schemas.microsoft.com/office/drawing/2014/main" id="{DC05B4DD-77AB-4A59-8025-AD963AD0EC47}"/>
               </a:ext>
             </a:extLst>
           </p:cNvPr>
@@ -9772,7 +9644,7 @@
           <p:cNvPr id="88" name="protocol-boundary-label">
             <a:extLst xmlns:a="http://schemas.openxmlformats.org/drawingml/2006/main">
               <a:ext uri="{FF2B5EF4-FFF2-40B4-BE49-F238E27FC236}">
-                <a16:creationId xmlns:a16="http://schemas.microsoft.com/office/drawing/2014/main" id="{60D9EB34-6A25-4861-BB4F-3EAC352ECE43}"/>
+                <a16:creationId xmlns:a16="http://schemas.microsoft.com/office/drawing/2014/main" id="{E55ACED5-AC38-4A9C-9237-1ED3405A3E65}"/>
               </a:ext>
             </a:extLst>
           </p:cNvPr>
@@ -9792,7 +9664,7 @@
         </p:spPr>
         <p:txBody>
           <a:bodyPr xmlns:a="http://schemas.openxmlformats.org/drawingml/2006/main" wrap="square" lIns="0" tIns="0" rIns="0" bIns="0" anchor="ctr">
-            <a:normAutofit fontScale="100000"/>
+            <a:normAutofit/>
           </a:bodyPr>
           <a:lstStyle xmlns:a="http://schemas.openxmlformats.org/drawingml/2006/main"/>
           <a:p xmlns:a="http://schemas.openxmlformats.org/drawingml/2006/main">
@@ -9818,7 +9690,7 @@
           <p:cNvPr id="89" name="stage-map">
             <a:extLst xmlns:a="http://schemas.openxmlformats.org/drawingml/2006/main">
               <a:ext uri="{FF2B5EF4-FFF2-40B4-BE49-F238E27FC236}">
-                <a16:creationId xmlns:a16="http://schemas.microsoft.com/office/drawing/2014/main" id="{D82BA4FF-D4AD-4372-AD8B-F2C199B05A37}"/>
+                <a16:creationId xmlns:a16="http://schemas.microsoft.com/office/drawing/2014/main" id="{A93BFADF-4104-4CA4-BBB2-50CFE6844902}"/>
               </a:ext>
             </a:extLst>
           </p:cNvPr>
@@ -9853,7 +9725,7 @@
           <p:cNvPr id="90" name="stage-freeze">
             <a:extLst xmlns:a="http://schemas.openxmlformats.org/drawingml/2006/main">
               <a:ext uri="{FF2B5EF4-FFF2-40B4-BE49-F238E27FC236}">
-                <a16:creationId xmlns:a16="http://schemas.microsoft.com/office/drawing/2014/main" id="{E824B037-6F6B-41CD-95EC-6866F7BF6406}"/>
+                <a16:creationId xmlns:a16="http://schemas.microsoft.com/office/drawing/2014/main" id="{7040E9F0-96F4-4387-958A-4AD93092EF83}"/>
               </a:ext>
             </a:extLst>
           </p:cNvPr>
@@ -9888,7 +9760,7 @@
           <p:cNvPr id="91" name="stage-run">
             <a:extLst xmlns:a="http://schemas.openxmlformats.org/drawingml/2006/main">
               <a:ext uri="{FF2B5EF4-FFF2-40B4-BE49-F238E27FC236}">
-                <a16:creationId xmlns:a16="http://schemas.microsoft.com/office/drawing/2014/main" id="{FD928116-47B3-48BA-A488-BA6AA465CD13}"/>
+                <a16:creationId xmlns:a16="http://schemas.microsoft.com/office/drawing/2014/main" id="{BA1DF8A4-8A00-47E3-971F-23AECE4C99D1}"/>
               </a:ext>
             </a:extLst>
           </p:cNvPr>
@@ -9923,7 +9795,7 @@
           <p:cNvPr id="92" name="stage-verify">
             <a:extLst xmlns:a="http://schemas.openxmlformats.org/drawingml/2006/main">
               <a:ext uri="{FF2B5EF4-FFF2-40B4-BE49-F238E27FC236}">
-                <a16:creationId xmlns:a16="http://schemas.microsoft.com/office/drawing/2014/main" id="{617CE34A-0BCB-4AFD-A406-96458B8872CC}"/>
+                <a16:creationId xmlns:a16="http://schemas.microsoft.com/office/drawing/2014/main" id="{60619BD3-20DD-473A-802A-0D55BD0532F5}"/>
               </a:ext>
             </a:extLst>
           </p:cNvPr>
@@ -9958,7 +9830,7 @@
           <p:cNvPr id="93" name="stage-1-index">
             <a:extLst xmlns:a="http://schemas.openxmlformats.org/drawingml/2006/main">
               <a:ext uri="{FF2B5EF4-FFF2-40B4-BE49-F238E27FC236}">
-                <a16:creationId xmlns:a16="http://schemas.microsoft.com/office/drawing/2014/main" id="{B851C2A3-2522-441F-9514-6BCBD23B7391}"/>
+                <a16:creationId xmlns:a16="http://schemas.microsoft.com/office/drawing/2014/main" id="{4E990C8F-2F08-4C4C-B822-34EAEA881BFE}"/>
               </a:ext>
             </a:extLst>
           </p:cNvPr>
@@ -9989,7 +9861,7 @@
           <p:cNvPr id="94" name="stage-1-index-text">
             <a:extLst xmlns:a="http://schemas.openxmlformats.org/drawingml/2006/main">
               <a:ext uri="{FF2B5EF4-FFF2-40B4-BE49-F238E27FC236}">
-                <a16:creationId xmlns:a16="http://schemas.microsoft.com/office/drawing/2014/main" id="{BB44BAD0-685C-4B25-B51B-10DD380CD3C3}"/>
+                <a16:creationId xmlns:a16="http://schemas.microsoft.com/office/drawing/2014/main" id="{26FEBB32-5295-4A56-A5EC-9F9CA28222B5}"/>
               </a:ext>
             </a:extLst>
           </p:cNvPr>
@@ -10035,7 +9907,7 @@
           <p:cNvPr id="95" name="stage-2-index">
             <a:extLst xmlns:a="http://schemas.openxmlformats.org/drawingml/2006/main">
               <a:ext uri="{FF2B5EF4-FFF2-40B4-BE49-F238E27FC236}">
-                <a16:creationId xmlns:a16="http://schemas.microsoft.com/office/drawing/2014/main" id="{401626E3-1FD4-4C16-9A1D-676355CEA0BF}"/>
+                <a16:creationId xmlns:a16="http://schemas.microsoft.com/office/drawing/2014/main" id="{08BA3537-2E62-43E6-AC1F-3FC46BDFE610}"/>
               </a:ext>
             </a:extLst>
           </p:cNvPr>
@@ -10066,7 +9938,7 @@
           <p:cNvPr id="96" name="stage-2-index-text">
             <a:extLst xmlns:a="http://schemas.openxmlformats.org/drawingml/2006/main">
               <a:ext uri="{FF2B5EF4-FFF2-40B4-BE49-F238E27FC236}">
-                <a16:creationId xmlns:a16="http://schemas.microsoft.com/office/drawing/2014/main" id="{3231A264-9FE1-4F68-AF78-0615F7AD174A}"/>
+                <a16:creationId xmlns:a16="http://schemas.microsoft.com/office/drawing/2014/main" id="{AEBFBFD5-B854-41EE-BE49-172C6A4A555F}"/>
               </a:ext>
             </a:extLst>
           </p:cNvPr>
@@ -10112,7 +9984,7 @@
           <p:cNvPr id="97" name="stage-3-index">
             <a:extLst xmlns:a="http://schemas.openxmlformats.org/drawingml/2006/main">
               <a:ext uri="{FF2B5EF4-FFF2-40B4-BE49-F238E27FC236}">
-                <a16:creationId xmlns:a16="http://schemas.microsoft.com/office/drawing/2014/main" id="{08206FB1-2EEE-4441-A676-1B56E310FB57}"/>
+                <a16:creationId xmlns:a16="http://schemas.microsoft.com/office/drawing/2014/main" id="{7AA4D60B-C4BA-4426-A24C-EE13C22CF967}"/>
               </a:ext>
             </a:extLst>
           </p:cNvPr>
@@ -10143,7 +10015,7 @@
           <p:cNvPr id="98" name="stage-3-index-text">
             <a:extLst xmlns:a="http://schemas.openxmlformats.org/drawingml/2006/main">
               <a:ext uri="{FF2B5EF4-FFF2-40B4-BE49-F238E27FC236}">
-                <a16:creationId xmlns:a16="http://schemas.microsoft.com/office/drawing/2014/main" id="{AC12D4BD-E891-457B-BCD9-C300566FEABD}"/>
+                <a16:creationId xmlns:a16="http://schemas.microsoft.com/office/drawing/2014/main" id="{6D7BE610-3EA5-40A8-A7DE-5E69E1FD2525}"/>
               </a:ext>
             </a:extLst>
           </p:cNvPr>
@@ -10189,7 +10061,7 @@
           <p:cNvPr id="99" name="stage-4-index">
             <a:extLst xmlns:a="http://schemas.openxmlformats.org/drawingml/2006/main">
               <a:ext uri="{FF2B5EF4-FFF2-40B4-BE49-F238E27FC236}">
-                <a16:creationId xmlns:a16="http://schemas.microsoft.com/office/drawing/2014/main" id="{EE2C644A-4897-4048-804E-6C55E0A0CE2E}"/>
+                <a16:creationId xmlns:a16="http://schemas.microsoft.com/office/drawing/2014/main" id="{4201B390-D9DC-4CBD-B946-B500DF791430}"/>
               </a:ext>
             </a:extLst>
           </p:cNvPr>
@@ -10220,7 +10092,7 @@
           <p:cNvPr id="100" name="stage-4-index-text">
             <a:extLst xmlns:a="http://schemas.openxmlformats.org/drawingml/2006/main">
               <a:ext uri="{FF2B5EF4-FFF2-40B4-BE49-F238E27FC236}">
-                <a16:creationId xmlns:a16="http://schemas.microsoft.com/office/drawing/2014/main" id="{863A5AFC-A547-4F4B-9FCF-01E9ABEB8A89}"/>
+                <a16:creationId xmlns:a16="http://schemas.microsoft.com/office/drawing/2014/main" id="{752A1147-1576-4A76-A1D7-942848BEBDA5}"/>
               </a:ext>
             </a:extLst>
           </p:cNvPr>
@@ -10266,7 +10138,7 @@
           <p:cNvPr id="101" name="stage-map-title">
             <a:extLst xmlns:a="http://schemas.openxmlformats.org/drawingml/2006/main">
               <a:ext uri="{FF2B5EF4-FFF2-40B4-BE49-F238E27FC236}">
-                <a16:creationId xmlns:a16="http://schemas.microsoft.com/office/drawing/2014/main" id="{B5CD944E-DE0D-48C7-A872-17CF7B458397}"/>
+                <a16:creationId xmlns:a16="http://schemas.microsoft.com/office/drawing/2014/main" id="{04C9785D-0EC4-481A-BB2F-E7AB648CA691}"/>
               </a:ext>
             </a:extLst>
           </p:cNvPr>
@@ -10312,7 +10184,7 @@
           <p:cNvPr id="102" name="stage-map-detail">
             <a:extLst xmlns:a="http://schemas.openxmlformats.org/drawingml/2006/main">
               <a:ext uri="{FF2B5EF4-FFF2-40B4-BE49-F238E27FC236}">
-                <a16:creationId xmlns:a16="http://schemas.microsoft.com/office/drawing/2014/main" id="{527E464C-C37A-41DD-A43D-691E9AB09FA3}"/>
+                <a16:creationId xmlns:a16="http://schemas.microsoft.com/office/drawing/2014/main" id="{DFC3789A-9440-4B37-BF41-45E48397E2A1}"/>
               </a:ext>
             </a:extLst>
           </p:cNvPr>
@@ -10332,7 +10204,7 @@
         </p:spPr>
         <p:txBody>
           <a:bodyPr xmlns:a="http://schemas.openxmlformats.org/drawingml/2006/main" wrap="square" lIns="0" tIns="0" rIns="0" bIns="0" anchor="ctr">
-            <a:normAutofit fontScale="100000"/>
+            <a:normAutofit/>
           </a:bodyPr>
           <a:lstStyle xmlns:a="http://schemas.openxmlformats.org/drawingml/2006/main"/>
           <a:p xmlns:a="http://schemas.openxmlformats.org/drawingml/2006/main">
@@ -10390,7 +10262,7 @@
           <p:cNvPr id="103" name="closure-check">
             <a:extLst xmlns:a="http://schemas.openxmlformats.org/drawingml/2006/main">
               <a:ext uri="{FF2B5EF4-FFF2-40B4-BE49-F238E27FC236}">
-                <a16:creationId xmlns:a16="http://schemas.microsoft.com/office/drawing/2014/main" id="{0B344A50-882A-4109-BD13-305AB1C91390}"/>
+                <a16:creationId xmlns:a16="http://schemas.microsoft.com/office/drawing/2014/main" id="{2EA3608B-9A83-455F-AF88-EAA57AB23451}"/>
               </a:ext>
             </a:extLst>
           </p:cNvPr>
@@ -10425,7 +10297,7 @@
           <p:cNvPr id="104" name="closure-check-title">
             <a:extLst xmlns:a="http://schemas.openxmlformats.org/drawingml/2006/main">
               <a:ext uri="{FF2B5EF4-FFF2-40B4-BE49-F238E27FC236}">
-                <a16:creationId xmlns:a16="http://schemas.microsoft.com/office/drawing/2014/main" id="{F2181609-B902-4298-B012-1B4F07684FA5}"/>
+                <a16:creationId xmlns:a16="http://schemas.microsoft.com/office/drawing/2014/main" id="{96C84E26-8D96-47AB-BB56-1305D8866A8C}"/>
               </a:ext>
             </a:extLst>
           </p:cNvPr>
@@ -10471,7 +10343,7 @@
           <p:cNvPr id="105" name="closure-check-note">
             <a:extLst xmlns:a="http://schemas.openxmlformats.org/drawingml/2006/main">
               <a:ext uri="{FF2B5EF4-FFF2-40B4-BE49-F238E27FC236}">
-                <a16:creationId xmlns:a16="http://schemas.microsoft.com/office/drawing/2014/main" id="{82FB680B-442F-4D2B-8A89-A7D356822711}"/>
+                <a16:creationId xmlns:a16="http://schemas.microsoft.com/office/drawing/2014/main" id="{BFEA7361-3E87-4597-AABB-1D580D126704}"/>
               </a:ext>
             </a:extLst>
           </p:cNvPr>
@@ -10533,7 +10405,7 @@
           <p:cNvPr id="106" name="stage-freeze-title">
             <a:extLst xmlns:a="http://schemas.openxmlformats.org/drawingml/2006/main">
               <a:ext uri="{FF2B5EF4-FFF2-40B4-BE49-F238E27FC236}">
-                <a16:creationId xmlns:a16="http://schemas.microsoft.com/office/drawing/2014/main" id="{A3328839-1CE4-4ADC-BAF9-1A72FF5C0D04}"/>
+                <a16:creationId xmlns:a16="http://schemas.microsoft.com/office/drawing/2014/main" id="{C6D0E21F-1231-4570-BF12-B51042ADDB9A}"/>
               </a:ext>
             </a:extLst>
           </p:cNvPr>
@@ -10579,7 +10451,7 @@
           <p:cNvPr id="107" name="stage-freeze-detail">
             <a:extLst xmlns:a="http://schemas.openxmlformats.org/drawingml/2006/main">
               <a:ext uri="{FF2B5EF4-FFF2-40B4-BE49-F238E27FC236}">
-                <a16:creationId xmlns:a16="http://schemas.microsoft.com/office/drawing/2014/main" id="{8B794FFC-4E34-4CEC-9513-812A98DADBB2}"/>
+                <a16:creationId xmlns:a16="http://schemas.microsoft.com/office/drawing/2014/main" id="{6080ACF9-6563-4165-9655-105B865D89D9}"/>
               </a:ext>
             </a:extLst>
           </p:cNvPr>
@@ -10599,7 +10471,7 @@
         </p:spPr>
         <p:txBody>
           <a:bodyPr xmlns:a="http://schemas.openxmlformats.org/drawingml/2006/main" wrap="square" lIns="0" tIns="0" rIns="0" bIns="0" anchor="ctr">
-            <a:normAutofit fontScale="100000"/>
+            <a:normAutofit/>
           </a:bodyPr>
           <a:lstStyle xmlns:a="http://schemas.openxmlformats.org/drawingml/2006/main"/>
           <a:p xmlns:a="http://schemas.openxmlformats.org/drawingml/2006/main">
@@ -10673,7 +10545,7 @@
           <p:cNvPr id="108" name="stage-freeze-note">
             <a:extLst xmlns:a="http://schemas.openxmlformats.org/drawingml/2006/main">
               <a:ext uri="{FF2B5EF4-FFF2-40B4-BE49-F238E27FC236}">
-                <a16:creationId xmlns:a16="http://schemas.microsoft.com/office/drawing/2014/main" id="{91888AB8-6C7E-42CD-8288-4DBE19E847AB}"/>
+                <a16:creationId xmlns:a16="http://schemas.microsoft.com/office/drawing/2014/main" id="{3DB0C872-7DB1-4720-B0D5-F9E074432034}"/>
               </a:ext>
             </a:extLst>
           </p:cNvPr>
@@ -10735,7 +10607,7 @@
           <p:cNvPr id="109" name="stage-run-title">
             <a:extLst xmlns:a="http://schemas.openxmlformats.org/drawingml/2006/main">
               <a:ext uri="{FF2B5EF4-FFF2-40B4-BE49-F238E27FC236}">
-                <a16:creationId xmlns:a16="http://schemas.microsoft.com/office/drawing/2014/main" id="{7BD9AC6B-F78A-4A52-B83A-9C8DA89B469F}"/>
+                <a16:creationId xmlns:a16="http://schemas.microsoft.com/office/drawing/2014/main" id="{7486B931-8818-4923-A99E-A7B788E8F892}"/>
               </a:ext>
             </a:extLst>
           </p:cNvPr>
@@ -10781,7 +10653,7 @@
           <p:cNvPr id="110" name="stage-run-subtitle">
             <a:extLst xmlns:a="http://schemas.openxmlformats.org/drawingml/2006/main">
               <a:ext uri="{FF2B5EF4-FFF2-40B4-BE49-F238E27FC236}">
-                <a16:creationId xmlns:a16="http://schemas.microsoft.com/office/drawing/2014/main" id="{1A038672-DF89-4161-8901-75496430DCBA}"/>
+                <a16:creationId xmlns:a16="http://schemas.microsoft.com/office/drawing/2014/main" id="{8FCFCF09-B565-476A-BAE0-990602A97791}"/>
               </a:ext>
             </a:extLst>
           </p:cNvPr>
@@ -10801,7 +10673,7 @@
         </p:spPr>
         <p:txBody>
           <a:bodyPr xmlns:a="http://schemas.openxmlformats.org/drawingml/2006/main" wrap="square" lIns="0" tIns="0" rIns="0" bIns="0" anchor="ctr">
-            <a:normAutofit fontScale="89744"/>
+            <a:normAutofit fontScale="89744" lnSpcReduction="10000"/>
           </a:bodyPr>
           <a:lstStyle xmlns:a="http://schemas.openxmlformats.org/drawingml/2006/main"/>
           <a:p xmlns:a="http://schemas.openxmlformats.org/drawingml/2006/main">
@@ -10827,7 +10699,7 @@
           <p:cNvPr id="111" name="lane-0">
             <a:extLst xmlns:a="http://schemas.openxmlformats.org/drawingml/2006/main">
               <a:ext uri="{FF2B5EF4-FFF2-40B4-BE49-F238E27FC236}">
-                <a16:creationId xmlns:a16="http://schemas.microsoft.com/office/drawing/2014/main" id="{6A0A477C-B3C2-454D-ABDF-E472F9BD8536}"/>
+                <a16:creationId xmlns:a16="http://schemas.microsoft.com/office/drawing/2014/main" id="{71A58423-13EF-4A75-A02E-9669A726B9BA}"/>
               </a:ext>
             </a:extLst>
           </p:cNvPr>
@@ -10862,7 +10734,7 @@
           <p:cNvPr id="112" name="lane-0-code-bg">
             <a:extLst xmlns:a="http://schemas.openxmlformats.org/drawingml/2006/main">
               <a:ext uri="{FF2B5EF4-FFF2-40B4-BE49-F238E27FC236}">
-                <a16:creationId xmlns:a16="http://schemas.microsoft.com/office/drawing/2014/main" id="{6F0EB76D-F8F3-432E-847A-5F911433E0AD}"/>
+                <a16:creationId xmlns:a16="http://schemas.microsoft.com/office/drawing/2014/main" id="{703B4FCB-761D-4D1B-9951-7332ED3A1200}"/>
               </a:ext>
             </a:extLst>
           </p:cNvPr>
@@ -10895,7 +10767,7 @@
           <p:cNvPr id="113" name="lane-0-code">
             <a:extLst xmlns:a="http://schemas.openxmlformats.org/drawingml/2006/main">
               <a:ext uri="{FF2B5EF4-FFF2-40B4-BE49-F238E27FC236}">
-                <a16:creationId xmlns:a16="http://schemas.microsoft.com/office/drawing/2014/main" id="{9770DCC0-7103-4C07-91BF-0A73B3316FC9}"/>
+                <a16:creationId xmlns:a16="http://schemas.microsoft.com/office/drawing/2014/main" id="{0CAB9B04-99D0-40AF-9B35-7ECF740173E5}"/>
               </a:ext>
             </a:extLst>
           </p:cNvPr>
@@ -10941,7 +10813,7 @@
           <p:cNvPr id="114" name="lane-0-label">
             <a:extLst xmlns:a="http://schemas.openxmlformats.org/drawingml/2006/main">
               <a:ext uri="{FF2B5EF4-FFF2-40B4-BE49-F238E27FC236}">
-                <a16:creationId xmlns:a16="http://schemas.microsoft.com/office/drawing/2014/main" id="{1C9F670E-702B-4450-83C2-0E0E0F16B183}"/>
+                <a16:creationId xmlns:a16="http://schemas.microsoft.com/office/drawing/2014/main" id="{EEF42E18-1606-4388-9515-203DDC2EC06A}"/>
               </a:ext>
             </a:extLst>
           </p:cNvPr>
@@ -10987,7 +10859,7 @@
           <p:cNvPr id="115" name="lane-1">
             <a:extLst xmlns:a="http://schemas.openxmlformats.org/drawingml/2006/main">
               <a:ext uri="{FF2B5EF4-FFF2-40B4-BE49-F238E27FC236}">
-                <a16:creationId xmlns:a16="http://schemas.microsoft.com/office/drawing/2014/main" id="{588E1ABF-2008-43A7-8944-421FE159F3B5}"/>
+                <a16:creationId xmlns:a16="http://schemas.microsoft.com/office/drawing/2014/main" id="{67FF91B1-072E-4B70-BC3E-F60A818A09E3}"/>
               </a:ext>
             </a:extLst>
           </p:cNvPr>
@@ -11022,7 +10894,7 @@
           <p:cNvPr id="116" name="lane-1-code-bg">
             <a:extLst xmlns:a="http://schemas.openxmlformats.org/drawingml/2006/main">
               <a:ext uri="{FF2B5EF4-FFF2-40B4-BE49-F238E27FC236}">
-                <a16:creationId xmlns:a16="http://schemas.microsoft.com/office/drawing/2014/main" id="{E33CE7B8-58D8-4CF6-9975-5C735ADE5B96}"/>
+                <a16:creationId xmlns:a16="http://schemas.microsoft.com/office/drawing/2014/main" id="{851F6B90-FC74-45B2-BF24-E853B2B79B77}"/>
               </a:ext>
             </a:extLst>
           </p:cNvPr>
@@ -11055,7 +10927,7 @@
           <p:cNvPr id="117" name="lane-1-code">
             <a:extLst xmlns:a="http://schemas.openxmlformats.org/drawingml/2006/main">
               <a:ext uri="{FF2B5EF4-FFF2-40B4-BE49-F238E27FC236}">
-                <a16:creationId xmlns:a16="http://schemas.microsoft.com/office/drawing/2014/main" id="{CD2F7344-0CE1-4773-8718-2DDACE383439}"/>
+                <a16:creationId xmlns:a16="http://schemas.microsoft.com/office/drawing/2014/main" id="{73D07378-6DC5-40E1-8DAB-9C9020B43940}"/>
               </a:ext>
             </a:extLst>
           </p:cNvPr>
@@ -11101,7 +10973,7 @@
           <p:cNvPr id="118" name="lane-1-label">
             <a:extLst xmlns:a="http://schemas.openxmlformats.org/drawingml/2006/main">
               <a:ext uri="{FF2B5EF4-FFF2-40B4-BE49-F238E27FC236}">
-                <a16:creationId xmlns:a16="http://schemas.microsoft.com/office/drawing/2014/main" id="{2A7C4840-EBEF-401A-B26D-71E0DFE15AB1}"/>
+                <a16:creationId xmlns:a16="http://schemas.microsoft.com/office/drawing/2014/main" id="{DC134873-D231-41DD-9AF1-CE892A2F17D4}"/>
               </a:ext>
             </a:extLst>
           </p:cNvPr>
@@ -11147,7 +11019,7 @@
           <p:cNvPr id="119" name="lane-2">
             <a:extLst xmlns:a="http://schemas.openxmlformats.org/drawingml/2006/main">
               <a:ext uri="{FF2B5EF4-FFF2-40B4-BE49-F238E27FC236}">
-                <a16:creationId xmlns:a16="http://schemas.microsoft.com/office/drawing/2014/main" id="{4559FFA6-4307-40C4-82B4-1C79ED4898AE}"/>
+                <a16:creationId xmlns:a16="http://schemas.microsoft.com/office/drawing/2014/main" id="{B1F681CA-0673-4921-A677-B6DE80BB0DDD}"/>
               </a:ext>
             </a:extLst>
           </p:cNvPr>
@@ -11182,7 +11054,7 @@
           <p:cNvPr id="120" name="lane-2-code-bg">
             <a:extLst xmlns:a="http://schemas.openxmlformats.org/drawingml/2006/main">
               <a:ext uri="{FF2B5EF4-FFF2-40B4-BE49-F238E27FC236}">
-                <a16:creationId xmlns:a16="http://schemas.microsoft.com/office/drawing/2014/main" id="{EE4DA190-BEC5-453B-AB21-AFE21D4D4999}"/>
+                <a16:creationId xmlns:a16="http://schemas.microsoft.com/office/drawing/2014/main" id="{71D4D55D-5D2E-4CE9-9B2E-0D30F691059C}"/>
               </a:ext>
             </a:extLst>
           </p:cNvPr>
@@ -11215,7 +11087,7 @@
           <p:cNvPr id="121" name="lane-2-code">
             <a:extLst xmlns:a="http://schemas.openxmlformats.org/drawingml/2006/main">
               <a:ext uri="{FF2B5EF4-FFF2-40B4-BE49-F238E27FC236}">
-                <a16:creationId xmlns:a16="http://schemas.microsoft.com/office/drawing/2014/main" id="{F7CA8320-49D9-4179-9589-AEFD4303069B}"/>
+                <a16:creationId xmlns:a16="http://schemas.microsoft.com/office/drawing/2014/main" id="{3B44D93A-099C-42B2-8F97-D78546FC4DB4}"/>
               </a:ext>
             </a:extLst>
           </p:cNvPr>
@@ -11261,7 +11133,7 @@
           <p:cNvPr id="122" name="lane-2-label">
             <a:extLst xmlns:a="http://schemas.openxmlformats.org/drawingml/2006/main">
               <a:ext uri="{FF2B5EF4-FFF2-40B4-BE49-F238E27FC236}">
-                <a16:creationId xmlns:a16="http://schemas.microsoft.com/office/drawing/2014/main" id="{0EDB00D2-0BB3-4FE6-83D6-869CE539E6E2}"/>
+                <a16:creationId xmlns:a16="http://schemas.microsoft.com/office/drawing/2014/main" id="{B2084706-6A13-4BB1-BF44-470B57EAEA7E}"/>
               </a:ext>
             </a:extLst>
           </p:cNvPr>
@@ -11307,7 +11179,7 @@
           <p:cNvPr id="123" name="stage-run-note">
             <a:extLst xmlns:a="http://schemas.openxmlformats.org/drawingml/2006/main">
               <a:ext uri="{FF2B5EF4-FFF2-40B4-BE49-F238E27FC236}">
-                <a16:creationId xmlns:a16="http://schemas.microsoft.com/office/drawing/2014/main" id="{5E450F10-5C91-4B57-AF1D-A0778E571164}"/>
+                <a16:creationId xmlns:a16="http://schemas.microsoft.com/office/drawing/2014/main" id="{F1A8BE2F-258A-46A7-920E-4C268ED72CA0}"/>
               </a:ext>
             </a:extLst>
           </p:cNvPr>
@@ -11327,7 +11199,7 @@
         </p:spPr>
         <p:txBody>
           <a:bodyPr xmlns:a="http://schemas.openxmlformats.org/drawingml/2006/main" wrap="square" lIns="0" tIns="0" rIns="0" bIns="0" anchor="ctr">
-            <a:normAutofit fontScale="78273"/>
+            <a:normAutofit fontScale="68273"/>
           </a:bodyPr>
           <a:lstStyle xmlns:a="http://schemas.openxmlformats.org/drawingml/2006/main"/>
           <a:p xmlns:a="http://schemas.openxmlformats.org/drawingml/2006/main">
@@ -11353,7 +11225,7 @@
           <p:cNvPr id="124" name="stage-verify-title">
             <a:extLst xmlns:a="http://schemas.openxmlformats.org/drawingml/2006/main">
               <a:ext uri="{FF2B5EF4-FFF2-40B4-BE49-F238E27FC236}">
-                <a16:creationId xmlns:a16="http://schemas.microsoft.com/office/drawing/2014/main" id="{2B50BC23-29A4-4A68-A52E-E7B4D17CF2E5}"/>
+                <a16:creationId xmlns:a16="http://schemas.microsoft.com/office/drawing/2014/main" id="{C36C5288-DFC5-436F-81C5-0036D2A05347}"/>
               </a:ext>
             </a:extLst>
           </p:cNvPr>
@@ -11399,7 +11271,7 @@
           <p:cNvPr id="125" name="integrity-check-bg">
             <a:extLst xmlns:a="http://schemas.openxmlformats.org/drawingml/2006/main">
               <a:ext uri="{FF2B5EF4-FFF2-40B4-BE49-F238E27FC236}">
-                <a16:creationId xmlns:a16="http://schemas.microsoft.com/office/drawing/2014/main" id="{11F302A8-6198-4D85-A1F5-6A5B0D3B8085}"/>
+                <a16:creationId xmlns:a16="http://schemas.microsoft.com/office/drawing/2014/main" id="{8499E0F3-8F3A-411C-9311-898F21B56C7A}"/>
               </a:ext>
             </a:extLst>
           </p:cNvPr>
@@ -11432,7 +11304,7 @@
           <p:cNvPr id="126" name="integrity-check-number">
             <a:extLst xmlns:a="http://schemas.openxmlformats.org/drawingml/2006/main">
               <a:ext uri="{FF2B5EF4-FFF2-40B4-BE49-F238E27FC236}">
-                <a16:creationId xmlns:a16="http://schemas.microsoft.com/office/drawing/2014/main" id="{4145F56E-A441-4309-BFAE-37495BD34F04}"/>
+                <a16:creationId xmlns:a16="http://schemas.microsoft.com/office/drawing/2014/main" id="{8CE64D8E-6CD0-48EB-939A-A43DAD862F42}"/>
               </a:ext>
             </a:extLst>
           </p:cNvPr>
@@ -11478,7 +11350,7 @@
           <p:cNvPr id="127" name="integrity-check-label">
             <a:extLst xmlns:a="http://schemas.openxmlformats.org/drawingml/2006/main">
               <a:ext uri="{FF2B5EF4-FFF2-40B4-BE49-F238E27FC236}">
-                <a16:creationId xmlns:a16="http://schemas.microsoft.com/office/drawing/2014/main" id="{F1B6B1A3-4F23-4DAD-A454-020D9037DEAD}"/>
+                <a16:creationId xmlns:a16="http://schemas.microsoft.com/office/drawing/2014/main" id="{DEF34742-F446-49DC-A7AE-A92E95860F75}"/>
               </a:ext>
             </a:extLst>
           </p:cNvPr>
@@ -11525,7 +11397,7 @@
           <p:cNvPr id="128" name="sla-check-bg">
             <a:extLst xmlns:a="http://schemas.openxmlformats.org/drawingml/2006/main">
               <a:ext uri="{FF2B5EF4-FFF2-40B4-BE49-F238E27FC236}">
-                <a16:creationId xmlns:a16="http://schemas.microsoft.com/office/drawing/2014/main" id="{CF53733B-C811-4466-B652-F8148153946C}"/>
+                <a16:creationId xmlns:a16="http://schemas.microsoft.com/office/drawing/2014/main" id="{23475869-5790-4F69-9A6C-8825F9268A3F}"/>
               </a:ext>
             </a:extLst>
           </p:cNvPr>
@@ -11558,7 +11430,7 @@
           <p:cNvPr id="129" name="sla-check-number">
             <a:extLst xmlns:a="http://schemas.openxmlformats.org/drawingml/2006/main">
               <a:ext uri="{FF2B5EF4-FFF2-40B4-BE49-F238E27FC236}">
-                <a16:creationId xmlns:a16="http://schemas.microsoft.com/office/drawing/2014/main" id="{824CD115-1479-4C1E-A0D4-45DE938C2C06}"/>
+                <a16:creationId xmlns:a16="http://schemas.microsoft.com/office/drawing/2014/main" id="{2723B851-4CF9-403F-BD6C-42403B55B592}"/>
               </a:ext>
             </a:extLst>
           </p:cNvPr>
@@ -11604,7 +11476,7 @@
           <p:cNvPr id="130" name="sla-check-label">
             <a:extLst xmlns:a="http://schemas.openxmlformats.org/drawingml/2006/main">
               <a:ext uri="{FF2B5EF4-FFF2-40B4-BE49-F238E27FC236}">
-                <a16:creationId xmlns:a16="http://schemas.microsoft.com/office/drawing/2014/main" id="{2AE3EBAA-FFA3-40D3-8899-E276FC703C9D}"/>
+                <a16:creationId xmlns:a16="http://schemas.microsoft.com/office/drawing/2014/main" id="{ADE37021-4FF4-45D5-9B8B-5F66676F7742}"/>
               </a:ext>
             </a:extLst>
           </p:cNvPr>
@@ -11651,7 +11523,7 @@
           <p:cNvPr id="131" name="stage-verify-note">
             <a:extLst xmlns:a="http://schemas.openxmlformats.org/drawingml/2006/main">
               <a:ext uri="{FF2B5EF4-FFF2-40B4-BE49-F238E27FC236}">
-                <a16:creationId xmlns:a16="http://schemas.microsoft.com/office/drawing/2014/main" id="{264046EA-5E54-45D4-9932-FCC0B5725A1E}"/>
+                <a16:creationId xmlns:a16="http://schemas.microsoft.com/office/drawing/2014/main" id="{8D5792E2-E7EB-4400-844B-05E2ED566415}"/>
               </a:ext>
             </a:extLst>
           </p:cNvPr>
@@ -11671,7 +11543,7 @@
         </p:spPr>
         <p:txBody>
           <a:bodyPr xmlns:a="http://schemas.openxmlformats.org/drawingml/2006/main" wrap="square" lIns="0" tIns="0" rIns="0" bIns="0" anchor="ctr">
-            <a:normAutofit fontScale="77496"/>
+            <a:normAutofit fontScale="67496"/>
           </a:bodyPr>
           <a:lstStyle xmlns:a="http://schemas.openxmlformats.org/drawingml/2006/main"/>
           <a:p xmlns:a="http://schemas.openxmlformats.org/drawingml/2006/main">
@@ -11698,7 +11570,7 @@
           <p:cNvPr id="132" name="audit-trace-strip">
             <a:extLst xmlns:a="http://schemas.openxmlformats.org/drawingml/2006/main">
               <a:ext uri="{FF2B5EF4-FFF2-40B4-BE49-F238E27FC236}">
-                <a16:creationId xmlns:a16="http://schemas.microsoft.com/office/drawing/2014/main" id="{D6EA58BA-1280-4F81-8906-31A239D0B6D1}"/>
+                <a16:creationId xmlns:a16="http://schemas.microsoft.com/office/drawing/2014/main" id="{811D67E8-C554-4FAB-9785-2A691027C6D0}"/>
               </a:ext>
             </a:extLst>
           </p:cNvPr>
@@ -11733,7 +11605,7 @@
           <p:cNvPr id="133" name="audit-trace-title">
             <a:extLst xmlns:a="http://schemas.openxmlformats.org/drawingml/2006/main">
               <a:ext uri="{FF2B5EF4-FFF2-40B4-BE49-F238E27FC236}">
-                <a16:creationId xmlns:a16="http://schemas.microsoft.com/office/drawing/2014/main" id="{33D5880E-DD0F-4129-8E08-1ABE1F7B051E}"/>
+                <a16:creationId xmlns:a16="http://schemas.microsoft.com/office/drawing/2014/main" id="{48D9FD62-38AE-471F-85FA-2610E00BF451}"/>
               </a:ext>
             </a:extLst>
           </p:cNvPr>
@@ -11779,7 +11651,7 @@
           <p:cNvPr id="134" name="audit-trace-fields">
             <a:extLst xmlns:a="http://schemas.openxmlformats.org/drawingml/2006/main">
               <a:ext uri="{FF2B5EF4-FFF2-40B4-BE49-F238E27FC236}">
-                <a16:creationId xmlns:a16="http://schemas.microsoft.com/office/drawing/2014/main" id="{7B1CF627-AC30-4026-8FAE-E7456340F5B9}"/>
+                <a16:creationId xmlns:a16="http://schemas.microsoft.com/office/drawing/2014/main" id="{752B276C-6A93-4408-8653-05E86BA3CC3E}"/>
               </a:ext>
             </a:extLst>
           </p:cNvPr>
@@ -11825,7 +11697,7 @@
           <p:cNvPr id="135" name="decision-kicker">
             <a:extLst xmlns:a="http://schemas.openxmlformats.org/drawingml/2006/main">
               <a:ext uri="{FF2B5EF4-FFF2-40B4-BE49-F238E27FC236}">
-                <a16:creationId xmlns:a16="http://schemas.microsoft.com/office/drawing/2014/main" id="{F297BD86-FF1A-4077-BE97-4F83E7D5C20D}"/>
+                <a16:creationId xmlns:a16="http://schemas.microsoft.com/office/drawing/2014/main" id="{862725C0-5968-400D-9414-0A3B3124D996}"/>
               </a:ext>
             </a:extLst>
           </p:cNvPr>
@@ -11871,7 +11743,7 @@
           <p:cNvPr id="136" name="accept">
             <a:extLst xmlns:a="http://schemas.openxmlformats.org/drawingml/2006/main">
               <a:ext uri="{FF2B5EF4-FFF2-40B4-BE49-F238E27FC236}">
-                <a16:creationId xmlns:a16="http://schemas.microsoft.com/office/drawing/2014/main" id="{B071C4C3-442E-4A17-9B65-E90DE107A6E5}"/>
+                <a16:creationId xmlns:a16="http://schemas.microsoft.com/office/drawing/2014/main" id="{4261530C-28E1-4EEC-A86F-4C192EDA567E}"/>
               </a:ext>
             </a:extLst>
           </p:cNvPr>
@@ -11906,7 +11778,7 @@
           <p:cNvPr id="137" name="accept-rail">
             <a:extLst xmlns:a="http://schemas.openxmlformats.org/drawingml/2006/main">
               <a:ext uri="{FF2B5EF4-FFF2-40B4-BE49-F238E27FC236}">
-                <a16:creationId xmlns:a16="http://schemas.microsoft.com/office/drawing/2014/main" id="{D77297A6-A64F-4583-B8A4-2746C1710BCC}"/>
+                <a16:creationId xmlns:a16="http://schemas.microsoft.com/office/drawing/2014/main" id="{D03C6D4E-6BE3-4097-8930-DBCE2CA1E80F}"/>
               </a:ext>
             </a:extLst>
           </p:cNvPr>
@@ -11937,7 +11809,7 @@
           <p:cNvPr id="138" name="accept-title">
             <a:extLst xmlns:a="http://schemas.openxmlformats.org/drawingml/2006/main">
               <a:ext uri="{FF2B5EF4-FFF2-40B4-BE49-F238E27FC236}">
-                <a16:creationId xmlns:a16="http://schemas.microsoft.com/office/drawing/2014/main" id="{AFD021DA-1FC6-42FF-88CB-4E317078981F}"/>
+                <a16:creationId xmlns:a16="http://schemas.microsoft.com/office/drawing/2014/main" id="{8D2CD6E8-9DAE-4533-B9DE-5879C51945FA}"/>
               </a:ext>
             </a:extLst>
           </p:cNvPr>
@@ -11983,7 +11855,7 @@
           <p:cNvPr id="139" name="accept-note">
             <a:extLst xmlns:a="http://schemas.openxmlformats.org/drawingml/2006/main">
               <a:ext uri="{FF2B5EF4-FFF2-40B4-BE49-F238E27FC236}">
-                <a16:creationId xmlns:a16="http://schemas.microsoft.com/office/drawing/2014/main" id="{23841601-911E-4DF9-B137-0F8CC2D6C92C}"/>
+                <a16:creationId xmlns:a16="http://schemas.microsoft.com/office/drawing/2014/main" id="{93706556-4FDE-46EC-8B73-EEF32B3319EE}"/>
               </a:ext>
             </a:extLst>
           </p:cNvPr>
@@ -12029,7 +11901,7 @@
           <p:cNvPr id="140" name="reject">
             <a:extLst xmlns:a="http://schemas.openxmlformats.org/drawingml/2006/main">
               <a:ext uri="{FF2B5EF4-FFF2-40B4-BE49-F238E27FC236}">
-                <a16:creationId xmlns:a16="http://schemas.microsoft.com/office/drawing/2014/main" id="{BF1D81E3-4C60-4E3D-B4E1-6325429BF51E}"/>
+                <a16:creationId xmlns:a16="http://schemas.microsoft.com/office/drawing/2014/main" id="{F2BC71A1-98CF-4A0A-BDA8-E312167D9617}"/>
               </a:ext>
             </a:extLst>
           </p:cNvPr>
@@ -12064,7 +11936,7 @@
           <p:cNvPr id="141" name="reject-rail">
             <a:extLst xmlns:a="http://schemas.openxmlformats.org/drawingml/2006/main">
               <a:ext uri="{FF2B5EF4-FFF2-40B4-BE49-F238E27FC236}">
-                <a16:creationId xmlns:a16="http://schemas.microsoft.com/office/drawing/2014/main" id="{970F7586-4CA1-43C5-9C95-DEA80AB04C6B}"/>
+                <a16:creationId xmlns:a16="http://schemas.microsoft.com/office/drawing/2014/main" id="{AEFEA6BA-138C-4E0B-8637-DAF35AB4FC55}"/>
               </a:ext>
             </a:extLst>
           </p:cNvPr>
@@ -12095,7 +11967,7 @@
           <p:cNvPr id="142" name="reject-title">
             <a:extLst xmlns:a="http://schemas.openxmlformats.org/drawingml/2006/main">
               <a:ext uri="{FF2B5EF4-FFF2-40B4-BE49-F238E27FC236}">
-                <a16:creationId xmlns:a16="http://schemas.microsoft.com/office/drawing/2014/main" id="{653ECA83-C33B-4136-BBC6-DE176B1A262F}"/>
+                <a16:creationId xmlns:a16="http://schemas.microsoft.com/office/drawing/2014/main" id="{E80B4077-9E29-47E8-9DC0-0DB0FF9F663C}"/>
               </a:ext>
             </a:extLst>
           </p:cNvPr>
@@ -12141,7 +12013,7 @@
           <p:cNvPr id="143" name="reject-note">
             <a:extLst xmlns:a="http://schemas.openxmlformats.org/drawingml/2006/main">
               <a:ext uri="{FF2B5EF4-FFF2-40B4-BE49-F238E27FC236}">
-                <a16:creationId xmlns:a16="http://schemas.microsoft.com/office/drawing/2014/main" id="{3B934CD3-DADC-40F5-948E-BD1E71A6BE70}"/>
+                <a16:creationId xmlns:a16="http://schemas.microsoft.com/office/drawing/2014/main" id="{CC58878C-BEB6-4C58-AD4F-B5A3BC1C3C74}"/>
               </a:ext>
             </a:extLst>
           </p:cNvPr>
@@ -12187,7 +12059,7 @@
           <p:cNvPr id="144" name="invalid">
             <a:extLst xmlns:a="http://schemas.openxmlformats.org/drawingml/2006/main">
               <a:ext uri="{FF2B5EF4-FFF2-40B4-BE49-F238E27FC236}">
-                <a16:creationId xmlns:a16="http://schemas.microsoft.com/office/drawing/2014/main" id="{01097D63-F7C7-40ED-83E7-0ED544D03D03}"/>
+                <a16:creationId xmlns:a16="http://schemas.microsoft.com/office/drawing/2014/main" id="{3769C143-9E9B-4441-A78B-7FEF82EA703E}"/>
               </a:ext>
             </a:extLst>
           </p:cNvPr>
@@ -12222,7 +12094,7 @@
           <p:cNvPr id="145" name="invalid-rail">
             <a:extLst xmlns:a="http://schemas.openxmlformats.org/drawingml/2006/main">
               <a:ext uri="{FF2B5EF4-FFF2-40B4-BE49-F238E27FC236}">
-                <a16:creationId xmlns:a16="http://schemas.microsoft.com/office/drawing/2014/main" id="{A6653B67-D21C-403F-961A-5B044D0A7A27}"/>
+                <a16:creationId xmlns:a16="http://schemas.microsoft.com/office/drawing/2014/main" id="{C009F755-5F02-4B35-B9F9-3F5415D8C972}"/>
               </a:ext>
             </a:extLst>
           </p:cNvPr>
@@ -12253,7 +12125,7 @@
           <p:cNvPr id="146" name="invalid-title">
             <a:extLst xmlns:a="http://schemas.openxmlformats.org/drawingml/2006/main">
               <a:ext uri="{FF2B5EF4-FFF2-40B4-BE49-F238E27FC236}">
-                <a16:creationId xmlns:a16="http://schemas.microsoft.com/office/drawing/2014/main" id="{E6A02DB0-2E48-42EE-AB0D-2109F0E470D9}"/>
+                <a16:creationId xmlns:a16="http://schemas.microsoft.com/office/drawing/2014/main" id="{A6E1886B-8620-4AA8-B3A8-0E9F7E67213A}"/>
               </a:ext>
             </a:extLst>
           </p:cNvPr>
@@ -12299,7 +12171,7 @@
           <p:cNvPr id="147" name="invalid-note">
             <a:extLst xmlns:a="http://schemas.openxmlformats.org/drawingml/2006/main">
               <a:ext uri="{FF2B5EF4-FFF2-40B4-BE49-F238E27FC236}">
-                <a16:creationId xmlns:a16="http://schemas.microsoft.com/office/drawing/2014/main" id="{5CB7FA80-E265-432F-AD6D-967D4D3858B7}"/>
+                <a16:creationId xmlns:a16="http://schemas.microsoft.com/office/drawing/2014/main" id="{64A24D5E-BC33-41F2-AB6D-D9630C210243}"/>
               </a:ext>
             </a:extLst>
           </p:cNvPr>
@@ -12345,7 +12217,7 @@
           <p:cNvPr id="148" name="evidence-kicker">
             <a:extLst xmlns:a="http://schemas.openxmlformats.org/drawingml/2006/main">
               <a:ext uri="{FF2B5EF4-FFF2-40B4-BE49-F238E27FC236}">
-                <a16:creationId xmlns:a16="http://schemas.microsoft.com/office/drawing/2014/main" id="{F93730DC-82E3-4FE8-A547-B05FDFBF2803}"/>
+                <a16:creationId xmlns:a16="http://schemas.microsoft.com/office/drawing/2014/main" id="{6F871021-17FE-4B94-AB49-EFFFA2593F33}"/>
               </a:ext>
             </a:extLst>
           </p:cNvPr>
@@ -12391,7 +12263,7 @@
           <p:cNvPr id="149" name="evidence-title">
             <a:extLst xmlns:a="http://schemas.openxmlformats.org/drawingml/2006/main">
               <a:ext uri="{FF2B5EF4-FFF2-40B4-BE49-F238E27FC236}">
-                <a16:creationId xmlns:a16="http://schemas.microsoft.com/office/drawing/2014/main" id="{B3F910ED-1EEF-4F5A-ACE0-CE9F3184CDC2}"/>
+                <a16:creationId xmlns:a16="http://schemas.microsoft.com/office/drawing/2014/main" id="{DC992036-ACA6-4D41-BD36-6AD5F705AFBC}"/>
               </a:ext>
             </a:extLst>
           </p:cNvPr>
@@ -12437,7 +12309,7 @@
           <p:cNvPr id="150" name="evidence-fields">
             <a:extLst xmlns:a="http://schemas.openxmlformats.org/drawingml/2006/main">
               <a:ext uri="{FF2B5EF4-FFF2-40B4-BE49-F238E27FC236}">
-                <a16:creationId xmlns:a16="http://schemas.microsoft.com/office/drawing/2014/main" id="{D6DFDE03-F852-4465-A41E-037BDFB9FF4A}"/>
+                <a16:creationId xmlns:a16="http://schemas.microsoft.com/office/drawing/2014/main" id="{F5F88C66-E595-4714-8D67-AE09FFCF5155}"/>
               </a:ext>
             </a:extLst>
           </p:cNvPr>
@@ -12457,7 +12329,7 @@
         </p:spPr>
         <p:txBody>
           <a:bodyPr xmlns:a="http://schemas.openxmlformats.org/drawingml/2006/main" wrap="square" lIns="0" tIns="0" rIns="0" bIns="0" anchor="ctr">
-            <a:normAutofit fontScale="98027"/>
+            <a:normAutofit fontScale="88027"/>
           </a:bodyPr>
           <a:lstStyle xmlns:a="http://schemas.openxmlformats.org/drawingml/2006/main"/>
           <a:p xmlns:a="http://schemas.openxmlformats.org/drawingml/2006/main">
@@ -12480,14 +12352,14 @@
       </p:sp>
       <p:pic>
         <p:nvPicPr>
-          <p:cNvPr id="474" name="图片 310"/>
+          <p:cNvPr id="629" name="图片 310"/>
           <p:cNvPicPr>
             <a:picLocks xmlns:a="http://schemas.openxmlformats.org/drawingml/2006/main" noChangeAspect="1"/>
           </p:cNvPicPr>
           <p:nvPr/>
         </p:nvPicPr>
         <p:blipFill>
-          <a:blip xmlns:r="http://schemas.openxmlformats.org/officeDocument/2006/relationships" xmlns:a="http://schemas.openxmlformats.org/drawingml/2006/main" r:embed="R226dad76a94547ec"/>
+          <a:blip xmlns:r="http://schemas.openxmlformats.org/officeDocument/2006/relationships" xmlns:a="http://schemas.openxmlformats.org/drawingml/2006/main" r:embed="Rf9a3fb5956504300"/>
           <a:stretch xmlns:a="http://schemas.openxmlformats.org/drawingml/2006/main">
             <a:fillRect l="0" t="0" r="0" b="0"/>
           </a:stretch>
@@ -12504,14 +12376,14 @@
       </p:pic>
       <p:pic>
         <p:nvPicPr>
-          <p:cNvPr id="475" name="图片 311"/>
+          <p:cNvPr id="630" name="图片 311"/>
           <p:cNvPicPr>
             <a:picLocks xmlns:a="http://schemas.openxmlformats.org/drawingml/2006/main" noChangeAspect="1"/>
           </p:cNvPicPr>
           <p:nvPr/>
         </p:nvPicPr>
         <p:blipFill>
-          <a:blip xmlns:r="http://schemas.openxmlformats.org/officeDocument/2006/relationships" xmlns:a="http://schemas.openxmlformats.org/drawingml/2006/main" r:embed="R60035c73b9884983"/>
+          <a:blip xmlns:r="http://schemas.openxmlformats.org/officeDocument/2006/relationships" xmlns:a="http://schemas.openxmlformats.org/drawingml/2006/main" r:embed="R0fa70ce16cff429e"/>
           <a:stretch xmlns:a="http://schemas.openxmlformats.org/drawingml/2006/main">
             <a:fillRect l="0" t="0" r="0" b="0"/>
           </a:stretch>
@@ -12528,14 +12400,14 @@
       </p:pic>
       <p:pic>
         <p:nvPicPr>
-          <p:cNvPr id="476" name="图片 312"/>
+          <p:cNvPr id="631" name="图片 312"/>
           <p:cNvPicPr>
             <a:picLocks xmlns:a="http://schemas.openxmlformats.org/drawingml/2006/main" noChangeAspect="1"/>
           </p:cNvPicPr>
           <p:nvPr/>
         </p:nvPicPr>
         <p:blipFill>
-          <a:blip xmlns:r="http://schemas.openxmlformats.org/officeDocument/2006/relationships" xmlns:a="http://schemas.openxmlformats.org/drawingml/2006/main" r:embed="Rdae7b38044e74459"/>
+          <a:blip xmlns:r="http://schemas.openxmlformats.org/officeDocument/2006/relationships" xmlns:a="http://schemas.openxmlformats.org/drawingml/2006/main" r:embed="Raa09843d61c94e5a"/>
           <a:stretch xmlns:a="http://schemas.openxmlformats.org/drawingml/2006/main">
             <a:fillRect l="0" t="0" r="0" b="0"/>
           </a:stretch>
@@ -12555,7 +12427,7 @@
           <p:cNvPr id="154" name="candidate-to-protocol-visible-head">
             <a:extLst xmlns:a="http://schemas.openxmlformats.org/drawingml/2006/main">
               <a:ext uri="{FF2B5EF4-FFF2-40B4-BE49-F238E27FC236}">
-                <a16:creationId xmlns:a16="http://schemas.microsoft.com/office/drawing/2014/main" id="{1FE51E08-F9DE-4E3C-B5CC-249AB1A738EE}"/>
+                <a16:creationId xmlns:a16="http://schemas.microsoft.com/office/drawing/2014/main" id="{FF1AB76B-37FD-4409-B8E5-503A64F6AEAA}"/>
               </a:ext>
             </a:extLst>
           </p:cNvPr>
@@ -12588,7 +12460,7 @@
           <p:cNvPr id="155" name="visible-stage-arrow-map-freeze">
             <a:extLst xmlns:a="http://schemas.openxmlformats.org/drawingml/2006/main">
               <a:ext uri="{FF2B5EF4-FFF2-40B4-BE49-F238E27FC236}">
-                <a16:creationId xmlns:a16="http://schemas.microsoft.com/office/drawing/2014/main" id="{5377E05A-B4C4-4450-97EF-94BAC8D220B3}"/>
+                <a16:creationId xmlns:a16="http://schemas.microsoft.com/office/drawing/2014/main" id="{651C6AFD-6695-4258-944B-5CEDBE403F11}"/>
               </a:ext>
             </a:extLst>
           </p:cNvPr>
@@ -12621,7 +12493,7 @@
           <p:cNvPr id="156" name="visible-stage-arrow-freeze-run">
             <a:extLst xmlns:a="http://schemas.openxmlformats.org/drawingml/2006/main">
               <a:ext uri="{FF2B5EF4-FFF2-40B4-BE49-F238E27FC236}">
-                <a16:creationId xmlns:a16="http://schemas.microsoft.com/office/drawing/2014/main" id="{E328732D-6DA0-4C10-9E54-F6AD02273230}"/>
+                <a16:creationId xmlns:a16="http://schemas.microsoft.com/office/drawing/2014/main" id="{B0658829-6B47-4667-BCAB-214268A95CB3}"/>
               </a:ext>
             </a:extLst>
           </p:cNvPr>
@@ -12654,7 +12526,7 @@
           <p:cNvPr id="157" name="visible-stage-arrow-run-verify">
             <a:extLst xmlns:a="http://schemas.openxmlformats.org/drawingml/2006/main">
               <a:ext uri="{FF2B5EF4-FFF2-40B4-BE49-F238E27FC236}">
-                <a16:creationId xmlns:a16="http://schemas.microsoft.com/office/drawing/2014/main" id="{31096938-266D-44D2-A65C-5BB106EBF928}"/>
+                <a16:creationId xmlns:a16="http://schemas.microsoft.com/office/drawing/2014/main" id="{8F8B55DE-EE4E-4BFA-B830-55A7A09FFF4F}"/>
               </a:ext>
             </a:extLst>
           </p:cNvPr>
@@ -12684,7 +12556,7 @@
       </p:sp>
       <p:cxnSp>
         <p:nvCxnSpPr>
-          <p:cNvPr id="481" name="visible-package-freeze-route"/>
+          <p:cNvPr id="636" name="visible-package-freeze-route"/>
           <p:cNvCxnSpPr/>
           <p:nvPr/>
         </p:nvCxnSpPr>
@@ -12706,7 +12578,7 @@
       </p:cxnSp>
       <p:cxnSp>
         <p:nvCxnSpPr>
-          <p:cNvPr id="482" name="visible-package-freeze-rise"/>
+          <p:cNvPr id="637" name="visible-package-freeze-rise"/>
           <p:cNvCxnSpPr/>
           <p:nvPr/>
         </p:nvCxnSpPr>
@@ -12731,7 +12603,7 @@
           <p:cNvPr id="160" name="visible-package-freeze-head">
             <a:extLst xmlns:a="http://schemas.openxmlformats.org/drawingml/2006/main">
               <a:ext uri="{FF2B5EF4-FFF2-40B4-BE49-F238E27FC236}">
-                <a16:creationId xmlns:a16="http://schemas.microsoft.com/office/drawing/2014/main" id="{42E15C92-4DB8-4990-B06E-4586EB8ECA5B}"/>
+                <a16:creationId xmlns:a16="http://schemas.microsoft.com/office/drawing/2014/main" id="{78D9C3AE-6B9F-4B5F-831B-0F1DDC765A58}"/>
               </a:ext>
             </a:extLst>
           </p:cNvPr>
@@ -12764,7 +12636,7 @@
           <p:cNvPr id="323" name="external-simplifier-branch">
             <a:extLst xmlns:a="http://schemas.openxmlformats.org/drawingml/2006/main">
               <a:ext uri="{FF2B5EF4-FFF2-40B4-BE49-F238E27FC236}">
-                <a16:creationId xmlns:a16="http://schemas.microsoft.com/office/drawing/2014/main" id="{DFB8458D-D666-44A8-943C-F2D9DBC0416E}"/>
+                <a16:creationId xmlns:a16="http://schemas.microsoft.com/office/drawing/2014/main" id="{F17750B2-61E6-4FD3-9066-6317C38A2D58}"/>
               </a:ext>
             </a:extLst>
           </p:cNvPr>
@@ -12797,7 +12669,7 @@
           <p:cNvPr id="324" name="candidate-to-renderer">
             <a:extLst xmlns:a="http://schemas.openxmlformats.org/drawingml/2006/main">
               <a:ext uri="{FF2B5EF4-FFF2-40B4-BE49-F238E27FC236}">
-                <a16:creationId xmlns:a16="http://schemas.microsoft.com/office/drawing/2014/main" id="{808E2914-2E6A-43BE-86AC-20237F683F34}"/>
+                <a16:creationId xmlns:a16="http://schemas.microsoft.com/office/drawing/2014/main" id="{144D5046-EBBF-423B-B379-243167BA4378}"/>
               </a:ext>
             </a:extLst>
           </p:cNvPr>
@@ -12830,7 +12702,7 @@
           <p:cNvPr id="325" name="renderer-to-simplified">
             <a:extLst xmlns:a="http://schemas.openxmlformats.org/drawingml/2006/main">
               <a:ext uri="{FF2B5EF4-FFF2-40B4-BE49-F238E27FC236}">
-                <a16:creationId xmlns:a16="http://schemas.microsoft.com/office/drawing/2014/main" id="{E91D681B-5102-49A7-A951-B281455664BB}"/>
+                <a16:creationId xmlns:a16="http://schemas.microsoft.com/office/drawing/2014/main" id="{41AD2CB6-62D2-4879-A046-7263ABF969BE}"/>
               </a:ext>
             </a:extLst>
           </p:cNvPr>
@@ -12858,10 +12730,3990 @@
           </a:ln>
         </p:spPr>
       </p:sp>
+      <p:cxnSp>
+        <p:nvCxnSpPr>
+          <p:cNvPr id="642" name="直接箭头连接符 1"/>
+          <p:cNvCxnSpPr>
+            <a:stCxn xmlns:a="http://schemas.openxmlformats.org/drawingml/2006/main" id="56" idx="3"/>
+            <a:endCxn xmlns:a="http://schemas.openxmlformats.org/drawingml/2006/main" id="57" idx="7"/>
+          </p:cNvCxnSpPr>
+          <p:nvPr/>
+        </p:nvCxnSpPr>
+        <p:spPr>
+          <a:xfrm xmlns:a="http://schemas.openxmlformats.org/drawingml/2006/main" flipH="1">
+            <a:off x="1891665" y="1648460"/>
+            <a:ext cx="271780" cy="189230"/>
+          </a:xfrm>
+          <a:prstGeom xmlns:a="http://schemas.openxmlformats.org/drawingml/2006/main" prst="straightConnector1">
+            <a:avLst/>
+          </a:prstGeom>
+          <a:ln xmlns:a="http://schemas.openxmlformats.org/drawingml/2006/main">
+            <a:solidFill>
+              <a:srgbClr val="3578E5"/>
+            </a:solidFill>
+            <a:tailEnd type="arrow"/>
+          </a:ln>
+        </p:spPr>
+        <p:style>
+          <a:lnRef xmlns:a="http://schemas.openxmlformats.org/drawingml/2006/main" idx="2">
+            <a:schemeClr val="accent1"/>
+          </a:lnRef>
+          <a:fillRef xmlns:a="http://schemas.openxmlformats.org/drawingml/2006/main" idx="0">
+            <a:srgbClr val="FFFFFF"/>
+          </a:fillRef>
+          <a:effectRef xmlns:a="http://schemas.openxmlformats.org/drawingml/2006/main" idx="0">
+            <a:srgbClr val="FFFFFF"/>
+          </a:effectRef>
+          <a:fontRef xmlns:a="http://schemas.openxmlformats.org/drawingml/2006/main" idx="minor">
+            <a:schemeClr val="tx1"/>
+          </a:fontRef>
+        </p:style>
+      </p:cxnSp>
+      <p:cxnSp>
+        <p:nvCxnSpPr>
+          <p:cNvPr id="643" name="直接箭头连接符 2"/>
+          <p:cNvCxnSpPr>
+            <a:stCxn xmlns:a="http://schemas.openxmlformats.org/drawingml/2006/main" id="56" idx="4"/>
+            <a:endCxn xmlns:a="http://schemas.openxmlformats.org/drawingml/2006/main" id="60" idx="0"/>
+          </p:cNvCxnSpPr>
+          <p:nvPr/>
+        </p:nvCxnSpPr>
+        <p:spPr>
+          <a:xfrm xmlns:a="http://schemas.openxmlformats.org/drawingml/2006/main">
+            <a:off x="2230755" y="1676400"/>
+            <a:ext cx="259080" cy="304800"/>
+          </a:xfrm>
+          <a:prstGeom xmlns:a="http://schemas.openxmlformats.org/drawingml/2006/main" prst="straightConnector1">
+            <a:avLst/>
+          </a:prstGeom>
+          <a:ln xmlns:a="http://schemas.openxmlformats.org/drawingml/2006/main">
+            <a:solidFill>
+              <a:srgbClr val="3578E5"/>
+            </a:solidFill>
+            <a:tailEnd type="arrow"/>
+          </a:ln>
+        </p:spPr>
+        <p:style>
+          <a:lnRef xmlns:a="http://schemas.openxmlformats.org/drawingml/2006/main" idx="2">
+            <a:schemeClr val="accent1"/>
+          </a:lnRef>
+          <a:fillRef xmlns:a="http://schemas.openxmlformats.org/drawingml/2006/main" idx="0">
+            <a:srgbClr val="FFFFFF"/>
+          </a:fillRef>
+          <a:effectRef xmlns:a="http://schemas.openxmlformats.org/drawingml/2006/main" idx="0">
+            <a:srgbClr val="FFFFFF"/>
+          </a:effectRef>
+          <a:fontRef xmlns:a="http://schemas.openxmlformats.org/drawingml/2006/main" idx="minor">
+            <a:schemeClr val="tx1"/>
+          </a:fontRef>
+        </p:style>
+      </p:cxnSp>
     </p:spTree>
     <p:extLst>
       <p:ext uri="{BB962C8B-B14F-4D97-AF65-F5344CB8AC3E}">
-        <p14:creationId xmlns:p14="http://schemas.microsoft.com/office/powerpoint/2010/main" val="2063836653"/>
+        <p14:creationId xmlns:p14="http://schemas.microsoft.com/office/powerpoint/2010/main" val="989153853"/>
+      </p:ext>
+    </p:extLst>
+  </p:cSld>
+</p:sld>
+</file>
+
+<file path=ppt/slides/slide3.xml><?xml version="1.0" encoding="utf-8"?>
+<p:sld xmlns:p="http://schemas.openxmlformats.org/presentationml/2006/main">
+  <p:cSld>
+    <p:bg>
+      <p:bgPr>
+        <a:solidFill xmlns:a="http://schemas.openxmlformats.org/drawingml/2006/main">
+          <a:srgbClr val="FFFFFF"/>
+        </a:solidFill>
+      </p:bgPr>
+    </p:bg>
+    <p:spTree>
+      <p:nvGrpSpPr>
+        <p:cNvPr id="1" name=""/>
+        <p:cNvGrpSpPr/>
+        <p:nvPr/>
+      </p:nvGrpSpPr>
+      <p:grpSpPr>
+        <a:xfrm xmlns:a="http://schemas.openxmlformats.org/drawingml/2006/main"/>
+      </p:grpSpPr>
+      <p:sp>
+        <p:nvSpPr>
+          <p:cNvPr id="107" name="dag-components-title">
+            <a:extLst xmlns:a="http://schemas.openxmlformats.org/drawingml/2006/main">
+              <a:ext uri="{FF2B5EF4-FFF2-40B4-BE49-F238E27FC236}">
+                <a16:creationId xmlns:a16="http://schemas.microsoft.com/office/drawing/2014/main" id="{0B929896-C517-466F-9490-DFB35BDDCF2D}"/>
+              </a:ext>
+            </a:extLst>
+          </p:cNvPr>
+          <p:cNvSpPr>
+            <a:spLocks xmlns:a="http://schemas.openxmlformats.org/drawingml/2006/main" noGrp="1"/>
+          </p:cNvSpPr>
+          <p:nvPr/>
+        </p:nvSpPr>
+        <p:spPr>
+          <a:xfrm xmlns:a="http://schemas.openxmlformats.org/drawingml/2006/main">
+            <a:off x="400050" y="323850"/>
+            <a:ext cx="4953000" cy="361950"/>
+          </a:xfrm>
+          <a:prstGeom xmlns:a="http://schemas.openxmlformats.org/drawingml/2006/main" prst="rect">
+            <a:avLst/>
+          </a:prstGeom>
+          <a:noFill xmlns:a="http://schemas.openxmlformats.org/drawingml/2006/main"/>
+          <a:ln xmlns:a="http://schemas.openxmlformats.org/drawingml/2006/main" w="0">
+            <a:noFill/>
+            <a:prstDash val="solid"/>
+          </a:ln>
+        </p:spPr>
+        <p:txBody>
+          <a:bodyPr xmlns:a="http://schemas.openxmlformats.org/drawingml/2006/main" anchor="ctr"/>
+          <a:lstStyle xmlns:a="http://schemas.openxmlformats.org/drawingml/2006/main"/>
+          <a:p xmlns:a="http://schemas.openxmlformats.org/drawingml/2006/main">
+            <a:pPr algn="l">
+              <a:defRPr sz="1875" b="1">
+                <a:solidFill>
+                  <a:srgbClr val="17212B"/>
+                </a:solidFill>
+              </a:defRPr>
+            </a:pPr>
+            <a:r>
+              <a:rPr sz="1875" b="1">
+                <a:solidFill>
+                  <a:srgbClr val="17212B"/>
+                </a:solidFill>
+              </a:rPr>
+              <a:t>EDITABLE DAG COMPONENTS</a:t>
+            </a:r>
+          </a:p>
+        </p:txBody>
+      </p:sp>
+      <p:sp>
+        <p:nvSpPr>
+          <p:cNvPr id="2" name="dag-components-subtitle">
+            <a:extLst xmlns:a="http://schemas.openxmlformats.org/drawingml/2006/main">
+              <a:ext uri="{FF2B5EF4-FFF2-40B4-BE49-F238E27FC236}">
+                <a16:creationId xmlns:a16="http://schemas.microsoft.com/office/drawing/2014/main" id="{9061CCB0-1A32-4135-9927-A650E1AAE0E1}"/>
+              </a:ext>
+            </a:extLst>
+          </p:cNvPr>
+          <p:cNvSpPr>
+            <a:spLocks xmlns:a="http://schemas.openxmlformats.org/drawingml/2006/main" noGrp="1"/>
+          </p:cNvSpPr>
+          <p:nvPr/>
+        </p:nvSpPr>
+        <p:spPr>
+          <a:xfrm xmlns:a="http://schemas.openxmlformats.org/drawingml/2006/main">
+            <a:off x="400050" y="685800"/>
+            <a:ext cx="4953000" cy="228600"/>
+          </a:xfrm>
+          <a:prstGeom xmlns:a="http://schemas.openxmlformats.org/drawingml/2006/main" prst="rect">
+            <a:avLst/>
+          </a:prstGeom>
+          <a:noFill xmlns:a="http://schemas.openxmlformats.org/drawingml/2006/main"/>
+          <a:ln xmlns:a="http://schemas.openxmlformats.org/drawingml/2006/main" w="0">
+            <a:noFill/>
+            <a:prstDash val="solid"/>
+          </a:ln>
+        </p:spPr>
+        <p:txBody>
+          <a:bodyPr xmlns:a="http://schemas.openxmlformats.org/drawingml/2006/main" anchor="ctr"/>
+          <a:lstStyle xmlns:a="http://schemas.openxmlformats.org/drawingml/2006/main"/>
+          <a:p xmlns:a="http://schemas.openxmlformats.org/drawingml/2006/main">
+            <a:pPr algn="l">
+              <a:defRPr sz="900" b="0">
+                <a:solidFill>
+                  <a:srgbClr val="657387"/>
+                </a:solidFill>
+              </a:defRPr>
+            </a:pPr>
+            <a:r>
+              <a:rPr sz="900" b="0">
+                <a:solidFill>
+                  <a:srgbClr val="657387"/>
+                </a:solidFill>
+              </a:rPr>
+              <a:t>Native PowerPoint shapes  |  copy, recolor, reconnect</a:t>
+            </a:r>
+          </a:p>
+        </p:txBody>
+      </p:sp>
+      <p:sp>
+        <p:nvSpPr>
+          <p:cNvPr id="3" name="dag-components-title-rule">
+            <a:extLst xmlns:a="http://schemas.openxmlformats.org/drawingml/2006/main">
+              <a:ext uri="{FF2B5EF4-FFF2-40B4-BE49-F238E27FC236}">
+                <a16:creationId xmlns:a16="http://schemas.microsoft.com/office/drawing/2014/main" id="{5D6AB190-17B8-43CC-A594-565B9043B025}"/>
+              </a:ext>
+            </a:extLst>
+          </p:cNvPr>
+          <p:cNvSpPr>
+            <a:spLocks xmlns:a="http://schemas.openxmlformats.org/drawingml/2006/main" noGrp="1"/>
+          </p:cNvSpPr>
+          <p:nvPr/>
+        </p:nvSpPr>
+        <p:spPr>
+          <a:xfrm xmlns:a="http://schemas.openxmlformats.org/drawingml/2006/main">
+            <a:off x="400050" y="1066800"/>
+            <a:ext cx="11391900" cy="19050"/>
+          </a:xfrm>
+          <a:prstGeom xmlns:a="http://schemas.openxmlformats.org/drawingml/2006/main" prst="rect">
+            <a:avLst/>
+          </a:prstGeom>
+          <a:solidFill xmlns:a="http://schemas.openxmlformats.org/drawingml/2006/main">
+            <a:srgbClr val="3478DC"/>
+          </a:solidFill>
+          <a:ln xmlns:a="http://schemas.openxmlformats.org/drawingml/2006/main" w="0">
+            <a:noFill/>
+            <a:prstDash val="solid"/>
+          </a:ln>
+        </p:spPr>
+      </p:sp>
+      <p:sp>
+        <p:nvSpPr>
+          <p:cNvPr id="4" name="example-dag-panel">
+            <a:extLst xmlns:a="http://schemas.openxmlformats.org/drawingml/2006/main">
+              <a:ext uri="{FF2B5EF4-FFF2-40B4-BE49-F238E27FC236}">
+                <a16:creationId xmlns:a16="http://schemas.microsoft.com/office/drawing/2014/main" id="{2A496C17-6B14-49CE-B856-5D778AC9D21E}"/>
+              </a:ext>
+            </a:extLst>
+          </p:cNvPr>
+          <p:cNvSpPr>
+            <a:spLocks xmlns:a="http://schemas.openxmlformats.org/drawingml/2006/main" noGrp="1"/>
+          </p:cNvSpPr>
+          <p:nvPr/>
+        </p:nvSpPr>
+        <p:spPr>
+          <a:xfrm xmlns:a="http://schemas.openxmlformats.org/drawingml/2006/main">
+            <a:off x="400050" y="1381125"/>
+            <a:ext cx="6667500" cy="2857500"/>
+          </a:xfrm>
+          <a:prstGeom xmlns:a="http://schemas.openxmlformats.org/drawingml/2006/main" prst="roundRect">
+            <a:avLst>
+              <a:gd name="adj" fmla="val 2667"/>
+            </a:avLst>
+          </a:prstGeom>
+          <a:solidFill xmlns:a="http://schemas.openxmlformats.org/drawingml/2006/main">
+            <a:srgbClr val="FBFCFE"/>
+          </a:solidFill>
+          <a:ln xmlns:a="http://schemas.openxmlformats.org/drawingml/2006/main" w="9525">
+            <a:solidFill>
+              <a:srgbClr val="CBD5E1"/>
+            </a:solidFill>
+            <a:prstDash val="solid"/>
+          </a:ln>
+        </p:spPr>
+      </p:sp>
+      <p:sp>
+        <p:nvSpPr>
+          <p:cNvPr id="5" name="example-dag-label">
+            <a:extLst xmlns:a="http://schemas.openxmlformats.org/drawingml/2006/main">
+              <a:ext uri="{FF2B5EF4-FFF2-40B4-BE49-F238E27FC236}">
+                <a16:creationId xmlns:a16="http://schemas.microsoft.com/office/drawing/2014/main" id="{B60D075A-69AF-413E-8019-841088A5DC0B}"/>
+              </a:ext>
+            </a:extLst>
+          </p:cNvPr>
+          <p:cNvSpPr>
+            <a:spLocks xmlns:a="http://schemas.openxmlformats.org/drawingml/2006/main" noGrp="1"/>
+          </p:cNvSpPr>
+          <p:nvPr/>
+        </p:nvSpPr>
+        <p:spPr>
+          <a:xfrm xmlns:a="http://schemas.openxmlformats.org/drawingml/2006/main">
+            <a:off x="571500" y="1504950"/>
+            <a:ext cx="1714500" cy="228600"/>
+          </a:xfrm>
+          <a:prstGeom xmlns:a="http://schemas.openxmlformats.org/drawingml/2006/main" prst="rect">
+            <a:avLst/>
+          </a:prstGeom>
+          <a:noFill xmlns:a="http://schemas.openxmlformats.org/drawingml/2006/main"/>
+          <a:ln xmlns:a="http://schemas.openxmlformats.org/drawingml/2006/main" w="0">
+            <a:noFill/>
+            <a:prstDash val="solid"/>
+          </a:ln>
+        </p:spPr>
+        <p:txBody>
+          <a:bodyPr xmlns:a="http://schemas.openxmlformats.org/drawingml/2006/main" anchor="ctr"/>
+          <a:lstStyle xmlns:a="http://schemas.openxmlformats.org/drawingml/2006/main"/>
+          <a:p xmlns:a="http://schemas.openxmlformats.org/drawingml/2006/main">
+            <a:pPr algn="l">
+              <a:defRPr sz="900" b="1">
+                <a:solidFill>
+                  <a:srgbClr val="164E8B"/>
+                </a:solidFill>
+              </a:defRPr>
+            </a:pPr>
+            <a:r>
+              <a:rPr sz="900" b="1">
+                <a:solidFill>
+                  <a:srgbClr val="164E8B"/>
+                </a:solidFill>
+              </a:rPr>
+              <a:t>EXAMPLE DAG</a:t>
+            </a:r>
+          </a:p>
+        </p:txBody>
+      </p:sp>
+      <p:sp>
+        <p:nvSpPr>
+          <p:cNvPr id="6" name="example-grid-v-1">
+            <a:extLst xmlns:a="http://schemas.openxmlformats.org/drawingml/2006/main">
+              <a:ext uri="{FF2B5EF4-FFF2-40B4-BE49-F238E27FC236}">
+                <a16:creationId xmlns:a16="http://schemas.microsoft.com/office/drawing/2014/main" id="{D27FDEF6-8E1E-486C-B89F-B18A2E160D53}"/>
+              </a:ext>
+            </a:extLst>
+          </p:cNvPr>
+          <p:cNvSpPr>
+            <a:spLocks xmlns:a="http://schemas.openxmlformats.org/drawingml/2006/main" noGrp="1"/>
+          </p:cNvSpPr>
+          <p:nvPr/>
+        </p:nvSpPr>
+        <p:spPr>
+          <a:xfrm xmlns:a="http://schemas.openxmlformats.org/drawingml/2006/main">
+            <a:off x="1098550" y="1847850"/>
+            <a:ext cx="9525" cy="2171700"/>
+          </a:xfrm>
+          <a:prstGeom xmlns:a="http://schemas.openxmlformats.org/drawingml/2006/main" prst="rect">
+            <a:avLst/>
+          </a:prstGeom>
+          <a:solidFill xmlns:a="http://schemas.openxmlformats.org/drawingml/2006/main">
+            <a:srgbClr val="E8EEF5"/>
+          </a:solidFill>
+          <a:ln xmlns:a="http://schemas.openxmlformats.org/drawingml/2006/main" w="0">
+            <a:noFill/>
+            <a:prstDash val="solid"/>
+          </a:ln>
+        </p:spPr>
+      </p:sp>
+      <p:sp>
+        <p:nvSpPr>
+          <p:cNvPr id="7" name="example-grid-v-2">
+            <a:extLst xmlns:a="http://schemas.openxmlformats.org/drawingml/2006/main">
+              <a:ext uri="{FF2B5EF4-FFF2-40B4-BE49-F238E27FC236}">
+                <a16:creationId xmlns:a16="http://schemas.microsoft.com/office/drawing/2014/main" id="{547FF0A3-78BF-4882-A9C1-9F900320E9DE}"/>
+              </a:ext>
+            </a:extLst>
+          </p:cNvPr>
+          <p:cNvSpPr>
+            <a:spLocks xmlns:a="http://schemas.openxmlformats.org/drawingml/2006/main" noGrp="1"/>
+          </p:cNvSpPr>
+          <p:nvPr/>
+        </p:nvSpPr>
+        <p:spPr>
+          <a:xfrm xmlns:a="http://schemas.openxmlformats.org/drawingml/2006/main">
+            <a:off x="1625600" y="1847850"/>
+            <a:ext cx="9525" cy="2171700"/>
+          </a:xfrm>
+          <a:prstGeom xmlns:a="http://schemas.openxmlformats.org/drawingml/2006/main" prst="rect">
+            <a:avLst/>
+          </a:prstGeom>
+          <a:solidFill xmlns:a="http://schemas.openxmlformats.org/drawingml/2006/main">
+            <a:srgbClr val="E8EEF5"/>
+          </a:solidFill>
+          <a:ln xmlns:a="http://schemas.openxmlformats.org/drawingml/2006/main" w="0">
+            <a:noFill/>
+            <a:prstDash val="solid"/>
+          </a:ln>
+        </p:spPr>
+      </p:sp>
+      <p:sp>
+        <p:nvSpPr>
+          <p:cNvPr id="8" name="example-grid-v-3">
+            <a:extLst xmlns:a="http://schemas.openxmlformats.org/drawingml/2006/main">
+              <a:ext uri="{FF2B5EF4-FFF2-40B4-BE49-F238E27FC236}">
+                <a16:creationId xmlns:a16="http://schemas.microsoft.com/office/drawing/2014/main" id="{629471F3-E80A-4868-BB81-9610E195E318}"/>
+              </a:ext>
+            </a:extLst>
+          </p:cNvPr>
+          <p:cNvSpPr>
+            <a:spLocks xmlns:a="http://schemas.openxmlformats.org/drawingml/2006/main" noGrp="1"/>
+          </p:cNvSpPr>
+          <p:nvPr/>
+        </p:nvSpPr>
+        <p:spPr>
+          <a:xfrm xmlns:a="http://schemas.openxmlformats.org/drawingml/2006/main">
+            <a:off x="2152650" y="1847850"/>
+            <a:ext cx="9525" cy="2171700"/>
+          </a:xfrm>
+          <a:prstGeom xmlns:a="http://schemas.openxmlformats.org/drawingml/2006/main" prst="rect">
+            <a:avLst/>
+          </a:prstGeom>
+          <a:solidFill xmlns:a="http://schemas.openxmlformats.org/drawingml/2006/main">
+            <a:srgbClr val="E8EEF5"/>
+          </a:solidFill>
+          <a:ln xmlns:a="http://schemas.openxmlformats.org/drawingml/2006/main" w="0">
+            <a:noFill/>
+            <a:prstDash val="solid"/>
+          </a:ln>
+        </p:spPr>
+      </p:sp>
+      <p:sp>
+        <p:nvSpPr>
+          <p:cNvPr id="9" name="example-grid-v-4">
+            <a:extLst xmlns:a="http://schemas.openxmlformats.org/drawingml/2006/main">
+              <a:ext uri="{FF2B5EF4-FFF2-40B4-BE49-F238E27FC236}">
+                <a16:creationId xmlns:a16="http://schemas.microsoft.com/office/drawing/2014/main" id="{31D2CD82-4CCF-4DC5-BA75-0D6DC45AA667}"/>
+              </a:ext>
+            </a:extLst>
+          </p:cNvPr>
+          <p:cNvSpPr>
+            <a:spLocks xmlns:a="http://schemas.openxmlformats.org/drawingml/2006/main" noGrp="1"/>
+          </p:cNvSpPr>
+          <p:nvPr/>
+        </p:nvSpPr>
+        <p:spPr>
+          <a:xfrm xmlns:a="http://schemas.openxmlformats.org/drawingml/2006/main">
+            <a:off x="2679700" y="1847850"/>
+            <a:ext cx="9525" cy="2171700"/>
+          </a:xfrm>
+          <a:prstGeom xmlns:a="http://schemas.openxmlformats.org/drawingml/2006/main" prst="rect">
+            <a:avLst/>
+          </a:prstGeom>
+          <a:solidFill xmlns:a="http://schemas.openxmlformats.org/drawingml/2006/main">
+            <a:srgbClr val="E8EEF5"/>
+          </a:solidFill>
+          <a:ln xmlns:a="http://schemas.openxmlformats.org/drawingml/2006/main" w="0">
+            <a:noFill/>
+            <a:prstDash val="solid"/>
+          </a:ln>
+        </p:spPr>
+      </p:sp>
+      <p:sp>
+        <p:nvSpPr>
+          <p:cNvPr id="10" name="example-grid-v-5">
+            <a:extLst xmlns:a="http://schemas.openxmlformats.org/drawingml/2006/main">
+              <a:ext uri="{FF2B5EF4-FFF2-40B4-BE49-F238E27FC236}">
+                <a16:creationId xmlns:a16="http://schemas.microsoft.com/office/drawing/2014/main" id="{66E67E59-B990-45E0-ACD1-9A148247A81E}"/>
+              </a:ext>
+            </a:extLst>
+          </p:cNvPr>
+          <p:cNvSpPr>
+            <a:spLocks xmlns:a="http://schemas.openxmlformats.org/drawingml/2006/main" noGrp="1"/>
+          </p:cNvSpPr>
+          <p:nvPr/>
+        </p:nvSpPr>
+        <p:spPr>
+          <a:xfrm xmlns:a="http://schemas.openxmlformats.org/drawingml/2006/main">
+            <a:off x="3206750" y="1847850"/>
+            <a:ext cx="9525" cy="2171700"/>
+          </a:xfrm>
+          <a:prstGeom xmlns:a="http://schemas.openxmlformats.org/drawingml/2006/main" prst="rect">
+            <a:avLst/>
+          </a:prstGeom>
+          <a:solidFill xmlns:a="http://schemas.openxmlformats.org/drawingml/2006/main">
+            <a:srgbClr val="E8EEF5"/>
+          </a:solidFill>
+          <a:ln xmlns:a="http://schemas.openxmlformats.org/drawingml/2006/main" w="0">
+            <a:noFill/>
+            <a:prstDash val="solid"/>
+          </a:ln>
+        </p:spPr>
+      </p:sp>
+      <p:sp>
+        <p:nvSpPr>
+          <p:cNvPr id="11" name="example-grid-v-6">
+            <a:extLst xmlns:a="http://schemas.openxmlformats.org/drawingml/2006/main">
+              <a:ext uri="{FF2B5EF4-FFF2-40B4-BE49-F238E27FC236}">
+                <a16:creationId xmlns:a16="http://schemas.microsoft.com/office/drawing/2014/main" id="{0ED61F11-470B-485A-A8E6-CCFD47361D39}"/>
+              </a:ext>
+            </a:extLst>
+          </p:cNvPr>
+          <p:cNvSpPr>
+            <a:spLocks xmlns:a="http://schemas.openxmlformats.org/drawingml/2006/main" noGrp="1"/>
+          </p:cNvSpPr>
+          <p:nvPr/>
+        </p:nvSpPr>
+        <p:spPr>
+          <a:xfrm xmlns:a="http://schemas.openxmlformats.org/drawingml/2006/main">
+            <a:off x="3733800" y="1847850"/>
+            <a:ext cx="9525" cy="2171700"/>
+          </a:xfrm>
+          <a:prstGeom xmlns:a="http://schemas.openxmlformats.org/drawingml/2006/main" prst="rect">
+            <a:avLst/>
+          </a:prstGeom>
+          <a:solidFill xmlns:a="http://schemas.openxmlformats.org/drawingml/2006/main">
+            <a:srgbClr val="E8EEF5"/>
+          </a:solidFill>
+          <a:ln xmlns:a="http://schemas.openxmlformats.org/drawingml/2006/main" w="0">
+            <a:noFill/>
+            <a:prstDash val="solid"/>
+          </a:ln>
+        </p:spPr>
+      </p:sp>
+      <p:sp>
+        <p:nvSpPr>
+          <p:cNvPr id="12" name="example-grid-v-7">
+            <a:extLst xmlns:a="http://schemas.openxmlformats.org/drawingml/2006/main">
+              <a:ext uri="{FF2B5EF4-FFF2-40B4-BE49-F238E27FC236}">
+                <a16:creationId xmlns:a16="http://schemas.microsoft.com/office/drawing/2014/main" id="{D2D766BE-91ED-4760-A8A8-1831715637F2}"/>
+              </a:ext>
+            </a:extLst>
+          </p:cNvPr>
+          <p:cNvSpPr>
+            <a:spLocks xmlns:a="http://schemas.openxmlformats.org/drawingml/2006/main" noGrp="1"/>
+          </p:cNvSpPr>
+          <p:nvPr/>
+        </p:nvSpPr>
+        <p:spPr>
+          <a:xfrm xmlns:a="http://schemas.openxmlformats.org/drawingml/2006/main">
+            <a:off x="4260850" y="1847850"/>
+            <a:ext cx="9525" cy="2171700"/>
+          </a:xfrm>
+          <a:prstGeom xmlns:a="http://schemas.openxmlformats.org/drawingml/2006/main" prst="rect">
+            <a:avLst/>
+          </a:prstGeom>
+          <a:solidFill xmlns:a="http://schemas.openxmlformats.org/drawingml/2006/main">
+            <a:srgbClr val="E8EEF5"/>
+          </a:solidFill>
+          <a:ln xmlns:a="http://schemas.openxmlformats.org/drawingml/2006/main" w="0">
+            <a:noFill/>
+            <a:prstDash val="solid"/>
+          </a:ln>
+        </p:spPr>
+      </p:sp>
+      <p:sp>
+        <p:nvSpPr>
+          <p:cNvPr id="13" name="example-grid-v-8">
+            <a:extLst xmlns:a="http://schemas.openxmlformats.org/drawingml/2006/main">
+              <a:ext uri="{FF2B5EF4-FFF2-40B4-BE49-F238E27FC236}">
+                <a16:creationId xmlns:a16="http://schemas.microsoft.com/office/drawing/2014/main" id="{F9B55047-E869-4070-BEF4-AECCF15FB719}"/>
+              </a:ext>
+            </a:extLst>
+          </p:cNvPr>
+          <p:cNvSpPr>
+            <a:spLocks xmlns:a="http://schemas.openxmlformats.org/drawingml/2006/main" noGrp="1"/>
+          </p:cNvSpPr>
+          <p:nvPr/>
+        </p:nvSpPr>
+        <p:spPr>
+          <a:xfrm xmlns:a="http://schemas.openxmlformats.org/drawingml/2006/main">
+            <a:off x="4787900" y="1847850"/>
+            <a:ext cx="9525" cy="2171700"/>
+          </a:xfrm>
+          <a:prstGeom xmlns:a="http://schemas.openxmlformats.org/drawingml/2006/main" prst="rect">
+            <a:avLst/>
+          </a:prstGeom>
+          <a:solidFill xmlns:a="http://schemas.openxmlformats.org/drawingml/2006/main">
+            <a:srgbClr val="E8EEF5"/>
+          </a:solidFill>
+          <a:ln xmlns:a="http://schemas.openxmlformats.org/drawingml/2006/main" w="0">
+            <a:noFill/>
+            <a:prstDash val="solid"/>
+          </a:ln>
+        </p:spPr>
+      </p:sp>
+      <p:sp>
+        <p:nvSpPr>
+          <p:cNvPr id="14" name="example-grid-v-9">
+            <a:extLst xmlns:a="http://schemas.openxmlformats.org/drawingml/2006/main">
+              <a:ext uri="{FF2B5EF4-FFF2-40B4-BE49-F238E27FC236}">
+                <a16:creationId xmlns:a16="http://schemas.microsoft.com/office/drawing/2014/main" id="{122BC146-2B02-4A31-BB34-07EC054B027E}"/>
+              </a:ext>
+            </a:extLst>
+          </p:cNvPr>
+          <p:cNvSpPr>
+            <a:spLocks xmlns:a="http://schemas.openxmlformats.org/drawingml/2006/main" noGrp="1"/>
+          </p:cNvSpPr>
+          <p:nvPr/>
+        </p:nvSpPr>
+        <p:spPr>
+          <a:xfrm xmlns:a="http://schemas.openxmlformats.org/drawingml/2006/main">
+            <a:off x="5314950" y="1847850"/>
+            <a:ext cx="9525" cy="2171700"/>
+          </a:xfrm>
+          <a:prstGeom xmlns:a="http://schemas.openxmlformats.org/drawingml/2006/main" prst="rect">
+            <a:avLst/>
+          </a:prstGeom>
+          <a:solidFill xmlns:a="http://schemas.openxmlformats.org/drawingml/2006/main">
+            <a:srgbClr val="E8EEF5"/>
+          </a:solidFill>
+          <a:ln xmlns:a="http://schemas.openxmlformats.org/drawingml/2006/main" w="0">
+            <a:noFill/>
+            <a:prstDash val="solid"/>
+          </a:ln>
+        </p:spPr>
+      </p:sp>
+      <p:sp>
+        <p:nvSpPr>
+          <p:cNvPr id="15" name="example-grid-v-10">
+            <a:extLst xmlns:a="http://schemas.openxmlformats.org/drawingml/2006/main">
+              <a:ext uri="{FF2B5EF4-FFF2-40B4-BE49-F238E27FC236}">
+                <a16:creationId xmlns:a16="http://schemas.microsoft.com/office/drawing/2014/main" id="{EDD3314B-6EEA-46E4-9106-42AA21473D47}"/>
+              </a:ext>
+            </a:extLst>
+          </p:cNvPr>
+          <p:cNvSpPr>
+            <a:spLocks xmlns:a="http://schemas.openxmlformats.org/drawingml/2006/main" noGrp="1"/>
+          </p:cNvSpPr>
+          <p:nvPr/>
+        </p:nvSpPr>
+        <p:spPr>
+          <a:xfrm xmlns:a="http://schemas.openxmlformats.org/drawingml/2006/main">
+            <a:off x="5842000" y="1847850"/>
+            <a:ext cx="9525" cy="2171700"/>
+          </a:xfrm>
+          <a:prstGeom xmlns:a="http://schemas.openxmlformats.org/drawingml/2006/main" prst="rect">
+            <a:avLst/>
+          </a:prstGeom>
+          <a:solidFill xmlns:a="http://schemas.openxmlformats.org/drawingml/2006/main">
+            <a:srgbClr val="E8EEF5"/>
+          </a:solidFill>
+          <a:ln xmlns:a="http://schemas.openxmlformats.org/drawingml/2006/main" w="0">
+            <a:noFill/>
+            <a:prstDash val="solid"/>
+          </a:ln>
+        </p:spPr>
+      </p:sp>
+      <p:sp>
+        <p:nvSpPr>
+          <p:cNvPr id="16" name="example-grid-v-11">
+            <a:extLst xmlns:a="http://schemas.openxmlformats.org/drawingml/2006/main">
+              <a:ext uri="{FF2B5EF4-FFF2-40B4-BE49-F238E27FC236}">
+                <a16:creationId xmlns:a16="http://schemas.microsoft.com/office/drawing/2014/main" id="{42D1FC3C-51F0-4287-B969-5B2645B6F2F5}"/>
+              </a:ext>
+            </a:extLst>
+          </p:cNvPr>
+          <p:cNvSpPr>
+            <a:spLocks xmlns:a="http://schemas.openxmlformats.org/drawingml/2006/main" noGrp="1"/>
+          </p:cNvSpPr>
+          <p:nvPr/>
+        </p:nvSpPr>
+        <p:spPr>
+          <a:xfrm xmlns:a="http://schemas.openxmlformats.org/drawingml/2006/main">
+            <a:off x="6369050" y="1847850"/>
+            <a:ext cx="9525" cy="2171700"/>
+          </a:xfrm>
+          <a:prstGeom xmlns:a="http://schemas.openxmlformats.org/drawingml/2006/main" prst="rect">
+            <a:avLst/>
+          </a:prstGeom>
+          <a:solidFill xmlns:a="http://schemas.openxmlformats.org/drawingml/2006/main">
+            <a:srgbClr val="E8EEF5"/>
+          </a:solidFill>
+          <a:ln xmlns:a="http://schemas.openxmlformats.org/drawingml/2006/main" w="0">
+            <a:noFill/>
+            <a:prstDash val="solid"/>
+          </a:ln>
+        </p:spPr>
+      </p:sp>
+      <p:sp>
+        <p:nvSpPr>
+          <p:cNvPr id="17" name="example-grid-h-1">
+            <a:extLst xmlns:a="http://schemas.openxmlformats.org/drawingml/2006/main">
+              <a:ext uri="{FF2B5EF4-FFF2-40B4-BE49-F238E27FC236}">
+                <a16:creationId xmlns:a16="http://schemas.microsoft.com/office/drawing/2014/main" id="{A76F69AC-9F1F-4D65-A1BD-A3FE48D46844}"/>
+              </a:ext>
+            </a:extLst>
+          </p:cNvPr>
+          <p:cNvSpPr>
+            <a:spLocks xmlns:a="http://schemas.openxmlformats.org/drawingml/2006/main" noGrp="1"/>
+          </p:cNvSpPr>
+          <p:nvPr/>
+        </p:nvSpPr>
+        <p:spPr>
+          <a:xfrm xmlns:a="http://schemas.openxmlformats.org/drawingml/2006/main">
+            <a:off x="571500" y="2282190"/>
+            <a:ext cx="6324600" cy="9525"/>
+          </a:xfrm>
+          <a:prstGeom xmlns:a="http://schemas.openxmlformats.org/drawingml/2006/main" prst="rect">
+            <a:avLst/>
+          </a:prstGeom>
+          <a:solidFill xmlns:a="http://schemas.openxmlformats.org/drawingml/2006/main">
+            <a:srgbClr val="E8EEF5"/>
+          </a:solidFill>
+          <a:ln xmlns:a="http://schemas.openxmlformats.org/drawingml/2006/main" w="0">
+            <a:noFill/>
+            <a:prstDash val="solid"/>
+          </a:ln>
+        </p:spPr>
+      </p:sp>
+      <p:sp>
+        <p:nvSpPr>
+          <p:cNvPr id="18" name="example-grid-h-2">
+            <a:extLst xmlns:a="http://schemas.openxmlformats.org/drawingml/2006/main">
+              <a:ext uri="{FF2B5EF4-FFF2-40B4-BE49-F238E27FC236}">
+                <a16:creationId xmlns:a16="http://schemas.microsoft.com/office/drawing/2014/main" id="{51BCA560-6F38-4451-9AF5-04CEE853F14A}"/>
+              </a:ext>
+            </a:extLst>
+          </p:cNvPr>
+          <p:cNvSpPr>
+            <a:spLocks xmlns:a="http://schemas.openxmlformats.org/drawingml/2006/main" noGrp="1"/>
+          </p:cNvSpPr>
+          <p:nvPr/>
+        </p:nvSpPr>
+        <p:spPr>
+          <a:xfrm xmlns:a="http://schemas.openxmlformats.org/drawingml/2006/main">
+            <a:off x="571500" y="2716530"/>
+            <a:ext cx="6324600" cy="9525"/>
+          </a:xfrm>
+          <a:prstGeom xmlns:a="http://schemas.openxmlformats.org/drawingml/2006/main" prst="rect">
+            <a:avLst/>
+          </a:prstGeom>
+          <a:solidFill xmlns:a="http://schemas.openxmlformats.org/drawingml/2006/main">
+            <a:srgbClr val="E8EEF5"/>
+          </a:solidFill>
+          <a:ln xmlns:a="http://schemas.openxmlformats.org/drawingml/2006/main" w="0">
+            <a:noFill/>
+            <a:prstDash val="solid"/>
+          </a:ln>
+        </p:spPr>
+      </p:sp>
+      <p:sp>
+        <p:nvSpPr>
+          <p:cNvPr id="19" name="example-grid-h-3">
+            <a:extLst xmlns:a="http://schemas.openxmlformats.org/drawingml/2006/main">
+              <a:ext uri="{FF2B5EF4-FFF2-40B4-BE49-F238E27FC236}">
+                <a16:creationId xmlns:a16="http://schemas.microsoft.com/office/drawing/2014/main" id="{71C4E221-19AE-4CB3-B1E8-FE550D1C8144}"/>
+              </a:ext>
+            </a:extLst>
+          </p:cNvPr>
+          <p:cNvSpPr>
+            <a:spLocks xmlns:a="http://schemas.openxmlformats.org/drawingml/2006/main" noGrp="1"/>
+          </p:cNvSpPr>
+          <p:nvPr/>
+        </p:nvSpPr>
+        <p:spPr>
+          <a:xfrm xmlns:a="http://schemas.openxmlformats.org/drawingml/2006/main">
+            <a:off x="571500" y="3150870"/>
+            <a:ext cx="6324600" cy="9525"/>
+          </a:xfrm>
+          <a:prstGeom xmlns:a="http://schemas.openxmlformats.org/drawingml/2006/main" prst="rect">
+            <a:avLst/>
+          </a:prstGeom>
+          <a:solidFill xmlns:a="http://schemas.openxmlformats.org/drawingml/2006/main">
+            <a:srgbClr val="E8EEF5"/>
+          </a:solidFill>
+          <a:ln xmlns:a="http://schemas.openxmlformats.org/drawingml/2006/main" w="0">
+            <a:noFill/>
+            <a:prstDash val="solid"/>
+          </a:ln>
+        </p:spPr>
+      </p:sp>
+      <p:sp>
+        <p:nvSpPr>
+          <p:cNvPr id="20" name="example-grid-h-4">
+            <a:extLst xmlns:a="http://schemas.openxmlformats.org/drawingml/2006/main">
+              <a:ext uri="{FF2B5EF4-FFF2-40B4-BE49-F238E27FC236}">
+                <a16:creationId xmlns:a16="http://schemas.microsoft.com/office/drawing/2014/main" id="{CB4976F6-CF16-461F-A8A4-B067396C9D4A}"/>
+              </a:ext>
+            </a:extLst>
+          </p:cNvPr>
+          <p:cNvSpPr>
+            <a:spLocks xmlns:a="http://schemas.openxmlformats.org/drawingml/2006/main" noGrp="1"/>
+          </p:cNvSpPr>
+          <p:nvPr/>
+        </p:nvSpPr>
+        <p:spPr>
+          <a:xfrm xmlns:a="http://schemas.openxmlformats.org/drawingml/2006/main">
+            <a:off x="571500" y="3585210"/>
+            <a:ext cx="6324600" cy="9525"/>
+          </a:xfrm>
+          <a:prstGeom xmlns:a="http://schemas.openxmlformats.org/drawingml/2006/main" prst="rect">
+            <a:avLst/>
+          </a:prstGeom>
+          <a:solidFill xmlns:a="http://schemas.openxmlformats.org/drawingml/2006/main">
+            <a:srgbClr val="E8EEF5"/>
+          </a:solidFill>
+          <a:ln xmlns:a="http://schemas.openxmlformats.org/drawingml/2006/main" w="0">
+            <a:noFill/>
+            <a:prstDash val="solid"/>
+          </a:ln>
+        </p:spPr>
+      </p:sp>
+      <p:sp>
+        <p:nvSpPr>
+          <p:cNvPr id="21" name="example-node-a1">
+            <a:extLst xmlns:a="http://schemas.openxmlformats.org/drawingml/2006/main">
+              <a:ext uri="{FF2B5EF4-FFF2-40B4-BE49-F238E27FC236}">
+                <a16:creationId xmlns:a16="http://schemas.microsoft.com/office/drawing/2014/main" id="{1DCA407C-8B4C-4CEE-9B9A-519081547764}"/>
+              </a:ext>
+            </a:extLst>
+          </p:cNvPr>
+          <p:cNvSpPr>
+            <a:spLocks xmlns:a="http://schemas.openxmlformats.org/drawingml/2006/main" noGrp="1"/>
+          </p:cNvSpPr>
+          <p:nvPr/>
+        </p:nvSpPr>
+        <p:spPr>
+          <a:xfrm xmlns:a="http://schemas.openxmlformats.org/drawingml/2006/main">
+            <a:off x="904875" y="2809875"/>
+            <a:ext cx="285750" cy="285750"/>
+          </a:xfrm>
+          <a:prstGeom xmlns:a="http://schemas.openxmlformats.org/drawingml/2006/main" prst="ellipse">
+            <a:avLst/>
+          </a:prstGeom>
+          <a:solidFill xmlns:a="http://schemas.openxmlformats.org/drawingml/2006/main">
+            <a:srgbClr val="3478DC"/>
+          </a:solidFill>
+          <a:ln xmlns:a="http://schemas.openxmlformats.org/drawingml/2006/main" w="14288">
+            <a:solidFill>
+              <a:srgbClr val="3478DC"/>
+            </a:solidFill>
+            <a:prstDash val="solid"/>
+          </a:ln>
+        </p:spPr>
+        <p:txBody>
+          <a:bodyPr xmlns:a="http://schemas.openxmlformats.org/drawingml/2006/main" anchor="ctr"/>
+          <a:lstStyle xmlns:a="http://schemas.openxmlformats.org/drawingml/2006/main"/>
+          <a:p xmlns:a="http://schemas.openxmlformats.org/drawingml/2006/main">
+            <a:pPr algn="ctr">
+              <a:defRPr sz="675" b="1">
+                <a:solidFill>
+                  <a:srgbClr val="FFFFFF"/>
+                </a:solidFill>
+              </a:defRPr>
+            </a:pPr>
+            <a:r>
+              <a:rPr sz="675" b="1">
+                <a:solidFill>
+                  <a:srgbClr val="FFFFFF"/>
+                </a:solidFill>
+              </a:rPr>
+              <a:t>1</a:t>
+            </a:r>
+          </a:p>
+        </p:txBody>
+      </p:sp>
+      <p:sp>
+        <p:nvSpPr>
+          <p:cNvPr id="22" name="example-node-a2">
+            <a:extLst xmlns:a="http://schemas.openxmlformats.org/drawingml/2006/main">
+              <a:ext uri="{FF2B5EF4-FFF2-40B4-BE49-F238E27FC236}">
+                <a16:creationId xmlns:a16="http://schemas.microsoft.com/office/drawing/2014/main" id="{D46A9D94-6035-4506-9D1B-AA476E541941}"/>
+              </a:ext>
+            </a:extLst>
+          </p:cNvPr>
+          <p:cNvSpPr>
+            <a:spLocks xmlns:a="http://schemas.openxmlformats.org/drawingml/2006/main" noGrp="1"/>
+          </p:cNvSpPr>
+          <p:nvPr/>
+        </p:nvSpPr>
+        <p:spPr>
+          <a:xfrm xmlns:a="http://schemas.openxmlformats.org/drawingml/2006/main">
+            <a:off x="2047875" y="2190750"/>
+            <a:ext cx="285750" cy="285750"/>
+          </a:xfrm>
+          <a:prstGeom xmlns:a="http://schemas.openxmlformats.org/drawingml/2006/main" prst="ellipse">
+            <a:avLst/>
+          </a:prstGeom>
+          <a:solidFill xmlns:a="http://schemas.openxmlformats.org/drawingml/2006/main">
+            <a:srgbClr val="3478DC"/>
+          </a:solidFill>
+          <a:ln xmlns:a="http://schemas.openxmlformats.org/drawingml/2006/main" w="14288">
+            <a:solidFill>
+              <a:srgbClr val="3478DC"/>
+            </a:solidFill>
+            <a:prstDash val="solid"/>
+          </a:ln>
+        </p:spPr>
+        <p:txBody>
+          <a:bodyPr xmlns:a="http://schemas.openxmlformats.org/drawingml/2006/main" anchor="ctr"/>
+          <a:lstStyle xmlns:a="http://schemas.openxmlformats.org/drawingml/2006/main"/>
+          <a:p xmlns:a="http://schemas.openxmlformats.org/drawingml/2006/main">
+            <a:pPr algn="ctr">
+              <a:defRPr sz="675" b="1">
+                <a:solidFill>
+                  <a:srgbClr val="FFFFFF"/>
+                </a:solidFill>
+              </a:defRPr>
+            </a:pPr>
+            <a:r>
+              <a:rPr sz="675" b="1">
+                <a:solidFill>
+                  <a:srgbClr val="FFFFFF"/>
+                </a:solidFill>
+              </a:rPr>
+              <a:t>2</a:t>
+            </a:r>
+          </a:p>
+        </p:txBody>
+      </p:sp>
+      <p:sp>
+        <p:nvSpPr>
+          <p:cNvPr id="23" name="example-node-a3">
+            <a:extLst xmlns:a="http://schemas.openxmlformats.org/drawingml/2006/main">
+              <a:ext uri="{FF2B5EF4-FFF2-40B4-BE49-F238E27FC236}">
+                <a16:creationId xmlns:a16="http://schemas.microsoft.com/office/drawing/2014/main" id="{2FA6B70D-70CE-446E-BC37-76A12BA24DFA}"/>
+              </a:ext>
+            </a:extLst>
+          </p:cNvPr>
+          <p:cNvSpPr>
+            <a:spLocks xmlns:a="http://schemas.openxmlformats.org/drawingml/2006/main" noGrp="1"/>
+          </p:cNvSpPr>
+          <p:nvPr/>
+        </p:nvSpPr>
+        <p:spPr>
+          <a:xfrm xmlns:a="http://schemas.openxmlformats.org/drawingml/2006/main">
+            <a:off x="2047875" y="3333750"/>
+            <a:ext cx="285750" cy="285750"/>
+          </a:xfrm>
+          <a:prstGeom xmlns:a="http://schemas.openxmlformats.org/drawingml/2006/main" prst="ellipse">
+            <a:avLst/>
+          </a:prstGeom>
+          <a:solidFill xmlns:a="http://schemas.openxmlformats.org/drawingml/2006/main">
+            <a:srgbClr val="3478DC"/>
+          </a:solidFill>
+          <a:ln xmlns:a="http://schemas.openxmlformats.org/drawingml/2006/main" w="14288">
+            <a:solidFill>
+              <a:srgbClr val="3478DC"/>
+            </a:solidFill>
+            <a:prstDash val="solid"/>
+          </a:ln>
+        </p:spPr>
+        <p:txBody>
+          <a:bodyPr xmlns:a="http://schemas.openxmlformats.org/drawingml/2006/main" anchor="ctr"/>
+          <a:lstStyle xmlns:a="http://schemas.openxmlformats.org/drawingml/2006/main"/>
+          <a:p xmlns:a="http://schemas.openxmlformats.org/drawingml/2006/main">
+            <a:pPr algn="ctr">
+              <a:defRPr sz="675" b="1">
+                <a:solidFill>
+                  <a:srgbClr val="FFFFFF"/>
+                </a:solidFill>
+              </a:defRPr>
+            </a:pPr>
+            <a:r>
+              <a:rPr sz="675" b="1">
+                <a:solidFill>
+                  <a:srgbClr val="FFFFFF"/>
+                </a:solidFill>
+              </a:rPr>
+              <a:t>3</a:t>
+            </a:r>
+          </a:p>
+        </p:txBody>
+      </p:sp>
+      <p:sp>
+        <p:nvSpPr>
+          <p:cNvPr id="24" name="example-node-a4">
+            <a:extLst xmlns:a="http://schemas.openxmlformats.org/drawingml/2006/main">
+              <a:ext uri="{FF2B5EF4-FFF2-40B4-BE49-F238E27FC236}">
+                <a16:creationId xmlns:a16="http://schemas.microsoft.com/office/drawing/2014/main" id="{E7D7507D-3A33-4593-ADB5-295F7702D2A6}"/>
+              </a:ext>
+            </a:extLst>
+          </p:cNvPr>
+          <p:cNvSpPr>
+            <a:spLocks xmlns:a="http://schemas.openxmlformats.org/drawingml/2006/main" noGrp="1"/>
+          </p:cNvSpPr>
+          <p:nvPr/>
+        </p:nvSpPr>
+        <p:spPr>
+          <a:xfrm xmlns:a="http://schemas.openxmlformats.org/drawingml/2006/main">
+            <a:off x="3476625" y="2000250"/>
+            <a:ext cx="285750" cy="285750"/>
+          </a:xfrm>
+          <a:prstGeom xmlns:a="http://schemas.openxmlformats.org/drawingml/2006/main" prst="ellipse">
+            <a:avLst/>
+          </a:prstGeom>
+          <a:solidFill xmlns:a="http://schemas.openxmlformats.org/drawingml/2006/main">
+            <a:srgbClr val="3478DC"/>
+          </a:solidFill>
+          <a:ln xmlns:a="http://schemas.openxmlformats.org/drawingml/2006/main" w="14288">
+            <a:solidFill>
+              <a:srgbClr val="3478DC"/>
+            </a:solidFill>
+            <a:prstDash val="solid"/>
+          </a:ln>
+        </p:spPr>
+        <p:txBody>
+          <a:bodyPr xmlns:a="http://schemas.openxmlformats.org/drawingml/2006/main" anchor="ctr"/>
+          <a:lstStyle xmlns:a="http://schemas.openxmlformats.org/drawingml/2006/main"/>
+          <a:p xmlns:a="http://schemas.openxmlformats.org/drawingml/2006/main">
+            <a:pPr algn="ctr">
+              <a:defRPr sz="675" b="1">
+                <a:solidFill>
+                  <a:srgbClr val="FFFFFF"/>
+                </a:solidFill>
+              </a:defRPr>
+            </a:pPr>
+            <a:r>
+              <a:rPr sz="675" b="1">
+                <a:solidFill>
+                  <a:srgbClr val="FFFFFF"/>
+                </a:solidFill>
+              </a:rPr>
+              <a:t>4</a:t>
+            </a:r>
+          </a:p>
+        </p:txBody>
+      </p:sp>
+      <p:sp>
+        <p:nvSpPr>
+          <p:cNvPr id="25" name="example-node-a5">
+            <a:extLst xmlns:a="http://schemas.openxmlformats.org/drawingml/2006/main">
+              <a:ext uri="{FF2B5EF4-FFF2-40B4-BE49-F238E27FC236}">
+                <a16:creationId xmlns:a16="http://schemas.microsoft.com/office/drawing/2014/main" id="{1A8A4D2B-02FA-405F-8CB4-70D8A90C462B}"/>
+              </a:ext>
+            </a:extLst>
+          </p:cNvPr>
+          <p:cNvSpPr>
+            <a:spLocks xmlns:a="http://schemas.openxmlformats.org/drawingml/2006/main" noGrp="1"/>
+          </p:cNvSpPr>
+          <p:nvPr/>
+        </p:nvSpPr>
+        <p:spPr>
+          <a:xfrm xmlns:a="http://schemas.openxmlformats.org/drawingml/2006/main">
+            <a:off x="3476625" y="2857500"/>
+            <a:ext cx="285750" cy="285750"/>
+          </a:xfrm>
+          <a:prstGeom xmlns:a="http://schemas.openxmlformats.org/drawingml/2006/main" prst="ellipse">
+            <a:avLst/>
+          </a:prstGeom>
+          <a:solidFill xmlns:a="http://schemas.openxmlformats.org/drawingml/2006/main">
+            <a:srgbClr val="3478DC"/>
+          </a:solidFill>
+          <a:ln xmlns:a="http://schemas.openxmlformats.org/drawingml/2006/main" w="14288">
+            <a:solidFill>
+              <a:srgbClr val="3478DC"/>
+            </a:solidFill>
+            <a:prstDash val="solid"/>
+          </a:ln>
+        </p:spPr>
+        <p:txBody>
+          <a:bodyPr xmlns:a="http://schemas.openxmlformats.org/drawingml/2006/main" anchor="ctr"/>
+          <a:lstStyle xmlns:a="http://schemas.openxmlformats.org/drawingml/2006/main"/>
+          <a:p xmlns:a="http://schemas.openxmlformats.org/drawingml/2006/main">
+            <a:pPr algn="ctr">
+              <a:defRPr sz="675" b="1">
+                <a:solidFill>
+                  <a:srgbClr val="FFFFFF"/>
+                </a:solidFill>
+              </a:defRPr>
+            </a:pPr>
+            <a:r>
+              <a:rPr sz="675" b="1">
+                <a:solidFill>
+                  <a:srgbClr val="FFFFFF"/>
+                </a:solidFill>
+              </a:rPr>
+              <a:t>5</a:t>
+            </a:r>
+          </a:p>
+        </p:txBody>
+      </p:sp>
+      <p:sp>
+        <p:nvSpPr>
+          <p:cNvPr id="26" name="example-node-a6">
+            <a:extLst xmlns:a="http://schemas.openxmlformats.org/drawingml/2006/main">
+              <a:ext uri="{FF2B5EF4-FFF2-40B4-BE49-F238E27FC236}">
+                <a16:creationId xmlns:a16="http://schemas.microsoft.com/office/drawing/2014/main" id="{2C095B5E-3EB5-4BE4-9AB1-2A2BE0F9E5EF}"/>
+              </a:ext>
+            </a:extLst>
+          </p:cNvPr>
+          <p:cNvSpPr>
+            <a:spLocks xmlns:a="http://schemas.openxmlformats.org/drawingml/2006/main" noGrp="1"/>
+          </p:cNvSpPr>
+          <p:nvPr/>
+        </p:nvSpPr>
+        <p:spPr>
+          <a:xfrm xmlns:a="http://schemas.openxmlformats.org/drawingml/2006/main">
+            <a:off x="3476625" y="3619500"/>
+            <a:ext cx="285750" cy="285750"/>
+          </a:xfrm>
+          <a:prstGeom xmlns:a="http://schemas.openxmlformats.org/drawingml/2006/main" prst="ellipse">
+            <a:avLst/>
+          </a:prstGeom>
+          <a:solidFill xmlns:a="http://schemas.openxmlformats.org/drawingml/2006/main">
+            <a:srgbClr val="3478DC"/>
+          </a:solidFill>
+          <a:ln xmlns:a="http://schemas.openxmlformats.org/drawingml/2006/main" w="14288">
+            <a:solidFill>
+              <a:srgbClr val="3478DC"/>
+            </a:solidFill>
+            <a:prstDash val="solid"/>
+          </a:ln>
+        </p:spPr>
+        <p:txBody>
+          <a:bodyPr xmlns:a="http://schemas.openxmlformats.org/drawingml/2006/main" anchor="ctr"/>
+          <a:lstStyle xmlns:a="http://schemas.openxmlformats.org/drawingml/2006/main"/>
+          <a:p xmlns:a="http://schemas.openxmlformats.org/drawingml/2006/main">
+            <a:pPr algn="ctr">
+              <a:defRPr sz="675" b="1">
+                <a:solidFill>
+                  <a:srgbClr val="FFFFFF"/>
+                </a:solidFill>
+              </a:defRPr>
+            </a:pPr>
+            <a:r>
+              <a:rPr sz="675" b="1">
+                <a:solidFill>
+                  <a:srgbClr val="FFFFFF"/>
+                </a:solidFill>
+              </a:rPr>
+              <a:t>6</a:t>
+            </a:r>
+          </a:p>
+        </p:txBody>
+      </p:sp>
+      <p:sp>
+        <p:nvSpPr>
+          <p:cNvPr id="27" name="example-node-a7">
+            <a:extLst xmlns:a="http://schemas.openxmlformats.org/drawingml/2006/main">
+              <a:ext uri="{FF2B5EF4-FFF2-40B4-BE49-F238E27FC236}">
+                <a16:creationId xmlns:a16="http://schemas.microsoft.com/office/drawing/2014/main" id="{5B1FDD85-E190-413A-A934-F046CE9926CC}"/>
+              </a:ext>
+            </a:extLst>
+          </p:cNvPr>
+          <p:cNvSpPr>
+            <a:spLocks xmlns:a="http://schemas.openxmlformats.org/drawingml/2006/main" noGrp="1"/>
+          </p:cNvSpPr>
+          <p:nvPr/>
+        </p:nvSpPr>
+        <p:spPr>
+          <a:xfrm xmlns:a="http://schemas.openxmlformats.org/drawingml/2006/main">
+            <a:off x="5000625" y="2381250"/>
+            <a:ext cx="285750" cy="285750"/>
+          </a:xfrm>
+          <a:prstGeom xmlns:a="http://schemas.openxmlformats.org/drawingml/2006/main" prst="ellipse">
+            <a:avLst/>
+          </a:prstGeom>
+          <a:solidFill xmlns:a="http://schemas.openxmlformats.org/drawingml/2006/main">
+            <a:srgbClr val="3478DC"/>
+          </a:solidFill>
+          <a:ln xmlns:a="http://schemas.openxmlformats.org/drawingml/2006/main" w="14288">
+            <a:solidFill>
+              <a:srgbClr val="3478DC"/>
+            </a:solidFill>
+            <a:prstDash val="solid"/>
+          </a:ln>
+        </p:spPr>
+        <p:txBody>
+          <a:bodyPr xmlns:a="http://schemas.openxmlformats.org/drawingml/2006/main" anchor="ctr"/>
+          <a:lstStyle xmlns:a="http://schemas.openxmlformats.org/drawingml/2006/main"/>
+          <a:p xmlns:a="http://schemas.openxmlformats.org/drawingml/2006/main">
+            <a:pPr algn="ctr">
+              <a:defRPr sz="675" b="1">
+                <a:solidFill>
+                  <a:srgbClr val="FFFFFF"/>
+                </a:solidFill>
+              </a:defRPr>
+            </a:pPr>
+            <a:r>
+              <a:rPr sz="675" b="1">
+                <a:solidFill>
+                  <a:srgbClr val="FFFFFF"/>
+                </a:solidFill>
+              </a:rPr>
+              <a:t>7</a:t>
+            </a:r>
+          </a:p>
+        </p:txBody>
+      </p:sp>
+      <p:sp>
+        <p:nvSpPr>
+          <p:cNvPr id="28" name="example-node-a8">
+            <a:extLst xmlns:a="http://schemas.openxmlformats.org/drawingml/2006/main">
+              <a:ext uri="{FF2B5EF4-FFF2-40B4-BE49-F238E27FC236}">
+                <a16:creationId xmlns:a16="http://schemas.microsoft.com/office/drawing/2014/main" id="{066FE45C-6ABE-40EA-A20D-DE55924B7FB9}"/>
+              </a:ext>
+            </a:extLst>
+          </p:cNvPr>
+          <p:cNvSpPr>
+            <a:spLocks xmlns:a="http://schemas.openxmlformats.org/drawingml/2006/main" noGrp="1"/>
+          </p:cNvSpPr>
+          <p:nvPr/>
+        </p:nvSpPr>
+        <p:spPr>
+          <a:xfrm xmlns:a="http://schemas.openxmlformats.org/drawingml/2006/main">
+            <a:off x="5000625" y="3333750"/>
+            <a:ext cx="285750" cy="285750"/>
+          </a:xfrm>
+          <a:prstGeom xmlns:a="http://schemas.openxmlformats.org/drawingml/2006/main" prst="ellipse">
+            <a:avLst/>
+          </a:prstGeom>
+          <a:solidFill xmlns:a="http://schemas.openxmlformats.org/drawingml/2006/main">
+            <a:srgbClr val="3478DC"/>
+          </a:solidFill>
+          <a:ln xmlns:a="http://schemas.openxmlformats.org/drawingml/2006/main" w="14288">
+            <a:solidFill>
+              <a:srgbClr val="3478DC"/>
+            </a:solidFill>
+            <a:prstDash val="solid"/>
+          </a:ln>
+        </p:spPr>
+        <p:txBody>
+          <a:bodyPr xmlns:a="http://schemas.openxmlformats.org/drawingml/2006/main" anchor="ctr"/>
+          <a:lstStyle xmlns:a="http://schemas.openxmlformats.org/drawingml/2006/main"/>
+          <a:p xmlns:a="http://schemas.openxmlformats.org/drawingml/2006/main">
+            <a:pPr algn="ctr">
+              <a:defRPr sz="675" b="1">
+                <a:solidFill>
+                  <a:srgbClr val="FFFFFF"/>
+                </a:solidFill>
+              </a:defRPr>
+            </a:pPr>
+            <a:r>
+              <a:rPr sz="675" b="1">
+                <a:solidFill>
+                  <a:srgbClr val="FFFFFF"/>
+                </a:solidFill>
+              </a:rPr>
+              <a:t>8</a:t>
+            </a:r>
+          </a:p>
+        </p:txBody>
+      </p:sp>
+      <p:sp>
+        <p:nvSpPr>
+          <p:cNvPr id="29" name="example-node-a9">
+            <a:extLst xmlns:a="http://schemas.openxmlformats.org/drawingml/2006/main">
+              <a:ext uri="{FF2B5EF4-FFF2-40B4-BE49-F238E27FC236}">
+                <a16:creationId xmlns:a16="http://schemas.microsoft.com/office/drawing/2014/main" id="{B71614D2-22E8-47A3-9A6F-367DF3BC94FB}"/>
+              </a:ext>
+            </a:extLst>
+          </p:cNvPr>
+          <p:cNvSpPr>
+            <a:spLocks xmlns:a="http://schemas.openxmlformats.org/drawingml/2006/main" noGrp="1"/>
+          </p:cNvSpPr>
+          <p:nvPr/>
+        </p:nvSpPr>
+        <p:spPr>
+          <a:xfrm xmlns:a="http://schemas.openxmlformats.org/drawingml/2006/main">
+            <a:off x="6334125" y="2857500"/>
+            <a:ext cx="285750" cy="285750"/>
+          </a:xfrm>
+          <a:prstGeom xmlns:a="http://schemas.openxmlformats.org/drawingml/2006/main" prst="ellipse">
+            <a:avLst/>
+          </a:prstGeom>
+          <a:solidFill xmlns:a="http://schemas.openxmlformats.org/drawingml/2006/main">
+            <a:srgbClr val="3478DC"/>
+          </a:solidFill>
+          <a:ln xmlns:a="http://schemas.openxmlformats.org/drawingml/2006/main" w="14288">
+            <a:solidFill>
+              <a:srgbClr val="3478DC"/>
+            </a:solidFill>
+            <a:prstDash val="solid"/>
+          </a:ln>
+        </p:spPr>
+        <p:txBody>
+          <a:bodyPr xmlns:a="http://schemas.openxmlformats.org/drawingml/2006/main" anchor="ctr"/>
+          <a:lstStyle xmlns:a="http://schemas.openxmlformats.org/drawingml/2006/main"/>
+          <a:p xmlns:a="http://schemas.openxmlformats.org/drawingml/2006/main">
+            <a:pPr algn="ctr">
+              <a:defRPr sz="675" b="1">
+                <a:solidFill>
+                  <a:srgbClr val="FFFFFF"/>
+                </a:solidFill>
+              </a:defRPr>
+            </a:pPr>
+            <a:r>
+              <a:rPr sz="675" b="1">
+                <a:solidFill>
+                  <a:srgbClr val="FFFFFF"/>
+                </a:solidFill>
+              </a:rPr>
+              <a:t>9</a:t>
+            </a:r>
+          </a:p>
+        </p:txBody>
+      </p:sp>
+      <p:cxnSp>
+        <p:nvCxnSpPr>
+          <p:cNvPr id="136" name=""/>
+          <p:cNvCxnSpPr>
+            <a:stCxn xmlns:a="http://schemas.openxmlformats.org/drawingml/2006/main" id="21" idx="7"/>
+            <a:endCxn xmlns:a="http://schemas.openxmlformats.org/drawingml/2006/main" id="22" idx="3"/>
+          </p:cNvCxnSpPr>
+          <p:nvPr/>
+        </p:nvCxnSpPr>
+        <p:spPr>
+          <a:xfrm xmlns:a="http://schemas.openxmlformats.org/drawingml/2006/main" flipV="1">
+            <a:off x="1148778" y="2434653"/>
+            <a:ext cx="940944" cy="417069"/>
+          </a:xfrm>
+          <a:prstGeom xmlns:a="http://schemas.openxmlformats.org/drawingml/2006/main" prst="straightConnector1">
+            <a:avLst/>
+          </a:prstGeom>
+          <a:ln xmlns:a="http://schemas.openxmlformats.org/drawingml/2006/main" w="17145" cap="rnd">
+            <a:solidFill>
+              <a:srgbClr val="164E8B"/>
+            </a:solidFill>
+            <a:prstDash val="solid"/>
+            <a:round/>
+            <a:tailEnd type="triangle" w="sm" len="sm"/>
+          </a:ln>
+        </p:spPr>
+      </p:cxnSp>
+      <p:cxnSp>
+        <p:nvCxnSpPr>
+          <p:cNvPr id="137" name=""/>
+          <p:cNvCxnSpPr>
+            <a:stCxn xmlns:a="http://schemas.openxmlformats.org/drawingml/2006/main" id="21" idx="5"/>
+            <a:endCxn xmlns:a="http://schemas.openxmlformats.org/drawingml/2006/main" id="23" idx="2"/>
+          </p:cNvCxnSpPr>
+          <p:nvPr/>
+        </p:nvCxnSpPr>
+        <p:spPr>
+          <a:xfrm xmlns:a="http://schemas.openxmlformats.org/drawingml/2006/main">
+            <a:off x="1148778" y="3053778"/>
+            <a:ext cx="899097" cy="422847"/>
+          </a:xfrm>
+          <a:prstGeom xmlns:a="http://schemas.openxmlformats.org/drawingml/2006/main" prst="straightConnector1">
+            <a:avLst/>
+          </a:prstGeom>
+          <a:ln xmlns:a="http://schemas.openxmlformats.org/drawingml/2006/main" w="17145" cap="rnd">
+            <a:solidFill>
+              <a:srgbClr val="164E8B"/>
+            </a:solidFill>
+            <a:prstDash val="solid"/>
+            <a:round/>
+            <a:tailEnd type="triangle" w="sm" len="sm"/>
+          </a:ln>
+        </p:spPr>
+      </p:cxnSp>
+      <p:cxnSp>
+        <p:nvCxnSpPr>
+          <p:cNvPr id="138" name=""/>
+          <p:cNvCxnSpPr>
+            <a:stCxn xmlns:a="http://schemas.openxmlformats.org/drawingml/2006/main" id="22" idx="6"/>
+            <a:endCxn xmlns:a="http://schemas.openxmlformats.org/drawingml/2006/main" id="24" idx="2"/>
+          </p:cNvCxnSpPr>
+          <p:nvPr/>
+        </p:nvCxnSpPr>
+        <p:spPr>
+          <a:xfrm xmlns:a="http://schemas.openxmlformats.org/drawingml/2006/main" flipV="1">
+            <a:off x="2333625" y="2143125"/>
+            <a:ext cx="1143000" cy="190500"/>
+          </a:xfrm>
+          <a:prstGeom xmlns:a="http://schemas.openxmlformats.org/drawingml/2006/main" prst="straightConnector1">
+            <a:avLst/>
+          </a:prstGeom>
+          <a:ln xmlns:a="http://schemas.openxmlformats.org/drawingml/2006/main" w="17145" cap="rnd">
+            <a:solidFill>
+              <a:srgbClr val="164E8B"/>
+            </a:solidFill>
+            <a:prstDash val="solid"/>
+            <a:round/>
+            <a:tailEnd type="triangle" w="sm" len="sm"/>
+          </a:ln>
+        </p:spPr>
+      </p:cxnSp>
+      <p:cxnSp>
+        <p:nvCxnSpPr>
+          <p:cNvPr id="139" name=""/>
+          <p:cNvCxnSpPr>
+            <a:stCxn xmlns:a="http://schemas.openxmlformats.org/drawingml/2006/main" id="22" idx="5"/>
+            <a:endCxn xmlns:a="http://schemas.openxmlformats.org/drawingml/2006/main" id="25" idx="1"/>
+          </p:cNvCxnSpPr>
+          <p:nvPr/>
+        </p:nvCxnSpPr>
+        <p:spPr>
+          <a:xfrm xmlns:a="http://schemas.openxmlformats.org/drawingml/2006/main">
+            <a:off x="2291778" y="2434653"/>
+            <a:ext cx="1226694" cy="464694"/>
+          </a:xfrm>
+          <a:prstGeom xmlns:a="http://schemas.openxmlformats.org/drawingml/2006/main" prst="straightConnector1">
+            <a:avLst/>
+          </a:prstGeom>
+          <a:ln xmlns:a="http://schemas.openxmlformats.org/drawingml/2006/main" w="17145" cap="rnd">
+            <a:solidFill>
+              <a:srgbClr val="164E8B"/>
+            </a:solidFill>
+            <a:prstDash val="solid"/>
+            <a:round/>
+            <a:tailEnd type="triangle" w="sm" len="sm"/>
+          </a:ln>
+        </p:spPr>
+      </p:cxnSp>
+      <p:cxnSp>
+        <p:nvCxnSpPr>
+          <p:cNvPr id="140" name=""/>
+          <p:cNvCxnSpPr>
+            <a:stCxn xmlns:a="http://schemas.openxmlformats.org/drawingml/2006/main" id="23" idx="6"/>
+            <a:endCxn xmlns:a="http://schemas.openxmlformats.org/drawingml/2006/main" id="25" idx="2"/>
+          </p:cNvCxnSpPr>
+          <p:nvPr/>
+        </p:nvCxnSpPr>
+        <p:spPr>
+          <a:xfrm xmlns:a="http://schemas.openxmlformats.org/drawingml/2006/main" flipV="1">
+            <a:off x="2333625" y="3000375"/>
+            <a:ext cx="1143000" cy="476250"/>
+          </a:xfrm>
+          <a:prstGeom xmlns:a="http://schemas.openxmlformats.org/drawingml/2006/main" prst="straightConnector1">
+            <a:avLst/>
+          </a:prstGeom>
+          <a:ln xmlns:a="http://schemas.openxmlformats.org/drawingml/2006/main" w="17145" cap="rnd">
+            <a:solidFill>
+              <a:srgbClr val="164E8B"/>
+            </a:solidFill>
+            <a:prstDash val="solid"/>
+            <a:round/>
+            <a:tailEnd type="triangle" w="sm" len="sm"/>
+          </a:ln>
+        </p:spPr>
+      </p:cxnSp>
+      <p:cxnSp>
+        <p:nvCxnSpPr>
+          <p:cNvPr id="141" name=""/>
+          <p:cNvCxnSpPr>
+            <a:stCxn xmlns:a="http://schemas.openxmlformats.org/drawingml/2006/main" id="23" idx="6"/>
+            <a:endCxn xmlns:a="http://schemas.openxmlformats.org/drawingml/2006/main" id="26" idx="2"/>
+          </p:cNvCxnSpPr>
+          <p:nvPr/>
+        </p:nvCxnSpPr>
+        <p:spPr>
+          <a:xfrm xmlns:a="http://schemas.openxmlformats.org/drawingml/2006/main">
+            <a:off x="2333625" y="3476625"/>
+            <a:ext cx="1143000" cy="285750"/>
+          </a:xfrm>
+          <a:prstGeom xmlns:a="http://schemas.openxmlformats.org/drawingml/2006/main" prst="straightConnector1">
+            <a:avLst/>
+          </a:prstGeom>
+          <a:ln xmlns:a="http://schemas.openxmlformats.org/drawingml/2006/main" w="17145" cap="rnd">
+            <a:solidFill>
+              <a:srgbClr val="164E8B"/>
+            </a:solidFill>
+            <a:prstDash val="solid"/>
+            <a:round/>
+            <a:tailEnd type="triangle" w="sm" len="sm"/>
+          </a:ln>
+        </p:spPr>
+      </p:cxnSp>
+      <p:cxnSp>
+        <p:nvCxnSpPr>
+          <p:cNvPr id="142" name=""/>
+          <p:cNvCxnSpPr>
+            <a:stCxn xmlns:a="http://schemas.openxmlformats.org/drawingml/2006/main" id="24" idx="6"/>
+            <a:endCxn xmlns:a="http://schemas.openxmlformats.org/drawingml/2006/main" id="27" idx="2"/>
+          </p:cNvCxnSpPr>
+          <p:nvPr/>
+        </p:nvCxnSpPr>
+        <p:spPr>
+          <a:xfrm xmlns:a="http://schemas.openxmlformats.org/drawingml/2006/main">
+            <a:off x="3762375" y="2143125"/>
+            <a:ext cx="1238250" cy="381000"/>
+          </a:xfrm>
+          <a:prstGeom xmlns:a="http://schemas.openxmlformats.org/drawingml/2006/main" prst="straightConnector1">
+            <a:avLst/>
+          </a:prstGeom>
+          <a:ln xmlns:a="http://schemas.openxmlformats.org/drawingml/2006/main" w="17145" cap="rnd">
+            <a:solidFill>
+              <a:srgbClr val="164E8B"/>
+            </a:solidFill>
+            <a:prstDash val="solid"/>
+            <a:round/>
+            <a:tailEnd type="triangle" w="sm" len="sm"/>
+          </a:ln>
+        </p:spPr>
+      </p:cxnSp>
+      <p:cxnSp>
+        <p:nvCxnSpPr>
+          <p:cNvPr id="143" name=""/>
+          <p:cNvCxnSpPr>
+            <a:stCxn xmlns:a="http://schemas.openxmlformats.org/drawingml/2006/main" id="25" idx="6"/>
+            <a:endCxn xmlns:a="http://schemas.openxmlformats.org/drawingml/2006/main" id="27" idx="2"/>
+          </p:cNvCxnSpPr>
+          <p:nvPr/>
+        </p:nvCxnSpPr>
+        <p:spPr>
+          <a:xfrm xmlns:a="http://schemas.openxmlformats.org/drawingml/2006/main" flipV="1">
+            <a:off x="3762375" y="2524125"/>
+            <a:ext cx="1238250" cy="476250"/>
+          </a:xfrm>
+          <a:prstGeom xmlns:a="http://schemas.openxmlformats.org/drawingml/2006/main" prst="straightConnector1">
+            <a:avLst/>
+          </a:prstGeom>
+          <a:ln xmlns:a="http://schemas.openxmlformats.org/drawingml/2006/main" w="17145" cap="rnd">
+            <a:solidFill>
+              <a:srgbClr val="164E8B"/>
+            </a:solidFill>
+            <a:prstDash val="solid"/>
+            <a:round/>
+            <a:tailEnd type="triangle" w="sm" len="sm"/>
+          </a:ln>
+        </p:spPr>
+      </p:cxnSp>
+      <p:cxnSp>
+        <p:nvCxnSpPr>
+          <p:cNvPr id="144" name=""/>
+          <p:cNvCxnSpPr>
+            <a:stCxn xmlns:a="http://schemas.openxmlformats.org/drawingml/2006/main" id="25" idx="6"/>
+            <a:endCxn xmlns:a="http://schemas.openxmlformats.org/drawingml/2006/main" id="28" idx="2"/>
+          </p:cNvCxnSpPr>
+          <p:nvPr/>
+        </p:nvCxnSpPr>
+        <p:spPr>
+          <a:xfrm xmlns:a="http://schemas.openxmlformats.org/drawingml/2006/main">
+            <a:off x="3762375" y="3000375"/>
+            <a:ext cx="1238250" cy="476250"/>
+          </a:xfrm>
+          <a:prstGeom xmlns:a="http://schemas.openxmlformats.org/drawingml/2006/main" prst="straightConnector1">
+            <a:avLst/>
+          </a:prstGeom>
+          <a:ln xmlns:a="http://schemas.openxmlformats.org/drawingml/2006/main" w="17145" cap="rnd">
+            <a:solidFill>
+              <a:srgbClr val="164E8B"/>
+            </a:solidFill>
+            <a:prstDash val="solid"/>
+            <a:round/>
+            <a:tailEnd type="triangle" w="sm" len="sm"/>
+          </a:ln>
+        </p:spPr>
+      </p:cxnSp>
+      <p:cxnSp>
+        <p:nvCxnSpPr>
+          <p:cNvPr id="145" name=""/>
+          <p:cNvCxnSpPr>
+            <a:stCxn xmlns:a="http://schemas.openxmlformats.org/drawingml/2006/main" id="26" idx="6"/>
+            <a:endCxn xmlns:a="http://schemas.openxmlformats.org/drawingml/2006/main" id="28" idx="2"/>
+          </p:cNvCxnSpPr>
+          <p:nvPr/>
+        </p:nvCxnSpPr>
+        <p:spPr>
+          <a:xfrm xmlns:a="http://schemas.openxmlformats.org/drawingml/2006/main" flipV="1">
+            <a:off x="3762375" y="3476625"/>
+            <a:ext cx="1238250" cy="285750"/>
+          </a:xfrm>
+          <a:prstGeom xmlns:a="http://schemas.openxmlformats.org/drawingml/2006/main" prst="straightConnector1">
+            <a:avLst/>
+          </a:prstGeom>
+          <a:ln xmlns:a="http://schemas.openxmlformats.org/drawingml/2006/main" w="17145" cap="rnd">
+            <a:solidFill>
+              <a:srgbClr val="164E8B"/>
+            </a:solidFill>
+            <a:prstDash val="solid"/>
+            <a:round/>
+            <a:tailEnd type="triangle" w="sm" len="sm"/>
+          </a:ln>
+        </p:spPr>
+      </p:cxnSp>
+      <p:cxnSp>
+        <p:nvCxnSpPr>
+          <p:cNvPr id="146" name=""/>
+          <p:cNvCxnSpPr>
+            <a:stCxn xmlns:a="http://schemas.openxmlformats.org/drawingml/2006/main" id="27" idx="6"/>
+            <a:endCxn xmlns:a="http://schemas.openxmlformats.org/drawingml/2006/main" id="29" idx="2"/>
+          </p:cNvCxnSpPr>
+          <p:nvPr/>
+        </p:nvCxnSpPr>
+        <p:spPr>
+          <a:xfrm xmlns:a="http://schemas.openxmlformats.org/drawingml/2006/main">
+            <a:off x="5286375" y="2524125"/>
+            <a:ext cx="1047750" cy="476250"/>
+          </a:xfrm>
+          <a:prstGeom xmlns:a="http://schemas.openxmlformats.org/drawingml/2006/main" prst="straightConnector1">
+            <a:avLst/>
+          </a:prstGeom>
+          <a:ln xmlns:a="http://schemas.openxmlformats.org/drawingml/2006/main" w="17145" cap="rnd">
+            <a:solidFill>
+              <a:srgbClr val="164E8B"/>
+            </a:solidFill>
+            <a:prstDash val="solid"/>
+            <a:round/>
+            <a:tailEnd type="triangle" w="sm" len="sm"/>
+          </a:ln>
+        </p:spPr>
+      </p:cxnSp>
+      <p:cxnSp>
+        <p:nvCxnSpPr>
+          <p:cNvPr id="147" name=""/>
+          <p:cNvCxnSpPr>
+            <a:stCxn xmlns:a="http://schemas.openxmlformats.org/drawingml/2006/main" id="28" idx="6"/>
+            <a:endCxn xmlns:a="http://schemas.openxmlformats.org/drawingml/2006/main" id="29" idx="2"/>
+          </p:cNvCxnSpPr>
+          <p:nvPr/>
+        </p:nvCxnSpPr>
+        <p:spPr>
+          <a:xfrm xmlns:a="http://schemas.openxmlformats.org/drawingml/2006/main" flipV="1">
+            <a:off x="5286375" y="3000375"/>
+            <a:ext cx="1047750" cy="476250"/>
+          </a:xfrm>
+          <a:prstGeom xmlns:a="http://schemas.openxmlformats.org/drawingml/2006/main" prst="straightConnector1">
+            <a:avLst/>
+          </a:prstGeom>
+          <a:ln xmlns:a="http://schemas.openxmlformats.org/drawingml/2006/main" w="17145" cap="rnd">
+            <a:solidFill>
+              <a:srgbClr val="164E8B"/>
+            </a:solidFill>
+            <a:prstDash val="solid"/>
+            <a:round/>
+            <a:tailEnd type="triangle" w="sm" len="sm"/>
+          </a:ln>
+        </p:spPr>
+      </p:cxnSp>
+      <p:sp>
+        <p:nvSpPr>
+          <p:cNvPr id="42" name="styles-panel">
+            <a:extLst xmlns:a="http://schemas.openxmlformats.org/drawingml/2006/main">
+              <a:ext uri="{FF2B5EF4-FFF2-40B4-BE49-F238E27FC236}">
+                <a16:creationId xmlns:a16="http://schemas.microsoft.com/office/drawing/2014/main" id="{FFA40048-F8E5-4CA3-AD63-195DC57D9312}"/>
+              </a:ext>
+            </a:extLst>
+          </p:cNvPr>
+          <p:cNvSpPr>
+            <a:spLocks xmlns:a="http://schemas.openxmlformats.org/drawingml/2006/main" noGrp="1"/>
+          </p:cNvSpPr>
+          <p:nvPr/>
+        </p:nvSpPr>
+        <p:spPr>
+          <a:xfrm xmlns:a="http://schemas.openxmlformats.org/drawingml/2006/main">
+            <a:off x="7258050" y="1381125"/>
+            <a:ext cx="4533900" cy="2857500"/>
+          </a:xfrm>
+          <a:prstGeom xmlns:a="http://schemas.openxmlformats.org/drawingml/2006/main" prst="roundRect">
+            <a:avLst>
+              <a:gd name="adj" fmla="val 2667"/>
+            </a:avLst>
+          </a:prstGeom>
+          <a:solidFill xmlns:a="http://schemas.openxmlformats.org/drawingml/2006/main">
+            <a:srgbClr val="FBFCFE"/>
+          </a:solidFill>
+          <a:ln xmlns:a="http://schemas.openxmlformats.org/drawingml/2006/main" w="9525">
+            <a:solidFill>
+              <a:srgbClr val="CBD5E1"/>
+            </a:solidFill>
+            <a:prstDash val="solid"/>
+          </a:ln>
+        </p:spPr>
+      </p:sp>
+      <p:sp>
+        <p:nvSpPr>
+          <p:cNvPr id="43" name="styles-panel-title">
+            <a:extLst xmlns:a="http://schemas.openxmlformats.org/drawingml/2006/main">
+              <a:ext uri="{FF2B5EF4-FFF2-40B4-BE49-F238E27FC236}">
+                <a16:creationId xmlns:a16="http://schemas.microsoft.com/office/drawing/2014/main" id="{946BF6A2-F0EC-40D7-A7ED-C995840E4F83}"/>
+              </a:ext>
+            </a:extLst>
+          </p:cNvPr>
+          <p:cNvSpPr>
+            <a:spLocks xmlns:a="http://schemas.openxmlformats.org/drawingml/2006/main" noGrp="1"/>
+          </p:cNvSpPr>
+          <p:nvPr/>
+        </p:nvSpPr>
+        <p:spPr>
+          <a:xfrm xmlns:a="http://schemas.openxmlformats.org/drawingml/2006/main">
+            <a:off x="7429500" y="1504950"/>
+            <a:ext cx="2095500" cy="228600"/>
+          </a:xfrm>
+          <a:prstGeom xmlns:a="http://schemas.openxmlformats.org/drawingml/2006/main" prst="rect">
+            <a:avLst/>
+          </a:prstGeom>
+          <a:noFill xmlns:a="http://schemas.openxmlformats.org/drawingml/2006/main"/>
+          <a:ln xmlns:a="http://schemas.openxmlformats.org/drawingml/2006/main" w="0">
+            <a:noFill/>
+            <a:prstDash val="solid"/>
+          </a:ln>
+        </p:spPr>
+        <p:txBody>
+          <a:bodyPr xmlns:a="http://schemas.openxmlformats.org/drawingml/2006/main" anchor="ctr"/>
+          <a:lstStyle xmlns:a="http://schemas.openxmlformats.org/drawingml/2006/main"/>
+          <a:p xmlns:a="http://schemas.openxmlformats.org/drawingml/2006/main">
+            <a:pPr algn="l">
+              <a:defRPr sz="900" b="1">
+                <a:solidFill>
+                  <a:srgbClr val="164E8B"/>
+                </a:solidFill>
+              </a:defRPr>
+            </a:pPr>
+            <a:r>
+              <a:rPr sz="900" b="1">
+                <a:solidFill>
+                  <a:srgbClr val="164E8B"/>
+                </a:solidFill>
+              </a:rPr>
+              <a:t>NODE &amp; EDGE STYLES</a:t>
+            </a:r>
+          </a:p>
+        </p:txBody>
+      </p:sp>
+      <p:sp>
+        <p:nvSpPr>
+          <p:cNvPr id="44" name="nodes-label">
+            <a:extLst xmlns:a="http://schemas.openxmlformats.org/drawingml/2006/main">
+              <a:ext uri="{FF2B5EF4-FFF2-40B4-BE49-F238E27FC236}">
+                <a16:creationId xmlns:a16="http://schemas.microsoft.com/office/drawing/2014/main" id="{4D278271-C706-487F-86B6-D17AC6535EF6}"/>
+              </a:ext>
+            </a:extLst>
+          </p:cNvPr>
+          <p:cNvSpPr>
+            <a:spLocks xmlns:a="http://schemas.openxmlformats.org/drawingml/2006/main" noGrp="1"/>
+          </p:cNvSpPr>
+          <p:nvPr/>
+        </p:nvSpPr>
+        <p:spPr>
+          <a:xfrm xmlns:a="http://schemas.openxmlformats.org/drawingml/2006/main">
+            <a:off x="7429500" y="1809750"/>
+            <a:ext cx="952500" cy="190500"/>
+          </a:xfrm>
+          <a:prstGeom xmlns:a="http://schemas.openxmlformats.org/drawingml/2006/main" prst="rect">
+            <a:avLst/>
+          </a:prstGeom>
+          <a:noFill xmlns:a="http://schemas.openxmlformats.org/drawingml/2006/main"/>
+          <a:ln xmlns:a="http://schemas.openxmlformats.org/drawingml/2006/main" w="0">
+            <a:noFill/>
+            <a:prstDash val="solid"/>
+          </a:ln>
+        </p:spPr>
+        <p:txBody>
+          <a:bodyPr xmlns:a="http://schemas.openxmlformats.org/drawingml/2006/main" anchor="ctr"/>
+          <a:lstStyle xmlns:a="http://schemas.openxmlformats.org/drawingml/2006/main"/>
+          <a:p xmlns:a="http://schemas.openxmlformats.org/drawingml/2006/main">
+            <a:pPr algn="l">
+              <a:defRPr sz="750" b="1">
+                <a:solidFill>
+                  <a:srgbClr val="657387"/>
+                </a:solidFill>
+              </a:defRPr>
+            </a:pPr>
+            <a:r>
+              <a:rPr sz="750" b="1">
+                <a:solidFill>
+                  <a:srgbClr val="657387"/>
+                </a:solidFill>
+              </a:rPr>
+              <a:t>NODES</a:t>
+            </a:r>
+          </a:p>
+        </p:txBody>
+      </p:sp>
+      <p:sp>
+        <p:nvSpPr>
+          <p:cNvPr id="45" name="edges-label">
+            <a:extLst xmlns:a="http://schemas.openxmlformats.org/drawingml/2006/main">
+              <a:ext uri="{FF2B5EF4-FFF2-40B4-BE49-F238E27FC236}">
+                <a16:creationId xmlns:a16="http://schemas.microsoft.com/office/drawing/2014/main" id="{C5099614-F259-4027-84FD-DA9B7C585097}"/>
+              </a:ext>
+            </a:extLst>
+          </p:cNvPr>
+          <p:cNvSpPr>
+            <a:spLocks xmlns:a="http://schemas.openxmlformats.org/drawingml/2006/main" noGrp="1"/>
+          </p:cNvSpPr>
+          <p:nvPr/>
+        </p:nvSpPr>
+        <p:spPr>
+          <a:xfrm xmlns:a="http://schemas.openxmlformats.org/drawingml/2006/main">
+            <a:off x="7429500" y="2876550"/>
+            <a:ext cx="952500" cy="190500"/>
+          </a:xfrm>
+          <a:prstGeom xmlns:a="http://schemas.openxmlformats.org/drawingml/2006/main" prst="rect">
+            <a:avLst/>
+          </a:prstGeom>
+          <a:noFill xmlns:a="http://schemas.openxmlformats.org/drawingml/2006/main"/>
+          <a:ln xmlns:a="http://schemas.openxmlformats.org/drawingml/2006/main" w="0">
+            <a:noFill/>
+            <a:prstDash val="solid"/>
+          </a:ln>
+        </p:spPr>
+        <p:txBody>
+          <a:bodyPr xmlns:a="http://schemas.openxmlformats.org/drawingml/2006/main" anchor="ctr"/>
+          <a:lstStyle xmlns:a="http://schemas.openxmlformats.org/drawingml/2006/main"/>
+          <a:p xmlns:a="http://schemas.openxmlformats.org/drawingml/2006/main">
+            <a:pPr algn="l">
+              <a:defRPr sz="750" b="1">
+                <a:solidFill>
+                  <a:srgbClr val="657387"/>
+                </a:solidFill>
+              </a:defRPr>
+            </a:pPr>
+            <a:r>
+              <a:rPr sz="750" b="1">
+                <a:solidFill>
+                  <a:srgbClr val="657387"/>
+                </a:solidFill>
+              </a:rPr>
+              <a:t>EDGES</a:t>
+            </a:r>
+          </a:p>
+        </p:txBody>
+      </p:sp>
+      <p:sp>
+        <p:nvSpPr>
+          <p:cNvPr id="46" name="style-node-atom">
+            <a:extLst xmlns:a="http://schemas.openxmlformats.org/drawingml/2006/main">
+              <a:ext uri="{FF2B5EF4-FFF2-40B4-BE49-F238E27FC236}">
+                <a16:creationId xmlns:a16="http://schemas.microsoft.com/office/drawing/2014/main" id="{3CFAD693-0C6A-476C-BCD4-EACA53AED62B}"/>
+              </a:ext>
+            </a:extLst>
+          </p:cNvPr>
+          <p:cNvSpPr>
+            <a:spLocks xmlns:a="http://schemas.openxmlformats.org/drawingml/2006/main" noGrp="1"/>
+          </p:cNvSpPr>
+          <p:nvPr/>
+        </p:nvSpPr>
+        <p:spPr>
+          <a:xfrm xmlns:a="http://schemas.openxmlformats.org/drawingml/2006/main">
+            <a:off x="7658100" y="2085975"/>
+            <a:ext cx="304800" cy="304800"/>
+          </a:xfrm>
+          <a:prstGeom xmlns:a="http://schemas.openxmlformats.org/drawingml/2006/main" prst="ellipse">
+            <a:avLst/>
+          </a:prstGeom>
+          <a:solidFill xmlns:a="http://schemas.openxmlformats.org/drawingml/2006/main">
+            <a:srgbClr val="3478DC"/>
+          </a:solidFill>
+          <a:ln xmlns:a="http://schemas.openxmlformats.org/drawingml/2006/main" w="14288">
+            <a:solidFill>
+              <a:srgbClr val="3478DC"/>
+            </a:solidFill>
+            <a:prstDash val="solid"/>
+          </a:ln>
+        </p:spPr>
+        <p:txBody>
+          <a:bodyPr xmlns:a="http://schemas.openxmlformats.org/drawingml/2006/main" anchor="ctr"/>
+          <a:lstStyle xmlns:a="http://schemas.openxmlformats.org/drawingml/2006/main"/>
+          <a:p xmlns:a="http://schemas.openxmlformats.org/drawingml/2006/main">
+            <a:pPr algn="ctr">
+              <a:defRPr sz="750" b="1">
+                <a:solidFill>
+                  <a:srgbClr val="FFFFFF"/>
+                </a:solidFill>
+              </a:defRPr>
+            </a:pPr>
+            <a:r>
+              <a:rPr sz="750" b="1">
+                <a:solidFill>
+                  <a:srgbClr val="FFFFFF"/>
+                </a:solidFill>
+              </a:rPr>
+              <a:t>A</a:t>
+            </a:r>
+          </a:p>
+        </p:txBody>
+      </p:sp>
+      <p:sp>
+        <p:nvSpPr>
+          <p:cNvPr id="47" name="style-node-label-atom">
+            <a:extLst xmlns:a="http://schemas.openxmlformats.org/drawingml/2006/main">
+              <a:ext uri="{FF2B5EF4-FFF2-40B4-BE49-F238E27FC236}">
+                <a16:creationId xmlns:a16="http://schemas.microsoft.com/office/drawing/2014/main" id="{C277590F-0374-43A1-8E83-38F1C1F0A9E8}"/>
+              </a:ext>
+            </a:extLst>
+          </p:cNvPr>
+          <p:cNvSpPr>
+            <a:spLocks xmlns:a="http://schemas.openxmlformats.org/drawingml/2006/main" noGrp="1"/>
+          </p:cNvSpPr>
+          <p:nvPr/>
+        </p:nvSpPr>
+        <p:spPr>
+          <a:xfrm xmlns:a="http://schemas.openxmlformats.org/drawingml/2006/main">
+            <a:off x="7353300" y="2457450"/>
+            <a:ext cx="914400" cy="190500"/>
+          </a:xfrm>
+          <a:prstGeom xmlns:a="http://schemas.openxmlformats.org/drawingml/2006/main" prst="rect">
+            <a:avLst/>
+          </a:prstGeom>
+          <a:noFill xmlns:a="http://schemas.openxmlformats.org/drawingml/2006/main"/>
+          <a:ln xmlns:a="http://schemas.openxmlformats.org/drawingml/2006/main" w="0">
+            <a:noFill/>
+            <a:prstDash val="solid"/>
+          </a:ln>
+        </p:spPr>
+        <p:txBody>
+          <a:bodyPr xmlns:a="http://schemas.openxmlformats.org/drawingml/2006/main" anchor="ctr"/>
+          <a:lstStyle xmlns:a="http://schemas.openxmlformats.org/drawingml/2006/main"/>
+          <a:p xmlns:a="http://schemas.openxmlformats.org/drawingml/2006/main">
+            <a:pPr algn="ctr">
+              <a:defRPr sz="675" b="1">
+                <a:solidFill>
+                  <a:srgbClr val="657387"/>
+                </a:solidFill>
+              </a:defRPr>
+            </a:pPr>
+            <a:r>
+              <a:rPr sz="675" b="1">
+                <a:solidFill>
+                  <a:srgbClr val="657387"/>
+                </a:solidFill>
+              </a:rPr>
+              <a:t>ATOM</a:t>
+            </a:r>
+          </a:p>
+        </p:txBody>
+      </p:sp>
+      <p:sp>
+        <p:nvSpPr>
+          <p:cNvPr id="48" name="style-node-retained">
+            <a:extLst xmlns:a="http://schemas.openxmlformats.org/drawingml/2006/main">
+              <a:ext uri="{FF2B5EF4-FFF2-40B4-BE49-F238E27FC236}">
+                <a16:creationId xmlns:a16="http://schemas.microsoft.com/office/drawing/2014/main" id="{F48DF318-B8EC-4515-BC56-A7D1746487A1}"/>
+              </a:ext>
+            </a:extLst>
+          </p:cNvPr>
+          <p:cNvSpPr>
+            <a:spLocks xmlns:a="http://schemas.openxmlformats.org/drawingml/2006/main" noGrp="1"/>
+          </p:cNvSpPr>
+          <p:nvPr/>
+        </p:nvSpPr>
+        <p:spPr>
+          <a:xfrm xmlns:a="http://schemas.openxmlformats.org/drawingml/2006/main">
+            <a:off x="8705850" y="2085975"/>
+            <a:ext cx="304800" cy="304800"/>
+          </a:xfrm>
+          <a:prstGeom xmlns:a="http://schemas.openxmlformats.org/drawingml/2006/main" prst="ellipse">
+            <a:avLst/>
+          </a:prstGeom>
+          <a:solidFill xmlns:a="http://schemas.openxmlformats.org/drawingml/2006/main">
+            <a:srgbClr val="49BBD6"/>
+          </a:solidFill>
+          <a:ln xmlns:a="http://schemas.openxmlformats.org/drawingml/2006/main" w="14288">
+            <a:solidFill>
+              <a:srgbClr val="49BBD6"/>
+            </a:solidFill>
+            <a:prstDash val="solid"/>
+          </a:ln>
+        </p:spPr>
+        <p:txBody>
+          <a:bodyPr xmlns:a="http://schemas.openxmlformats.org/drawingml/2006/main" anchor="ctr"/>
+          <a:lstStyle xmlns:a="http://schemas.openxmlformats.org/drawingml/2006/main"/>
+          <a:p xmlns:a="http://schemas.openxmlformats.org/drawingml/2006/main">
+            <a:pPr algn="ctr">
+              <a:defRPr sz="750" b="1">
+                <a:solidFill>
+                  <a:srgbClr val="FFFFFF"/>
+                </a:solidFill>
+              </a:defRPr>
+            </a:pPr>
+            <a:r>
+              <a:rPr sz="750" b="1">
+                <a:solidFill>
+                  <a:srgbClr val="FFFFFF"/>
+                </a:solidFill>
+              </a:rPr>
+              <a:t>A</a:t>
+            </a:r>
+          </a:p>
+        </p:txBody>
+      </p:sp>
+      <p:sp>
+        <p:nvSpPr>
+          <p:cNvPr id="49" name="style-node-label-retained">
+            <a:extLst xmlns:a="http://schemas.openxmlformats.org/drawingml/2006/main">
+              <a:ext uri="{FF2B5EF4-FFF2-40B4-BE49-F238E27FC236}">
+                <a16:creationId xmlns:a16="http://schemas.microsoft.com/office/drawing/2014/main" id="{8A8B58C8-D8DE-422C-ADCB-87EBA83F34B1}"/>
+              </a:ext>
+            </a:extLst>
+          </p:cNvPr>
+          <p:cNvSpPr>
+            <a:spLocks xmlns:a="http://schemas.openxmlformats.org/drawingml/2006/main" noGrp="1"/>
+          </p:cNvSpPr>
+          <p:nvPr/>
+        </p:nvSpPr>
+        <p:spPr>
+          <a:xfrm xmlns:a="http://schemas.openxmlformats.org/drawingml/2006/main">
+            <a:off x="8401050" y="2457450"/>
+            <a:ext cx="914400" cy="190500"/>
+          </a:xfrm>
+          <a:prstGeom xmlns:a="http://schemas.openxmlformats.org/drawingml/2006/main" prst="rect">
+            <a:avLst/>
+          </a:prstGeom>
+          <a:noFill xmlns:a="http://schemas.openxmlformats.org/drawingml/2006/main"/>
+          <a:ln xmlns:a="http://schemas.openxmlformats.org/drawingml/2006/main" w="0">
+            <a:noFill/>
+            <a:prstDash val="solid"/>
+          </a:ln>
+        </p:spPr>
+        <p:txBody>
+          <a:bodyPr xmlns:a="http://schemas.openxmlformats.org/drawingml/2006/main" anchor="ctr"/>
+          <a:lstStyle xmlns:a="http://schemas.openxmlformats.org/drawingml/2006/main"/>
+          <a:p xmlns:a="http://schemas.openxmlformats.org/drawingml/2006/main">
+            <a:pPr algn="ctr">
+              <a:defRPr sz="675" b="1">
+                <a:solidFill>
+                  <a:srgbClr val="657387"/>
+                </a:solidFill>
+              </a:defRPr>
+            </a:pPr>
+            <a:r>
+              <a:rPr sz="675" b="1">
+                <a:solidFill>
+                  <a:srgbClr val="657387"/>
+                </a:solidFill>
+              </a:rPr>
+              <a:t>RETAINED</a:t>
+            </a:r>
+          </a:p>
+        </p:txBody>
+      </p:sp>
+      <p:sp>
+        <p:nvSpPr>
+          <p:cNvPr id="50" name="style-node-boundary">
+            <a:extLst xmlns:a="http://schemas.openxmlformats.org/drawingml/2006/main">
+              <a:ext uri="{FF2B5EF4-FFF2-40B4-BE49-F238E27FC236}">
+                <a16:creationId xmlns:a16="http://schemas.microsoft.com/office/drawing/2014/main" id="{D555D483-A53B-460C-A3AB-3476C3D3683F}"/>
+              </a:ext>
+            </a:extLst>
+          </p:cNvPr>
+          <p:cNvSpPr>
+            <a:spLocks xmlns:a="http://schemas.openxmlformats.org/drawingml/2006/main" noGrp="1"/>
+          </p:cNvSpPr>
+          <p:nvPr/>
+        </p:nvSpPr>
+        <p:spPr>
+          <a:xfrm xmlns:a="http://schemas.openxmlformats.org/drawingml/2006/main">
+            <a:off x="9753600" y="2085975"/>
+            <a:ext cx="304800" cy="304800"/>
+          </a:xfrm>
+          <a:prstGeom xmlns:a="http://schemas.openxmlformats.org/drawingml/2006/main" prst="ellipse">
+            <a:avLst/>
+          </a:prstGeom>
+          <a:solidFill xmlns:a="http://schemas.openxmlformats.org/drawingml/2006/main">
+            <a:srgbClr val="FFFFFF"/>
+          </a:solidFill>
+          <a:ln xmlns:a="http://schemas.openxmlformats.org/drawingml/2006/main" w="23813">
+            <a:solidFill>
+              <a:srgbClr val="3478DC"/>
+            </a:solidFill>
+            <a:prstDash val="solid"/>
+          </a:ln>
+        </p:spPr>
+        <p:txBody>
+          <a:bodyPr xmlns:a="http://schemas.openxmlformats.org/drawingml/2006/main" anchor="ctr"/>
+          <a:lstStyle xmlns:a="http://schemas.openxmlformats.org/drawingml/2006/main"/>
+          <a:p xmlns:a="http://schemas.openxmlformats.org/drawingml/2006/main">
+            <a:pPr algn="ctr">
+              <a:defRPr sz="750" b="1">
+                <a:solidFill>
+                  <a:srgbClr val="164E8B"/>
+                </a:solidFill>
+              </a:defRPr>
+            </a:pPr>
+            <a:r>
+              <a:rPr sz="750" b="1">
+                <a:solidFill>
+                  <a:srgbClr val="164E8B"/>
+                </a:solidFill>
+              </a:rPr>
+              <a:t>A</a:t>
+            </a:r>
+          </a:p>
+        </p:txBody>
+      </p:sp>
+      <p:sp>
+        <p:nvSpPr>
+          <p:cNvPr id="51" name="style-node-label-boundary">
+            <a:extLst xmlns:a="http://schemas.openxmlformats.org/drawingml/2006/main">
+              <a:ext uri="{FF2B5EF4-FFF2-40B4-BE49-F238E27FC236}">
+                <a16:creationId xmlns:a16="http://schemas.microsoft.com/office/drawing/2014/main" id="{E2B1809C-B144-44AA-81BD-1F85B31B3E78}"/>
+              </a:ext>
+            </a:extLst>
+          </p:cNvPr>
+          <p:cNvSpPr>
+            <a:spLocks xmlns:a="http://schemas.openxmlformats.org/drawingml/2006/main" noGrp="1"/>
+          </p:cNvSpPr>
+          <p:nvPr/>
+        </p:nvSpPr>
+        <p:spPr>
+          <a:xfrm xmlns:a="http://schemas.openxmlformats.org/drawingml/2006/main">
+            <a:off x="9448800" y="2457450"/>
+            <a:ext cx="914400" cy="190500"/>
+          </a:xfrm>
+          <a:prstGeom xmlns:a="http://schemas.openxmlformats.org/drawingml/2006/main" prst="rect">
+            <a:avLst/>
+          </a:prstGeom>
+          <a:noFill xmlns:a="http://schemas.openxmlformats.org/drawingml/2006/main"/>
+          <a:ln xmlns:a="http://schemas.openxmlformats.org/drawingml/2006/main" w="0">
+            <a:noFill/>
+            <a:prstDash val="solid"/>
+          </a:ln>
+        </p:spPr>
+        <p:txBody>
+          <a:bodyPr xmlns:a="http://schemas.openxmlformats.org/drawingml/2006/main" anchor="ctr"/>
+          <a:lstStyle xmlns:a="http://schemas.openxmlformats.org/drawingml/2006/main"/>
+          <a:p xmlns:a="http://schemas.openxmlformats.org/drawingml/2006/main">
+            <a:pPr algn="ctr">
+              <a:defRPr sz="675" b="1">
+                <a:solidFill>
+                  <a:srgbClr val="657387"/>
+                </a:solidFill>
+              </a:defRPr>
+            </a:pPr>
+            <a:r>
+              <a:rPr sz="675" b="1">
+                <a:solidFill>
+                  <a:srgbClr val="657387"/>
+                </a:solidFill>
+              </a:rPr>
+              <a:t>BOUNDARY</a:t>
+            </a:r>
+          </a:p>
+        </p:txBody>
+      </p:sp>
+      <p:sp>
+        <p:nvSpPr>
+          <p:cNvPr id="52" name="style-node-removed">
+            <a:extLst xmlns:a="http://schemas.openxmlformats.org/drawingml/2006/main">
+              <a:ext uri="{FF2B5EF4-FFF2-40B4-BE49-F238E27FC236}">
+                <a16:creationId xmlns:a16="http://schemas.microsoft.com/office/drawing/2014/main" id="{19F2261D-3DE4-40B1-9730-0C20A04E8F01}"/>
+              </a:ext>
+            </a:extLst>
+          </p:cNvPr>
+          <p:cNvSpPr>
+            <a:spLocks xmlns:a="http://schemas.openxmlformats.org/drawingml/2006/main" noGrp="1"/>
+          </p:cNvSpPr>
+          <p:nvPr/>
+        </p:nvSpPr>
+        <p:spPr>
+          <a:xfrm xmlns:a="http://schemas.openxmlformats.org/drawingml/2006/main">
+            <a:off x="10801350" y="2085975"/>
+            <a:ext cx="304800" cy="304800"/>
+          </a:xfrm>
+          <a:prstGeom xmlns:a="http://schemas.openxmlformats.org/drawingml/2006/main" prst="ellipse">
+            <a:avLst/>
+          </a:prstGeom>
+          <a:solidFill xmlns:a="http://schemas.openxmlformats.org/drawingml/2006/main">
+            <a:srgbClr val="E8EDF3"/>
+          </a:solidFill>
+          <a:ln xmlns:a="http://schemas.openxmlformats.org/drawingml/2006/main" w="14288">
+            <a:solidFill>
+              <a:srgbClr val="AAB6C4"/>
+            </a:solidFill>
+            <a:prstDash val="solid"/>
+          </a:ln>
+        </p:spPr>
+        <p:txBody>
+          <a:bodyPr xmlns:a="http://schemas.openxmlformats.org/drawingml/2006/main" anchor="ctr"/>
+          <a:lstStyle xmlns:a="http://schemas.openxmlformats.org/drawingml/2006/main"/>
+          <a:p xmlns:a="http://schemas.openxmlformats.org/drawingml/2006/main">
+            <a:pPr algn="ctr">
+              <a:defRPr sz="750" b="1">
+                <a:solidFill>
+                  <a:srgbClr val="E0575B"/>
+                </a:solidFill>
+              </a:defRPr>
+            </a:pPr>
+            <a:r>
+              <a:rPr sz="750" b="1">
+                <a:solidFill>
+                  <a:srgbClr val="E0575B"/>
+                </a:solidFill>
+              </a:rPr>
+              <a:t>x</a:t>
+            </a:r>
+          </a:p>
+        </p:txBody>
+      </p:sp>
+      <p:sp>
+        <p:nvSpPr>
+          <p:cNvPr id="53" name="style-node-label-removed">
+            <a:extLst xmlns:a="http://schemas.openxmlformats.org/drawingml/2006/main">
+              <a:ext uri="{FF2B5EF4-FFF2-40B4-BE49-F238E27FC236}">
+                <a16:creationId xmlns:a16="http://schemas.microsoft.com/office/drawing/2014/main" id="{D256E82C-E838-4567-B342-1DBF8FD75EF7}"/>
+              </a:ext>
+            </a:extLst>
+          </p:cNvPr>
+          <p:cNvSpPr>
+            <a:spLocks xmlns:a="http://schemas.openxmlformats.org/drawingml/2006/main" noGrp="1"/>
+          </p:cNvSpPr>
+          <p:nvPr/>
+        </p:nvSpPr>
+        <p:spPr>
+          <a:xfrm xmlns:a="http://schemas.openxmlformats.org/drawingml/2006/main">
+            <a:off x="10496550" y="2457450"/>
+            <a:ext cx="914400" cy="190500"/>
+          </a:xfrm>
+          <a:prstGeom xmlns:a="http://schemas.openxmlformats.org/drawingml/2006/main" prst="rect">
+            <a:avLst/>
+          </a:prstGeom>
+          <a:noFill xmlns:a="http://schemas.openxmlformats.org/drawingml/2006/main"/>
+          <a:ln xmlns:a="http://schemas.openxmlformats.org/drawingml/2006/main" w="0">
+            <a:noFill/>
+            <a:prstDash val="solid"/>
+          </a:ln>
+        </p:spPr>
+        <p:txBody>
+          <a:bodyPr xmlns:a="http://schemas.openxmlformats.org/drawingml/2006/main" anchor="ctr"/>
+          <a:lstStyle xmlns:a="http://schemas.openxmlformats.org/drawingml/2006/main"/>
+          <a:p xmlns:a="http://schemas.openxmlformats.org/drawingml/2006/main">
+            <a:pPr algn="ctr">
+              <a:defRPr sz="675" b="1">
+                <a:solidFill>
+                  <a:srgbClr val="657387"/>
+                </a:solidFill>
+              </a:defRPr>
+            </a:pPr>
+            <a:r>
+              <a:rPr sz="675" b="1">
+                <a:solidFill>
+                  <a:srgbClr val="657387"/>
+                </a:solidFill>
+              </a:rPr>
+              <a:t>REMOVED</a:t>
+            </a:r>
+          </a:p>
+        </p:txBody>
+      </p:sp>
+      <p:sp>
+        <p:nvSpPr>
+          <p:cNvPr id="54" name="style-edge-DIRECTED-source">
+            <a:extLst xmlns:a="http://schemas.openxmlformats.org/drawingml/2006/main">
+              <a:ext uri="{FF2B5EF4-FFF2-40B4-BE49-F238E27FC236}">
+                <a16:creationId xmlns:a16="http://schemas.microsoft.com/office/drawing/2014/main" id="{0DCADCC8-F811-40C3-BA3C-0ECAAE63FF52}"/>
+              </a:ext>
+            </a:extLst>
+          </p:cNvPr>
+          <p:cNvSpPr>
+            <a:spLocks xmlns:a="http://schemas.openxmlformats.org/drawingml/2006/main" noGrp="1"/>
+          </p:cNvSpPr>
+          <p:nvPr/>
+        </p:nvSpPr>
+        <p:spPr>
+          <a:xfrm xmlns:a="http://schemas.openxmlformats.org/drawingml/2006/main">
+            <a:off x="7534275" y="3295650"/>
+            <a:ext cx="171450" cy="171450"/>
+          </a:xfrm>
+          <a:prstGeom xmlns:a="http://schemas.openxmlformats.org/drawingml/2006/main" prst="ellipse">
+            <a:avLst/>
+          </a:prstGeom>
+          <a:solidFill xmlns:a="http://schemas.openxmlformats.org/drawingml/2006/main">
+            <a:srgbClr val="FFFFFF"/>
+          </a:solidFill>
+          <a:ln xmlns:a="http://schemas.openxmlformats.org/drawingml/2006/main" w="19050">
+            <a:solidFill>
+              <a:srgbClr val="164E8B"/>
+            </a:solidFill>
+            <a:prstDash val="solid"/>
+          </a:ln>
+        </p:spPr>
+      </p:sp>
+      <p:sp>
+        <p:nvSpPr>
+          <p:cNvPr id="55" name="style-edge-DIRECTED-target">
+            <a:extLst xmlns:a="http://schemas.openxmlformats.org/drawingml/2006/main">
+              <a:ext uri="{FF2B5EF4-FFF2-40B4-BE49-F238E27FC236}">
+                <a16:creationId xmlns:a16="http://schemas.microsoft.com/office/drawing/2014/main" id="{9F9F1820-33B9-4DB4-8EC9-1C216569DA16}"/>
+              </a:ext>
+            </a:extLst>
+          </p:cNvPr>
+          <p:cNvSpPr>
+            <a:spLocks xmlns:a="http://schemas.openxmlformats.org/drawingml/2006/main" noGrp="1"/>
+          </p:cNvSpPr>
+          <p:nvPr/>
+        </p:nvSpPr>
+        <p:spPr>
+          <a:xfrm xmlns:a="http://schemas.openxmlformats.org/drawingml/2006/main">
+            <a:off x="8343900" y="3295650"/>
+            <a:ext cx="171450" cy="171450"/>
+          </a:xfrm>
+          <a:prstGeom xmlns:a="http://schemas.openxmlformats.org/drawingml/2006/main" prst="ellipse">
+            <a:avLst/>
+          </a:prstGeom>
+          <a:solidFill xmlns:a="http://schemas.openxmlformats.org/drawingml/2006/main">
+            <a:srgbClr val="164E8B"/>
+          </a:solidFill>
+          <a:ln xmlns:a="http://schemas.openxmlformats.org/drawingml/2006/main" w="14288">
+            <a:solidFill>
+              <a:srgbClr val="164E8B"/>
+            </a:solidFill>
+            <a:prstDash val="solid"/>
+          </a:ln>
+        </p:spPr>
+      </p:sp>
+      <p:cxnSp>
+        <p:nvCxnSpPr>
+          <p:cNvPr id="162" name=""/>
+          <p:cNvCxnSpPr>
+            <a:stCxn xmlns:a="http://schemas.openxmlformats.org/drawingml/2006/main" id="54" idx="6"/>
+            <a:endCxn xmlns:a="http://schemas.openxmlformats.org/drawingml/2006/main" id="55" idx="2"/>
+          </p:cNvCxnSpPr>
+          <p:nvPr/>
+        </p:nvCxnSpPr>
+        <p:spPr>
+          <a:xfrm xmlns:a="http://schemas.openxmlformats.org/drawingml/2006/main">
+            <a:off x="7705725" y="3381375"/>
+            <a:ext cx="638175" cy="0"/>
+          </a:xfrm>
+          <a:prstGeom xmlns:a="http://schemas.openxmlformats.org/drawingml/2006/main" prst="straightConnector1">
+            <a:avLst/>
+          </a:prstGeom>
+          <a:ln xmlns:a="http://schemas.openxmlformats.org/drawingml/2006/main" w="19050" cap="rnd">
+            <a:solidFill>
+              <a:srgbClr val="164E8B"/>
+            </a:solidFill>
+            <a:prstDash val="solid"/>
+            <a:round/>
+            <a:tailEnd type="triangle" w="sm" len="sm"/>
+          </a:ln>
+        </p:spPr>
+      </p:cxnSp>
+      <p:sp>
+        <p:nvSpPr>
+          <p:cNvPr id="57" name="style-edge-label-directed">
+            <a:extLst xmlns:a="http://schemas.openxmlformats.org/drawingml/2006/main">
+              <a:ext uri="{FF2B5EF4-FFF2-40B4-BE49-F238E27FC236}">
+                <a16:creationId xmlns:a16="http://schemas.microsoft.com/office/drawing/2014/main" id="{CCC8104A-13D8-484C-99A0-96217F9C7FC5}"/>
+              </a:ext>
+            </a:extLst>
+          </p:cNvPr>
+          <p:cNvSpPr>
+            <a:spLocks xmlns:a="http://schemas.openxmlformats.org/drawingml/2006/main" noGrp="1"/>
+          </p:cNvSpPr>
+          <p:nvPr/>
+        </p:nvSpPr>
+        <p:spPr>
+          <a:xfrm xmlns:a="http://schemas.openxmlformats.org/drawingml/2006/main">
+            <a:off x="7505700" y="3619500"/>
+            <a:ext cx="1038225" cy="190500"/>
+          </a:xfrm>
+          <a:prstGeom xmlns:a="http://schemas.openxmlformats.org/drawingml/2006/main" prst="rect">
+            <a:avLst/>
+          </a:prstGeom>
+          <a:noFill xmlns:a="http://schemas.openxmlformats.org/drawingml/2006/main"/>
+          <a:ln xmlns:a="http://schemas.openxmlformats.org/drawingml/2006/main" w="0">
+            <a:noFill/>
+            <a:prstDash val="solid"/>
+          </a:ln>
+        </p:spPr>
+        <p:txBody>
+          <a:bodyPr xmlns:a="http://schemas.openxmlformats.org/drawingml/2006/main" anchor="ctr"/>
+          <a:lstStyle xmlns:a="http://schemas.openxmlformats.org/drawingml/2006/main"/>
+          <a:p xmlns:a="http://schemas.openxmlformats.org/drawingml/2006/main">
+            <a:pPr algn="ctr">
+              <a:defRPr sz="675" b="1">
+                <a:solidFill>
+                  <a:srgbClr val="657387"/>
+                </a:solidFill>
+              </a:defRPr>
+            </a:pPr>
+            <a:r>
+              <a:rPr sz="675" b="1">
+                <a:solidFill>
+                  <a:srgbClr val="657387"/>
+                </a:solidFill>
+              </a:rPr>
+              <a:t>DIRECTED</a:t>
+            </a:r>
+          </a:p>
+        </p:txBody>
+      </p:sp>
+      <p:sp>
+        <p:nvSpPr>
+          <p:cNvPr id="58" name="style-edge-DEPENDENCY-source">
+            <a:extLst xmlns:a="http://schemas.openxmlformats.org/drawingml/2006/main">
+              <a:ext uri="{FF2B5EF4-FFF2-40B4-BE49-F238E27FC236}">
+                <a16:creationId xmlns:a16="http://schemas.microsoft.com/office/drawing/2014/main" id="{5D70999C-5E0E-4628-9D5A-94A4D9ED069E}"/>
+              </a:ext>
+            </a:extLst>
+          </p:cNvPr>
+          <p:cNvSpPr>
+            <a:spLocks xmlns:a="http://schemas.openxmlformats.org/drawingml/2006/main" noGrp="1"/>
+          </p:cNvSpPr>
+          <p:nvPr/>
+        </p:nvSpPr>
+        <p:spPr>
+          <a:xfrm xmlns:a="http://schemas.openxmlformats.org/drawingml/2006/main">
+            <a:off x="9010650" y="3295650"/>
+            <a:ext cx="171450" cy="171450"/>
+          </a:xfrm>
+          <a:prstGeom xmlns:a="http://schemas.openxmlformats.org/drawingml/2006/main" prst="ellipse">
+            <a:avLst/>
+          </a:prstGeom>
+          <a:solidFill xmlns:a="http://schemas.openxmlformats.org/drawingml/2006/main">
+            <a:srgbClr val="FFFFFF"/>
+          </a:solidFill>
+          <a:ln xmlns:a="http://schemas.openxmlformats.org/drawingml/2006/main" w="19050">
+            <a:solidFill>
+              <a:srgbClr val="657387"/>
+            </a:solidFill>
+            <a:prstDash val="solid"/>
+          </a:ln>
+        </p:spPr>
+      </p:sp>
+      <p:sp>
+        <p:nvSpPr>
+          <p:cNvPr id="59" name="style-edge-DEPENDENCY-target">
+            <a:extLst xmlns:a="http://schemas.openxmlformats.org/drawingml/2006/main">
+              <a:ext uri="{FF2B5EF4-FFF2-40B4-BE49-F238E27FC236}">
+                <a16:creationId xmlns:a16="http://schemas.microsoft.com/office/drawing/2014/main" id="{006EFF2F-95D9-4C19-9874-02F02F6C91DC}"/>
+              </a:ext>
+            </a:extLst>
+          </p:cNvPr>
+          <p:cNvSpPr>
+            <a:spLocks xmlns:a="http://schemas.openxmlformats.org/drawingml/2006/main" noGrp="1"/>
+          </p:cNvSpPr>
+          <p:nvPr/>
+        </p:nvSpPr>
+        <p:spPr>
+          <a:xfrm xmlns:a="http://schemas.openxmlformats.org/drawingml/2006/main">
+            <a:off x="9820275" y="3295650"/>
+            <a:ext cx="171450" cy="171450"/>
+          </a:xfrm>
+          <a:prstGeom xmlns:a="http://schemas.openxmlformats.org/drawingml/2006/main" prst="ellipse">
+            <a:avLst/>
+          </a:prstGeom>
+          <a:solidFill xmlns:a="http://schemas.openxmlformats.org/drawingml/2006/main">
+            <a:srgbClr val="657387"/>
+          </a:solidFill>
+          <a:ln xmlns:a="http://schemas.openxmlformats.org/drawingml/2006/main" w="14288">
+            <a:solidFill>
+              <a:srgbClr val="657387"/>
+            </a:solidFill>
+            <a:prstDash val="solid"/>
+          </a:ln>
+        </p:spPr>
+      </p:sp>
+      <p:cxnSp>
+        <p:nvCxnSpPr>
+          <p:cNvPr id="166" name=""/>
+          <p:cNvCxnSpPr>
+            <a:stCxn xmlns:a="http://schemas.openxmlformats.org/drawingml/2006/main" id="58" idx="6"/>
+            <a:endCxn xmlns:a="http://schemas.openxmlformats.org/drawingml/2006/main" id="59" idx="2"/>
+          </p:cNvCxnSpPr>
+          <p:nvPr/>
+        </p:nvCxnSpPr>
+        <p:spPr>
+          <a:xfrm xmlns:a="http://schemas.openxmlformats.org/drawingml/2006/main">
+            <a:off x="9182100" y="3381375"/>
+            <a:ext cx="638175" cy="0"/>
+          </a:xfrm>
+          <a:prstGeom xmlns:a="http://schemas.openxmlformats.org/drawingml/2006/main" prst="straightConnector1">
+            <a:avLst/>
+          </a:prstGeom>
+          <a:ln xmlns:a="http://schemas.openxmlformats.org/drawingml/2006/main" w="19050" cap="rnd">
+            <a:solidFill>
+              <a:srgbClr val="657387"/>
+            </a:solidFill>
+            <a:prstDash val="dash"/>
+            <a:round/>
+            <a:tailEnd type="triangle" w="sm" len="sm"/>
+          </a:ln>
+        </p:spPr>
+      </p:cxnSp>
+      <p:sp>
+        <p:nvSpPr>
+          <p:cNvPr id="61" name="style-edge-label-dependency">
+            <a:extLst xmlns:a="http://schemas.openxmlformats.org/drawingml/2006/main">
+              <a:ext uri="{FF2B5EF4-FFF2-40B4-BE49-F238E27FC236}">
+                <a16:creationId xmlns:a16="http://schemas.microsoft.com/office/drawing/2014/main" id="{B982832F-E94D-4AE4-AC3D-4A772546C0C5}"/>
+              </a:ext>
+            </a:extLst>
+          </p:cNvPr>
+          <p:cNvSpPr>
+            <a:spLocks xmlns:a="http://schemas.openxmlformats.org/drawingml/2006/main" noGrp="1"/>
+          </p:cNvSpPr>
+          <p:nvPr/>
+        </p:nvSpPr>
+        <p:spPr>
+          <a:xfrm xmlns:a="http://schemas.openxmlformats.org/drawingml/2006/main">
+            <a:off x="8982075" y="3619500"/>
+            <a:ext cx="1038225" cy="190500"/>
+          </a:xfrm>
+          <a:prstGeom xmlns:a="http://schemas.openxmlformats.org/drawingml/2006/main" prst="rect">
+            <a:avLst/>
+          </a:prstGeom>
+          <a:noFill xmlns:a="http://schemas.openxmlformats.org/drawingml/2006/main"/>
+          <a:ln xmlns:a="http://schemas.openxmlformats.org/drawingml/2006/main" w="0">
+            <a:noFill/>
+            <a:prstDash val="solid"/>
+          </a:ln>
+        </p:spPr>
+        <p:txBody>
+          <a:bodyPr xmlns:a="http://schemas.openxmlformats.org/drawingml/2006/main" anchor="ctr"/>
+          <a:lstStyle xmlns:a="http://schemas.openxmlformats.org/drawingml/2006/main"/>
+          <a:p xmlns:a="http://schemas.openxmlformats.org/drawingml/2006/main">
+            <a:pPr algn="ctr">
+              <a:defRPr sz="675" b="1">
+                <a:solidFill>
+                  <a:srgbClr val="657387"/>
+                </a:solidFill>
+              </a:defRPr>
+            </a:pPr>
+            <a:r>
+              <a:rPr sz="675" b="1">
+                <a:solidFill>
+                  <a:srgbClr val="657387"/>
+                </a:solidFill>
+              </a:rPr>
+              <a:t>DEPENDENCY</a:t>
+            </a:r>
+          </a:p>
+        </p:txBody>
+      </p:sp>
+      <p:sp>
+        <p:nvSpPr>
+          <p:cNvPr id="62" name="style-edge-HIGHLIGHT-source">
+            <a:extLst xmlns:a="http://schemas.openxmlformats.org/drawingml/2006/main">
+              <a:ext uri="{FF2B5EF4-FFF2-40B4-BE49-F238E27FC236}">
+                <a16:creationId xmlns:a16="http://schemas.microsoft.com/office/drawing/2014/main" id="{116A3000-07C3-4808-89E0-26C6A87DB5F3}"/>
+              </a:ext>
+            </a:extLst>
+          </p:cNvPr>
+          <p:cNvSpPr>
+            <a:spLocks xmlns:a="http://schemas.openxmlformats.org/drawingml/2006/main" noGrp="1"/>
+          </p:cNvSpPr>
+          <p:nvPr/>
+        </p:nvSpPr>
+        <p:spPr>
+          <a:xfrm xmlns:a="http://schemas.openxmlformats.org/drawingml/2006/main">
+            <a:off x="10487025" y="3295650"/>
+            <a:ext cx="171450" cy="171450"/>
+          </a:xfrm>
+          <a:prstGeom xmlns:a="http://schemas.openxmlformats.org/drawingml/2006/main" prst="ellipse">
+            <a:avLst/>
+          </a:prstGeom>
+          <a:solidFill xmlns:a="http://schemas.openxmlformats.org/drawingml/2006/main">
+            <a:srgbClr val="FFFFFF"/>
+          </a:solidFill>
+          <a:ln xmlns:a="http://schemas.openxmlformats.org/drawingml/2006/main" w="19050">
+            <a:solidFill>
+              <a:srgbClr val="49BBD6"/>
+            </a:solidFill>
+            <a:prstDash val="solid"/>
+          </a:ln>
+        </p:spPr>
+      </p:sp>
+      <p:sp>
+        <p:nvSpPr>
+          <p:cNvPr id="63" name="style-edge-HIGHLIGHT-target">
+            <a:extLst xmlns:a="http://schemas.openxmlformats.org/drawingml/2006/main">
+              <a:ext uri="{FF2B5EF4-FFF2-40B4-BE49-F238E27FC236}">
+                <a16:creationId xmlns:a16="http://schemas.microsoft.com/office/drawing/2014/main" id="{A7EFD35F-7373-40D3-9AAA-305A39E2B039}"/>
+              </a:ext>
+            </a:extLst>
+          </p:cNvPr>
+          <p:cNvSpPr>
+            <a:spLocks xmlns:a="http://schemas.openxmlformats.org/drawingml/2006/main" noGrp="1"/>
+          </p:cNvSpPr>
+          <p:nvPr/>
+        </p:nvSpPr>
+        <p:spPr>
+          <a:xfrm xmlns:a="http://schemas.openxmlformats.org/drawingml/2006/main">
+            <a:off x="11296650" y="3295650"/>
+            <a:ext cx="171450" cy="171450"/>
+          </a:xfrm>
+          <a:prstGeom xmlns:a="http://schemas.openxmlformats.org/drawingml/2006/main" prst="ellipse">
+            <a:avLst/>
+          </a:prstGeom>
+          <a:solidFill xmlns:a="http://schemas.openxmlformats.org/drawingml/2006/main">
+            <a:srgbClr val="49BBD6"/>
+          </a:solidFill>
+          <a:ln xmlns:a="http://schemas.openxmlformats.org/drawingml/2006/main" w="14288">
+            <a:solidFill>
+              <a:srgbClr val="49BBD6"/>
+            </a:solidFill>
+            <a:prstDash val="solid"/>
+          </a:ln>
+        </p:spPr>
+      </p:sp>
+      <p:cxnSp>
+        <p:nvCxnSpPr>
+          <p:cNvPr id="170" name=""/>
+          <p:cNvCxnSpPr>
+            <a:stCxn xmlns:a="http://schemas.openxmlformats.org/drawingml/2006/main" id="62" idx="6"/>
+            <a:endCxn xmlns:a="http://schemas.openxmlformats.org/drawingml/2006/main" id="63" idx="2"/>
+          </p:cNvCxnSpPr>
+          <p:nvPr/>
+        </p:nvCxnSpPr>
+        <p:spPr>
+          <a:xfrm xmlns:a="http://schemas.openxmlformats.org/drawingml/2006/main">
+            <a:off x="10658475" y="3381375"/>
+            <a:ext cx="638175" cy="0"/>
+          </a:xfrm>
+          <a:prstGeom xmlns:a="http://schemas.openxmlformats.org/drawingml/2006/main" prst="straightConnector1">
+            <a:avLst/>
+          </a:prstGeom>
+          <a:ln xmlns:a="http://schemas.openxmlformats.org/drawingml/2006/main" w="19050" cap="rnd">
+            <a:solidFill>
+              <a:srgbClr val="49BBD6"/>
+            </a:solidFill>
+            <a:prstDash val="solid"/>
+            <a:round/>
+            <a:tailEnd type="triangle" w="sm" len="sm"/>
+          </a:ln>
+        </p:spPr>
+      </p:cxnSp>
+      <p:sp>
+        <p:nvSpPr>
+          <p:cNvPr id="65" name="style-edge-label-highlight">
+            <a:extLst xmlns:a="http://schemas.openxmlformats.org/drawingml/2006/main">
+              <a:ext uri="{FF2B5EF4-FFF2-40B4-BE49-F238E27FC236}">
+                <a16:creationId xmlns:a16="http://schemas.microsoft.com/office/drawing/2014/main" id="{675A1547-F159-4326-A0DD-3E8FCAAA3236}"/>
+              </a:ext>
+            </a:extLst>
+          </p:cNvPr>
+          <p:cNvSpPr>
+            <a:spLocks xmlns:a="http://schemas.openxmlformats.org/drawingml/2006/main" noGrp="1"/>
+          </p:cNvSpPr>
+          <p:nvPr/>
+        </p:nvSpPr>
+        <p:spPr>
+          <a:xfrm xmlns:a="http://schemas.openxmlformats.org/drawingml/2006/main">
+            <a:off x="10458450" y="3619500"/>
+            <a:ext cx="1038225" cy="190500"/>
+          </a:xfrm>
+          <a:prstGeom xmlns:a="http://schemas.openxmlformats.org/drawingml/2006/main" prst="rect">
+            <a:avLst/>
+          </a:prstGeom>
+          <a:noFill xmlns:a="http://schemas.openxmlformats.org/drawingml/2006/main"/>
+          <a:ln xmlns:a="http://schemas.openxmlformats.org/drawingml/2006/main" w="0">
+            <a:noFill/>
+            <a:prstDash val="solid"/>
+          </a:ln>
+        </p:spPr>
+        <p:txBody>
+          <a:bodyPr xmlns:a="http://schemas.openxmlformats.org/drawingml/2006/main" anchor="ctr"/>
+          <a:lstStyle xmlns:a="http://schemas.openxmlformats.org/drawingml/2006/main"/>
+          <a:p xmlns:a="http://schemas.openxmlformats.org/drawingml/2006/main">
+            <a:pPr algn="ctr">
+              <a:defRPr sz="675" b="1">
+                <a:solidFill>
+                  <a:srgbClr val="657387"/>
+                </a:solidFill>
+              </a:defRPr>
+            </a:pPr>
+            <a:r>
+              <a:rPr sz="675" b="1">
+                <a:solidFill>
+                  <a:srgbClr val="657387"/>
+                </a:solidFill>
+              </a:rPr>
+              <a:t>HIGHLIGHT</a:t>
+            </a:r>
+          </a:p>
+        </p:txBody>
+      </p:sp>
+      <p:sp>
+        <p:nvSpPr>
+          <p:cNvPr id="66" name="patterns-panel">
+            <a:extLst xmlns:a="http://schemas.openxmlformats.org/drawingml/2006/main">
+              <a:ext uri="{FF2B5EF4-FFF2-40B4-BE49-F238E27FC236}">
+                <a16:creationId xmlns:a16="http://schemas.microsoft.com/office/drawing/2014/main" id="{38B10F8C-19BC-4888-8009-7AB2EB50486E}"/>
+              </a:ext>
+            </a:extLst>
+          </p:cNvPr>
+          <p:cNvSpPr>
+            <a:spLocks xmlns:a="http://schemas.openxmlformats.org/drawingml/2006/main" noGrp="1"/>
+          </p:cNvSpPr>
+          <p:nvPr/>
+        </p:nvSpPr>
+        <p:spPr>
+          <a:xfrm xmlns:a="http://schemas.openxmlformats.org/drawingml/2006/main">
+            <a:off x="400050" y="4457700"/>
+            <a:ext cx="11391900" cy="1885950"/>
+          </a:xfrm>
+          <a:prstGeom xmlns:a="http://schemas.openxmlformats.org/drawingml/2006/main" prst="roundRect">
+            <a:avLst>
+              <a:gd name="adj" fmla="val 4040"/>
+            </a:avLst>
+          </a:prstGeom>
+          <a:solidFill xmlns:a="http://schemas.openxmlformats.org/drawingml/2006/main">
+            <a:srgbClr val="FBFCFE"/>
+          </a:solidFill>
+          <a:ln xmlns:a="http://schemas.openxmlformats.org/drawingml/2006/main" w="9525">
+            <a:solidFill>
+              <a:srgbClr val="CBD5E1"/>
+            </a:solidFill>
+            <a:prstDash val="solid"/>
+          </a:ln>
+        </p:spPr>
+      </p:sp>
+      <p:sp>
+        <p:nvSpPr>
+          <p:cNvPr id="67" name="patterns-title">
+            <a:extLst xmlns:a="http://schemas.openxmlformats.org/drawingml/2006/main">
+              <a:ext uri="{FF2B5EF4-FFF2-40B4-BE49-F238E27FC236}">
+                <a16:creationId xmlns:a16="http://schemas.microsoft.com/office/drawing/2014/main" id="{7C884252-F995-454C-A8EC-B65E89B9BB15}"/>
+              </a:ext>
+            </a:extLst>
+          </p:cNvPr>
+          <p:cNvSpPr>
+            <a:spLocks xmlns:a="http://schemas.openxmlformats.org/drawingml/2006/main" noGrp="1"/>
+          </p:cNvSpPr>
+          <p:nvPr/>
+        </p:nvSpPr>
+        <p:spPr>
+          <a:xfrm xmlns:a="http://schemas.openxmlformats.org/drawingml/2006/main">
+            <a:off x="571500" y="4572000"/>
+            <a:ext cx="2381250" cy="228600"/>
+          </a:xfrm>
+          <a:prstGeom xmlns:a="http://schemas.openxmlformats.org/drawingml/2006/main" prst="rect">
+            <a:avLst/>
+          </a:prstGeom>
+          <a:noFill xmlns:a="http://schemas.openxmlformats.org/drawingml/2006/main"/>
+          <a:ln xmlns:a="http://schemas.openxmlformats.org/drawingml/2006/main" w="0">
+            <a:noFill/>
+            <a:prstDash val="solid"/>
+          </a:ln>
+        </p:spPr>
+        <p:txBody>
+          <a:bodyPr xmlns:a="http://schemas.openxmlformats.org/drawingml/2006/main" anchor="ctr"/>
+          <a:lstStyle xmlns:a="http://schemas.openxmlformats.org/drawingml/2006/main"/>
+          <a:p xmlns:a="http://schemas.openxmlformats.org/drawingml/2006/main">
+            <a:pPr algn="l">
+              <a:defRPr sz="900" b="1">
+                <a:solidFill>
+                  <a:srgbClr val="164E8B"/>
+                </a:solidFill>
+              </a:defRPr>
+            </a:pPr>
+            <a:r>
+              <a:rPr sz="900" b="1">
+                <a:solidFill>
+                  <a:srgbClr val="164E8B"/>
+                </a:solidFill>
+              </a:rPr>
+              <a:t>COPY-READY PATTERNS</a:t>
+            </a:r>
+          </a:p>
+        </p:txBody>
+      </p:sp>
+      <p:sp>
+        <p:nvSpPr>
+          <p:cNvPr id="68" name="patterns-divider-330">
+            <a:extLst xmlns:a="http://schemas.openxmlformats.org/drawingml/2006/main">
+              <a:ext uri="{FF2B5EF4-FFF2-40B4-BE49-F238E27FC236}">
+                <a16:creationId xmlns:a16="http://schemas.microsoft.com/office/drawing/2014/main" id="{7C268F0B-6711-4C62-B3A1-C955D22DFC4F}"/>
+              </a:ext>
+            </a:extLst>
+          </p:cNvPr>
+          <p:cNvSpPr>
+            <a:spLocks xmlns:a="http://schemas.openxmlformats.org/drawingml/2006/main" noGrp="1"/>
+          </p:cNvSpPr>
+          <p:nvPr/>
+        </p:nvSpPr>
+        <p:spPr>
+          <a:xfrm xmlns:a="http://schemas.openxmlformats.org/drawingml/2006/main">
+            <a:off x="3143250" y="4876800"/>
+            <a:ext cx="9525" cy="1257300"/>
+          </a:xfrm>
+          <a:prstGeom xmlns:a="http://schemas.openxmlformats.org/drawingml/2006/main" prst="rect">
+            <a:avLst/>
+          </a:prstGeom>
+          <a:solidFill xmlns:a="http://schemas.openxmlformats.org/drawingml/2006/main">
+            <a:srgbClr val="CBD5E1"/>
+          </a:solidFill>
+          <a:ln xmlns:a="http://schemas.openxmlformats.org/drawingml/2006/main" w="0">
+            <a:noFill/>
+            <a:prstDash val="solid"/>
+          </a:ln>
+        </p:spPr>
+      </p:sp>
+      <p:sp>
+        <p:nvSpPr>
+          <p:cNvPr id="69" name="patterns-divider-620">
+            <a:extLst xmlns:a="http://schemas.openxmlformats.org/drawingml/2006/main">
+              <a:ext uri="{FF2B5EF4-FFF2-40B4-BE49-F238E27FC236}">
+                <a16:creationId xmlns:a16="http://schemas.microsoft.com/office/drawing/2014/main" id="{E3F7D59E-E2CC-4A71-9F9F-D489733ACA3E}"/>
+              </a:ext>
+            </a:extLst>
+          </p:cNvPr>
+          <p:cNvSpPr>
+            <a:spLocks xmlns:a="http://schemas.openxmlformats.org/drawingml/2006/main" noGrp="1"/>
+          </p:cNvSpPr>
+          <p:nvPr/>
+        </p:nvSpPr>
+        <p:spPr>
+          <a:xfrm xmlns:a="http://schemas.openxmlformats.org/drawingml/2006/main">
+            <a:off x="5905500" y="4876800"/>
+            <a:ext cx="9525" cy="1257300"/>
+          </a:xfrm>
+          <a:prstGeom xmlns:a="http://schemas.openxmlformats.org/drawingml/2006/main" prst="rect">
+            <a:avLst/>
+          </a:prstGeom>
+          <a:solidFill xmlns:a="http://schemas.openxmlformats.org/drawingml/2006/main">
+            <a:srgbClr val="CBD5E1"/>
+          </a:solidFill>
+          <a:ln xmlns:a="http://schemas.openxmlformats.org/drawingml/2006/main" w="0">
+            <a:noFill/>
+            <a:prstDash val="solid"/>
+          </a:ln>
+        </p:spPr>
+      </p:sp>
+      <p:sp>
+        <p:nvSpPr>
+          <p:cNvPr id="70" name="patterns-divider-910">
+            <a:extLst xmlns:a="http://schemas.openxmlformats.org/drawingml/2006/main">
+              <a:ext uri="{FF2B5EF4-FFF2-40B4-BE49-F238E27FC236}">
+                <a16:creationId xmlns:a16="http://schemas.microsoft.com/office/drawing/2014/main" id="{D46D9E61-14BA-4D39-880A-A8C2AA0C871A}"/>
+              </a:ext>
+            </a:extLst>
+          </p:cNvPr>
+          <p:cNvSpPr>
+            <a:spLocks xmlns:a="http://schemas.openxmlformats.org/drawingml/2006/main" noGrp="1"/>
+          </p:cNvSpPr>
+          <p:nvPr/>
+        </p:nvSpPr>
+        <p:spPr>
+          <a:xfrm xmlns:a="http://schemas.openxmlformats.org/drawingml/2006/main">
+            <a:off x="8667750" y="4876800"/>
+            <a:ext cx="9525" cy="1257300"/>
+          </a:xfrm>
+          <a:prstGeom xmlns:a="http://schemas.openxmlformats.org/drawingml/2006/main" prst="rect">
+            <a:avLst/>
+          </a:prstGeom>
+          <a:solidFill xmlns:a="http://schemas.openxmlformats.org/drawingml/2006/main">
+            <a:srgbClr val="CBD5E1"/>
+          </a:solidFill>
+          <a:ln xmlns:a="http://schemas.openxmlformats.org/drawingml/2006/main" w="0">
+            <a:noFill/>
+            <a:prstDash val="solid"/>
+          </a:ln>
+        </p:spPr>
+      </p:sp>
+      <p:sp>
+        <p:nvSpPr>
+          <p:cNvPr id="71" name="pattern-label-chain">
+            <a:extLst xmlns:a="http://schemas.openxmlformats.org/drawingml/2006/main">
+              <a:ext uri="{FF2B5EF4-FFF2-40B4-BE49-F238E27FC236}">
+                <a16:creationId xmlns:a16="http://schemas.microsoft.com/office/drawing/2014/main" id="{848B981E-F4CB-4569-A60A-CAFC18E135B5}"/>
+              </a:ext>
+            </a:extLst>
+          </p:cNvPr>
+          <p:cNvSpPr>
+            <a:spLocks xmlns:a="http://schemas.openxmlformats.org/drawingml/2006/main" noGrp="1"/>
+          </p:cNvSpPr>
+          <p:nvPr/>
+        </p:nvSpPr>
+        <p:spPr>
+          <a:xfrm xmlns:a="http://schemas.openxmlformats.org/drawingml/2006/main">
+            <a:off x="571500" y="4895850"/>
+            <a:ext cx="1524000" cy="190500"/>
+          </a:xfrm>
+          <a:prstGeom xmlns:a="http://schemas.openxmlformats.org/drawingml/2006/main" prst="rect">
+            <a:avLst/>
+          </a:prstGeom>
+          <a:noFill xmlns:a="http://schemas.openxmlformats.org/drawingml/2006/main"/>
+          <a:ln xmlns:a="http://schemas.openxmlformats.org/drawingml/2006/main" w="0">
+            <a:noFill/>
+            <a:prstDash val="solid"/>
+          </a:ln>
+        </p:spPr>
+        <p:txBody>
+          <a:bodyPr xmlns:a="http://schemas.openxmlformats.org/drawingml/2006/main" anchor="ctr"/>
+          <a:lstStyle xmlns:a="http://schemas.openxmlformats.org/drawingml/2006/main"/>
+          <a:p xmlns:a="http://schemas.openxmlformats.org/drawingml/2006/main">
+            <a:pPr algn="l">
+              <a:defRPr sz="750" b="1">
+                <a:solidFill>
+                  <a:srgbClr val="657387"/>
+                </a:solidFill>
+              </a:defRPr>
+            </a:pPr>
+            <a:r>
+              <a:rPr sz="750" b="1">
+                <a:solidFill>
+                  <a:srgbClr val="657387"/>
+                </a:solidFill>
+              </a:rPr>
+              <a:t>CHAIN</a:t>
+            </a:r>
+          </a:p>
+        </p:txBody>
+      </p:sp>
+      <p:sp>
+        <p:nvSpPr>
+          <p:cNvPr id="72" name="pattern-label-branch">
+            <a:extLst xmlns:a="http://schemas.openxmlformats.org/drawingml/2006/main">
+              <a:ext uri="{FF2B5EF4-FFF2-40B4-BE49-F238E27FC236}">
+                <a16:creationId xmlns:a16="http://schemas.microsoft.com/office/drawing/2014/main" id="{B7D791E4-E261-4DAD-BB82-1D7A17598071}"/>
+              </a:ext>
+            </a:extLst>
+          </p:cNvPr>
+          <p:cNvSpPr>
+            <a:spLocks xmlns:a="http://schemas.openxmlformats.org/drawingml/2006/main" noGrp="1"/>
+          </p:cNvSpPr>
+          <p:nvPr/>
+        </p:nvSpPr>
+        <p:spPr>
+          <a:xfrm xmlns:a="http://schemas.openxmlformats.org/drawingml/2006/main">
+            <a:off x="3333750" y="4895850"/>
+            <a:ext cx="1524000" cy="190500"/>
+          </a:xfrm>
+          <a:prstGeom xmlns:a="http://schemas.openxmlformats.org/drawingml/2006/main" prst="rect">
+            <a:avLst/>
+          </a:prstGeom>
+          <a:noFill xmlns:a="http://schemas.openxmlformats.org/drawingml/2006/main"/>
+          <a:ln xmlns:a="http://schemas.openxmlformats.org/drawingml/2006/main" w="0">
+            <a:noFill/>
+            <a:prstDash val="solid"/>
+          </a:ln>
+        </p:spPr>
+        <p:txBody>
+          <a:bodyPr xmlns:a="http://schemas.openxmlformats.org/drawingml/2006/main" anchor="ctr"/>
+          <a:lstStyle xmlns:a="http://schemas.openxmlformats.org/drawingml/2006/main"/>
+          <a:p xmlns:a="http://schemas.openxmlformats.org/drawingml/2006/main">
+            <a:pPr algn="l">
+              <a:defRPr sz="750" b="1">
+                <a:solidFill>
+                  <a:srgbClr val="657387"/>
+                </a:solidFill>
+              </a:defRPr>
+            </a:pPr>
+            <a:r>
+              <a:rPr sz="750" b="1">
+                <a:solidFill>
+                  <a:srgbClr val="657387"/>
+                </a:solidFill>
+              </a:rPr>
+              <a:t>BRANCH</a:t>
+            </a:r>
+          </a:p>
+        </p:txBody>
+      </p:sp>
+      <p:sp>
+        <p:nvSpPr>
+          <p:cNvPr id="73" name="pattern-label-merge">
+            <a:extLst xmlns:a="http://schemas.openxmlformats.org/drawingml/2006/main">
+              <a:ext uri="{FF2B5EF4-FFF2-40B4-BE49-F238E27FC236}">
+                <a16:creationId xmlns:a16="http://schemas.microsoft.com/office/drawing/2014/main" id="{EE992633-9AA6-4E63-BA8F-D91F46E1BA35}"/>
+              </a:ext>
+            </a:extLst>
+          </p:cNvPr>
+          <p:cNvSpPr>
+            <a:spLocks xmlns:a="http://schemas.openxmlformats.org/drawingml/2006/main" noGrp="1"/>
+          </p:cNvSpPr>
+          <p:nvPr/>
+        </p:nvSpPr>
+        <p:spPr>
+          <a:xfrm xmlns:a="http://schemas.openxmlformats.org/drawingml/2006/main">
+            <a:off x="6096000" y="4895850"/>
+            <a:ext cx="1524000" cy="190500"/>
+          </a:xfrm>
+          <a:prstGeom xmlns:a="http://schemas.openxmlformats.org/drawingml/2006/main" prst="rect">
+            <a:avLst/>
+          </a:prstGeom>
+          <a:noFill xmlns:a="http://schemas.openxmlformats.org/drawingml/2006/main"/>
+          <a:ln xmlns:a="http://schemas.openxmlformats.org/drawingml/2006/main" w="0">
+            <a:noFill/>
+            <a:prstDash val="solid"/>
+          </a:ln>
+        </p:spPr>
+        <p:txBody>
+          <a:bodyPr xmlns:a="http://schemas.openxmlformats.org/drawingml/2006/main" anchor="ctr"/>
+          <a:lstStyle xmlns:a="http://schemas.openxmlformats.org/drawingml/2006/main"/>
+          <a:p xmlns:a="http://schemas.openxmlformats.org/drawingml/2006/main">
+            <a:pPr algn="l">
+              <a:defRPr sz="750" b="1">
+                <a:solidFill>
+                  <a:srgbClr val="657387"/>
+                </a:solidFill>
+              </a:defRPr>
+            </a:pPr>
+            <a:r>
+              <a:rPr sz="750" b="1">
+                <a:solidFill>
+                  <a:srgbClr val="657387"/>
+                </a:solidFill>
+              </a:rPr>
+              <a:t>MERGE</a:t>
+            </a:r>
+          </a:p>
+        </p:txBody>
+      </p:sp>
+      <p:sp>
+        <p:nvSpPr>
+          <p:cNvPr id="74" name="pattern-label-closure">
+            <a:extLst xmlns:a="http://schemas.openxmlformats.org/drawingml/2006/main">
+              <a:ext uri="{FF2B5EF4-FFF2-40B4-BE49-F238E27FC236}">
+                <a16:creationId xmlns:a16="http://schemas.microsoft.com/office/drawing/2014/main" id="{028550B6-0FC5-41D7-AFDA-831770C087D7}"/>
+              </a:ext>
+            </a:extLst>
+          </p:cNvPr>
+          <p:cNvSpPr>
+            <a:spLocks xmlns:a="http://schemas.openxmlformats.org/drawingml/2006/main" noGrp="1"/>
+          </p:cNvSpPr>
+          <p:nvPr/>
+        </p:nvSpPr>
+        <p:spPr>
+          <a:xfrm xmlns:a="http://schemas.openxmlformats.org/drawingml/2006/main">
+            <a:off x="8858250" y="4895850"/>
+            <a:ext cx="1524000" cy="190500"/>
+          </a:xfrm>
+          <a:prstGeom xmlns:a="http://schemas.openxmlformats.org/drawingml/2006/main" prst="rect">
+            <a:avLst/>
+          </a:prstGeom>
+          <a:noFill xmlns:a="http://schemas.openxmlformats.org/drawingml/2006/main"/>
+          <a:ln xmlns:a="http://schemas.openxmlformats.org/drawingml/2006/main" w="0">
+            <a:noFill/>
+            <a:prstDash val="solid"/>
+          </a:ln>
+        </p:spPr>
+        <p:txBody>
+          <a:bodyPr xmlns:a="http://schemas.openxmlformats.org/drawingml/2006/main" anchor="ctr"/>
+          <a:lstStyle xmlns:a="http://schemas.openxmlformats.org/drawingml/2006/main"/>
+          <a:p xmlns:a="http://schemas.openxmlformats.org/drawingml/2006/main">
+            <a:pPr algn="l">
+              <a:defRPr sz="750" b="1">
+                <a:solidFill>
+                  <a:srgbClr val="657387"/>
+                </a:solidFill>
+              </a:defRPr>
+            </a:pPr>
+            <a:r>
+              <a:rPr sz="750" b="1">
+                <a:solidFill>
+                  <a:srgbClr val="657387"/>
+                </a:solidFill>
+              </a:rPr>
+              <a:t>CLOSURE</a:t>
+            </a:r>
+          </a:p>
+        </p:txBody>
+      </p:sp>
+      <p:sp>
+        <p:nvSpPr>
+          <p:cNvPr id="75" name="pattern-chain-1">
+            <a:extLst xmlns:a="http://schemas.openxmlformats.org/drawingml/2006/main">
+              <a:ext uri="{FF2B5EF4-FFF2-40B4-BE49-F238E27FC236}">
+                <a16:creationId xmlns:a16="http://schemas.microsoft.com/office/drawing/2014/main" id="{65186775-2F37-495A-87D8-B584B2596004}"/>
+              </a:ext>
+            </a:extLst>
+          </p:cNvPr>
+          <p:cNvSpPr>
+            <a:spLocks xmlns:a="http://schemas.openxmlformats.org/drawingml/2006/main" noGrp="1"/>
+          </p:cNvSpPr>
+          <p:nvPr/>
+        </p:nvSpPr>
+        <p:spPr>
+          <a:xfrm xmlns:a="http://schemas.openxmlformats.org/drawingml/2006/main">
+            <a:off x="800100" y="5467350"/>
+            <a:ext cx="209550" cy="209550"/>
+          </a:xfrm>
+          <a:prstGeom xmlns:a="http://schemas.openxmlformats.org/drawingml/2006/main" prst="ellipse">
+            <a:avLst/>
+          </a:prstGeom>
+          <a:solidFill xmlns:a="http://schemas.openxmlformats.org/drawingml/2006/main">
+            <a:srgbClr val="3478DC"/>
+          </a:solidFill>
+          <a:ln xmlns:a="http://schemas.openxmlformats.org/drawingml/2006/main" w="14288">
+            <a:solidFill>
+              <a:srgbClr val="3478DC"/>
+            </a:solidFill>
+            <a:prstDash val="solid"/>
+          </a:ln>
+        </p:spPr>
+      </p:sp>
+      <p:sp>
+        <p:nvSpPr>
+          <p:cNvPr id="76" name="pattern-chain-2">
+            <a:extLst xmlns:a="http://schemas.openxmlformats.org/drawingml/2006/main">
+              <a:ext uri="{FF2B5EF4-FFF2-40B4-BE49-F238E27FC236}">
+                <a16:creationId xmlns:a16="http://schemas.microsoft.com/office/drawing/2014/main" id="{4B7CAB75-1F97-42CB-A59D-A6B061E3691F}"/>
+              </a:ext>
+            </a:extLst>
+          </p:cNvPr>
+          <p:cNvSpPr>
+            <a:spLocks xmlns:a="http://schemas.openxmlformats.org/drawingml/2006/main" noGrp="1"/>
+          </p:cNvSpPr>
+          <p:nvPr/>
+        </p:nvSpPr>
+        <p:spPr>
+          <a:xfrm xmlns:a="http://schemas.openxmlformats.org/drawingml/2006/main">
+            <a:off x="1419225" y="5467350"/>
+            <a:ext cx="209550" cy="209550"/>
+          </a:xfrm>
+          <a:prstGeom xmlns:a="http://schemas.openxmlformats.org/drawingml/2006/main" prst="ellipse">
+            <a:avLst/>
+          </a:prstGeom>
+          <a:solidFill xmlns:a="http://schemas.openxmlformats.org/drawingml/2006/main">
+            <a:srgbClr val="3478DC"/>
+          </a:solidFill>
+          <a:ln xmlns:a="http://schemas.openxmlformats.org/drawingml/2006/main" w="14288">
+            <a:solidFill>
+              <a:srgbClr val="3478DC"/>
+            </a:solidFill>
+            <a:prstDash val="solid"/>
+          </a:ln>
+        </p:spPr>
+      </p:sp>
+      <p:sp>
+        <p:nvSpPr>
+          <p:cNvPr id="77" name="pattern-chain-3">
+            <a:extLst xmlns:a="http://schemas.openxmlformats.org/drawingml/2006/main">
+              <a:ext uri="{FF2B5EF4-FFF2-40B4-BE49-F238E27FC236}">
+                <a16:creationId xmlns:a16="http://schemas.microsoft.com/office/drawing/2014/main" id="{EABB2EFF-29D3-4CA4-AAB1-B7439729124A}"/>
+              </a:ext>
+            </a:extLst>
+          </p:cNvPr>
+          <p:cNvSpPr>
+            <a:spLocks xmlns:a="http://schemas.openxmlformats.org/drawingml/2006/main" noGrp="1"/>
+          </p:cNvSpPr>
+          <p:nvPr/>
+        </p:nvSpPr>
+        <p:spPr>
+          <a:xfrm xmlns:a="http://schemas.openxmlformats.org/drawingml/2006/main">
+            <a:off x="2038350" y="5467350"/>
+            <a:ext cx="209550" cy="209550"/>
+          </a:xfrm>
+          <a:prstGeom xmlns:a="http://schemas.openxmlformats.org/drawingml/2006/main" prst="ellipse">
+            <a:avLst/>
+          </a:prstGeom>
+          <a:solidFill xmlns:a="http://schemas.openxmlformats.org/drawingml/2006/main">
+            <a:srgbClr val="3478DC"/>
+          </a:solidFill>
+          <a:ln xmlns:a="http://schemas.openxmlformats.org/drawingml/2006/main" w="14288">
+            <a:solidFill>
+              <a:srgbClr val="3478DC"/>
+            </a:solidFill>
+            <a:prstDash val="solid"/>
+          </a:ln>
+        </p:spPr>
+      </p:sp>
+      <p:sp>
+        <p:nvSpPr>
+          <p:cNvPr id="78" name="pattern-chain-4">
+            <a:extLst xmlns:a="http://schemas.openxmlformats.org/drawingml/2006/main">
+              <a:ext uri="{FF2B5EF4-FFF2-40B4-BE49-F238E27FC236}">
+                <a16:creationId xmlns:a16="http://schemas.microsoft.com/office/drawing/2014/main" id="{326C21F9-803F-4936-A88E-13899B87BD6B}"/>
+              </a:ext>
+            </a:extLst>
+          </p:cNvPr>
+          <p:cNvSpPr>
+            <a:spLocks xmlns:a="http://schemas.openxmlformats.org/drawingml/2006/main" noGrp="1"/>
+          </p:cNvSpPr>
+          <p:nvPr/>
+        </p:nvSpPr>
+        <p:spPr>
+          <a:xfrm xmlns:a="http://schemas.openxmlformats.org/drawingml/2006/main">
+            <a:off x="2657475" y="5467350"/>
+            <a:ext cx="209550" cy="209550"/>
+          </a:xfrm>
+          <a:prstGeom xmlns:a="http://schemas.openxmlformats.org/drawingml/2006/main" prst="ellipse">
+            <a:avLst/>
+          </a:prstGeom>
+          <a:solidFill xmlns:a="http://schemas.openxmlformats.org/drawingml/2006/main">
+            <a:srgbClr val="3478DC"/>
+          </a:solidFill>
+          <a:ln xmlns:a="http://schemas.openxmlformats.org/drawingml/2006/main" w="14288">
+            <a:solidFill>
+              <a:srgbClr val="3478DC"/>
+            </a:solidFill>
+            <a:prstDash val="solid"/>
+          </a:ln>
+        </p:spPr>
+      </p:sp>
+      <p:cxnSp>
+        <p:nvCxnSpPr>
+          <p:cNvPr id="185" name=""/>
+          <p:cNvCxnSpPr>
+            <a:stCxn xmlns:a="http://schemas.openxmlformats.org/drawingml/2006/main" id="75" idx="6"/>
+            <a:endCxn xmlns:a="http://schemas.openxmlformats.org/drawingml/2006/main" id="76" idx="2"/>
+          </p:cNvCxnSpPr>
+          <p:nvPr/>
+        </p:nvCxnSpPr>
+        <p:spPr>
+          <a:xfrm xmlns:a="http://schemas.openxmlformats.org/drawingml/2006/main">
+            <a:off x="1009650" y="5572125"/>
+            <a:ext cx="409575" cy="0"/>
+          </a:xfrm>
+          <a:prstGeom xmlns:a="http://schemas.openxmlformats.org/drawingml/2006/main" prst="straightConnector1">
+            <a:avLst/>
+          </a:prstGeom>
+          <a:ln xmlns:a="http://schemas.openxmlformats.org/drawingml/2006/main" w="17145" cap="rnd">
+            <a:solidFill>
+              <a:srgbClr val="164E8B"/>
+            </a:solidFill>
+            <a:prstDash val="solid"/>
+            <a:round/>
+            <a:tailEnd type="triangle" w="sm" len="sm"/>
+          </a:ln>
+        </p:spPr>
+      </p:cxnSp>
+      <p:cxnSp>
+        <p:nvCxnSpPr>
+          <p:cNvPr id="186" name=""/>
+          <p:cNvCxnSpPr>
+            <a:stCxn xmlns:a="http://schemas.openxmlformats.org/drawingml/2006/main" id="76" idx="6"/>
+            <a:endCxn xmlns:a="http://schemas.openxmlformats.org/drawingml/2006/main" id="77" idx="2"/>
+          </p:cNvCxnSpPr>
+          <p:nvPr/>
+        </p:nvCxnSpPr>
+        <p:spPr>
+          <a:xfrm xmlns:a="http://schemas.openxmlformats.org/drawingml/2006/main">
+            <a:off x="1628775" y="5572125"/>
+            <a:ext cx="409575" cy="0"/>
+          </a:xfrm>
+          <a:prstGeom xmlns:a="http://schemas.openxmlformats.org/drawingml/2006/main" prst="straightConnector1">
+            <a:avLst/>
+          </a:prstGeom>
+          <a:ln xmlns:a="http://schemas.openxmlformats.org/drawingml/2006/main" w="17145" cap="rnd">
+            <a:solidFill>
+              <a:srgbClr val="164E8B"/>
+            </a:solidFill>
+            <a:prstDash val="solid"/>
+            <a:round/>
+            <a:tailEnd type="triangle" w="sm" len="sm"/>
+          </a:ln>
+        </p:spPr>
+      </p:cxnSp>
+      <p:cxnSp>
+        <p:nvCxnSpPr>
+          <p:cNvPr id="187" name=""/>
+          <p:cNvCxnSpPr>
+            <a:stCxn xmlns:a="http://schemas.openxmlformats.org/drawingml/2006/main" id="77" idx="6"/>
+            <a:endCxn xmlns:a="http://schemas.openxmlformats.org/drawingml/2006/main" id="78" idx="2"/>
+          </p:cNvCxnSpPr>
+          <p:nvPr/>
+        </p:nvCxnSpPr>
+        <p:spPr>
+          <a:xfrm xmlns:a="http://schemas.openxmlformats.org/drawingml/2006/main">
+            <a:off x="2247900" y="5572125"/>
+            <a:ext cx="409575" cy="0"/>
+          </a:xfrm>
+          <a:prstGeom xmlns:a="http://schemas.openxmlformats.org/drawingml/2006/main" prst="straightConnector1">
+            <a:avLst/>
+          </a:prstGeom>
+          <a:ln xmlns:a="http://schemas.openxmlformats.org/drawingml/2006/main" w="17145" cap="rnd">
+            <a:solidFill>
+              <a:srgbClr val="164E8B"/>
+            </a:solidFill>
+            <a:prstDash val="solid"/>
+            <a:round/>
+            <a:tailEnd type="triangle" w="sm" len="sm"/>
+          </a:ln>
+        </p:spPr>
+      </p:cxnSp>
+      <p:sp>
+        <p:nvSpPr>
+          <p:cNvPr id="82" name="pattern-branch-root">
+            <a:extLst xmlns:a="http://schemas.openxmlformats.org/drawingml/2006/main">
+              <a:ext uri="{FF2B5EF4-FFF2-40B4-BE49-F238E27FC236}">
+                <a16:creationId xmlns:a16="http://schemas.microsoft.com/office/drawing/2014/main" id="{A3747539-4C65-4252-9280-A5A0B333E94F}"/>
+              </a:ext>
+            </a:extLst>
+          </p:cNvPr>
+          <p:cNvSpPr>
+            <a:spLocks xmlns:a="http://schemas.openxmlformats.org/drawingml/2006/main" noGrp="1"/>
+          </p:cNvSpPr>
+          <p:nvPr/>
+        </p:nvSpPr>
+        <p:spPr>
+          <a:xfrm xmlns:a="http://schemas.openxmlformats.org/drawingml/2006/main">
+            <a:off x="3514725" y="5467350"/>
+            <a:ext cx="209550" cy="209550"/>
+          </a:xfrm>
+          <a:prstGeom xmlns:a="http://schemas.openxmlformats.org/drawingml/2006/main" prst="ellipse">
+            <a:avLst/>
+          </a:prstGeom>
+          <a:solidFill xmlns:a="http://schemas.openxmlformats.org/drawingml/2006/main">
+            <a:srgbClr val="3478DC"/>
+          </a:solidFill>
+          <a:ln xmlns:a="http://schemas.openxmlformats.org/drawingml/2006/main" w="14288">
+            <a:solidFill>
+              <a:srgbClr val="3478DC"/>
+            </a:solidFill>
+            <a:prstDash val="solid"/>
+          </a:ln>
+        </p:spPr>
+      </p:sp>
+      <p:sp>
+        <p:nvSpPr>
+          <p:cNvPr id="83" name="pattern-branch-upper">
+            <a:extLst xmlns:a="http://schemas.openxmlformats.org/drawingml/2006/main">
+              <a:ext uri="{FF2B5EF4-FFF2-40B4-BE49-F238E27FC236}">
+                <a16:creationId xmlns:a16="http://schemas.microsoft.com/office/drawing/2014/main" id="{EDB063A0-EDC6-4676-9C07-3A84B3414BA8}"/>
+              </a:ext>
+            </a:extLst>
+          </p:cNvPr>
+          <p:cNvSpPr>
+            <a:spLocks xmlns:a="http://schemas.openxmlformats.org/drawingml/2006/main" noGrp="1"/>
+          </p:cNvSpPr>
+          <p:nvPr/>
+        </p:nvSpPr>
+        <p:spPr>
+          <a:xfrm xmlns:a="http://schemas.openxmlformats.org/drawingml/2006/main">
+            <a:off x="4371975" y="5133975"/>
+            <a:ext cx="209550" cy="209550"/>
+          </a:xfrm>
+          <a:prstGeom xmlns:a="http://schemas.openxmlformats.org/drawingml/2006/main" prst="ellipse">
+            <a:avLst/>
+          </a:prstGeom>
+          <a:solidFill xmlns:a="http://schemas.openxmlformats.org/drawingml/2006/main">
+            <a:srgbClr val="3478DC"/>
+          </a:solidFill>
+          <a:ln xmlns:a="http://schemas.openxmlformats.org/drawingml/2006/main" w="14288">
+            <a:solidFill>
+              <a:srgbClr val="3478DC"/>
+            </a:solidFill>
+            <a:prstDash val="solid"/>
+          </a:ln>
+        </p:spPr>
+      </p:sp>
+      <p:sp>
+        <p:nvSpPr>
+          <p:cNvPr id="84" name="pattern-branch-lower">
+            <a:extLst xmlns:a="http://schemas.openxmlformats.org/drawingml/2006/main">
+              <a:ext uri="{FF2B5EF4-FFF2-40B4-BE49-F238E27FC236}">
+                <a16:creationId xmlns:a16="http://schemas.microsoft.com/office/drawing/2014/main" id="{085E71CF-8632-44D7-9244-7633AF467304}"/>
+              </a:ext>
+            </a:extLst>
+          </p:cNvPr>
+          <p:cNvSpPr>
+            <a:spLocks xmlns:a="http://schemas.openxmlformats.org/drawingml/2006/main" noGrp="1"/>
+          </p:cNvSpPr>
+          <p:nvPr/>
+        </p:nvSpPr>
+        <p:spPr>
+          <a:xfrm xmlns:a="http://schemas.openxmlformats.org/drawingml/2006/main">
+            <a:off x="4371975" y="5800725"/>
+            <a:ext cx="209550" cy="209550"/>
+          </a:xfrm>
+          <a:prstGeom xmlns:a="http://schemas.openxmlformats.org/drawingml/2006/main" prst="ellipse">
+            <a:avLst/>
+          </a:prstGeom>
+          <a:solidFill xmlns:a="http://schemas.openxmlformats.org/drawingml/2006/main">
+            <a:srgbClr val="3478DC"/>
+          </a:solidFill>
+          <a:ln xmlns:a="http://schemas.openxmlformats.org/drawingml/2006/main" w="14288">
+            <a:solidFill>
+              <a:srgbClr val="3478DC"/>
+            </a:solidFill>
+            <a:prstDash val="solid"/>
+          </a:ln>
+        </p:spPr>
+      </p:sp>
+      <p:sp>
+        <p:nvSpPr>
+          <p:cNvPr id="85" name="pattern-branch-leaf">
+            <a:extLst xmlns:a="http://schemas.openxmlformats.org/drawingml/2006/main">
+              <a:ext uri="{FF2B5EF4-FFF2-40B4-BE49-F238E27FC236}">
+                <a16:creationId xmlns:a16="http://schemas.microsoft.com/office/drawing/2014/main" id="{E32B2FA8-145B-456E-B401-49ABA2FBDED3}"/>
+              </a:ext>
+            </a:extLst>
+          </p:cNvPr>
+          <p:cNvSpPr>
+            <a:spLocks xmlns:a="http://schemas.openxmlformats.org/drawingml/2006/main" noGrp="1"/>
+          </p:cNvSpPr>
+          <p:nvPr/>
+        </p:nvSpPr>
+        <p:spPr>
+          <a:xfrm xmlns:a="http://schemas.openxmlformats.org/drawingml/2006/main">
+            <a:off x="5181600" y="5467350"/>
+            <a:ext cx="209550" cy="209550"/>
+          </a:xfrm>
+          <a:prstGeom xmlns:a="http://schemas.openxmlformats.org/drawingml/2006/main" prst="ellipse">
+            <a:avLst/>
+          </a:prstGeom>
+          <a:solidFill xmlns:a="http://schemas.openxmlformats.org/drawingml/2006/main">
+            <a:srgbClr val="3478DC"/>
+          </a:solidFill>
+          <a:ln xmlns:a="http://schemas.openxmlformats.org/drawingml/2006/main" w="14288">
+            <a:solidFill>
+              <a:srgbClr val="3478DC"/>
+            </a:solidFill>
+            <a:prstDash val="solid"/>
+          </a:ln>
+        </p:spPr>
+      </p:sp>
+      <p:cxnSp>
+        <p:nvCxnSpPr>
+          <p:cNvPr id="192" name=""/>
+          <p:cNvCxnSpPr>
+            <a:stCxn xmlns:a="http://schemas.openxmlformats.org/drawingml/2006/main" id="82" idx="6"/>
+            <a:endCxn xmlns:a="http://schemas.openxmlformats.org/drawingml/2006/main" id="83" idx="3"/>
+          </p:cNvCxnSpPr>
+          <p:nvPr/>
+        </p:nvCxnSpPr>
+        <p:spPr>
+          <a:xfrm xmlns:a="http://schemas.openxmlformats.org/drawingml/2006/main" flipV="1">
+            <a:off x="3724275" y="5312837"/>
+            <a:ext cx="678388" cy="259288"/>
+          </a:xfrm>
+          <a:prstGeom xmlns:a="http://schemas.openxmlformats.org/drawingml/2006/main" prst="straightConnector1">
+            <a:avLst/>
+          </a:prstGeom>
+          <a:ln xmlns:a="http://schemas.openxmlformats.org/drawingml/2006/main" w="17145" cap="rnd">
+            <a:solidFill>
+              <a:srgbClr val="164E8B"/>
+            </a:solidFill>
+            <a:prstDash val="solid"/>
+            <a:round/>
+            <a:tailEnd type="triangle" w="sm" len="sm"/>
+          </a:ln>
+        </p:spPr>
+      </p:cxnSp>
+      <p:cxnSp>
+        <p:nvCxnSpPr>
+          <p:cNvPr id="193" name=""/>
+          <p:cNvCxnSpPr>
+            <a:stCxn xmlns:a="http://schemas.openxmlformats.org/drawingml/2006/main" id="82" idx="5"/>
+            <a:endCxn xmlns:a="http://schemas.openxmlformats.org/drawingml/2006/main" id="84" idx="2"/>
+          </p:cNvCxnSpPr>
+          <p:nvPr/>
+        </p:nvCxnSpPr>
+        <p:spPr>
+          <a:xfrm xmlns:a="http://schemas.openxmlformats.org/drawingml/2006/main">
+            <a:off x="3693587" y="5646212"/>
+            <a:ext cx="678388" cy="259288"/>
+          </a:xfrm>
+          <a:prstGeom xmlns:a="http://schemas.openxmlformats.org/drawingml/2006/main" prst="straightConnector1">
+            <a:avLst/>
+          </a:prstGeom>
+          <a:ln xmlns:a="http://schemas.openxmlformats.org/drawingml/2006/main" w="17145" cap="rnd">
+            <a:solidFill>
+              <a:srgbClr val="164E8B"/>
+            </a:solidFill>
+            <a:prstDash val="solid"/>
+            <a:round/>
+            <a:tailEnd type="triangle" w="sm" len="sm"/>
+          </a:ln>
+        </p:spPr>
+      </p:cxnSp>
+      <p:cxnSp>
+        <p:nvCxnSpPr>
+          <p:cNvPr id="194" name=""/>
+          <p:cNvCxnSpPr>
+            <a:stCxn xmlns:a="http://schemas.openxmlformats.org/drawingml/2006/main" id="83" idx="5"/>
+            <a:endCxn xmlns:a="http://schemas.openxmlformats.org/drawingml/2006/main" id="85" idx="2"/>
+          </p:cNvCxnSpPr>
+          <p:nvPr/>
+        </p:nvCxnSpPr>
+        <p:spPr>
+          <a:xfrm xmlns:a="http://schemas.openxmlformats.org/drawingml/2006/main">
+            <a:off x="4550837" y="5312837"/>
+            <a:ext cx="630763" cy="259288"/>
+          </a:xfrm>
+          <a:prstGeom xmlns:a="http://schemas.openxmlformats.org/drawingml/2006/main" prst="straightConnector1">
+            <a:avLst/>
+          </a:prstGeom>
+          <a:ln xmlns:a="http://schemas.openxmlformats.org/drawingml/2006/main" w="17145" cap="rnd">
+            <a:solidFill>
+              <a:srgbClr val="164E8B"/>
+            </a:solidFill>
+            <a:prstDash val="solid"/>
+            <a:round/>
+            <a:tailEnd type="triangle" w="sm" len="sm"/>
+          </a:ln>
+        </p:spPr>
+      </p:cxnSp>
+      <p:cxnSp>
+        <p:nvCxnSpPr>
+          <p:cNvPr id="195" name=""/>
+          <p:cNvCxnSpPr>
+            <a:stCxn xmlns:a="http://schemas.openxmlformats.org/drawingml/2006/main" id="84" idx="7"/>
+            <a:endCxn xmlns:a="http://schemas.openxmlformats.org/drawingml/2006/main" id="85" idx="2"/>
+          </p:cNvCxnSpPr>
+          <p:nvPr/>
+        </p:nvCxnSpPr>
+        <p:spPr>
+          <a:xfrm xmlns:a="http://schemas.openxmlformats.org/drawingml/2006/main" flipV="1">
+            <a:off x="4550837" y="5572125"/>
+            <a:ext cx="630763" cy="259288"/>
+          </a:xfrm>
+          <a:prstGeom xmlns:a="http://schemas.openxmlformats.org/drawingml/2006/main" prst="straightConnector1">
+            <a:avLst/>
+          </a:prstGeom>
+          <a:ln xmlns:a="http://schemas.openxmlformats.org/drawingml/2006/main" w="17145" cap="rnd">
+            <a:solidFill>
+              <a:srgbClr val="164E8B"/>
+            </a:solidFill>
+            <a:prstDash val="solid"/>
+            <a:round/>
+            <a:tailEnd type="triangle" w="sm" len="sm"/>
+          </a:ln>
+        </p:spPr>
+      </p:cxnSp>
+      <p:sp>
+        <p:nvSpPr>
+          <p:cNvPr id="90" name="pattern-merge-upper">
+            <a:extLst xmlns:a="http://schemas.openxmlformats.org/drawingml/2006/main">
+              <a:ext uri="{FF2B5EF4-FFF2-40B4-BE49-F238E27FC236}">
+                <a16:creationId xmlns:a16="http://schemas.microsoft.com/office/drawing/2014/main" id="{438DD42A-28B6-49D8-964C-53D2377C3463}"/>
+              </a:ext>
+            </a:extLst>
+          </p:cNvPr>
+          <p:cNvSpPr>
+            <a:spLocks xmlns:a="http://schemas.openxmlformats.org/drawingml/2006/main" noGrp="1"/>
+          </p:cNvSpPr>
+          <p:nvPr/>
+        </p:nvSpPr>
+        <p:spPr>
+          <a:xfrm xmlns:a="http://schemas.openxmlformats.org/drawingml/2006/main">
+            <a:off x="6229350" y="5133975"/>
+            <a:ext cx="209550" cy="209550"/>
+          </a:xfrm>
+          <a:prstGeom xmlns:a="http://schemas.openxmlformats.org/drawingml/2006/main" prst="ellipse">
+            <a:avLst/>
+          </a:prstGeom>
+          <a:solidFill xmlns:a="http://schemas.openxmlformats.org/drawingml/2006/main">
+            <a:srgbClr val="3478DC"/>
+          </a:solidFill>
+          <a:ln xmlns:a="http://schemas.openxmlformats.org/drawingml/2006/main" w="14288">
+            <a:solidFill>
+              <a:srgbClr val="3478DC"/>
+            </a:solidFill>
+            <a:prstDash val="solid"/>
+          </a:ln>
+        </p:spPr>
+      </p:sp>
+      <p:sp>
+        <p:nvSpPr>
+          <p:cNvPr id="91" name="pattern-merge-lower">
+            <a:extLst xmlns:a="http://schemas.openxmlformats.org/drawingml/2006/main">
+              <a:ext uri="{FF2B5EF4-FFF2-40B4-BE49-F238E27FC236}">
+                <a16:creationId xmlns:a16="http://schemas.microsoft.com/office/drawing/2014/main" id="{33D49B43-34AC-46F4-B4DB-68F1802EC8E9}"/>
+              </a:ext>
+            </a:extLst>
+          </p:cNvPr>
+          <p:cNvSpPr>
+            <a:spLocks xmlns:a="http://schemas.openxmlformats.org/drawingml/2006/main" noGrp="1"/>
+          </p:cNvSpPr>
+          <p:nvPr/>
+        </p:nvSpPr>
+        <p:spPr>
+          <a:xfrm xmlns:a="http://schemas.openxmlformats.org/drawingml/2006/main">
+            <a:off x="6229350" y="5800725"/>
+            <a:ext cx="209550" cy="209550"/>
+          </a:xfrm>
+          <a:prstGeom xmlns:a="http://schemas.openxmlformats.org/drawingml/2006/main" prst="ellipse">
+            <a:avLst/>
+          </a:prstGeom>
+          <a:solidFill xmlns:a="http://schemas.openxmlformats.org/drawingml/2006/main">
+            <a:srgbClr val="3478DC"/>
+          </a:solidFill>
+          <a:ln xmlns:a="http://schemas.openxmlformats.org/drawingml/2006/main" w="14288">
+            <a:solidFill>
+              <a:srgbClr val="3478DC"/>
+            </a:solidFill>
+            <a:prstDash val="solid"/>
+          </a:ln>
+        </p:spPr>
+      </p:sp>
+      <p:sp>
+        <p:nvSpPr>
+          <p:cNvPr id="92" name="pattern-merge-center">
+            <a:extLst xmlns:a="http://schemas.openxmlformats.org/drawingml/2006/main">
+              <a:ext uri="{FF2B5EF4-FFF2-40B4-BE49-F238E27FC236}">
+                <a16:creationId xmlns:a16="http://schemas.microsoft.com/office/drawing/2014/main" id="{D28E890C-AAAB-4069-A343-168D376A4FBE}"/>
+              </a:ext>
+            </a:extLst>
+          </p:cNvPr>
+          <p:cNvSpPr>
+            <a:spLocks xmlns:a="http://schemas.openxmlformats.org/drawingml/2006/main" noGrp="1"/>
+          </p:cNvSpPr>
+          <p:nvPr/>
+        </p:nvSpPr>
+        <p:spPr>
+          <a:xfrm xmlns:a="http://schemas.openxmlformats.org/drawingml/2006/main">
+            <a:off x="7181850" y="5467350"/>
+            <a:ext cx="209550" cy="209550"/>
+          </a:xfrm>
+          <a:prstGeom xmlns:a="http://schemas.openxmlformats.org/drawingml/2006/main" prst="ellipse">
+            <a:avLst/>
+          </a:prstGeom>
+          <a:solidFill xmlns:a="http://schemas.openxmlformats.org/drawingml/2006/main">
+            <a:srgbClr val="3478DC"/>
+          </a:solidFill>
+          <a:ln xmlns:a="http://schemas.openxmlformats.org/drawingml/2006/main" w="14288">
+            <a:solidFill>
+              <a:srgbClr val="3478DC"/>
+            </a:solidFill>
+            <a:prstDash val="solid"/>
+          </a:ln>
+        </p:spPr>
+      </p:sp>
+      <p:sp>
+        <p:nvSpPr>
+          <p:cNvPr id="93" name="pattern-merge-leaf">
+            <a:extLst xmlns:a="http://schemas.openxmlformats.org/drawingml/2006/main">
+              <a:ext uri="{FF2B5EF4-FFF2-40B4-BE49-F238E27FC236}">
+                <a16:creationId xmlns:a16="http://schemas.microsoft.com/office/drawing/2014/main" id="{CC4A20ED-68DB-42D9-918F-5AE9F340FB77}"/>
+              </a:ext>
+            </a:extLst>
+          </p:cNvPr>
+          <p:cNvSpPr>
+            <a:spLocks xmlns:a="http://schemas.openxmlformats.org/drawingml/2006/main" noGrp="1"/>
+          </p:cNvSpPr>
+          <p:nvPr/>
+        </p:nvSpPr>
+        <p:spPr>
+          <a:xfrm xmlns:a="http://schemas.openxmlformats.org/drawingml/2006/main">
+            <a:off x="8039100" y="5467350"/>
+            <a:ext cx="209550" cy="209550"/>
+          </a:xfrm>
+          <a:prstGeom xmlns:a="http://schemas.openxmlformats.org/drawingml/2006/main" prst="ellipse">
+            <a:avLst/>
+          </a:prstGeom>
+          <a:solidFill xmlns:a="http://schemas.openxmlformats.org/drawingml/2006/main">
+            <a:srgbClr val="3478DC"/>
+          </a:solidFill>
+          <a:ln xmlns:a="http://schemas.openxmlformats.org/drawingml/2006/main" w="14288">
+            <a:solidFill>
+              <a:srgbClr val="3478DC"/>
+            </a:solidFill>
+            <a:prstDash val="solid"/>
+          </a:ln>
+        </p:spPr>
+      </p:sp>
+      <p:cxnSp>
+        <p:nvCxnSpPr>
+          <p:cNvPr id="200" name=""/>
+          <p:cNvCxnSpPr>
+            <a:stCxn xmlns:a="http://schemas.openxmlformats.org/drawingml/2006/main" id="90" idx="6"/>
+            <a:endCxn xmlns:a="http://schemas.openxmlformats.org/drawingml/2006/main" id="92" idx="2"/>
+          </p:cNvCxnSpPr>
+          <p:nvPr/>
+        </p:nvCxnSpPr>
+        <p:spPr>
+          <a:xfrm xmlns:a="http://schemas.openxmlformats.org/drawingml/2006/main">
+            <a:off x="6438900" y="5238750"/>
+            <a:ext cx="742950" cy="333375"/>
+          </a:xfrm>
+          <a:prstGeom xmlns:a="http://schemas.openxmlformats.org/drawingml/2006/main" prst="straightConnector1">
+            <a:avLst/>
+          </a:prstGeom>
+          <a:ln xmlns:a="http://schemas.openxmlformats.org/drawingml/2006/main" w="17145" cap="rnd">
+            <a:solidFill>
+              <a:srgbClr val="164E8B"/>
+            </a:solidFill>
+            <a:prstDash val="solid"/>
+            <a:round/>
+            <a:tailEnd type="triangle" w="sm" len="sm"/>
+          </a:ln>
+        </p:spPr>
+      </p:cxnSp>
+      <p:cxnSp>
+        <p:nvCxnSpPr>
+          <p:cNvPr id="201" name=""/>
+          <p:cNvCxnSpPr>
+            <a:stCxn xmlns:a="http://schemas.openxmlformats.org/drawingml/2006/main" id="91" idx="6"/>
+            <a:endCxn xmlns:a="http://schemas.openxmlformats.org/drawingml/2006/main" id="92" idx="2"/>
+          </p:cNvCxnSpPr>
+          <p:nvPr/>
+        </p:nvCxnSpPr>
+        <p:spPr>
+          <a:xfrm xmlns:a="http://schemas.openxmlformats.org/drawingml/2006/main" flipV="1">
+            <a:off x="6438900" y="5572125"/>
+            <a:ext cx="742950" cy="333375"/>
+          </a:xfrm>
+          <a:prstGeom xmlns:a="http://schemas.openxmlformats.org/drawingml/2006/main" prst="straightConnector1">
+            <a:avLst/>
+          </a:prstGeom>
+          <a:ln xmlns:a="http://schemas.openxmlformats.org/drawingml/2006/main" w="17145" cap="rnd">
+            <a:solidFill>
+              <a:srgbClr val="164E8B"/>
+            </a:solidFill>
+            <a:prstDash val="solid"/>
+            <a:round/>
+            <a:tailEnd type="triangle" w="sm" len="sm"/>
+          </a:ln>
+        </p:spPr>
+      </p:cxnSp>
+      <p:cxnSp>
+        <p:nvCxnSpPr>
+          <p:cNvPr id="202" name=""/>
+          <p:cNvCxnSpPr>
+            <a:stCxn xmlns:a="http://schemas.openxmlformats.org/drawingml/2006/main" id="92" idx="6"/>
+            <a:endCxn xmlns:a="http://schemas.openxmlformats.org/drawingml/2006/main" id="93" idx="2"/>
+          </p:cNvCxnSpPr>
+          <p:nvPr/>
+        </p:nvCxnSpPr>
+        <p:spPr>
+          <a:xfrm xmlns:a="http://schemas.openxmlformats.org/drawingml/2006/main">
+            <a:off x="7391400" y="5572125"/>
+            <a:ext cx="647700" cy="0"/>
+          </a:xfrm>
+          <a:prstGeom xmlns:a="http://schemas.openxmlformats.org/drawingml/2006/main" prst="straightConnector1">
+            <a:avLst/>
+          </a:prstGeom>
+          <a:ln xmlns:a="http://schemas.openxmlformats.org/drawingml/2006/main" w="17145" cap="rnd">
+            <a:solidFill>
+              <a:srgbClr val="164E8B"/>
+            </a:solidFill>
+            <a:prstDash val="solid"/>
+            <a:round/>
+            <a:tailEnd type="triangle" w="sm" len="sm"/>
+          </a:ln>
+        </p:spPr>
+      </p:cxnSp>
+      <p:sp>
+        <p:nvSpPr>
+          <p:cNvPr id="97" name="pattern-closure-boundary">
+            <a:extLst xmlns:a="http://schemas.openxmlformats.org/drawingml/2006/main">
+              <a:ext uri="{FF2B5EF4-FFF2-40B4-BE49-F238E27FC236}">
+                <a16:creationId xmlns:a16="http://schemas.microsoft.com/office/drawing/2014/main" id="{0C177A8F-ABD8-4C86-BBE2-48F30F7289BC}"/>
+              </a:ext>
+            </a:extLst>
+          </p:cNvPr>
+          <p:cNvSpPr>
+            <a:spLocks xmlns:a="http://schemas.openxmlformats.org/drawingml/2006/main" noGrp="1"/>
+          </p:cNvSpPr>
+          <p:nvPr/>
+        </p:nvSpPr>
+        <p:spPr>
+          <a:xfrm xmlns:a="http://schemas.openxmlformats.org/drawingml/2006/main">
+            <a:off x="9001125" y="5143500"/>
+            <a:ext cx="1952625" cy="857250"/>
+          </a:xfrm>
+          <a:prstGeom xmlns:a="http://schemas.openxmlformats.org/drawingml/2006/main" prst="roundRect">
+            <a:avLst>
+              <a:gd name="adj" fmla="val 8889"/>
+            </a:avLst>
+          </a:prstGeom>
+          <a:solidFill xmlns:a="http://schemas.openxmlformats.org/drawingml/2006/main">
+            <a:srgbClr val="F3FBFD"/>
+          </a:solidFill>
+          <a:ln xmlns:a="http://schemas.openxmlformats.org/drawingml/2006/main" w="14288">
+            <a:solidFill>
+              <a:srgbClr val="49BBD6"/>
+            </a:solidFill>
+            <a:prstDash val="dash"/>
+          </a:ln>
+        </p:spPr>
+      </p:sp>
+      <p:sp>
+        <p:nvSpPr>
+          <p:cNvPr id="98" name="pattern-closure-prerequisite-1">
+            <a:extLst xmlns:a="http://schemas.openxmlformats.org/drawingml/2006/main">
+              <a:ext uri="{FF2B5EF4-FFF2-40B4-BE49-F238E27FC236}">
+                <a16:creationId xmlns:a16="http://schemas.microsoft.com/office/drawing/2014/main" id="{23801CF0-FB8C-4A96-A3E4-63BCC841F079}"/>
+              </a:ext>
+            </a:extLst>
+          </p:cNvPr>
+          <p:cNvSpPr>
+            <a:spLocks xmlns:a="http://schemas.openxmlformats.org/drawingml/2006/main" noGrp="1"/>
+          </p:cNvSpPr>
+          <p:nvPr/>
+        </p:nvSpPr>
+        <p:spPr>
+          <a:xfrm xmlns:a="http://schemas.openxmlformats.org/drawingml/2006/main">
+            <a:off x="9182100" y="5467350"/>
+            <a:ext cx="209550" cy="209550"/>
+          </a:xfrm>
+          <a:prstGeom xmlns:a="http://schemas.openxmlformats.org/drawingml/2006/main" prst="ellipse">
+            <a:avLst/>
+          </a:prstGeom>
+          <a:solidFill xmlns:a="http://schemas.openxmlformats.org/drawingml/2006/main">
+            <a:srgbClr val="49BBD6"/>
+          </a:solidFill>
+          <a:ln xmlns:a="http://schemas.openxmlformats.org/drawingml/2006/main" w="14288">
+            <a:solidFill>
+              <a:srgbClr val="49BBD6"/>
+            </a:solidFill>
+            <a:prstDash val="solid"/>
+          </a:ln>
+        </p:spPr>
+      </p:sp>
+      <p:sp>
+        <p:nvSpPr>
+          <p:cNvPr id="99" name="pattern-closure-prerequisite-2">
+            <a:extLst xmlns:a="http://schemas.openxmlformats.org/drawingml/2006/main">
+              <a:ext uri="{FF2B5EF4-FFF2-40B4-BE49-F238E27FC236}">
+                <a16:creationId xmlns:a16="http://schemas.microsoft.com/office/drawing/2014/main" id="{14B4A34D-6836-45B8-B78B-EE8F38A7187F}"/>
+              </a:ext>
+            </a:extLst>
+          </p:cNvPr>
+          <p:cNvSpPr>
+            <a:spLocks xmlns:a="http://schemas.openxmlformats.org/drawingml/2006/main" noGrp="1"/>
+          </p:cNvSpPr>
+          <p:nvPr/>
+        </p:nvSpPr>
+        <p:spPr>
+          <a:xfrm xmlns:a="http://schemas.openxmlformats.org/drawingml/2006/main">
+            <a:off x="9801225" y="5229225"/>
+            <a:ext cx="209550" cy="209550"/>
+          </a:xfrm>
+          <a:prstGeom xmlns:a="http://schemas.openxmlformats.org/drawingml/2006/main" prst="ellipse">
+            <a:avLst/>
+          </a:prstGeom>
+          <a:solidFill xmlns:a="http://schemas.openxmlformats.org/drawingml/2006/main">
+            <a:srgbClr val="49BBD6"/>
+          </a:solidFill>
+          <a:ln xmlns:a="http://schemas.openxmlformats.org/drawingml/2006/main" w="14288">
+            <a:solidFill>
+              <a:srgbClr val="49BBD6"/>
+            </a:solidFill>
+            <a:prstDash val="solid"/>
+          </a:ln>
+        </p:spPr>
+      </p:sp>
+      <p:sp>
+        <p:nvSpPr>
+          <p:cNvPr id="100" name="pattern-closure-prerequisite-3">
+            <a:extLst xmlns:a="http://schemas.openxmlformats.org/drawingml/2006/main">
+              <a:ext uri="{FF2B5EF4-FFF2-40B4-BE49-F238E27FC236}">
+                <a16:creationId xmlns:a16="http://schemas.microsoft.com/office/drawing/2014/main" id="{E77BA46F-173F-417B-9FE3-470CD9AC5646}"/>
+              </a:ext>
+            </a:extLst>
+          </p:cNvPr>
+          <p:cNvSpPr>
+            <a:spLocks xmlns:a="http://schemas.openxmlformats.org/drawingml/2006/main" noGrp="1"/>
+          </p:cNvSpPr>
+          <p:nvPr/>
+        </p:nvSpPr>
+        <p:spPr>
+          <a:xfrm xmlns:a="http://schemas.openxmlformats.org/drawingml/2006/main">
+            <a:off x="9801225" y="5705475"/>
+            <a:ext cx="209550" cy="209550"/>
+          </a:xfrm>
+          <a:prstGeom xmlns:a="http://schemas.openxmlformats.org/drawingml/2006/main" prst="ellipse">
+            <a:avLst/>
+          </a:prstGeom>
+          <a:solidFill xmlns:a="http://schemas.openxmlformats.org/drawingml/2006/main">
+            <a:srgbClr val="49BBD6"/>
+          </a:solidFill>
+          <a:ln xmlns:a="http://schemas.openxmlformats.org/drawingml/2006/main" w="14288">
+            <a:solidFill>
+              <a:srgbClr val="49BBD6"/>
+            </a:solidFill>
+            <a:prstDash val="solid"/>
+          </a:ln>
+        </p:spPr>
+      </p:sp>
+      <p:sp>
+        <p:nvSpPr>
+          <p:cNvPr id="101" name="pattern-closure-target">
+            <a:extLst xmlns:a="http://schemas.openxmlformats.org/drawingml/2006/main">
+              <a:ext uri="{FF2B5EF4-FFF2-40B4-BE49-F238E27FC236}">
+                <a16:creationId xmlns:a16="http://schemas.microsoft.com/office/drawing/2014/main" id="{DBBFB30F-54C4-41BF-9C67-ED2B4376C922}"/>
+              </a:ext>
+            </a:extLst>
+          </p:cNvPr>
+          <p:cNvSpPr>
+            <a:spLocks xmlns:a="http://schemas.openxmlformats.org/drawingml/2006/main" noGrp="1"/>
+          </p:cNvSpPr>
+          <p:nvPr/>
+        </p:nvSpPr>
+        <p:spPr>
+          <a:xfrm xmlns:a="http://schemas.openxmlformats.org/drawingml/2006/main">
+            <a:off x="10553700" y="5457825"/>
+            <a:ext cx="228600" cy="228600"/>
+          </a:xfrm>
+          <a:prstGeom xmlns:a="http://schemas.openxmlformats.org/drawingml/2006/main" prst="ellipse">
+            <a:avLst/>
+          </a:prstGeom>
+          <a:solidFill xmlns:a="http://schemas.openxmlformats.org/drawingml/2006/main">
+            <a:srgbClr val="3478DC"/>
+          </a:solidFill>
+          <a:ln xmlns:a="http://schemas.openxmlformats.org/drawingml/2006/main" w="14288">
+            <a:solidFill>
+              <a:srgbClr val="3478DC"/>
+            </a:solidFill>
+            <a:prstDash val="solid"/>
+          </a:ln>
+        </p:spPr>
+      </p:sp>
+      <p:sp>
+        <p:nvSpPr>
+          <p:cNvPr id="102" name="pattern-closure-unrelated">
+            <a:extLst xmlns:a="http://schemas.openxmlformats.org/drawingml/2006/main">
+              <a:ext uri="{FF2B5EF4-FFF2-40B4-BE49-F238E27FC236}">
+                <a16:creationId xmlns:a16="http://schemas.microsoft.com/office/drawing/2014/main" id="{DF165521-BEC1-4D04-AF02-888AB9E1B86A}"/>
+              </a:ext>
+            </a:extLst>
+          </p:cNvPr>
+          <p:cNvSpPr>
+            <a:spLocks xmlns:a="http://schemas.openxmlformats.org/drawingml/2006/main" noGrp="1"/>
+          </p:cNvSpPr>
+          <p:nvPr/>
+        </p:nvSpPr>
+        <p:spPr>
+          <a:xfrm xmlns:a="http://schemas.openxmlformats.org/drawingml/2006/main">
+            <a:off x="11229975" y="5467350"/>
+            <a:ext cx="209550" cy="209550"/>
+          </a:xfrm>
+          <a:prstGeom xmlns:a="http://schemas.openxmlformats.org/drawingml/2006/main" prst="ellipse">
+            <a:avLst/>
+          </a:prstGeom>
+          <a:solidFill xmlns:a="http://schemas.openxmlformats.org/drawingml/2006/main">
+            <a:srgbClr val="E8EDF3"/>
+          </a:solidFill>
+          <a:ln xmlns:a="http://schemas.openxmlformats.org/drawingml/2006/main" w="14288">
+            <a:solidFill>
+              <a:srgbClr val="AAB6C4"/>
+            </a:solidFill>
+            <a:prstDash val="solid"/>
+          </a:ln>
+        </p:spPr>
+      </p:sp>
+      <p:cxnSp>
+        <p:nvCxnSpPr>
+          <p:cNvPr id="209" name=""/>
+          <p:cNvCxnSpPr>
+            <a:stCxn xmlns:a="http://schemas.openxmlformats.org/drawingml/2006/main" id="98" idx="6"/>
+            <a:endCxn xmlns:a="http://schemas.openxmlformats.org/drawingml/2006/main" id="99" idx="3"/>
+          </p:cNvCxnSpPr>
+          <p:nvPr/>
+        </p:nvCxnSpPr>
+        <p:spPr>
+          <a:xfrm xmlns:a="http://schemas.openxmlformats.org/drawingml/2006/main" flipV="1">
+            <a:off x="9391650" y="5408087"/>
+            <a:ext cx="440263" cy="164038"/>
+          </a:xfrm>
+          <a:prstGeom xmlns:a="http://schemas.openxmlformats.org/drawingml/2006/main" prst="straightConnector1">
+            <a:avLst/>
+          </a:prstGeom>
+          <a:ln xmlns:a="http://schemas.openxmlformats.org/drawingml/2006/main" w="17145" cap="rnd">
+            <a:solidFill>
+              <a:srgbClr val="49BBD6"/>
+            </a:solidFill>
+            <a:prstDash val="solid"/>
+            <a:round/>
+            <a:tailEnd type="triangle" w="sm" len="sm"/>
+          </a:ln>
+        </p:spPr>
+      </p:cxnSp>
+      <p:cxnSp>
+        <p:nvCxnSpPr>
+          <p:cNvPr id="210" name=""/>
+          <p:cNvCxnSpPr>
+            <a:stCxn xmlns:a="http://schemas.openxmlformats.org/drawingml/2006/main" id="98" idx="5"/>
+            <a:endCxn xmlns:a="http://schemas.openxmlformats.org/drawingml/2006/main" id="100" idx="2"/>
+          </p:cNvCxnSpPr>
+          <p:nvPr/>
+        </p:nvCxnSpPr>
+        <p:spPr>
+          <a:xfrm xmlns:a="http://schemas.openxmlformats.org/drawingml/2006/main">
+            <a:off x="9360962" y="5646212"/>
+            <a:ext cx="440263" cy="164038"/>
+          </a:xfrm>
+          <a:prstGeom xmlns:a="http://schemas.openxmlformats.org/drawingml/2006/main" prst="straightConnector1">
+            <a:avLst/>
+          </a:prstGeom>
+          <a:ln xmlns:a="http://schemas.openxmlformats.org/drawingml/2006/main" w="17145" cap="rnd">
+            <a:solidFill>
+              <a:srgbClr val="49BBD6"/>
+            </a:solidFill>
+            <a:prstDash val="solid"/>
+            <a:round/>
+            <a:tailEnd type="triangle" w="sm" len="sm"/>
+          </a:ln>
+        </p:spPr>
+      </p:cxnSp>
+      <p:cxnSp>
+        <p:nvCxnSpPr>
+          <p:cNvPr id="211" name=""/>
+          <p:cNvCxnSpPr>
+            <a:stCxn xmlns:a="http://schemas.openxmlformats.org/drawingml/2006/main" id="99" idx="6"/>
+            <a:endCxn xmlns:a="http://schemas.openxmlformats.org/drawingml/2006/main" id="101" idx="2"/>
+          </p:cNvCxnSpPr>
+          <p:nvPr/>
+        </p:nvCxnSpPr>
+        <p:spPr>
+          <a:xfrm xmlns:a="http://schemas.openxmlformats.org/drawingml/2006/main">
+            <a:off x="10010775" y="5334000"/>
+            <a:ext cx="542925" cy="238125"/>
+          </a:xfrm>
+          <a:prstGeom xmlns:a="http://schemas.openxmlformats.org/drawingml/2006/main" prst="straightConnector1">
+            <a:avLst/>
+          </a:prstGeom>
+          <a:ln xmlns:a="http://schemas.openxmlformats.org/drawingml/2006/main" w="17145" cap="rnd">
+            <a:solidFill>
+              <a:srgbClr val="49BBD6"/>
+            </a:solidFill>
+            <a:prstDash val="solid"/>
+            <a:round/>
+            <a:tailEnd type="triangle" w="sm" len="sm"/>
+          </a:ln>
+        </p:spPr>
+      </p:cxnSp>
+      <p:cxnSp>
+        <p:nvCxnSpPr>
+          <p:cNvPr id="212" name=""/>
+          <p:cNvCxnSpPr>
+            <a:stCxn xmlns:a="http://schemas.openxmlformats.org/drawingml/2006/main" id="100" idx="6"/>
+            <a:endCxn xmlns:a="http://schemas.openxmlformats.org/drawingml/2006/main" id="101" idx="2"/>
+          </p:cNvCxnSpPr>
+          <p:nvPr/>
+        </p:nvCxnSpPr>
+        <p:spPr>
+          <a:xfrm xmlns:a="http://schemas.openxmlformats.org/drawingml/2006/main" flipV="1">
+            <a:off x="10010775" y="5572125"/>
+            <a:ext cx="542925" cy="238125"/>
+          </a:xfrm>
+          <a:prstGeom xmlns:a="http://schemas.openxmlformats.org/drawingml/2006/main" prst="straightConnector1">
+            <a:avLst/>
+          </a:prstGeom>
+          <a:ln xmlns:a="http://schemas.openxmlformats.org/drawingml/2006/main" w="17145" cap="rnd">
+            <a:solidFill>
+              <a:srgbClr val="49BBD6"/>
+            </a:solidFill>
+            <a:prstDash val="solid"/>
+            <a:round/>
+            <a:tailEnd type="triangle" w="sm" len="sm"/>
+          </a:ln>
+        </p:spPr>
+      </p:cxnSp>
+    </p:spTree>
+    <p:extLst>
+      <p:ext uri="{BB962C8B-B14F-4D97-AF65-F5344CB8AC3E}">
+        <p14:creationId xmlns:p14="http://schemas.microsoft.com/office/powerpoint/2010/main" val="989153853"/>
       </p:ext>
     </p:extLst>
   </p:cSld>
